--- a/Smart_WMS_Agent_기획요약.pptx
+++ b/Smart_WMS_Agent_기획요약.pptx
@@ -22,9 +22,10 @@
     <p:sldId id="270" r:id="rId16"/>
     <p:sldId id="271" r:id="rId17"/>
     <p:sldId id="272" r:id="rId18"/>
+    <p:sldId id="273" r:id="rId19"/>
   </p:sldIdLst>
   <p:notesMasterIdLst>
-    <p:notesMasterId r:id="rId19"/>
+    <p:notesMasterId r:id="rId20"/>
   </p:notesMasterIdLst>
   <p:sldSz cx="9144000" cy="5143500"/>
   <p:notesSz cx="5143500" cy="9144000"/>
@@ -1246,6 +1247,94 @@
             <a:fld id="{F7021451-1387-4CA6-816F-3879F97B5CBC}" type="slidenum">
               <a:rPr lang="en-US"/>
               <a:t>17</a:t>
+            </a:fld>
+            <a:endParaRPr lang="en-US"/>
+          </a:p>
+        </p:txBody>
+      </p:sp>
+    </p:spTree>
+    <p:extLst>
+      <p:ext uri="{BB962C8B-B14F-4D97-AF65-F5344CB8AC3E}">
+        <p14:creationId xmlns:p14="http://schemas.microsoft.com/office/powerpoint/2010/main" val="1024086991"/>
+      </p:ext>
+    </p:extLst>
+  </p:cSld>
+  <p:clrMapOvr>
+    <a:masterClrMapping/>
+  </p:clrMapOvr>
+</p:notes>
+</file>
+
+<file path=ppt/notesSlides/notesSlide18.xml><?xml version="1.0" encoding="utf-8"?>
+<p:notes xmlns:a="http://schemas.openxmlformats.org/drawingml/2006/main" xmlns:r="http://schemas.openxmlformats.org/officeDocument/2006/relationships" xmlns:p="http://schemas.openxmlformats.org/presentationml/2006/main">
+  <p:cSld>
+    <p:spTree>
+      <p:nvGrpSpPr>
+        <p:cNvPr id="1" name=""/>
+        <p:cNvGrpSpPr/>
+        <p:nvPr/>
+      </p:nvGrpSpPr>
+      <p:grpSpPr>
+        <a:xfrm>
+          <a:off x="0" y="0"/>
+          <a:ext cx="0" cy="0"/>
+          <a:chOff x="0" y="0"/>
+          <a:chExt cx="0" cy="0"/>
+        </a:xfrm>
+      </p:grpSpPr>
+      <p:sp>
+        <p:nvSpPr>
+          <p:cNvPr id="2" name="Slide Image Placeholder 1"/>
+          <p:cNvSpPr>
+            <a:spLocks noGrp="1" noRot="1" noChangeAspect="1"/>
+          </p:cNvSpPr>
+          <p:nvPr>
+            <p:ph type="sldImg"/>
+          </p:nvPr>
+        </p:nvSpPr>
+        <p:spPr/>
+      </p:sp>
+      <p:sp>
+        <p:nvSpPr>
+          <p:cNvPr id="3" name="Notes Placeholder 2"/>
+          <p:cNvSpPr>
+            <a:spLocks noGrp="1"/>
+          </p:cNvSpPr>
+          <p:nvPr>
+            <p:ph type="body" idx="1"/>
+          </p:nvPr>
+        </p:nvSpPr>
+        <p:spPr/>
+        <p:txBody>
+          <a:bodyPr/>
+          <a:lstStyle/>
+          <a:p>
+            <a:r>
+              <a:rPr lang="en-US" dirty="0"/>
+              <a:t/>
+            </a:r>
+            <a:endParaRPr lang="en-US" dirty="0"/>
+          </a:p>
+        </p:txBody>
+      </p:sp>
+      <p:sp>
+        <p:nvSpPr>
+          <p:cNvPr id="4" name="Slide Number Placeholder 3"/>
+          <p:cNvSpPr>
+            <a:spLocks noGrp="1"/>
+          </p:cNvSpPr>
+          <p:nvPr>
+            <p:ph type="sldNum" sz="quarter" idx="10"/>
+          </p:nvPr>
+        </p:nvSpPr>
+        <p:spPr/>
+        <p:txBody>
+          <a:bodyPr/>
+          <a:lstStyle/>
+          <a:p>
+            <a:fld id="{F7021451-1387-4CA6-816F-3879F97B5CBC}" type="slidenum">
+              <a:rPr lang="en-US"/>
+              <a:t>18</a:t>
             </a:fld>
             <a:endParaRPr lang="en-US"/>
           </a:p>
@@ -6942,7 +7031,7 @@
                 <a:ea typeface="Malgun Gothic" pitchFamily="34" charset="-122"/>
                 <a:cs typeface="Malgun Gothic" pitchFamily="34" charset="-120"/>
               </a:rPr>
-              <a:t>RAG ① Adaptive vs Agentic · ALR+Sufficient 결합</a:t>
+              <a:t>RAG ① Adaptive vs Agentic — 검색 여부 + 품질 루프</a:t>
             </a:r>
             <a:endParaRPr lang="en-US" sz="2700" dirty="0"/>
           </a:p>
@@ -7335,12 +7424,12 @@
         </p:nvSpPr>
         <p:spPr>
           <a:xfrm>
-            <a:off x="457200" y="3611880"/>
-            <a:ext cx="8229600" cy="1417320"/>
+            <a:off x="457200" y="3657600"/>
+            <a:ext cx="8229600" cy="1143000"/>
           </a:xfrm>
           <a:prstGeom prst="roundRect">
             <a:avLst>
-              <a:gd name="adj" fmla="val 5161"/>
+              <a:gd name="adj" fmla="val 6400"/>
             </a:avLst>
           </a:prstGeom>
           <a:solidFill>
@@ -7357,7 +7446,7 @@
         </p:nvSpPr>
         <p:spPr>
           <a:xfrm>
-            <a:off x="685800" y="3712464"/>
+            <a:off x="685800" y="3767328"/>
             <a:ext cx="7772400" cy="274320"/>
           </a:xfrm>
           <a:prstGeom prst="rect">
@@ -7382,7 +7471,7 @@
                 <a:ea typeface="Malgun Gothic" pitchFamily="34" charset="-122"/>
                 <a:cs typeface="Malgun Gothic" pitchFamily="34" charset="-120"/>
               </a:rPr>
-              <a:t>ALR + Sufficient Context + PRISM — 역할이 겹치지 않게 결합</a:t>
+              <a:t>이 둘을 받치는 3가지 사상</a:t>
             </a:r>
             <a:endParaRPr lang="en-US" sz="1250" dirty="0"/>
           </a:p>
@@ -7396,8 +7485,8 @@
         </p:nvSpPr>
         <p:spPr>
           <a:xfrm>
-            <a:off x="685800" y="4005072"/>
-            <a:ext cx="7772400" cy="987552"/>
+            <a:off x="685800" y="4133088"/>
+            <a:ext cx="7772400" cy="594360"/>
           </a:xfrm>
           <a:prstGeom prst="rect">
             <a:avLst/>
@@ -7411,12 +7500,12 @@
           <a:p>
             <a:pPr indent="0" marL="0">
               <a:lnSpc>
-                <a:spcPct val="104000"/>
+                <a:spcPct val="105000"/>
               </a:lnSpc>
               <a:buNone/>
             </a:pPr>
             <a:r>
-              <a:rPr lang="en-US" sz="960" b="1" dirty="0">
+              <a:rPr lang="en-US" sz="1100" b="1" dirty="0">
                 <a:solidFill>
                   <a:srgbClr val="FFFFFF"/>
                 </a:solidFill>
@@ -7424,16 +7513,16 @@
                 <a:ea typeface="Malgun Gothic" pitchFamily="34" charset="-122"/>
                 <a:cs typeface="Malgun Gothic" pitchFamily="34" charset="-120"/>
               </a:rPr>
-              <a:t>ALR(DocSeeker 개념)  </a:t>
+              <a:t>ALR </a:t>
             </a:r>
             <a:pPr indent="0" marL="0">
               <a:lnSpc>
-                <a:spcPct val="104000"/>
+                <a:spcPct val="105000"/>
               </a:lnSpc>
               <a:buNone/>
             </a:pPr>
             <a:r>
-              <a:rPr lang="en-US" sz="960" dirty="0">
+              <a:rPr lang="en-US" sz="1100" dirty="0">
                 <a:solidFill>
                   <a:srgbClr val="CFD8DC"/>
                 </a:solidFill>
@@ -7441,19 +7530,16 @@
                 <a:ea typeface="Malgun Gothic" pitchFamily="34" charset="-122"/>
                 <a:cs typeface="Malgun Gothic" pitchFamily="34" charset="-120"/>
               </a:rPr>
-              <a:t>인덱싱 때 근거 메타(answerable_intents·evidence_summary) 사전부여 = 근거 구조·사전 라우팅 (chunker.py)</a:t>
-            </a:r>
-            <a:endParaRPr lang="en-US" sz="960" dirty="0"/>
-          </a:p>
-          <a:p>
+              <a:t>근거 구조·사전 라우팅      </a:t>
+            </a:r>
             <a:pPr indent="0" marL="0">
               <a:lnSpc>
-                <a:spcPct val="104000"/>
+                <a:spcPct val="105000"/>
               </a:lnSpc>
               <a:buNone/>
             </a:pPr>
             <a:r>
-              <a:rPr lang="en-US" sz="960" b="1" dirty="0">
+              <a:rPr lang="en-US" sz="1100" b="1" dirty="0">
                 <a:solidFill>
                   <a:srgbClr val="FFFFFF"/>
                 </a:solidFill>
@@ -7461,16 +7547,16 @@
                 <a:ea typeface="Malgun Gothic" pitchFamily="34" charset="-122"/>
                 <a:cs typeface="Malgun Gothic" pitchFamily="34" charset="-120"/>
               </a:rPr>
-              <a:t>PRISM  </a:t>
+              <a:t>PRISM </a:t>
             </a:r>
             <a:pPr indent="0" marL="0">
               <a:lnSpc>
-                <a:spcPct val="104000"/>
+                <a:spcPct val="105000"/>
               </a:lnSpc>
               <a:buNone/>
             </a:pPr>
             <a:r>
-              <a:rPr lang="en-US" sz="960" dirty="0">
+              <a:rPr lang="en-US" sz="1100" dirty="0">
                 <a:solidFill>
                   <a:srgbClr val="CFD8DC"/>
                 </a:solidFill>
@@ -7478,19 +7564,16 @@
                 <a:ea typeface="Malgun Gothic" pitchFamily="34" charset="-122"/>
                 <a:cs typeface="Malgun Gothic" pitchFamily="34" charset="-120"/>
               </a:rPr>
-              <a:t>relevance+contribution+evidence_span 리랭커 = 설명용 근거 span 추출 (prism_rerank)</a:t>
-            </a:r>
-            <a:endParaRPr lang="en-US" sz="960" dirty="0"/>
-          </a:p>
-          <a:p>
+              <a:t>설명용 근거 추출      </a:t>
+            </a:r>
             <a:pPr indent="0" marL="0">
               <a:lnSpc>
-                <a:spcPct val="104000"/>
+                <a:spcPct val="105000"/>
               </a:lnSpc>
               <a:buNone/>
             </a:pPr>
             <a:r>
-              <a:rPr lang="en-US" sz="960" b="1" dirty="0">
+              <a:rPr lang="en-US" sz="1100" b="1" dirty="0">
                 <a:solidFill>
                   <a:srgbClr val="FFFFFF"/>
                 </a:solidFill>
@@ -7498,16 +7581,16 @@
                 <a:ea typeface="Malgun Gothic" pitchFamily="34" charset="-122"/>
                 <a:cs typeface="Malgun Gothic" pitchFamily="34" charset="-120"/>
               </a:rPr>
-              <a:t>Sufficient(Google)  </a:t>
+              <a:t>Sufficient </a:t>
             </a:r>
             <a:pPr indent="0" marL="0">
               <a:lnSpc>
-                <a:spcPct val="104000"/>
+                <a:spcPct val="105000"/>
               </a:lnSpc>
               <a:buNone/>
             </a:pPr>
             <a:r>
-              <a:rPr lang="en-US" sz="960" dirty="0">
+              <a:rPr lang="en-US" sz="1100" dirty="0">
                 <a:solidFill>
                   <a:srgbClr val="CFD8DC"/>
                 </a:solidFill>
@@ -7515,9 +7598,29 @@
                 <a:ea typeface="Malgun Gothic" pitchFamily="34" charset="-122"/>
                 <a:cs typeface="Malgun Gothic" pitchFamily="34" charset="-120"/>
               </a:rPr>
-              <a:t>‘답해도 되나’ 게이트 = 환각 차단·abstain. ALR만으론 멈추는 규칙이 없어 환각 위험 → 보완 (sufficient_context)</a:t>
-            </a:r>
-            <a:endParaRPr lang="en-US" sz="960" dirty="0"/>
+              <a:t>환각 차단 게이트</a:t>
+            </a:r>
+            <a:endParaRPr lang="en-US" sz="1100" dirty="0"/>
+          </a:p>
+          <a:p>
+            <a:pPr indent="0" marL="0">
+              <a:lnSpc>
+                <a:spcPct val="105000"/>
+              </a:lnSpc>
+              <a:buNone/>
+            </a:pPr>
+            <a:r>
+              <a:rPr lang="en-US" sz="1100" i="1" dirty="0">
+                <a:solidFill>
+                  <a:srgbClr val="9FC7C4"/>
+                </a:solidFill>
+                <a:latin typeface="Malgun Gothic" pitchFamily="34" charset="0"/>
+                <a:ea typeface="Malgun Gothic" pitchFamily="34" charset="-122"/>
+                <a:cs typeface="Malgun Gothic" pitchFamily="34" charset="-120"/>
+              </a:rPr>
+              <a:t>→ 각각이 무엇이고, 어떤 장점 때문에 넣어 어떻게 결합했는지는 다음 장에서 설명</a:t>
+            </a:r>
+            <a:endParaRPr lang="en-US" sz="1100" dirty="0"/>
           </a:p>
         </p:txBody>
       </p:sp>
@@ -7586,7 +7689,7 @@
                 <a:ea typeface="Malgun Gothic" pitchFamily="34" charset="-122"/>
                 <a:cs typeface="Malgun Gothic" pitchFamily="34" charset="-120"/>
               </a:rPr>
-              <a:t>RAG · VECTOR DB</a:t>
+              <a:t>RAG · WHY COMBINE</a:t>
             </a:r>
             <a:endParaRPr lang="en-US" sz="1100" dirty="0"/>
           </a:p>
@@ -7625,7 +7728,7 @@
                 <a:ea typeface="Malgun Gothic" pitchFamily="34" charset="-122"/>
                 <a:cs typeface="Malgun Gothic" pitchFamily="34" charset="-120"/>
               </a:rPr>
-              <a:t>RAG ② Vector DB 구성과 검색 파이프라인</a:t>
+              <a:t>RAG ② ALR · Sufficient · PRISM — 무엇이고, 왜 결합했나</a:t>
             </a:r>
             <a:endParaRPr lang="en-US" sz="2700" dirty="0"/>
           </a:p>
@@ -7633,18 +7736,230 @@
       </p:sp>
       <p:sp>
         <p:nvSpPr>
-          <p:cNvPr id="4" name="Shape 2"/>
-          <p:cNvSpPr/>
-          <p:nvPr/>
-        </p:nvSpPr>
-        <p:spPr>
-          <a:xfrm>
-            <a:off x="457200" y="1417320"/>
-            <a:ext cx="3977640" cy="3246120"/>
+          <p:cNvPr id="4" name="Text 2"/>
+          <p:cNvSpPr/>
+          <p:nvPr/>
+        </p:nvSpPr>
+        <p:spPr>
+          <a:xfrm>
+            <a:off x="457200" y="1024128"/>
+            <a:ext cx="8531352" cy="292608"/>
+          </a:xfrm>
+          <a:prstGeom prst="rect">
+            <a:avLst/>
+          </a:prstGeom>
+          <a:noFill/>
+          <a:ln/>
+        </p:spPr>
+        <p:txBody>
+          <a:bodyPr wrap="square" lIns="0" tIns="0" rIns="0" bIns="0" rtlCol="0" anchor="ctr"/>
+          <a:lstStyle/>
+          <a:p>
+            <a:pPr indent="0" marL="0">
+              <a:buNone/>
+            </a:pPr>
+            <a:r>
+              <a:rPr lang="en-US" sz="1150" dirty="0">
+                <a:solidFill>
+                  <a:srgbClr val="6B7A85"/>
+                </a:solidFill>
+                <a:latin typeface="Malgun Gothic" pitchFamily="34" charset="0"/>
+                <a:ea typeface="Malgun Gothic" pitchFamily="34" charset="-122"/>
+                <a:cs typeface="Malgun Gothic" pitchFamily="34" charset="-120"/>
+              </a:rPr>
+              <a:t>세 기법은 역할이 겹치지 않는다 — 질문 분석, 근거 정제, 생성 판단을 나눠 단일 RAG의 약점을 보완한다</a:t>
+            </a:r>
+            <a:endParaRPr lang="en-US" sz="1150" dirty="0"/>
+          </a:p>
+        </p:txBody>
+      </p:sp>
+      <p:sp>
+        <p:nvSpPr>
+          <p:cNvPr id="5" name="Shape 3"/>
+          <p:cNvSpPr/>
+          <p:nvPr/>
+        </p:nvSpPr>
+        <p:spPr>
+          <a:xfrm>
+            <a:off x="457200" y="1371600"/>
+            <a:ext cx="8531352" cy="457200"/>
           </a:xfrm>
           <a:prstGeom prst="roundRect">
             <a:avLst>
-              <a:gd name="adj" fmla="val 1972"/>
+              <a:gd name="adj" fmla="val 16000"/>
+            </a:avLst>
+          </a:prstGeom>
+          <a:solidFill>
+            <a:srgbClr val="EDF5F6"/>
+          </a:solidFill>
+          <a:ln/>
+        </p:spPr>
+      </p:sp>
+      <p:sp>
+        <p:nvSpPr>
+          <p:cNvPr id="6" name="Text 4"/>
+          <p:cNvSpPr/>
+          <p:nvPr/>
+        </p:nvSpPr>
+        <p:spPr>
+          <a:xfrm>
+            <a:off x="457200" y="1371600"/>
+            <a:ext cx="8531352" cy="457200"/>
+          </a:xfrm>
+          <a:prstGeom prst="rect">
+            <a:avLst/>
+          </a:prstGeom>
+          <a:noFill/>
+          <a:ln/>
+        </p:spPr>
+        <p:txBody>
+          <a:bodyPr wrap="square" lIns="0" tIns="0" rIns="0" bIns="0" rtlCol="0" anchor="ctr"/>
+          <a:lstStyle/>
+          <a:p>
+            <a:pPr algn="ctr" indent="0" marL="0">
+              <a:buNone/>
+            </a:pPr>
+            <a:r>
+              <a:rPr lang="en-US" sz="1050" b="1" dirty="0">
+                <a:solidFill>
+                  <a:srgbClr val="2B3A42"/>
+                </a:solidFill>
+                <a:latin typeface="Malgun Gothic" pitchFamily="34" charset="0"/>
+                <a:ea typeface="Malgun Gothic" pitchFamily="34" charset="-122"/>
+                <a:cs typeface="Malgun Gothic" pitchFamily="34" charset="-120"/>
+              </a:rPr>
+              <a:t>질문 입력 </a:t>
+            </a:r>
+            <a:pPr algn="ctr" indent="0" marL="0">
+              <a:buNone/>
+            </a:pPr>
+            <a:r>
+              <a:rPr lang="en-US" sz="1050" dirty="0">
+                <a:solidFill>
+                  <a:srgbClr val="6B7A85"/>
+                </a:solidFill>
+                <a:latin typeface="Malgun Gothic" pitchFamily="34" charset="0"/>
+                <a:ea typeface="Malgun Gothic" pitchFamily="34" charset="-122"/>
+                <a:cs typeface="Malgun Gothic" pitchFamily="34" charset="-120"/>
+              </a:rPr>
+              <a:t>→  </a:t>
+            </a:r>
+            <a:pPr algn="ctr" indent="0" marL="0">
+              <a:buNone/>
+            </a:pPr>
+            <a:r>
+              <a:rPr lang="en-US" sz="1050" b="1" dirty="0">
+                <a:solidFill>
+                  <a:srgbClr val="028090"/>
+                </a:solidFill>
+                <a:latin typeface="Malgun Gothic" pitchFamily="34" charset="0"/>
+                <a:ea typeface="Malgun Gothic" pitchFamily="34" charset="-122"/>
+                <a:cs typeface="Malgun Gothic" pitchFamily="34" charset="-120"/>
+              </a:rPr>
+              <a:t>ALR </a:t>
+            </a:r>
+            <a:pPr algn="ctr" indent="0" marL="0">
+              <a:buNone/>
+            </a:pPr>
+            <a:r>
+              <a:rPr lang="en-US" sz="1050" dirty="0">
+                <a:solidFill>
+                  <a:srgbClr val="6B7A85"/>
+                </a:solidFill>
+                <a:latin typeface="Malgun Gothic" pitchFamily="34" charset="0"/>
+                <a:ea typeface="Malgun Gothic" pitchFamily="34" charset="-122"/>
+                <a:cs typeface="Malgun Gothic" pitchFamily="34" charset="-120"/>
+              </a:rPr>
+              <a:t>→  Retrieval  →  </a:t>
+            </a:r>
+            <a:pPr algn="ctr" indent="0" marL="0">
+              <a:buNone/>
+            </a:pPr>
+            <a:r>
+              <a:rPr lang="en-US" sz="1050" b="1" dirty="0">
+                <a:solidFill>
+                  <a:srgbClr val="028090"/>
+                </a:solidFill>
+                <a:latin typeface="Malgun Gothic" pitchFamily="34" charset="0"/>
+                <a:ea typeface="Malgun Gothic" pitchFamily="34" charset="-122"/>
+                <a:cs typeface="Malgun Gothic" pitchFamily="34" charset="-120"/>
+              </a:rPr>
+              <a:t>PRISM </a:t>
+            </a:r>
+            <a:pPr algn="ctr" indent="0" marL="0">
+              <a:buNone/>
+            </a:pPr>
+            <a:r>
+              <a:rPr lang="en-US" sz="1050" dirty="0">
+                <a:solidFill>
+                  <a:srgbClr val="6B7A85"/>
+                </a:solidFill>
+                <a:latin typeface="Malgun Gothic" pitchFamily="34" charset="0"/>
+                <a:ea typeface="Malgun Gothic" pitchFamily="34" charset="-122"/>
+                <a:cs typeface="Malgun Gothic" pitchFamily="34" charset="-120"/>
+              </a:rPr>
+              <a:t>→  </a:t>
+            </a:r>
+            <a:pPr algn="ctr" indent="0" marL="0">
+              <a:buNone/>
+            </a:pPr>
+            <a:r>
+              <a:rPr lang="en-US" sz="1050" b="1" dirty="0">
+                <a:solidFill>
+                  <a:srgbClr val="028090"/>
+                </a:solidFill>
+                <a:latin typeface="Malgun Gothic" pitchFamily="34" charset="0"/>
+                <a:ea typeface="Malgun Gothic" pitchFamily="34" charset="-122"/>
+                <a:cs typeface="Malgun Gothic" pitchFamily="34" charset="-120"/>
+              </a:rPr>
+              <a:t>Sufficient Context </a:t>
+            </a:r>
+            <a:pPr algn="ctr" indent="0" marL="0">
+              <a:buNone/>
+            </a:pPr>
+            <a:r>
+              <a:rPr lang="en-US" sz="1050" dirty="0">
+                <a:solidFill>
+                  <a:srgbClr val="6B7A85"/>
+                </a:solidFill>
+                <a:latin typeface="Malgun Gothic" pitchFamily="34" charset="0"/>
+                <a:ea typeface="Malgun Gothic" pitchFamily="34" charset="-122"/>
+                <a:cs typeface="Malgun Gothic" pitchFamily="34" charset="-120"/>
+              </a:rPr>
+              <a:t>→  </a:t>
+            </a:r>
+            <a:pPr algn="ctr" indent="0" marL="0">
+              <a:buNone/>
+            </a:pPr>
+            <a:r>
+              <a:rPr lang="en-US" sz="1050" b="1" dirty="0">
+                <a:solidFill>
+                  <a:srgbClr val="2B3A42"/>
+                </a:solidFill>
+                <a:latin typeface="Malgun Gothic" pitchFamily="34" charset="0"/>
+                <a:ea typeface="Malgun Gothic" pitchFamily="34" charset="-122"/>
+                <a:cs typeface="Malgun Gothic" pitchFamily="34" charset="-120"/>
+              </a:rPr>
+              <a:t>Answer / Re-search / Abstain</a:t>
+            </a:r>
+            <a:endParaRPr lang="en-US" sz="1050" dirty="0"/>
+          </a:p>
+        </p:txBody>
+      </p:sp>
+      <p:sp>
+        <p:nvSpPr>
+          <p:cNvPr id="7" name="Shape 5"/>
+          <p:cNvSpPr/>
+          <p:nvPr/>
+        </p:nvSpPr>
+        <p:spPr>
+          <a:xfrm>
+            <a:off x="457200" y="1965960"/>
+            <a:ext cx="2734056" cy="2240280"/>
+          </a:xfrm>
+          <a:prstGeom prst="roundRect">
+            <a:avLst>
+              <a:gd name="adj" fmla="val 2857"/>
             </a:avLst>
           </a:prstGeom>
           <a:solidFill>
@@ -7662,30 +7977,72 @@
       </p:sp>
       <p:sp>
         <p:nvSpPr>
-          <p:cNvPr id="5" name="Text 3"/>
-          <p:cNvSpPr/>
-          <p:nvPr/>
-        </p:nvSpPr>
-        <p:spPr>
-          <a:xfrm>
-            <a:off x="640080" y="1545336"/>
-            <a:ext cx="3611880" cy="292608"/>
-          </a:xfrm>
-          <a:prstGeom prst="rect">
-            <a:avLst/>
-          </a:prstGeom>
-          <a:noFill/>
-          <a:ln/>
-        </p:spPr>
-        <p:txBody>
-          <a:bodyPr wrap="square" lIns="0" tIns="0" rIns="0" bIns="0" rtlCol="0" anchor="ctr"/>
-          <a:lstStyle/>
-          <a:p>
-            <a:pPr indent="0" marL="0">
-              <a:buNone/>
-            </a:pPr>
-            <a:r>
-              <a:rPr lang="en-US" sz="1250" b="1" dirty="0">
+          <p:cNvPr id="8" name="Text 6"/>
+          <p:cNvSpPr/>
+          <p:nvPr/>
+        </p:nvSpPr>
+        <p:spPr>
+          <a:xfrm>
+            <a:off x="621792" y="2075688"/>
+            <a:ext cx="2404872" cy="457200"/>
+          </a:xfrm>
+          <a:prstGeom prst="rect">
+            <a:avLst/>
+          </a:prstGeom>
+          <a:noFill/>
+          <a:ln/>
+        </p:spPr>
+        <p:txBody>
+          <a:bodyPr wrap="square" lIns="0" tIns="0" rIns="0" bIns="0" rtlCol="0" anchor="t"/>
+          <a:lstStyle/>
+          <a:p>
+            <a:pPr indent="0" marL="0">
+              <a:buNone/>
+            </a:pPr>
+            <a:r>
+              <a:rPr lang="en-US" sz="1050" b="1" dirty="0">
+                <a:solidFill>
+                  <a:srgbClr val="028090"/>
+                </a:solidFill>
+                <a:latin typeface="Malgun Gothic" pitchFamily="34" charset="0"/>
+                <a:ea typeface="Malgun Gothic" pitchFamily="34" charset="-122"/>
+                <a:cs typeface="Malgun Gothic" pitchFamily="34" charset="-120"/>
+              </a:rPr>
+              <a:t>ALR: Analysis–Localization–Reasoning</a:t>
+            </a:r>
+            <a:endParaRPr lang="en-US" sz="1050" dirty="0"/>
+          </a:p>
+        </p:txBody>
+      </p:sp>
+      <p:sp>
+        <p:nvSpPr>
+          <p:cNvPr id="9" name="Text 7"/>
+          <p:cNvSpPr/>
+          <p:nvPr/>
+        </p:nvSpPr>
+        <p:spPr>
+          <a:xfrm>
+            <a:off x="621792" y="2596896"/>
+            <a:ext cx="2404872" cy="1536192"/>
+          </a:xfrm>
+          <a:prstGeom prst="rect">
+            <a:avLst/>
+          </a:prstGeom>
+          <a:noFill/>
+          <a:ln/>
+        </p:spPr>
+        <p:txBody>
+          <a:bodyPr wrap="square" lIns="0" tIns="0" rIns="0" bIns="0" rtlCol="0" anchor="t"/>
+          <a:lstStyle/>
+          <a:p>
+            <a:pPr indent="0" marL="0">
+              <a:lnSpc>
+                <a:spcPct val="104000"/>
+              </a:lnSpc>
+              <a:buNone/>
+            </a:pPr>
+            <a:r>
+              <a:rPr lang="en-US" sz="880" b="1" dirty="0">
                 <a:solidFill>
                   <a:srgbClr val="2B3A42"/>
                 </a:solidFill>
@@ -7693,41 +8050,16 @@
                 <a:ea typeface="Malgun Gothic" pitchFamily="34" charset="-122"/>
                 <a:cs typeface="Malgun Gothic" pitchFamily="34" charset="-120"/>
               </a:rPr>
-              <a:t>Vector DB · 인덱스 구성</a:t>
-            </a:r>
-            <a:endParaRPr lang="en-US" sz="1250" dirty="0"/>
-          </a:p>
-        </p:txBody>
-      </p:sp>
-      <p:sp>
-        <p:nvSpPr>
-          <p:cNvPr id="6" name="Text 4"/>
-          <p:cNvSpPr/>
-          <p:nvPr/>
-        </p:nvSpPr>
-        <p:spPr>
-          <a:xfrm>
-            <a:off x="640080" y="1892808"/>
-            <a:ext cx="3611880" cy="2642616"/>
-          </a:xfrm>
-          <a:prstGeom prst="rect">
-            <a:avLst/>
-          </a:prstGeom>
-          <a:noFill/>
-          <a:ln/>
-        </p:spPr>
-        <p:txBody>
-          <a:bodyPr wrap="square" lIns="0" tIns="0" rIns="0" bIns="0" rtlCol="0" anchor="t"/>
-          <a:lstStyle/>
-          <a:p>
+              <a:t>무엇  </a:t>
+            </a:r>
             <a:pPr indent="0" marL="0">
               <a:lnSpc>
-                <a:spcPct val="105000"/>
+                <a:spcPct val="104000"/>
               </a:lnSpc>
               <a:buNone/>
             </a:pPr>
             <a:r>
-              <a:rPr lang="en-US" sz="1020" dirty="0">
+              <a:rPr lang="en-US" sz="880" dirty="0">
                 <a:solidFill>
                   <a:srgbClr val="6B7A85"/>
                 </a:solidFill>
@@ -7735,19 +8067,45 @@
                 <a:ea typeface="Malgun Gothic" pitchFamily="34" charset="-122"/>
                 <a:cs typeface="Malgun Gothic" pitchFamily="34" charset="-120"/>
               </a:rPr>
-              <a:t>· Vector DB: FAISS IndexFlatIP</a:t>
-            </a:r>
-            <a:endParaRPr lang="en-US" sz="1020" dirty="0"/>
+              <a:t>DocSeeker의 구조화된 문서 추론 흐름. 질문 의도를 먼저 분석하고, 필요한 근거 위치를 문서에서 식별한 뒤 그 근거로 추론한다.</a:t>
+            </a:r>
+            <a:endParaRPr lang="en-US" sz="880" dirty="0"/>
           </a:p>
           <a:p>
             <a:pPr indent="0" marL="0">
               <a:lnSpc>
-                <a:spcPct val="105000"/>
+                <a:spcPct val="104000"/>
               </a:lnSpc>
               <a:buNone/>
             </a:pPr>
-            <a:r>
-              <a:rPr lang="en-US" sz="1020" dirty="0">
+            <a:endParaRPr lang="en-US" sz="880" dirty="0"/>
+          </a:p>
+          <a:p>
+            <a:pPr indent="0" marL="0">
+              <a:lnSpc>
+                <a:spcPct val="104000"/>
+              </a:lnSpc>
+              <a:buNone/>
+            </a:pPr>
+            <a:r>
+              <a:rPr lang="en-US" sz="880" b="1" dirty="0">
+                <a:solidFill>
+                  <a:srgbClr val="2B3A42"/>
+                </a:solidFill>
+                <a:latin typeface="Malgun Gothic" pitchFamily="34" charset="0"/>
+                <a:ea typeface="Malgun Gothic" pitchFamily="34" charset="-122"/>
+                <a:cs typeface="Malgun Gothic" pitchFamily="34" charset="-120"/>
+              </a:rPr>
+              <a:t>강점  </a:t>
+            </a:r>
+            <a:pPr indent="0" marL="0">
+              <a:lnSpc>
+                <a:spcPct val="104000"/>
+              </a:lnSpc>
+              <a:buNone/>
+            </a:pPr>
+            <a:r>
+              <a:rPr lang="en-US" sz="880" dirty="0">
                 <a:solidFill>
                   <a:srgbClr val="6B7A85"/>
                 </a:solidFill>
@@ -7755,19 +8113,45 @@
                 <a:ea typeface="Malgun Gothic" pitchFamily="34" charset="-122"/>
                 <a:cs typeface="Malgun Gothic" pitchFamily="34" charset="-120"/>
               </a:rPr>
-              <a:t>   (L2 정규화 → 코사인 유사도)</a:t>
-            </a:r>
-            <a:endParaRPr lang="en-US" sz="1020" dirty="0"/>
+              <a:t>검색과 추론을 분리해 ‘어디를 근거로 답했는지’가 명확. 긴 문서의 노이즈를 줄이고 근거 추적성을 높인다.</a:t>
+            </a:r>
+            <a:endParaRPr lang="en-US" sz="880" dirty="0"/>
           </a:p>
           <a:p>
             <a:pPr indent="0" marL="0">
               <a:lnSpc>
-                <a:spcPct val="105000"/>
+                <a:spcPct val="104000"/>
               </a:lnSpc>
               <a:buNone/>
             </a:pPr>
-            <a:r>
-              <a:rPr lang="en-US" sz="1020" dirty="0">
+            <a:endParaRPr lang="en-US" sz="880" dirty="0"/>
+          </a:p>
+          <a:p>
+            <a:pPr indent="0" marL="0">
+              <a:lnSpc>
+                <a:spcPct val="104000"/>
+              </a:lnSpc>
+              <a:buNone/>
+            </a:pPr>
+            <a:r>
+              <a:rPr lang="en-US" sz="880" b="1" dirty="0">
+                <a:solidFill>
+                  <a:srgbClr val="028090"/>
+                </a:solidFill>
+                <a:latin typeface="Malgun Gothic" pitchFamily="34" charset="0"/>
+                <a:ea typeface="Malgun Gothic" pitchFamily="34" charset="-122"/>
+                <a:cs typeface="Malgun Gothic" pitchFamily="34" charset="-120"/>
+              </a:rPr>
+              <a:t>역할  </a:t>
+            </a:r>
+            <a:pPr indent="0" marL="0">
+              <a:lnSpc>
+                <a:spcPct val="104000"/>
+              </a:lnSpc>
+              <a:buNone/>
+            </a:pPr>
+            <a:r>
+              <a:rPr lang="en-US" sz="880" dirty="0">
                 <a:solidFill>
                   <a:srgbClr val="6B7A85"/>
                 </a:solidFill>
@@ -7775,166 +8159,26 @@
                 <a:ea typeface="Malgun Gothic" pitchFamily="34" charset="-122"/>
                 <a:cs typeface="Malgun Gothic" pitchFamily="34" charset="-120"/>
               </a:rPr>
-              <a:t>· 임베딩: text-embedding-3-small</a:t>
-            </a:r>
-            <a:endParaRPr lang="en-US" sz="1020" dirty="0"/>
-          </a:p>
-          <a:p>
-            <a:pPr indent="0" marL="0">
-              <a:lnSpc>
-                <a:spcPct val="105000"/>
-              </a:lnSpc>
-              <a:buNone/>
-            </a:pPr>
-            <a:r>
-              <a:rPr lang="en-US" sz="1020" dirty="0">
-                <a:solidFill>
-                  <a:srgbClr val="6B7A85"/>
-                </a:solidFill>
-                <a:latin typeface="Malgun Gothic" pitchFamily="34" charset="0"/>
-                <a:ea typeface="Malgun Gothic" pitchFamily="34" charset="-122"/>
-                <a:cs typeface="Malgun Gothic" pitchFamily="34" charset="-120"/>
-              </a:rPr>
-              <a:t>· 청킹: 정책 md 6종 · ## 헤딩 단위</a:t>
-            </a:r>
-            <a:endParaRPr lang="en-US" sz="1020" dirty="0"/>
-          </a:p>
-          <a:p>
-            <a:pPr indent="0" marL="0">
-              <a:lnSpc>
-                <a:spcPct val="105000"/>
-              </a:lnSpc>
-              <a:buNone/>
-            </a:pPr>
-            <a:r>
-              <a:rPr lang="en-US" sz="1020" dirty="0">
-                <a:solidFill>
-                  <a:srgbClr val="6B7A85"/>
-                </a:solidFill>
-                <a:latin typeface="Malgun Gothic" pitchFamily="34" charset="0"/>
-                <a:ea typeface="Malgun Gothic" pitchFamily="34" charset="-122"/>
-                <a:cs typeface="Malgun Gothic" pitchFamily="34" charset="-120"/>
-              </a:rPr>
-              <a:t>   (LLM 없이 결정적 메타 부여)</a:t>
-            </a:r>
-            <a:endParaRPr lang="en-US" sz="1020" dirty="0"/>
-          </a:p>
-          <a:p>
-            <a:pPr indent="0" marL="0">
-              <a:lnSpc>
-                <a:spcPct val="105000"/>
-              </a:lnSpc>
-              <a:buNone/>
-            </a:pPr>
-            <a:r>
-              <a:rPr lang="en-US" sz="1020" dirty="0">
-                <a:solidFill>
-                  <a:srgbClr val="6B7A85"/>
-                </a:solidFill>
-                <a:latin typeface="Malgun Gothic" pitchFamily="34" charset="0"/>
-                <a:ea typeface="Malgun Gothic" pitchFamily="34" charset="-122"/>
-                <a:cs typeface="Malgun Gothic" pitchFamily="34" charset="-120"/>
-              </a:rPr>
-              <a:t>· 메타: source·document_type·domain·</a:t>
-            </a:r>
-            <a:endParaRPr lang="en-US" sz="1020" dirty="0"/>
-          </a:p>
-          <a:p>
-            <a:pPr indent="0" marL="0">
-              <a:lnSpc>
-                <a:spcPct val="105000"/>
-              </a:lnSpc>
-              <a:buNone/>
-            </a:pPr>
-            <a:r>
-              <a:rPr lang="en-US" sz="1020" dirty="0">
-                <a:solidFill>
-                  <a:srgbClr val="6B7A85"/>
-                </a:solidFill>
-                <a:latin typeface="Malgun Gothic" pitchFamily="34" charset="0"/>
-                <a:ea typeface="Malgun Gothic" pitchFamily="34" charset="-122"/>
-                <a:cs typeface="Malgun Gothic" pitchFamily="34" charset="-120"/>
-              </a:rPr>
-              <a:t>   section·answerable_intents·evidence_summary</a:t>
-            </a:r>
-            <a:endParaRPr lang="en-US" sz="1020" dirty="0"/>
-          </a:p>
-          <a:p>
-            <a:pPr indent="0" marL="0">
-              <a:lnSpc>
-                <a:spcPct val="105000"/>
-              </a:lnSpc>
-              <a:buNone/>
-            </a:pPr>
-            <a:r>
-              <a:rPr lang="en-US" sz="1020" dirty="0">
-                <a:solidFill>
-                  <a:srgbClr val="6B7A85"/>
-                </a:solidFill>
-                <a:latin typeface="Malgun Gothic" pitchFamily="34" charset="0"/>
-                <a:ea typeface="Malgun Gothic" pitchFamily="34" charset="-122"/>
-                <a:cs typeface="Malgun Gothic" pitchFamily="34" charset="-120"/>
-              </a:rPr>
-              <a:t>· 인덱스: faiss.index + chunks.json</a:t>
-            </a:r>
-            <a:endParaRPr lang="en-US" sz="1020" dirty="0"/>
-          </a:p>
-          <a:p>
-            <a:pPr indent="0" marL="0">
-              <a:lnSpc>
-                <a:spcPct val="105000"/>
-              </a:lnSpc>
-              <a:buNone/>
-            </a:pPr>
-            <a:r>
-              <a:rPr lang="en-US" sz="1020" dirty="0">
-                <a:solidFill>
-                  <a:srgbClr val="6B7A85"/>
-                </a:solidFill>
-                <a:latin typeface="Malgun Gothic" pitchFamily="34" charset="0"/>
-                <a:ea typeface="Malgun Gothic" pitchFamily="34" charset="-122"/>
-                <a:cs typeface="Malgun Gothic" pitchFamily="34" charset="-120"/>
-              </a:rPr>
-              <a:t>   정책 변경 시 전체 재인덱싱</a:t>
-            </a:r>
-            <a:endParaRPr lang="en-US" sz="1020" dirty="0"/>
-          </a:p>
-          <a:p>
-            <a:pPr indent="0" marL="0">
-              <a:lnSpc>
-                <a:spcPct val="105000"/>
-              </a:lnSpc>
-              <a:buNone/>
-            </a:pPr>
-            <a:r>
-              <a:rPr lang="en-US" sz="1020" dirty="0">
-                <a:solidFill>
-                  <a:srgbClr val="6B7A85"/>
-                </a:solidFill>
-                <a:latin typeface="Malgun Gothic" pitchFamily="34" charset="0"/>
-                <a:ea typeface="Malgun Gothic" pitchFamily="34" charset="-122"/>
-                <a:cs typeface="Malgun Gothic" pitchFamily="34" charset="-120"/>
-              </a:rPr>
-              <a:t>· 향후: PostgreSQL/pgvector 전환</a:t>
-            </a:r>
-            <a:endParaRPr lang="en-US" sz="1020" dirty="0"/>
-          </a:p>
-        </p:txBody>
-      </p:sp>
-      <p:sp>
-        <p:nvSpPr>
-          <p:cNvPr id="7" name="Shape 5"/>
-          <p:cNvSpPr/>
-          <p:nvPr/>
-        </p:nvSpPr>
-        <p:spPr>
-          <a:xfrm>
-            <a:off x="4617720" y="1417320"/>
-            <a:ext cx="4069080" cy="1783080"/>
+              <a:t>DocSeeker 모델은 도입하지 않고 ALR 개념·흐름만 차용. RAG 파이프라인에서 질문 분석·근거 후보 라우팅 기준으로 사용.</a:t>
+            </a:r>
+            <a:endParaRPr lang="en-US" sz="880" dirty="0"/>
+          </a:p>
+        </p:txBody>
+      </p:sp>
+      <p:sp>
+        <p:nvSpPr>
+          <p:cNvPr id="10" name="Shape 8"/>
+          <p:cNvSpPr/>
+          <p:nvPr/>
+        </p:nvSpPr>
+        <p:spPr>
+          <a:xfrm>
+            <a:off x="3355848" y="1965960"/>
+            <a:ext cx="2734056" cy="2240280"/>
           </a:xfrm>
           <a:prstGeom prst="roundRect">
             <a:avLst>
-              <a:gd name="adj" fmla="val 3590"/>
+              <a:gd name="adj" fmla="val 2857"/>
             </a:avLst>
           </a:prstGeom>
           <a:solidFill>
@@ -7952,30 +8196,72 @@
       </p:sp>
       <p:sp>
         <p:nvSpPr>
-          <p:cNvPr id="8" name="Text 6"/>
-          <p:cNvSpPr/>
-          <p:nvPr/>
-        </p:nvSpPr>
-        <p:spPr>
-          <a:xfrm>
-            <a:off x="4800600" y="1545336"/>
-            <a:ext cx="3703320" cy="292608"/>
-          </a:xfrm>
-          <a:prstGeom prst="rect">
-            <a:avLst/>
-          </a:prstGeom>
-          <a:noFill/>
-          <a:ln/>
-        </p:spPr>
-        <p:txBody>
-          <a:bodyPr wrap="square" lIns="0" tIns="0" rIns="0" bIns="0" rtlCol="0" anchor="ctr"/>
-          <a:lstStyle/>
-          <a:p>
-            <a:pPr indent="0" marL="0">
-              <a:buNone/>
-            </a:pPr>
-            <a:r>
-              <a:rPr lang="en-US" sz="1250" b="1" dirty="0">
+          <p:cNvPr id="11" name="Text 9"/>
+          <p:cNvSpPr/>
+          <p:nvPr/>
+        </p:nvSpPr>
+        <p:spPr>
+          <a:xfrm>
+            <a:off x="3520440" y="2075688"/>
+            <a:ext cx="2404872" cy="457200"/>
+          </a:xfrm>
+          <a:prstGeom prst="rect">
+            <a:avLst/>
+          </a:prstGeom>
+          <a:noFill/>
+          <a:ln/>
+        </p:spPr>
+        <p:txBody>
+          <a:bodyPr wrap="square" lIns="0" tIns="0" rIns="0" bIns="0" rtlCol="0" anchor="t"/>
+          <a:lstStyle/>
+          <a:p>
+            <a:pPr indent="0" marL="0">
+              <a:buNone/>
+            </a:pPr>
+            <a:r>
+              <a:rPr lang="en-US" sz="1050" b="1" dirty="0">
+                <a:solidFill>
+                  <a:srgbClr val="028090"/>
+                </a:solidFill>
+                <a:latin typeface="Malgun Gothic" pitchFamily="34" charset="0"/>
+                <a:ea typeface="Malgun Gothic" pitchFamily="34" charset="-122"/>
+                <a:cs typeface="Malgun Gothic" pitchFamily="34" charset="-120"/>
+              </a:rPr>
+              <a:t>PRISM: Evidence-aware Reranker</a:t>
+            </a:r>
+            <a:endParaRPr lang="en-US" sz="1050" dirty="0"/>
+          </a:p>
+        </p:txBody>
+      </p:sp>
+      <p:sp>
+        <p:nvSpPr>
+          <p:cNvPr id="12" name="Text 10"/>
+          <p:cNvSpPr/>
+          <p:nvPr/>
+        </p:nvSpPr>
+        <p:spPr>
+          <a:xfrm>
+            <a:off x="3520440" y="2596896"/>
+            <a:ext cx="2404872" cy="1536192"/>
+          </a:xfrm>
+          <a:prstGeom prst="rect">
+            <a:avLst/>
+          </a:prstGeom>
+          <a:noFill/>
+          <a:ln/>
+        </p:spPr>
+        <p:txBody>
+          <a:bodyPr wrap="square" lIns="0" tIns="0" rIns="0" bIns="0" rtlCol="0" anchor="t"/>
+          <a:lstStyle/>
+          <a:p>
+            <a:pPr indent="0" marL="0">
+              <a:lnSpc>
+                <a:spcPct val="104000"/>
+              </a:lnSpc>
+              <a:buNone/>
+            </a:pPr>
+            <a:r>
+              <a:rPr lang="en-US" sz="880" b="1" dirty="0">
                 <a:solidFill>
                   <a:srgbClr val="2B3A42"/>
                 </a:solidFill>
@@ -7983,41 +8269,16 @@
                 <a:ea typeface="Malgun Gothic" pitchFamily="34" charset="-122"/>
                 <a:cs typeface="Malgun Gothic" pitchFamily="34" charset="-120"/>
               </a:rPr>
-              <a:t>검색 파이프라인 (rag/retriever.py)</a:t>
-            </a:r>
-            <a:endParaRPr lang="en-US" sz="1250" dirty="0"/>
-          </a:p>
-        </p:txBody>
-      </p:sp>
-      <p:sp>
-        <p:nvSpPr>
-          <p:cNvPr id="9" name="Text 7"/>
-          <p:cNvSpPr/>
-          <p:nvPr/>
-        </p:nvSpPr>
-        <p:spPr>
-          <a:xfrm>
-            <a:off x="4800600" y="1892808"/>
-            <a:ext cx="3703320" cy="1179576"/>
-          </a:xfrm>
-          <a:prstGeom prst="rect">
-            <a:avLst/>
-          </a:prstGeom>
-          <a:noFill/>
-          <a:ln/>
-        </p:spPr>
-        <p:txBody>
-          <a:bodyPr wrap="square" lIns="0" tIns="0" rIns="0" bIns="0" rtlCol="0" anchor="t"/>
-          <a:lstStyle/>
-          <a:p>
+              <a:t>무엇  </a:t>
+            </a:r>
             <a:pPr indent="0" marL="0">
               <a:lnSpc>
-                <a:spcPct val="105000"/>
+                <a:spcPct val="104000"/>
               </a:lnSpc>
               <a:buNone/>
             </a:pPr>
             <a:r>
-              <a:rPr lang="en-US" sz="1020" dirty="0">
+              <a:rPr lang="en-US" sz="880" dirty="0">
                 <a:solidFill>
                   <a:srgbClr val="6B7A85"/>
                 </a:solidFill>
@@ -8025,19 +8286,45 @@
                 <a:ea typeface="Malgun Gothic" pitchFamily="34" charset="-122"/>
                 <a:cs typeface="Malgun Gothic" pitchFamily="34" charset="-120"/>
               </a:rPr>
-              <a:t>① 질의 임베딩 → ② FAISS top-(k×3)</a:t>
-            </a:r>
-            <a:endParaRPr lang="en-US" sz="1020" dirty="0"/>
+              <a:t>유사도 점수만 쓰는 reranker가 아니라 relevance 판단·contribution·근거 구절(evidence passage)을 함께 생성하는 재랭킹.</a:t>
+            </a:r>
+            <a:endParaRPr lang="en-US" sz="880" dirty="0"/>
           </a:p>
           <a:p>
             <a:pPr indent="0" marL="0">
               <a:lnSpc>
-                <a:spcPct val="105000"/>
+                <a:spcPct val="104000"/>
               </a:lnSpc>
               <a:buNone/>
             </a:pPr>
-            <a:r>
-              <a:rPr lang="en-US" sz="1020" dirty="0">
+            <a:endParaRPr lang="en-US" sz="880" dirty="0"/>
+          </a:p>
+          <a:p>
+            <a:pPr indent="0" marL="0">
+              <a:lnSpc>
+                <a:spcPct val="104000"/>
+              </a:lnSpc>
+              <a:buNone/>
+            </a:pPr>
+            <a:r>
+              <a:rPr lang="en-US" sz="880" b="1" dirty="0">
+                <a:solidFill>
+                  <a:srgbClr val="2B3A42"/>
+                </a:solidFill>
+                <a:latin typeface="Malgun Gothic" pitchFamily="34" charset="0"/>
+                <a:ea typeface="Malgun Gothic" pitchFamily="34" charset="-122"/>
+                <a:cs typeface="Malgun Gothic" pitchFamily="34" charset="-120"/>
+              </a:rPr>
+              <a:t>강점  </a:t>
+            </a:r>
+            <a:pPr indent="0" marL="0">
+              <a:lnSpc>
+                <a:spcPct val="104000"/>
+              </a:lnSpc>
+              <a:buNone/>
+            </a:pPr>
+            <a:r>
+              <a:rPr lang="en-US" sz="880" dirty="0">
                 <a:solidFill>
                   <a:srgbClr val="6B7A85"/>
                 </a:solidFill>
@@ -8045,19 +8332,45 @@
                 <a:ea typeface="Malgun Gothic" pitchFamily="34" charset="-122"/>
                 <a:cs typeface="Malgun Gothic" pitchFamily="34" charset="-120"/>
               </a:rPr>
-              <a:t>③ intent 메타 필터 → top-k</a:t>
-            </a:r>
-            <a:endParaRPr lang="en-US" sz="1020" dirty="0"/>
+              <a:t>‘왜 근거인지’와 ‘답변 기여도’를 함께 제공 → 검색 결과를 그대로 넣지 않고 핵심 근거 중심으로 context를 정제.</a:t>
+            </a:r>
+            <a:endParaRPr lang="en-US" sz="880" dirty="0"/>
           </a:p>
           <a:p>
             <a:pPr indent="0" marL="0">
               <a:lnSpc>
-                <a:spcPct val="105000"/>
+                <a:spcPct val="104000"/>
               </a:lnSpc>
               <a:buNone/>
             </a:pPr>
-            <a:r>
-              <a:rPr lang="en-US" sz="1020" dirty="0">
+            <a:endParaRPr lang="en-US" sz="880" dirty="0"/>
+          </a:p>
+          <a:p>
+            <a:pPr indent="0" marL="0">
+              <a:lnSpc>
+                <a:spcPct val="104000"/>
+              </a:lnSpc>
+              <a:buNone/>
+            </a:pPr>
+            <a:r>
+              <a:rPr lang="en-US" sz="880" b="1" dirty="0">
+                <a:solidFill>
+                  <a:srgbClr val="028090"/>
+                </a:solidFill>
+                <a:latin typeface="Malgun Gothic" pitchFamily="34" charset="0"/>
+                <a:ea typeface="Malgun Gothic" pitchFamily="34" charset="-122"/>
+                <a:cs typeface="Malgun Gothic" pitchFamily="34" charset="-120"/>
+              </a:rPr>
+              <a:t>역할  </a:t>
+            </a:r>
+            <a:pPr indent="0" marL="0">
+              <a:lnSpc>
+                <a:spcPct val="104000"/>
+              </a:lnSpc>
+              <a:buNone/>
+            </a:pPr>
+            <a:r>
+              <a:rPr lang="en-US" sz="880" dirty="0">
                 <a:solidFill>
                   <a:srgbClr val="6B7A85"/>
                 </a:solidFill>
@@ -8065,66 +8378,245 @@
                 <a:ea typeface="Malgun Gothic" pitchFamily="34" charset="-122"/>
                 <a:cs typeface="Malgun Gothic" pitchFamily="34" charset="-120"/>
               </a:rPr>
-              <a:t>④ PRISM 리랭크(relevance·contribution·span)</a:t>
-            </a:r>
-            <a:endParaRPr lang="en-US" sz="1020" dirty="0"/>
-          </a:p>
-          <a:p>
-            <a:pPr indent="0" marL="0">
-              <a:lnSpc>
-                <a:spcPct val="105000"/>
-              </a:lnSpc>
-              <a:buNone/>
-            </a:pPr>
-            <a:r>
-              <a:rPr lang="en-US" sz="1020" dirty="0">
-                <a:solidFill>
-                  <a:srgbClr val="6B7A85"/>
-                </a:solidFill>
-                <a:latin typeface="Malgun Gothic" pitchFamily="34" charset="0"/>
-                <a:ea typeface="Malgun Gothic" pitchFamily="34" charset="-122"/>
-                <a:cs typeface="Malgun Gothic" pitchFamily="34" charset="-120"/>
-              </a:rPr>
-              <a:t>⑤ Sufficient 판정</a:t>
-            </a:r>
-            <a:endParaRPr lang="en-US" sz="1020" dirty="0"/>
-          </a:p>
-          <a:p>
-            <a:pPr indent="0" marL="0">
-              <a:lnSpc>
-                <a:spcPct val="105000"/>
-              </a:lnSpc>
-              <a:buNone/>
-            </a:pPr>
-            <a:r>
-              <a:rPr lang="en-US" sz="1020" dirty="0">
-                <a:solidFill>
-                  <a:srgbClr val="6B7A85"/>
-                </a:solidFill>
-                <a:latin typeface="Malgun Gothic" pitchFamily="34" charset="0"/>
-                <a:ea typeface="Malgun Gothic" pitchFamily="34" charset="-122"/>
-                <a:cs typeface="Malgun Gothic" pitchFamily="34" charset="-120"/>
-              </a:rPr>
-              <a:t>   충분 → 근거 답변 / 부족 → 재검색(≤2)·abstain</a:t>
-            </a:r>
-            <a:endParaRPr lang="en-US" sz="1020" dirty="0"/>
-          </a:p>
-        </p:txBody>
-      </p:sp>
-      <p:sp>
-        <p:nvSpPr>
-          <p:cNvPr id="10" name="Shape 8"/>
-          <p:cNvSpPr/>
-          <p:nvPr/>
-        </p:nvSpPr>
-        <p:spPr>
-          <a:xfrm>
-            <a:off x="4617720" y="3383280"/>
-            <a:ext cx="4069080" cy="1280160"/>
+              <a:t>검색된 후보 청크를 재평가해 답변에 쓸 근거 구절과 설명 가능한 contribution을 생성.</a:t>
+            </a:r>
+            <a:endParaRPr lang="en-US" sz="880" dirty="0"/>
+          </a:p>
+        </p:txBody>
+      </p:sp>
+      <p:sp>
+        <p:nvSpPr>
+          <p:cNvPr id="13" name="Shape 11"/>
+          <p:cNvSpPr/>
+          <p:nvPr/>
+        </p:nvSpPr>
+        <p:spPr>
+          <a:xfrm>
+            <a:off x="6254496" y="1965960"/>
+            <a:ext cx="2734056" cy="2240280"/>
           </a:xfrm>
           <a:prstGeom prst="roundRect">
             <a:avLst>
-              <a:gd name="adj" fmla="val 4286"/>
+              <a:gd name="adj" fmla="val 2857"/>
+            </a:avLst>
+          </a:prstGeom>
+          <a:solidFill>
+            <a:srgbClr val="F4F6F7"/>
+          </a:solidFill>
+          <a:ln/>
+          <a:effectLst>
+            <a:outerShdw sx="100000" sy="100000" kx="0" ky="0" algn="bl" rotWithShape="0" blurRad="63500" dist="25400" dir="2700000">
+              <a:srgbClr val="000000">
+                <a:alpha val="10000"/>
+              </a:srgbClr>
+            </a:outerShdw>
+          </a:effectLst>
+        </p:spPr>
+      </p:sp>
+      <p:sp>
+        <p:nvSpPr>
+          <p:cNvPr id="14" name="Text 12"/>
+          <p:cNvSpPr/>
+          <p:nvPr/>
+        </p:nvSpPr>
+        <p:spPr>
+          <a:xfrm>
+            <a:off x="6419088" y="2075688"/>
+            <a:ext cx="2404872" cy="457200"/>
+          </a:xfrm>
+          <a:prstGeom prst="rect">
+            <a:avLst/>
+          </a:prstGeom>
+          <a:noFill/>
+          <a:ln/>
+        </p:spPr>
+        <p:txBody>
+          <a:bodyPr wrap="square" lIns="0" tIns="0" rIns="0" bIns="0" rtlCol="0" anchor="t"/>
+          <a:lstStyle/>
+          <a:p>
+            <a:pPr indent="0" marL="0">
+              <a:buNone/>
+            </a:pPr>
+            <a:r>
+              <a:rPr lang="en-US" sz="1050" b="1" dirty="0">
+                <a:solidFill>
+                  <a:srgbClr val="028090"/>
+                </a:solidFill>
+                <a:latin typeface="Malgun Gothic" pitchFamily="34" charset="0"/>
+                <a:ea typeface="Malgun Gothic" pitchFamily="34" charset="-122"/>
+                <a:cs typeface="Malgun Gothic" pitchFamily="34" charset="-120"/>
+              </a:rPr>
+              <a:t>Sufficient Context: Answerability Gate</a:t>
+            </a:r>
+            <a:endParaRPr lang="en-US" sz="1050" dirty="0"/>
+          </a:p>
+        </p:txBody>
+      </p:sp>
+      <p:sp>
+        <p:nvSpPr>
+          <p:cNvPr id="15" name="Text 13"/>
+          <p:cNvSpPr/>
+          <p:nvPr/>
+        </p:nvSpPr>
+        <p:spPr>
+          <a:xfrm>
+            <a:off x="6419088" y="2596896"/>
+            <a:ext cx="2404872" cy="1536192"/>
+          </a:xfrm>
+          <a:prstGeom prst="rect">
+            <a:avLst/>
+          </a:prstGeom>
+          <a:noFill/>
+          <a:ln/>
+        </p:spPr>
+        <p:txBody>
+          <a:bodyPr wrap="square" lIns="0" tIns="0" rIns="0" bIns="0" rtlCol="0" anchor="t"/>
+          <a:lstStyle/>
+          <a:p>
+            <a:pPr indent="0" marL="0">
+              <a:lnSpc>
+                <a:spcPct val="104000"/>
+              </a:lnSpc>
+              <a:buNone/>
+            </a:pPr>
+            <a:r>
+              <a:rPr lang="en-US" sz="880" b="1" dirty="0">
+                <a:solidFill>
+                  <a:srgbClr val="2B3A42"/>
+                </a:solidFill>
+                <a:latin typeface="Malgun Gothic" pitchFamily="34" charset="0"/>
+                <a:ea typeface="Malgun Gothic" pitchFamily="34" charset="-122"/>
+                <a:cs typeface="Malgun Gothic" pitchFamily="34" charset="-120"/>
+              </a:rPr>
+              <a:t>무엇  </a:t>
+            </a:r>
+            <a:pPr indent="0" marL="0">
+              <a:lnSpc>
+                <a:spcPct val="104000"/>
+              </a:lnSpc>
+              <a:buNone/>
+            </a:pPr>
+            <a:r>
+              <a:rPr lang="en-US" sz="880" dirty="0">
+                <a:solidFill>
+                  <a:srgbClr val="6B7A85"/>
+                </a:solidFill>
+                <a:latin typeface="Malgun Gothic" pitchFamily="34" charset="0"/>
+                <a:ea typeface="Malgun Gothic" pitchFamily="34" charset="-122"/>
+                <a:cs typeface="Malgun Gothic" pitchFamily="34" charset="-120"/>
+              </a:rPr>
+              <a:t>정제된 context만으로 질문에 답할 수 있는지 판단하는 품질 게이트.</a:t>
+            </a:r>
+            <a:endParaRPr lang="en-US" sz="880" dirty="0"/>
+          </a:p>
+          <a:p>
+            <a:pPr indent="0" marL="0">
+              <a:lnSpc>
+                <a:spcPct val="104000"/>
+              </a:lnSpc>
+              <a:buNone/>
+            </a:pPr>
+            <a:endParaRPr lang="en-US" sz="880" dirty="0"/>
+          </a:p>
+          <a:p>
+            <a:pPr indent="0" marL="0">
+              <a:lnSpc>
+                <a:spcPct val="104000"/>
+              </a:lnSpc>
+              <a:buNone/>
+            </a:pPr>
+            <a:r>
+              <a:rPr lang="en-US" sz="880" b="1" dirty="0">
+                <a:solidFill>
+                  <a:srgbClr val="2B3A42"/>
+                </a:solidFill>
+                <a:latin typeface="Malgun Gothic" pitchFamily="34" charset="0"/>
+                <a:ea typeface="Malgun Gothic" pitchFamily="34" charset="-122"/>
+                <a:cs typeface="Malgun Gothic" pitchFamily="34" charset="-120"/>
+              </a:rPr>
+              <a:t>강점  </a:t>
+            </a:r>
+            <a:pPr indent="0" marL="0">
+              <a:lnSpc>
+                <a:spcPct val="104000"/>
+              </a:lnSpc>
+              <a:buNone/>
+            </a:pPr>
+            <a:r>
+              <a:rPr lang="en-US" sz="880" dirty="0">
+                <a:solidFill>
+                  <a:srgbClr val="6B7A85"/>
+                </a:solidFill>
+                <a:latin typeface="Malgun Gothic" pitchFamily="34" charset="0"/>
+                <a:ea typeface="Malgun Gothic" pitchFamily="34" charset="-122"/>
+                <a:cs typeface="Malgun Gothic" pitchFamily="34" charset="-120"/>
+              </a:rPr>
+              <a:t>근거 부족 상태의 억지 답변을 차단. 불충분하면 추가 검색·재질문 또는 답변 보류(abstain).</a:t>
+            </a:r>
+            <a:endParaRPr lang="en-US" sz="880" dirty="0"/>
+          </a:p>
+          <a:p>
+            <a:pPr indent="0" marL="0">
+              <a:lnSpc>
+                <a:spcPct val="104000"/>
+              </a:lnSpc>
+              <a:buNone/>
+            </a:pPr>
+            <a:endParaRPr lang="en-US" sz="880" dirty="0"/>
+          </a:p>
+          <a:p>
+            <a:pPr indent="0" marL="0">
+              <a:lnSpc>
+                <a:spcPct val="104000"/>
+              </a:lnSpc>
+              <a:buNone/>
+            </a:pPr>
+            <a:r>
+              <a:rPr lang="en-US" sz="880" b="1" dirty="0">
+                <a:solidFill>
+                  <a:srgbClr val="028090"/>
+                </a:solidFill>
+                <a:latin typeface="Malgun Gothic" pitchFamily="34" charset="0"/>
+                <a:ea typeface="Malgun Gothic" pitchFamily="34" charset="-122"/>
+                <a:cs typeface="Malgun Gothic" pitchFamily="34" charset="-120"/>
+              </a:rPr>
+              <a:t>역할  </a:t>
+            </a:r>
+            <a:pPr indent="0" marL="0">
+              <a:lnSpc>
+                <a:spcPct val="104000"/>
+              </a:lnSpc>
+              <a:buNone/>
+            </a:pPr>
+            <a:r>
+              <a:rPr lang="en-US" sz="880" dirty="0">
+                <a:solidFill>
+                  <a:srgbClr val="6B7A85"/>
+                </a:solidFill>
+                <a:latin typeface="Malgun Gothic" pitchFamily="34" charset="0"/>
+                <a:ea typeface="Malgun Gothic" pitchFamily="34" charset="-122"/>
+                <a:cs typeface="Malgun Gothic" pitchFamily="34" charset="-120"/>
+              </a:rPr>
+              <a:t>답변 생성 직전 근거 충분성을 판단 — 충분하면 답변, 부족하면 재검색하거나 ‘근거 부족으로 답변 불가’.</a:t>
+            </a:r>
+            <a:endParaRPr lang="en-US" sz="880" dirty="0"/>
+          </a:p>
+        </p:txBody>
+      </p:sp>
+      <p:sp>
+        <p:nvSpPr>
+          <p:cNvPr id="16" name="Shape 14"/>
+          <p:cNvSpPr/>
+          <p:nvPr/>
+        </p:nvSpPr>
+        <p:spPr>
+          <a:xfrm>
+            <a:off x="457200" y="4315968"/>
+            <a:ext cx="8531352" cy="731520"/>
+          </a:xfrm>
+          <a:prstGeom prst="roundRect">
+            <a:avLst>
+              <a:gd name="adj" fmla="val 8750"/>
             </a:avLst>
           </a:prstGeom>
           <a:solidFill>
@@ -8135,14 +8627,14 @@
       </p:sp>
       <p:sp>
         <p:nvSpPr>
-          <p:cNvPr id="11" name="Text 9"/>
-          <p:cNvSpPr/>
-          <p:nvPr/>
-        </p:nvSpPr>
-        <p:spPr>
-          <a:xfrm>
-            <a:off x="4764024" y="3474720"/>
-            <a:ext cx="3776472" cy="237744"/>
+          <p:cNvPr id="17" name="Text 15"/>
+          <p:cNvSpPr/>
+          <p:nvPr/>
+        </p:nvSpPr>
+        <p:spPr>
+          <a:xfrm>
+            <a:off x="658368" y="4315968"/>
+            <a:ext cx="8138160" cy="731520"/>
           </a:xfrm>
           <a:prstGeom prst="rect">
             <a:avLst/>
@@ -8155,6 +8647,9 @@
           <a:lstStyle/>
           <a:p>
             <a:pPr indent="0" marL="0">
+              <a:lnSpc>
+                <a:spcPct val="104000"/>
+              </a:lnSpc>
               <a:buNone/>
             </a:pPr>
             <a:r>
@@ -8166,111 +8661,26 @@
                 <a:ea typeface="Malgun Gothic" pitchFamily="34" charset="-122"/>
                 <a:cs typeface="Malgun Gothic" pitchFamily="34" charset="-120"/>
               </a:rPr>
-              <a:t>인덱스 빌드 (rag/index.py)</a:t>
+              <a:t>결합  </a:t>
+            </a:r>
+            <a:pPr indent="0" marL="0">
+              <a:lnSpc>
+                <a:spcPct val="104000"/>
+              </a:lnSpc>
+              <a:buNone/>
+            </a:pPr>
+            <a:r>
+              <a:rPr lang="en-US" sz="950" dirty="0">
+                <a:solidFill>
+                  <a:srgbClr val="E6EDEF"/>
+                </a:solidFill>
+                <a:latin typeface="Malgun Gothic" pitchFamily="34" charset="0"/>
+                <a:ea typeface="Malgun Gothic" pitchFamily="34" charset="-122"/>
+                <a:cs typeface="Malgun Gothic" pitchFamily="34" charset="-120"/>
+              </a:rPr>
+              <a:t>ALR은 질문 분석·근거 탐색을 구조화하고, PRISM은 후보를 근거 중심으로 재정렬·정제하며, Sufficient Context는 최종 답변 가능 여부를 판단한다. → 단순 유사도 RAG의 약점(잘못된 근거 선택·불충분한 context 답변·환각)을 함께 줄인다.</a:t>
             </a:r>
             <a:endParaRPr lang="en-US" sz="950" dirty="0"/>
-          </a:p>
-        </p:txBody>
-      </p:sp>
-      <p:sp>
-        <p:nvSpPr>
-          <p:cNvPr id="12" name="Text 10"/>
-          <p:cNvSpPr/>
-          <p:nvPr/>
-        </p:nvSpPr>
-        <p:spPr>
-          <a:xfrm>
-            <a:off x="4764024" y="3749040"/>
-            <a:ext cx="3776472" cy="822960"/>
-          </a:xfrm>
-          <a:prstGeom prst="rect">
-            <a:avLst/>
-          </a:prstGeom>
-          <a:noFill/>
-          <a:ln/>
-        </p:spPr>
-        <p:txBody>
-          <a:bodyPr wrap="square" lIns="0" tIns="0" rIns="0" bIns="0" rtlCol="0" anchor="t"/>
-          <a:lstStyle/>
-          <a:p>
-            <a:pPr indent="0" marL="0">
-              <a:lnSpc>
-                <a:spcPct val="105000"/>
-              </a:lnSpc>
-              <a:buNone/>
-            </a:pPr>
-            <a:r>
-              <a:rPr lang="en-US" sz="830" dirty="0">
-                <a:solidFill>
-                  <a:srgbClr val="E6EDEF"/>
-                </a:solidFill>
-                <a:latin typeface="Courier New" pitchFamily="34" charset="0"/>
-                <a:ea typeface="Courier New" pitchFamily="34" charset="-122"/>
-                <a:cs typeface="Courier New" pitchFamily="34" charset="-120"/>
-              </a:rPr>
-              <a:t>vecs = embed([c.text for c in chunks])</a:t>
-            </a:r>
-            <a:endParaRPr lang="en-US" sz="830" dirty="0"/>
-          </a:p>
-          <a:p>
-            <a:pPr indent="0" marL="0">
-              <a:lnSpc>
-                <a:spcPct val="105000"/>
-              </a:lnSpc>
-              <a:buNone/>
-            </a:pPr>
-            <a:r>
-              <a:rPr lang="en-US" sz="830" dirty="0">
-                <a:solidFill>
-                  <a:srgbClr val="E6EDEF"/>
-                </a:solidFill>
-                <a:latin typeface="Courier New" pitchFamily="34" charset="0"/>
-                <a:ea typeface="Courier New" pitchFamily="34" charset="-122"/>
-                <a:cs typeface="Courier New" pitchFamily="34" charset="-120"/>
-              </a:rPr>
-              <a:t>faiss.normalize_L2(vecs)        # → 코사인</a:t>
-            </a:r>
-            <a:endParaRPr lang="en-US" sz="830" dirty="0"/>
-          </a:p>
-          <a:p>
-            <a:pPr indent="0" marL="0">
-              <a:lnSpc>
-                <a:spcPct val="105000"/>
-              </a:lnSpc>
-              <a:buNone/>
-            </a:pPr>
-            <a:r>
-              <a:rPr lang="en-US" sz="830" dirty="0">
-                <a:solidFill>
-                  <a:srgbClr val="E6EDEF"/>
-                </a:solidFill>
-                <a:latin typeface="Courier New" pitchFamily="34" charset="0"/>
-                <a:ea typeface="Courier New" pitchFamily="34" charset="-122"/>
-                <a:cs typeface="Courier New" pitchFamily="34" charset="-120"/>
-              </a:rPr>
-              <a:t>index = faiss.IndexFlatIP(dim)</a:t>
-            </a:r>
-            <a:endParaRPr lang="en-US" sz="830" dirty="0"/>
-          </a:p>
-          <a:p>
-            <a:pPr indent="0" marL="0">
-              <a:lnSpc>
-                <a:spcPct val="105000"/>
-              </a:lnSpc>
-              <a:buNone/>
-            </a:pPr>
-            <a:r>
-              <a:rPr lang="en-US" sz="830" dirty="0">
-                <a:solidFill>
-                  <a:srgbClr val="E6EDEF"/>
-                </a:solidFill>
-                <a:latin typeface="Courier New" pitchFamily="34" charset="0"/>
-                <a:ea typeface="Courier New" pitchFamily="34" charset="-122"/>
-                <a:cs typeface="Courier New" pitchFamily="34" charset="-120"/>
-              </a:rPr>
-              <a:t>index.add(vecs)</a:t>
-            </a:r>
-            <a:endParaRPr lang="en-US" sz="830" dirty="0"/>
           </a:p>
         </p:txBody>
       </p:sp>
@@ -8339,7 +8749,7 @@
                 <a:ea typeface="Malgun Gothic" pitchFamily="34" charset="-122"/>
                 <a:cs typeface="Malgun Gothic" pitchFamily="34" charset="-120"/>
               </a:rPr>
-              <a:t>ROADMAP · NEXT</a:t>
+              <a:t>RAG · VECTOR DB</a:t>
             </a:r>
             <a:endParaRPr lang="en-US" sz="1100" dirty="0"/>
           </a:p>
@@ -8378,7 +8788,7 @@
                 <a:ea typeface="Malgun Gothic" pitchFamily="34" charset="-122"/>
                 <a:cs typeface="Malgun Gothic" pitchFamily="34" charset="-120"/>
               </a:rPr>
-              <a:t>향후 ① 실시간 수요 발생 (Runtime Demand Stream)</a:t>
+              <a:t>RAG ③ Vector DB 구성과 검색 파이프라인</a:t>
             </a:r>
             <a:endParaRPr lang="en-US" sz="2700" dirty="0"/>
           </a:p>
@@ -8386,57 +8796,18 @@
       </p:sp>
       <p:sp>
         <p:nvSpPr>
-          <p:cNvPr id="4" name="Text 2"/>
-          <p:cNvSpPr/>
-          <p:nvPr/>
-        </p:nvSpPr>
-        <p:spPr>
-          <a:xfrm>
-            <a:off x="457200" y="1060704"/>
-            <a:ext cx="8229600" cy="320040"/>
-          </a:xfrm>
-          <a:prstGeom prst="rect">
-            <a:avLst/>
-          </a:prstGeom>
-          <a:noFill/>
-          <a:ln/>
-        </p:spPr>
-        <p:txBody>
-          <a:bodyPr wrap="square" lIns="0" tIns="0" rIns="0" bIns="0" rtlCol="0" anchor="ctr"/>
-          <a:lstStyle/>
-          <a:p>
-            <a:pPr indent="0" marL="0">
-              <a:buNone/>
-            </a:pPr>
-            <a:r>
-              <a:rPr lang="en-US" sz="1150" dirty="0">
-                <a:solidFill>
-                  <a:srgbClr val="6B7A85"/>
-                </a:solidFill>
-                <a:latin typeface="Malgun Gothic" pitchFamily="34" charset="0"/>
-                <a:ea typeface="Malgun Gothic" pitchFamily="34" charset="-122"/>
-                <a:cs typeface="Malgun Gothic" pitchFamily="34" charset="-120"/>
-              </a:rPr>
-              <a:t>현재 DES의 확률 수요생성(Poisson, λ=fit_demand)을 런타임 이벤트 스트림으로 확장</a:t>
-            </a:r>
-            <a:endParaRPr lang="en-US" sz="1150" dirty="0"/>
-          </a:p>
-        </p:txBody>
-      </p:sp>
-      <p:sp>
-        <p:nvSpPr>
-          <p:cNvPr id="5" name="Shape 3"/>
-          <p:cNvSpPr/>
-          <p:nvPr/>
-        </p:nvSpPr>
-        <p:spPr>
-          <a:xfrm>
-            <a:off x="457200" y="1463040"/>
-            <a:ext cx="4114800" cy="1783080"/>
+          <p:cNvPr id="4" name="Shape 2"/>
+          <p:cNvSpPr/>
+          <p:nvPr/>
+        </p:nvSpPr>
+        <p:spPr>
+          <a:xfrm>
+            <a:off x="457200" y="1417320"/>
+            <a:ext cx="3977640" cy="3246120"/>
           </a:xfrm>
           <a:prstGeom prst="roundRect">
             <a:avLst>
-              <a:gd name="adj" fmla="val 3590"/>
+              <a:gd name="adj" fmla="val 1972"/>
             </a:avLst>
           </a:prstGeom>
           <a:solidFill>
@@ -8454,53 +8825,53 @@
       </p:sp>
       <p:sp>
         <p:nvSpPr>
+          <p:cNvPr id="5" name="Text 3"/>
+          <p:cNvSpPr/>
+          <p:nvPr/>
+        </p:nvSpPr>
+        <p:spPr>
+          <a:xfrm>
+            <a:off x="640080" y="1545336"/>
+            <a:ext cx="3611880" cy="292608"/>
+          </a:xfrm>
+          <a:prstGeom prst="rect">
+            <a:avLst/>
+          </a:prstGeom>
+          <a:noFill/>
+          <a:ln/>
+        </p:spPr>
+        <p:txBody>
+          <a:bodyPr wrap="square" lIns="0" tIns="0" rIns="0" bIns="0" rtlCol="0" anchor="ctr"/>
+          <a:lstStyle/>
+          <a:p>
+            <a:pPr indent="0" marL="0">
+              <a:buNone/>
+            </a:pPr>
+            <a:r>
+              <a:rPr lang="en-US" sz="1250" b="1" dirty="0">
+                <a:solidFill>
+                  <a:srgbClr val="2B3A42"/>
+                </a:solidFill>
+                <a:latin typeface="Malgun Gothic" pitchFamily="34" charset="0"/>
+                <a:ea typeface="Malgun Gothic" pitchFamily="34" charset="-122"/>
+                <a:cs typeface="Malgun Gothic" pitchFamily="34" charset="-120"/>
+              </a:rPr>
+              <a:t>Vector DB · 인덱스 구성</a:t>
+            </a:r>
+            <a:endParaRPr lang="en-US" sz="1250" dirty="0"/>
+          </a:p>
+        </p:txBody>
+      </p:sp>
+      <p:sp>
+        <p:nvSpPr>
           <p:cNvPr id="6" name="Text 4"/>
           <p:cNvSpPr/>
           <p:nvPr/>
         </p:nvSpPr>
         <p:spPr>
           <a:xfrm>
-            <a:off x="640080" y="1591056"/>
-            <a:ext cx="3749040" cy="292608"/>
-          </a:xfrm>
-          <a:prstGeom prst="rect">
-            <a:avLst/>
-          </a:prstGeom>
-          <a:noFill/>
-          <a:ln/>
-        </p:spPr>
-        <p:txBody>
-          <a:bodyPr wrap="square" lIns="0" tIns="0" rIns="0" bIns="0" rtlCol="0" anchor="ctr"/>
-          <a:lstStyle/>
-          <a:p>
-            <a:pPr indent="0" marL="0">
-              <a:buNone/>
-            </a:pPr>
-            <a:r>
-              <a:rPr lang="en-US" sz="1250" b="1" dirty="0">
-                <a:solidFill>
-                  <a:srgbClr val="2B3A42"/>
-                </a:solidFill>
-                <a:latin typeface="Malgun Gothic" pitchFamily="34" charset="0"/>
-                <a:ea typeface="Malgun Gothic" pitchFamily="34" charset="-122"/>
-                <a:cs typeface="Malgun Gothic" pitchFamily="34" charset="-120"/>
-              </a:rPr>
-              <a:t>실시간 발생 개념</a:t>
-            </a:r>
-            <a:endParaRPr lang="en-US" sz="1250" dirty="0"/>
-          </a:p>
-        </p:txBody>
-      </p:sp>
-      <p:sp>
-        <p:nvSpPr>
-          <p:cNvPr id="7" name="Text 5"/>
-          <p:cNvSpPr/>
-          <p:nvPr/>
-        </p:nvSpPr>
-        <p:spPr>
-          <a:xfrm>
-            <a:off x="640080" y="1938528"/>
-            <a:ext cx="3749040" cy="1179576"/>
+            <a:off x="640080" y="1892808"/>
+            <a:ext cx="3611880" cy="2642616"/>
           </a:xfrm>
           <a:prstGeom prst="rect">
             <a:avLst/>
@@ -8527,7 +8898,7 @@
                 <a:ea typeface="Malgun Gothic" pitchFamily="34" charset="-122"/>
                 <a:cs typeface="Malgun Gothic" pitchFamily="34" charset="-120"/>
               </a:rPr>
-              <a:t>· 앱 실행(runtime) 중 확률분포로 입고요청/출고요청이 실시간 생성</a:t>
+              <a:t>· Vector DB: FAISS IndexFlatIP</a:t>
             </a:r>
             <a:endParaRPr lang="en-US" sz="1020" dirty="0"/>
           </a:p>
@@ -8547,7 +8918,7 @@
                 <a:ea typeface="Malgun Gothic" pitchFamily="34" charset="-122"/>
                 <a:cs typeface="Malgun Gothic" pitchFamily="34" charset="-120"/>
               </a:rPr>
-              <a:t>· 발생 시점: 보유 데이터 대비 미래 / 중간 / 근미래(실시간)</a:t>
+              <a:t>   (L2 정규화 → 코사인 유사도)</a:t>
             </a:r>
             <a:endParaRPr lang="en-US" sz="1020" dirty="0"/>
           </a:p>
@@ -8567,26 +8938,166 @@
                 <a:ea typeface="Malgun Gothic" pitchFamily="34" charset="-122"/>
                 <a:cs typeface="Malgun Gothic" pitchFamily="34" charset="-120"/>
               </a:rPr>
-              <a:t>· 생성기: 현재 DES Poisson 수요(λ) 로직 재사용</a:t>
+              <a:t>· 임베딩: text-embedding-3-small</a:t>
             </a:r>
             <a:endParaRPr lang="en-US" sz="1020" dirty="0"/>
           </a:p>
-        </p:txBody>
-      </p:sp>
-      <p:sp>
-        <p:nvSpPr>
-          <p:cNvPr id="8" name="Shape 6"/>
-          <p:cNvSpPr/>
-          <p:nvPr/>
-        </p:nvSpPr>
-        <p:spPr>
-          <a:xfrm>
-            <a:off x="457200" y="3383280"/>
-            <a:ext cx="4114800" cy="1280160"/>
+          <a:p>
+            <a:pPr indent="0" marL="0">
+              <a:lnSpc>
+                <a:spcPct val="105000"/>
+              </a:lnSpc>
+              <a:buNone/>
+            </a:pPr>
+            <a:r>
+              <a:rPr lang="en-US" sz="1020" dirty="0">
+                <a:solidFill>
+                  <a:srgbClr val="6B7A85"/>
+                </a:solidFill>
+                <a:latin typeface="Malgun Gothic" pitchFamily="34" charset="0"/>
+                <a:ea typeface="Malgun Gothic" pitchFamily="34" charset="-122"/>
+                <a:cs typeface="Malgun Gothic" pitchFamily="34" charset="-120"/>
+              </a:rPr>
+              <a:t>· 청킹: 정책 md 6종 · ## 헤딩 단위</a:t>
+            </a:r>
+            <a:endParaRPr lang="en-US" sz="1020" dirty="0"/>
+          </a:p>
+          <a:p>
+            <a:pPr indent="0" marL="0">
+              <a:lnSpc>
+                <a:spcPct val="105000"/>
+              </a:lnSpc>
+              <a:buNone/>
+            </a:pPr>
+            <a:r>
+              <a:rPr lang="en-US" sz="1020" dirty="0">
+                <a:solidFill>
+                  <a:srgbClr val="6B7A85"/>
+                </a:solidFill>
+                <a:latin typeface="Malgun Gothic" pitchFamily="34" charset="0"/>
+                <a:ea typeface="Malgun Gothic" pitchFamily="34" charset="-122"/>
+                <a:cs typeface="Malgun Gothic" pitchFamily="34" charset="-120"/>
+              </a:rPr>
+              <a:t>   (LLM 없이 결정적 메타 부여)</a:t>
+            </a:r>
+            <a:endParaRPr lang="en-US" sz="1020" dirty="0"/>
+          </a:p>
+          <a:p>
+            <a:pPr indent="0" marL="0">
+              <a:lnSpc>
+                <a:spcPct val="105000"/>
+              </a:lnSpc>
+              <a:buNone/>
+            </a:pPr>
+            <a:r>
+              <a:rPr lang="en-US" sz="1020" dirty="0">
+                <a:solidFill>
+                  <a:srgbClr val="6B7A85"/>
+                </a:solidFill>
+                <a:latin typeface="Malgun Gothic" pitchFamily="34" charset="0"/>
+                <a:ea typeface="Malgun Gothic" pitchFamily="34" charset="-122"/>
+                <a:cs typeface="Malgun Gothic" pitchFamily="34" charset="-120"/>
+              </a:rPr>
+              <a:t>· 메타: source·document_type·domain·</a:t>
+            </a:r>
+            <a:endParaRPr lang="en-US" sz="1020" dirty="0"/>
+          </a:p>
+          <a:p>
+            <a:pPr indent="0" marL="0">
+              <a:lnSpc>
+                <a:spcPct val="105000"/>
+              </a:lnSpc>
+              <a:buNone/>
+            </a:pPr>
+            <a:r>
+              <a:rPr lang="en-US" sz="1020" dirty="0">
+                <a:solidFill>
+                  <a:srgbClr val="6B7A85"/>
+                </a:solidFill>
+                <a:latin typeface="Malgun Gothic" pitchFamily="34" charset="0"/>
+                <a:ea typeface="Malgun Gothic" pitchFamily="34" charset="-122"/>
+                <a:cs typeface="Malgun Gothic" pitchFamily="34" charset="-120"/>
+              </a:rPr>
+              <a:t>   section·answerable_intents·evidence_summary</a:t>
+            </a:r>
+            <a:endParaRPr lang="en-US" sz="1020" dirty="0"/>
+          </a:p>
+          <a:p>
+            <a:pPr indent="0" marL="0">
+              <a:lnSpc>
+                <a:spcPct val="105000"/>
+              </a:lnSpc>
+              <a:buNone/>
+            </a:pPr>
+            <a:r>
+              <a:rPr lang="en-US" sz="1020" dirty="0">
+                <a:solidFill>
+                  <a:srgbClr val="6B7A85"/>
+                </a:solidFill>
+                <a:latin typeface="Malgun Gothic" pitchFamily="34" charset="0"/>
+                <a:ea typeface="Malgun Gothic" pitchFamily="34" charset="-122"/>
+                <a:cs typeface="Malgun Gothic" pitchFamily="34" charset="-120"/>
+              </a:rPr>
+              <a:t>· 인덱스: faiss.index + chunks.json</a:t>
+            </a:r>
+            <a:endParaRPr lang="en-US" sz="1020" dirty="0"/>
+          </a:p>
+          <a:p>
+            <a:pPr indent="0" marL="0">
+              <a:lnSpc>
+                <a:spcPct val="105000"/>
+              </a:lnSpc>
+              <a:buNone/>
+            </a:pPr>
+            <a:r>
+              <a:rPr lang="en-US" sz="1020" dirty="0">
+                <a:solidFill>
+                  <a:srgbClr val="6B7A85"/>
+                </a:solidFill>
+                <a:latin typeface="Malgun Gothic" pitchFamily="34" charset="0"/>
+                <a:ea typeface="Malgun Gothic" pitchFamily="34" charset="-122"/>
+                <a:cs typeface="Malgun Gothic" pitchFamily="34" charset="-120"/>
+              </a:rPr>
+              <a:t>   정책 변경 시 전체 재인덱싱</a:t>
+            </a:r>
+            <a:endParaRPr lang="en-US" sz="1020" dirty="0"/>
+          </a:p>
+          <a:p>
+            <a:pPr indent="0" marL="0">
+              <a:lnSpc>
+                <a:spcPct val="105000"/>
+              </a:lnSpc>
+              <a:buNone/>
+            </a:pPr>
+            <a:r>
+              <a:rPr lang="en-US" sz="1020" dirty="0">
+                <a:solidFill>
+                  <a:srgbClr val="6B7A85"/>
+                </a:solidFill>
+                <a:latin typeface="Malgun Gothic" pitchFamily="34" charset="0"/>
+                <a:ea typeface="Malgun Gothic" pitchFamily="34" charset="-122"/>
+                <a:cs typeface="Malgun Gothic" pitchFamily="34" charset="-120"/>
+              </a:rPr>
+              <a:t>· 향후: PostgreSQL/pgvector 전환</a:t>
+            </a:r>
+            <a:endParaRPr lang="en-US" sz="1020" dirty="0"/>
+          </a:p>
+        </p:txBody>
+      </p:sp>
+      <p:sp>
+        <p:nvSpPr>
+          <p:cNvPr id="7" name="Shape 5"/>
+          <p:cNvSpPr/>
+          <p:nvPr/>
+        </p:nvSpPr>
+        <p:spPr>
+          <a:xfrm>
+            <a:off x="4617720" y="1417320"/>
+            <a:ext cx="4069080" cy="1783080"/>
           </a:xfrm>
           <a:prstGeom prst="roundRect">
             <a:avLst>
-              <a:gd name="adj" fmla="val 5000"/>
+              <a:gd name="adj" fmla="val 3590"/>
             </a:avLst>
           </a:prstGeom>
           <a:solidFill>
@@ -8604,53 +9115,53 @@
       </p:sp>
       <p:sp>
         <p:nvSpPr>
+          <p:cNvPr id="8" name="Text 6"/>
+          <p:cNvSpPr/>
+          <p:nvPr/>
+        </p:nvSpPr>
+        <p:spPr>
+          <a:xfrm>
+            <a:off x="4800600" y="1545336"/>
+            <a:ext cx="3703320" cy="292608"/>
+          </a:xfrm>
+          <a:prstGeom prst="rect">
+            <a:avLst/>
+          </a:prstGeom>
+          <a:noFill/>
+          <a:ln/>
+        </p:spPr>
+        <p:txBody>
+          <a:bodyPr wrap="square" lIns="0" tIns="0" rIns="0" bIns="0" rtlCol="0" anchor="ctr"/>
+          <a:lstStyle/>
+          <a:p>
+            <a:pPr indent="0" marL="0">
+              <a:buNone/>
+            </a:pPr>
+            <a:r>
+              <a:rPr lang="en-US" sz="1250" b="1" dirty="0">
+                <a:solidFill>
+                  <a:srgbClr val="2B3A42"/>
+                </a:solidFill>
+                <a:latin typeface="Malgun Gothic" pitchFamily="34" charset="0"/>
+                <a:ea typeface="Malgun Gothic" pitchFamily="34" charset="-122"/>
+                <a:cs typeface="Malgun Gothic" pitchFamily="34" charset="-120"/>
+              </a:rPr>
+              <a:t>검색 파이프라인 (rag/retriever.py)</a:t>
+            </a:r>
+            <a:endParaRPr lang="en-US" sz="1250" dirty="0"/>
+          </a:p>
+        </p:txBody>
+      </p:sp>
+      <p:sp>
+        <p:nvSpPr>
           <p:cNvPr id="9" name="Text 7"/>
           <p:cNvSpPr/>
           <p:nvPr/>
         </p:nvSpPr>
         <p:spPr>
           <a:xfrm>
-            <a:off x="640080" y="3511296"/>
-            <a:ext cx="3749040" cy="292608"/>
-          </a:xfrm>
-          <a:prstGeom prst="rect">
-            <a:avLst/>
-          </a:prstGeom>
-          <a:noFill/>
-          <a:ln/>
-        </p:spPr>
-        <p:txBody>
-          <a:bodyPr wrap="square" lIns="0" tIns="0" rIns="0" bIns="0" rtlCol="0" anchor="ctr"/>
-          <a:lstStyle/>
-          <a:p>
-            <a:pPr indent="0" marL="0">
-              <a:buNone/>
-            </a:pPr>
-            <a:r>
-              <a:rPr lang="en-US" sz="1250" b="1" dirty="0">
-                <a:solidFill>
-                  <a:srgbClr val="2B3A42"/>
-                </a:solidFill>
-                <a:latin typeface="Malgun Gothic" pitchFamily="34" charset="0"/>
-                <a:ea typeface="Malgun Gothic" pitchFamily="34" charset="-122"/>
-                <a:cs typeface="Malgun Gothic" pitchFamily="34" charset="-120"/>
-              </a:rPr>
-              <a:t>발생 흐름</a:t>
-            </a:r>
-            <a:endParaRPr lang="en-US" sz="1250" dirty="0"/>
-          </a:p>
-        </p:txBody>
-      </p:sp>
-      <p:sp>
-        <p:nvSpPr>
-          <p:cNvPr id="10" name="Text 8"/>
-          <p:cNvSpPr/>
-          <p:nvPr/>
-        </p:nvSpPr>
-        <p:spPr>
-          <a:xfrm>
-            <a:off x="640080" y="3858768"/>
-            <a:ext cx="3749040" cy="676656"/>
+            <a:off x="4800600" y="1892808"/>
+            <a:ext cx="3703320" cy="1179576"/>
           </a:xfrm>
           <a:prstGeom prst="rect">
             <a:avLst/>
@@ -8677,7 +9188,7 @@
                 <a:ea typeface="Malgun Gothic" pitchFamily="34" charset="-122"/>
                 <a:cs typeface="Malgun Gothic" pitchFamily="34" charset="-120"/>
               </a:rPr>
-              <a:t>확률 스트림 발생기 → 요청 row 생성</a:t>
+              <a:t>① 질의 임베딩 → ② FAISS top-(k×3)</a:t>
             </a:r>
             <a:endParaRPr lang="en-US" sz="1020" dirty="0"/>
           </a:p>
@@ -8697,45 +9208,132 @@
                 <a:ea typeface="Malgun Gothic" pitchFamily="34" charset="-122"/>
                 <a:cs typeface="Malgun Gothic" pitchFamily="34" charset="-120"/>
               </a:rPr>
-              <a:t>→ Toast 알림 → [탭 이동] 또는 [닫기]</a:t>
+              <a:t>③ intent 메타 필터 → top-k</a:t>
             </a:r>
             <a:endParaRPr lang="en-US" sz="1020" dirty="0"/>
           </a:p>
-        </p:txBody>
-      </p:sp>
-      <p:sp>
-        <p:nvSpPr>
-          <p:cNvPr id="11" name="Shape 9"/>
-          <p:cNvSpPr/>
-          <p:nvPr/>
-        </p:nvSpPr>
-        <p:spPr>
-          <a:xfrm>
-            <a:off x="4754880" y="1463040"/>
-            <a:ext cx="3931920" cy="1417320"/>
+          <a:p>
+            <a:pPr indent="0" marL="0">
+              <a:lnSpc>
+                <a:spcPct val="105000"/>
+              </a:lnSpc>
+              <a:buNone/>
+            </a:pPr>
+            <a:r>
+              <a:rPr lang="en-US" sz="1020" dirty="0">
+                <a:solidFill>
+                  <a:srgbClr val="6B7A85"/>
+                </a:solidFill>
+                <a:latin typeface="Malgun Gothic" pitchFamily="34" charset="0"/>
+                <a:ea typeface="Malgun Gothic" pitchFamily="34" charset="-122"/>
+                <a:cs typeface="Malgun Gothic" pitchFamily="34" charset="-120"/>
+              </a:rPr>
+              <a:t>④ PRISM 리랭크(relevance·contribution·span)</a:t>
+            </a:r>
+            <a:endParaRPr lang="en-US" sz="1020" dirty="0"/>
+          </a:p>
+          <a:p>
+            <a:pPr indent="0" marL="0">
+              <a:lnSpc>
+                <a:spcPct val="105000"/>
+              </a:lnSpc>
+              <a:buNone/>
+            </a:pPr>
+            <a:r>
+              <a:rPr lang="en-US" sz="1020" dirty="0">
+                <a:solidFill>
+                  <a:srgbClr val="6B7A85"/>
+                </a:solidFill>
+                <a:latin typeface="Malgun Gothic" pitchFamily="34" charset="0"/>
+                <a:ea typeface="Malgun Gothic" pitchFamily="34" charset="-122"/>
+                <a:cs typeface="Malgun Gothic" pitchFamily="34" charset="-120"/>
+              </a:rPr>
+              <a:t>⑤ Sufficient 판정</a:t>
+            </a:r>
+            <a:endParaRPr lang="en-US" sz="1020" dirty="0"/>
+          </a:p>
+          <a:p>
+            <a:pPr indent="0" marL="0">
+              <a:lnSpc>
+                <a:spcPct val="105000"/>
+              </a:lnSpc>
+              <a:buNone/>
+            </a:pPr>
+            <a:r>
+              <a:rPr lang="en-US" sz="1020" dirty="0">
+                <a:solidFill>
+                  <a:srgbClr val="6B7A85"/>
+                </a:solidFill>
+                <a:latin typeface="Malgun Gothic" pitchFamily="34" charset="0"/>
+                <a:ea typeface="Malgun Gothic" pitchFamily="34" charset="-122"/>
+                <a:cs typeface="Malgun Gothic" pitchFamily="34" charset="-120"/>
+              </a:rPr>
+              <a:t>   충분 → 근거 답변 / 부족 → 재검색(≤2)·abstain</a:t>
+            </a:r>
+            <a:endParaRPr lang="en-US" sz="1020" dirty="0"/>
+          </a:p>
+        </p:txBody>
+      </p:sp>
+      <p:sp>
+        <p:nvSpPr>
+          <p:cNvPr id="10" name="Shape 8"/>
+          <p:cNvSpPr/>
+          <p:nvPr/>
+        </p:nvSpPr>
+        <p:spPr>
+          <a:xfrm>
+            <a:off x="4617720" y="3383280"/>
+            <a:ext cx="4069080" cy="1280160"/>
           </a:xfrm>
           <a:prstGeom prst="roundRect">
             <a:avLst>
-              <a:gd name="adj" fmla="val 6452"/>
+              <a:gd name="adj" fmla="val 4286"/>
             </a:avLst>
           </a:prstGeom>
           <a:solidFill>
-            <a:srgbClr val="FFFFFF"/>
+            <a:srgbClr val="263238"/>
           </a:solidFill>
-          <a:ln w="15875">
-            <a:solidFill>
-              <a:srgbClr val="028090"/>
-            </a:solidFill>
-            <a:prstDash val="solid"/>
-          </a:ln>
-          <a:effectLst>
-            <a:outerShdw sx="100000" sy="100000" kx="0" ky="0" algn="bl" rotWithShape="0" blurRad="63500" dist="25400" dir="2700000">
-              <a:srgbClr val="000000">
-                <a:alpha val="10000"/>
-              </a:srgbClr>
-            </a:outerShdw>
-          </a:effectLst>
-        </p:spPr>
+          <a:ln/>
+        </p:spPr>
+      </p:sp>
+      <p:sp>
+        <p:nvSpPr>
+          <p:cNvPr id="11" name="Text 9"/>
+          <p:cNvSpPr/>
+          <p:nvPr/>
+        </p:nvSpPr>
+        <p:spPr>
+          <a:xfrm>
+            <a:off x="4764024" y="3474720"/>
+            <a:ext cx="3776472" cy="237744"/>
+          </a:xfrm>
+          <a:prstGeom prst="rect">
+            <a:avLst/>
+          </a:prstGeom>
+          <a:noFill/>
+          <a:ln/>
+        </p:spPr>
+        <p:txBody>
+          <a:bodyPr wrap="square" lIns="0" tIns="0" rIns="0" bIns="0" rtlCol="0" anchor="ctr"/>
+          <a:lstStyle/>
+          <a:p>
+            <a:pPr indent="0" marL="0">
+              <a:buNone/>
+            </a:pPr>
+            <a:r>
+              <a:rPr lang="en-US" sz="950" b="1" dirty="0">
+                <a:solidFill>
+                  <a:srgbClr val="7FD1CD"/>
+                </a:solidFill>
+                <a:latin typeface="Malgun Gothic" pitchFamily="34" charset="0"/>
+                <a:ea typeface="Malgun Gothic" pitchFamily="34" charset="-122"/>
+                <a:cs typeface="Malgun Gothic" pitchFamily="34" charset="-120"/>
+              </a:rPr>
+              <a:t>인덱스 빌드 (rag/index.py)</a:t>
+            </a:r>
+            <a:endParaRPr lang="en-US" sz="950" dirty="0"/>
+          </a:p>
+        </p:txBody>
       </p:sp>
       <p:sp>
         <p:nvSpPr>
@@ -8745,525 +9343,8 @@
         </p:nvSpPr>
         <p:spPr>
           <a:xfrm>
-            <a:off x="4956048" y="1591056"/>
-            <a:ext cx="3566160" cy="274320"/>
-          </a:xfrm>
-          <a:prstGeom prst="rect">
-            <a:avLst/>
-          </a:prstGeom>
-          <a:noFill/>
-          <a:ln/>
-        </p:spPr>
-        <p:txBody>
-          <a:bodyPr wrap="square" lIns="0" tIns="0" rIns="0" bIns="0" rtlCol="0" anchor="ctr"/>
-          <a:lstStyle/>
-          <a:p>
-            <a:pPr indent="0" marL="0">
-              <a:buNone/>
-            </a:pPr>
-            <a:r>
-              <a:rPr lang="en-US" sz="1200" b="1" dirty="0">
-                <a:solidFill>
-                  <a:srgbClr val="2B3A42"/>
-                </a:solidFill>
-                <a:latin typeface="Malgun Gothic" pitchFamily="34" charset="0"/>
-                <a:ea typeface="Malgun Gothic" pitchFamily="34" charset="-122"/>
-                <a:cs typeface="Malgun Gothic" pitchFamily="34" charset="-120"/>
-              </a:rPr>
-              <a:t>🔔  신규 출고요청 발생 — ORD-RT-014</a:t>
-            </a:r>
-            <a:endParaRPr lang="en-US" sz="1200" dirty="0"/>
-          </a:p>
-        </p:txBody>
-      </p:sp>
-      <p:sp>
-        <p:nvSpPr>
-          <p:cNvPr id="13" name="Text 11"/>
-          <p:cNvSpPr/>
-          <p:nvPr/>
-        </p:nvSpPr>
-        <p:spPr>
-          <a:xfrm>
-            <a:off x="4956048" y="1901952"/>
-            <a:ext cx="3566160" cy="274320"/>
-          </a:xfrm>
-          <a:prstGeom prst="rect">
-            <a:avLst/>
-          </a:prstGeom>
-          <a:noFill/>
-          <a:ln/>
-        </p:spPr>
-        <p:txBody>
-          <a:bodyPr wrap="square" lIns="0" tIns="0" rIns="0" bIns="0" rtlCol="0" anchor="ctr"/>
-          <a:lstStyle/>
-          <a:p>
-            <a:pPr indent="0" marL="0">
-              <a:buNone/>
-            </a:pPr>
-            <a:r>
-              <a:rPr lang="en-US" sz="1100" dirty="0">
-                <a:solidFill>
-                  <a:srgbClr val="6B7A85"/>
-                </a:solidFill>
-                <a:latin typeface="Malgun Gothic" pitchFamily="34" charset="0"/>
-                <a:ea typeface="Malgun Gothic" pitchFamily="34" charset="-122"/>
-                <a:cs typeface="Malgun Gothic" pitchFamily="34" charset="-120"/>
-              </a:rPr>
-              <a:t>오늘 16:00 마감 · </a:t>
-            </a:r>
-            <a:pPr indent="0" marL="0">
-              <a:buNone/>
-            </a:pPr>
-            <a:r>
-              <a:rPr lang="en-US" sz="1100" b="1" dirty="0">
-                <a:solidFill>
-                  <a:srgbClr val="C0392B"/>
-                </a:solidFill>
-                <a:latin typeface="Malgun Gothic" pitchFamily="34" charset="0"/>
-                <a:ea typeface="Malgun Gothic" pitchFamily="34" charset="-122"/>
-                <a:cs typeface="Malgun Gothic" pitchFamily="34" charset="-120"/>
-              </a:rPr>
-              <a:t>긴급</a:t>
-            </a:r>
-            <a:endParaRPr lang="en-US" sz="1100" dirty="0"/>
-          </a:p>
-        </p:txBody>
-      </p:sp>
-      <p:sp>
-        <p:nvSpPr>
-          <p:cNvPr id="14" name="Shape 12"/>
-          <p:cNvSpPr/>
-          <p:nvPr/>
-        </p:nvSpPr>
-        <p:spPr>
-          <a:xfrm>
-            <a:off x="4956048" y="2286000"/>
-            <a:ext cx="1737360" cy="384048"/>
-          </a:xfrm>
-          <a:prstGeom prst="roundRect">
-            <a:avLst>
-              <a:gd name="adj" fmla="val 23810"/>
-            </a:avLst>
-          </a:prstGeom>
-          <a:solidFill>
-            <a:srgbClr val="028090"/>
-          </a:solidFill>
-          <a:ln/>
-        </p:spPr>
-      </p:sp>
-      <p:sp>
-        <p:nvSpPr>
-          <p:cNvPr id="15" name="Text 13"/>
-          <p:cNvSpPr/>
-          <p:nvPr/>
-        </p:nvSpPr>
-        <p:spPr>
-          <a:xfrm>
-            <a:off x="4956048" y="2286000"/>
-            <a:ext cx="1737360" cy="384048"/>
-          </a:xfrm>
-          <a:prstGeom prst="rect">
-            <a:avLst/>
-          </a:prstGeom>
-          <a:noFill/>
-          <a:ln/>
-        </p:spPr>
-        <p:txBody>
-          <a:bodyPr wrap="square" lIns="0" tIns="0" rIns="0" bIns="0" rtlCol="0" anchor="ctr"/>
-          <a:lstStyle/>
-          <a:p>
-            <a:pPr algn="ctr" indent="0" marL="0">
-              <a:buNone/>
-            </a:pPr>
-            <a:r>
-              <a:rPr lang="en-US" sz="900" b="1" dirty="0">
-                <a:solidFill>
-                  <a:srgbClr val="FFFFFF"/>
-                </a:solidFill>
-                <a:latin typeface="Malgun Gothic" pitchFamily="34" charset="0"/>
-                <a:ea typeface="Malgun Gothic" pitchFamily="34" charset="-122"/>
-                <a:cs typeface="Malgun Gothic" pitchFamily="34" charset="-120"/>
-              </a:rPr>
-              <a:t>입·출고 요청 데이터로 이동</a:t>
-            </a:r>
-            <a:endParaRPr lang="en-US" sz="900" dirty="0"/>
-          </a:p>
-        </p:txBody>
-      </p:sp>
-      <p:sp>
-        <p:nvSpPr>
-          <p:cNvPr id="16" name="Shape 14"/>
-          <p:cNvSpPr/>
-          <p:nvPr/>
-        </p:nvSpPr>
-        <p:spPr>
-          <a:xfrm>
-            <a:off x="6812280" y="2286000"/>
-            <a:ext cx="868680" cy="384048"/>
-          </a:xfrm>
-          <a:prstGeom prst="roundRect">
-            <a:avLst>
-              <a:gd name="adj" fmla="val 23810"/>
-            </a:avLst>
-          </a:prstGeom>
-          <a:solidFill>
-            <a:srgbClr val="F4F6F7"/>
-          </a:solidFill>
-          <a:ln w="12700">
-            <a:solidFill>
-              <a:srgbClr val="C9D6D8"/>
-            </a:solidFill>
-            <a:prstDash val="solid"/>
-          </a:ln>
-        </p:spPr>
-      </p:sp>
-      <p:sp>
-        <p:nvSpPr>
-          <p:cNvPr id="17" name="Text 15"/>
-          <p:cNvSpPr/>
-          <p:nvPr/>
-        </p:nvSpPr>
-        <p:spPr>
-          <a:xfrm>
-            <a:off x="6812280" y="2286000"/>
-            <a:ext cx="868680" cy="384048"/>
-          </a:xfrm>
-          <a:prstGeom prst="rect">
-            <a:avLst/>
-          </a:prstGeom>
-          <a:noFill/>
-          <a:ln/>
-        </p:spPr>
-        <p:txBody>
-          <a:bodyPr wrap="square" lIns="0" tIns="0" rIns="0" bIns="0" rtlCol="0" anchor="ctr"/>
-          <a:lstStyle/>
-          <a:p>
-            <a:pPr algn="ctr" indent="0" marL="0">
-              <a:buNone/>
-            </a:pPr>
-            <a:r>
-              <a:rPr lang="en-US" sz="900" b="1" dirty="0">
-                <a:solidFill>
-                  <a:srgbClr val="6B7A85"/>
-                </a:solidFill>
-                <a:latin typeface="Malgun Gothic" pitchFamily="34" charset="0"/>
-                <a:ea typeface="Malgun Gothic" pitchFamily="34" charset="-122"/>
-                <a:cs typeface="Malgun Gothic" pitchFamily="34" charset="-120"/>
-              </a:rPr>
-              <a:t>닫기</a:t>
-            </a:r>
-            <a:endParaRPr lang="en-US" sz="900" dirty="0"/>
-          </a:p>
-        </p:txBody>
-      </p:sp>
-      <p:sp>
-        <p:nvSpPr>
-          <p:cNvPr id="18" name="Text 16"/>
-          <p:cNvSpPr/>
-          <p:nvPr/>
-        </p:nvSpPr>
-        <p:spPr>
-          <a:xfrm>
-            <a:off x="4754880" y="3246120"/>
-            <a:ext cx="3931920" cy="274320"/>
-          </a:xfrm>
-          <a:prstGeom prst="rect">
-            <a:avLst/>
-          </a:prstGeom>
-          <a:noFill/>
-          <a:ln/>
-        </p:spPr>
-        <p:txBody>
-          <a:bodyPr wrap="square" lIns="0" tIns="0" rIns="0" bIns="0" rtlCol="0" anchor="ctr"/>
-          <a:lstStyle/>
-          <a:p>
-            <a:pPr indent="0" marL="0">
-              <a:buNone/>
-            </a:pPr>
-            <a:r>
-              <a:rPr lang="en-US" sz="1100" b="1" dirty="0">
-                <a:solidFill>
-                  <a:srgbClr val="2B3A42"/>
-                </a:solidFill>
-                <a:latin typeface="Malgun Gothic" pitchFamily="34" charset="0"/>
-                <a:ea typeface="Malgun Gothic" pitchFamily="34" charset="-122"/>
-                <a:cs typeface="Malgun Gothic" pitchFamily="34" charset="-120"/>
-              </a:rPr>
-              <a:t>발생 시점 분포</a:t>
-            </a:r>
-            <a:endParaRPr lang="en-US" sz="1100" dirty="0"/>
-          </a:p>
-        </p:txBody>
-      </p:sp>
-      <p:sp>
-        <p:nvSpPr>
-          <p:cNvPr id="19" name="Shape 17"/>
-          <p:cNvSpPr/>
-          <p:nvPr/>
-        </p:nvSpPr>
-        <p:spPr>
-          <a:xfrm>
-            <a:off x="4937760" y="3977640"/>
-            <a:ext cx="3566160" cy="0"/>
-          </a:xfrm>
-          <a:prstGeom prst="line">
-            <a:avLst/>
-          </a:prstGeom>
-          <a:noFill/>
-          <a:ln w="19050">
-            <a:solidFill>
-              <a:srgbClr val="C9D6D8"/>
-            </a:solidFill>
-            <a:prstDash val="solid"/>
-          </a:ln>
-        </p:spPr>
-      </p:sp>
-      <p:sp>
-        <p:nvSpPr>
-          <p:cNvPr id="20" name="Shape 18"/>
-          <p:cNvSpPr/>
-          <p:nvPr/>
-        </p:nvSpPr>
-        <p:spPr>
-          <a:xfrm>
-            <a:off x="4937760" y="3904488"/>
-            <a:ext cx="146304" cy="146304"/>
-          </a:xfrm>
-          <a:prstGeom prst="ellipse">
-            <a:avLst/>
-          </a:prstGeom>
-          <a:solidFill>
-            <a:srgbClr val="028090"/>
-          </a:solidFill>
-          <a:ln/>
-        </p:spPr>
-      </p:sp>
-      <p:sp>
-        <p:nvSpPr>
-          <p:cNvPr id="21" name="Text 19"/>
-          <p:cNvSpPr/>
-          <p:nvPr/>
-        </p:nvSpPr>
-        <p:spPr>
-          <a:xfrm>
-            <a:off x="4526280" y="4114800"/>
-            <a:ext cx="960120" cy="274320"/>
-          </a:xfrm>
-          <a:prstGeom prst="rect">
-            <a:avLst/>
-          </a:prstGeom>
-          <a:noFill/>
-          <a:ln/>
-        </p:spPr>
-        <p:txBody>
-          <a:bodyPr wrap="square" lIns="0" tIns="0" rIns="0" bIns="0" rtlCol="0" anchor="ctr"/>
-          <a:lstStyle/>
-          <a:p>
-            <a:pPr algn="ctr" indent="0" marL="0">
-              <a:buNone/>
-            </a:pPr>
-            <a:r>
-              <a:rPr lang="en-US" sz="950" dirty="0">
-                <a:solidFill>
-                  <a:srgbClr val="2B3A42"/>
-                </a:solidFill>
-                <a:latin typeface="Malgun Gothic" pitchFamily="34" charset="0"/>
-                <a:ea typeface="Malgun Gothic" pitchFamily="34" charset="-122"/>
-                <a:cs typeface="Malgun Gothic" pitchFamily="34" charset="-120"/>
-              </a:rPr>
-              <a:t>now</a:t>
-            </a:r>
-            <a:endParaRPr lang="en-US" sz="950" dirty="0"/>
-          </a:p>
-        </p:txBody>
-      </p:sp>
-      <p:sp>
-        <p:nvSpPr>
-          <p:cNvPr id="22" name="Shape 20"/>
-          <p:cNvSpPr/>
-          <p:nvPr/>
-        </p:nvSpPr>
-        <p:spPr>
-          <a:xfrm>
-            <a:off x="5989320" y="3904488"/>
-            <a:ext cx="146304" cy="146304"/>
-          </a:xfrm>
-          <a:prstGeom prst="ellipse">
-            <a:avLst/>
-          </a:prstGeom>
-          <a:solidFill>
-            <a:srgbClr val="1C7293"/>
-          </a:solidFill>
-          <a:ln/>
-        </p:spPr>
-      </p:sp>
-      <p:sp>
-        <p:nvSpPr>
-          <p:cNvPr id="23" name="Text 21"/>
-          <p:cNvSpPr/>
-          <p:nvPr/>
-        </p:nvSpPr>
-        <p:spPr>
-          <a:xfrm>
-            <a:off x="5577840" y="4114800"/>
-            <a:ext cx="960120" cy="274320"/>
-          </a:xfrm>
-          <a:prstGeom prst="rect">
-            <a:avLst/>
-          </a:prstGeom>
-          <a:noFill/>
-          <a:ln/>
-        </p:spPr>
-        <p:txBody>
-          <a:bodyPr wrap="square" lIns="0" tIns="0" rIns="0" bIns="0" rtlCol="0" anchor="ctr"/>
-          <a:lstStyle/>
-          <a:p>
-            <a:pPr algn="ctr" indent="0" marL="0">
-              <a:buNone/>
-            </a:pPr>
-            <a:r>
-              <a:rPr lang="en-US" sz="950" dirty="0">
-                <a:solidFill>
-                  <a:srgbClr val="2B3A42"/>
-                </a:solidFill>
-                <a:latin typeface="Malgun Gothic" pitchFamily="34" charset="0"/>
-                <a:ea typeface="Malgun Gothic" pitchFamily="34" charset="-122"/>
-                <a:cs typeface="Malgun Gothic" pitchFamily="34" charset="-120"/>
-              </a:rPr>
-              <a:t>근미래</a:t>
-            </a:r>
-            <a:endParaRPr lang="en-US" sz="950" dirty="0"/>
-          </a:p>
-        </p:txBody>
-      </p:sp>
-      <p:sp>
-        <p:nvSpPr>
-          <p:cNvPr id="24" name="Shape 22"/>
-          <p:cNvSpPr/>
-          <p:nvPr/>
-        </p:nvSpPr>
-        <p:spPr>
-          <a:xfrm>
-            <a:off x="6949440" y="3904488"/>
-            <a:ext cx="146304" cy="146304"/>
-          </a:xfrm>
-          <a:prstGeom prst="ellipse">
-            <a:avLst/>
-          </a:prstGeom>
-          <a:solidFill>
-            <a:srgbClr val="8AA0A6"/>
-          </a:solidFill>
-          <a:ln/>
-        </p:spPr>
-      </p:sp>
-      <p:sp>
-        <p:nvSpPr>
-          <p:cNvPr id="25" name="Text 23"/>
-          <p:cNvSpPr/>
-          <p:nvPr/>
-        </p:nvSpPr>
-        <p:spPr>
-          <a:xfrm>
-            <a:off x="6537960" y="4114800"/>
-            <a:ext cx="960120" cy="274320"/>
-          </a:xfrm>
-          <a:prstGeom prst="rect">
-            <a:avLst/>
-          </a:prstGeom>
-          <a:noFill/>
-          <a:ln/>
-        </p:spPr>
-        <p:txBody>
-          <a:bodyPr wrap="square" lIns="0" tIns="0" rIns="0" bIns="0" rtlCol="0" anchor="ctr"/>
-          <a:lstStyle/>
-          <a:p>
-            <a:pPr algn="ctr" indent="0" marL="0">
-              <a:buNone/>
-            </a:pPr>
-            <a:r>
-              <a:rPr lang="en-US" sz="950" dirty="0">
-                <a:solidFill>
-                  <a:srgbClr val="2B3A42"/>
-                </a:solidFill>
-                <a:latin typeface="Malgun Gothic" pitchFamily="34" charset="0"/>
-                <a:ea typeface="Malgun Gothic" pitchFamily="34" charset="-122"/>
-                <a:cs typeface="Malgun Gothic" pitchFamily="34" charset="-120"/>
-              </a:rPr>
-              <a:t>중간</a:t>
-            </a:r>
-            <a:endParaRPr lang="en-US" sz="950" dirty="0"/>
-          </a:p>
-        </p:txBody>
-      </p:sp>
-      <p:sp>
-        <p:nvSpPr>
-          <p:cNvPr id="26" name="Shape 24"/>
-          <p:cNvSpPr/>
-          <p:nvPr/>
-        </p:nvSpPr>
-        <p:spPr>
-          <a:xfrm>
-            <a:off x="8183880" y="3904488"/>
-            <a:ext cx="146304" cy="146304"/>
-          </a:xfrm>
-          <a:prstGeom prst="ellipse">
-            <a:avLst/>
-          </a:prstGeom>
-          <a:solidFill>
-            <a:srgbClr val="8AA0A6"/>
-          </a:solidFill>
-          <a:ln/>
-        </p:spPr>
-      </p:sp>
-      <p:sp>
-        <p:nvSpPr>
-          <p:cNvPr id="27" name="Text 25"/>
-          <p:cNvSpPr/>
-          <p:nvPr/>
-        </p:nvSpPr>
-        <p:spPr>
-          <a:xfrm>
-            <a:off x="7772400" y="4114800"/>
-            <a:ext cx="960120" cy="274320"/>
-          </a:xfrm>
-          <a:prstGeom prst="rect">
-            <a:avLst/>
-          </a:prstGeom>
-          <a:noFill/>
-          <a:ln/>
-        </p:spPr>
-        <p:txBody>
-          <a:bodyPr wrap="square" lIns="0" tIns="0" rIns="0" bIns="0" rtlCol="0" anchor="ctr"/>
-          <a:lstStyle/>
-          <a:p>
-            <a:pPr algn="ctr" indent="0" marL="0">
-              <a:buNone/>
-            </a:pPr>
-            <a:r>
-              <a:rPr lang="en-US" sz="950" dirty="0">
-                <a:solidFill>
-                  <a:srgbClr val="2B3A42"/>
-                </a:solidFill>
-                <a:latin typeface="Malgun Gothic" pitchFamily="34" charset="0"/>
-                <a:ea typeface="Malgun Gothic" pitchFamily="34" charset="-122"/>
-                <a:cs typeface="Malgun Gothic" pitchFamily="34" charset="-120"/>
-              </a:rPr>
-              <a:t>미래</a:t>
-            </a:r>
-            <a:endParaRPr lang="en-US" sz="950" dirty="0"/>
-          </a:p>
-        </p:txBody>
-      </p:sp>
-      <p:sp>
-        <p:nvSpPr>
-          <p:cNvPr id="28" name="Text 26"/>
-          <p:cNvSpPr/>
-          <p:nvPr/>
-        </p:nvSpPr>
-        <p:spPr>
-          <a:xfrm>
-            <a:off x="4754880" y="4498848"/>
-            <a:ext cx="3931920" cy="457200"/>
+            <a:off x="4764024" y="3749040"/>
+            <a:ext cx="3776472" cy="822960"/>
           </a:xfrm>
           <a:prstGeom prst="rect">
             <a:avLst/>
@@ -9276,20 +9357,83 @@
           <a:lstStyle/>
           <a:p>
             <a:pPr indent="0" marL="0">
-              <a:buNone/>
-            </a:pPr>
-            <a:r>
-              <a:rPr lang="en-US" sz="950" i="1" dirty="0">
-                <a:solidFill>
-                  <a:srgbClr val="6B7A85"/>
-                </a:solidFill>
-                <a:latin typeface="Malgun Gothic" pitchFamily="34" charset="0"/>
-                <a:ea typeface="Malgun Gothic" pitchFamily="34" charset="-122"/>
-                <a:cs typeface="Malgun Gothic" pitchFamily="34" charset="-120"/>
-              </a:rPr>
-              <a:t>실시간 요청은 now 이후 어느 시점에도 발생 가능 — 근미래 건은 즉시 처리 압박</a:t>
-            </a:r>
-            <a:endParaRPr lang="en-US" sz="950" dirty="0"/>
+              <a:lnSpc>
+                <a:spcPct val="105000"/>
+              </a:lnSpc>
+              <a:buNone/>
+            </a:pPr>
+            <a:r>
+              <a:rPr lang="en-US" sz="830" dirty="0">
+                <a:solidFill>
+                  <a:srgbClr val="E6EDEF"/>
+                </a:solidFill>
+                <a:latin typeface="Courier New" pitchFamily="34" charset="0"/>
+                <a:ea typeface="Courier New" pitchFamily="34" charset="-122"/>
+                <a:cs typeface="Courier New" pitchFamily="34" charset="-120"/>
+              </a:rPr>
+              <a:t>vecs = embed([c.text for c in chunks])</a:t>
+            </a:r>
+            <a:endParaRPr lang="en-US" sz="830" dirty="0"/>
+          </a:p>
+          <a:p>
+            <a:pPr indent="0" marL="0">
+              <a:lnSpc>
+                <a:spcPct val="105000"/>
+              </a:lnSpc>
+              <a:buNone/>
+            </a:pPr>
+            <a:r>
+              <a:rPr lang="en-US" sz="830" dirty="0">
+                <a:solidFill>
+                  <a:srgbClr val="E6EDEF"/>
+                </a:solidFill>
+                <a:latin typeface="Courier New" pitchFamily="34" charset="0"/>
+                <a:ea typeface="Courier New" pitchFamily="34" charset="-122"/>
+                <a:cs typeface="Courier New" pitchFamily="34" charset="-120"/>
+              </a:rPr>
+              <a:t>faiss.normalize_L2(vecs)        # → 코사인</a:t>
+            </a:r>
+            <a:endParaRPr lang="en-US" sz="830" dirty="0"/>
+          </a:p>
+          <a:p>
+            <a:pPr indent="0" marL="0">
+              <a:lnSpc>
+                <a:spcPct val="105000"/>
+              </a:lnSpc>
+              <a:buNone/>
+            </a:pPr>
+            <a:r>
+              <a:rPr lang="en-US" sz="830" dirty="0">
+                <a:solidFill>
+                  <a:srgbClr val="E6EDEF"/>
+                </a:solidFill>
+                <a:latin typeface="Courier New" pitchFamily="34" charset="0"/>
+                <a:ea typeface="Courier New" pitchFamily="34" charset="-122"/>
+                <a:cs typeface="Courier New" pitchFamily="34" charset="-120"/>
+              </a:rPr>
+              <a:t>index = faiss.IndexFlatIP(dim)</a:t>
+            </a:r>
+            <a:endParaRPr lang="en-US" sz="830" dirty="0"/>
+          </a:p>
+          <a:p>
+            <a:pPr indent="0" marL="0">
+              <a:lnSpc>
+                <a:spcPct val="105000"/>
+              </a:lnSpc>
+              <a:buNone/>
+            </a:pPr>
+            <a:r>
+              <a:rPr lang="en-US" sz="830" dirty="0">
+                <a:solidFill>
+                  <a:srgbClr val="E6EDEF"/>
+                </a:solidFill>
+                <a:latin typeface="Courier New" pitchFamily="34" charset="0"/>
+                <a:ea typeface="Courier New" pitchFamily="34" charset="-122"/>
+                <a:cs typeface="Courier New" pitchFamily="34" charset="-120"/>
+              </a:rPr>
+              <a:t>index.add(vecs)</a:t>
+            </a:r>
+            <a:endParaRPr lang="en-US" sz="830" dirty="0"/>
           </a:p>
         </p:txBody>
       </p:sp>
@@ -9397,7 +9541,7 @@
                 <a:ea typeface="Malgun Gothic" pitchFamily="34" charset="-122"/>
                 <a:cs typeface="Malgun Gothic" pitchFamily="34" charset="-120"/>
               </a:rPr>
-              <a:t>향후 ② 긴급 처리 판정 · 입·출고 요청 데이터 탭</a:t>
+              <a:t>향후 ① 실시간 수요 발생 (Runtime Demand Stream)</a:t>
             </a:r>
             <a:endParaRPr lang="en-US" sz="2700" dirty="0"/>
           </a:p>
@@ -9405,18 +9549,57 @@
       </p:sp>
       <p:sp>
         <p:nvSpPr>
-          <p:cNvPr id="4" name="Shape 2"/>
-          <p:cNvSpPr/>
-          <p:nvPr/>
-        </p:nvSpPr>
-        <p:spPr>
-          <a:xfrm>
-            <a:off x="457200" y="1417320"/>
-            <a:ext cx="4114800" cy="1572768"/>
+          <p:cNvPr id="4" name="Text 2"/>
+          <p:cNvSpPr/>
+          <p:nvPr/>
+        </p:nvSpPr>
+        <p:spPr>
+          <a:xfrm>
+            <a:off x="457200" y="1060704"/>
+            <a:ext cx="8229600" cy="320040"/>
+          </a:xfrm>
+          <a:prstGeom prst="rect">
+            <a:avLst/>
+          </a:prstGeom>
+          <a:noFill/>
+          <a:ln/>
+        </p:spPr>
+        <p:txBody>
+          <a:bodyPr wrap="square" lIns="0" tIns="0" rIns="0" bIns="0" rtlCol="0" anchor="ctr"/>
+          <a:lstStyle/>
+          <a:p>
+            <a:pPr indent="0" marL="0">
+              <a:buNone/>
+            </a:pPr>
+            <a:r>
+              <a:rPr lang="en-US" sz="1150" dirty="0">
+                <a:solidFill>
+                  <a:srgbClr val="6B7A85"/>
+                </a:solidFill>
+                <a:latin typeface="Malgun Gothic" pitchFamily="34" charset="0"/>
+                <a:ea typeface="Malgun Gothic" pitchFamily="34" charset="-122"/>
+                <a:cs typeface="Malgun Gothic" pitchFamily="34" charset="-120"/>
+              </a:rPr>
+              <a:t>현재 DES의 확률 수요생성(Poisson, λ=fit_demand)을 런타임 이벤트 스트림으로 확장</a:t>
+            </a:r>
+            <a:endParaRPr lang="en-US" sz="1150" dirty="0"/>
+          </a:p>
+        </p:txBody>
+      </p:sp>
+      <p:sp>
+        <p:nvSpPr>
+          <p:cNvPr id="5" name="Shape 3"/>
+          <p:cNvSpPr/>
+          <p:nvPr/>
+        </p:nvSpPr>
+        <p:spPr>
+          <a:xfrm>
+            <a:off x="457200" y="1463040"/>
+            <a:ext cx="4114800" cy="1783080"/>
           </a:xfrm>
           <a:prstGeom prst="roundRect">
             <a:avLst>
-              <a:gd name="adj" fmla="val 4070"/>
+              <a:gd name="adj" fmla="val 3590"/>
             </a:avLst>
           </a:prstGeom>
           <a:solidFill>
@@ -9434,13 +9617,13 @@
       </p:sp>
       <p:sp>
         <p:nvSpPr>
-          <p:cNvPr id="5" name="Text 3"/>
-          <p:cNvSpPr/>
-          <p:nvPr/>
-        </p:nvSpPr>
-        <p:spPr>
-          <a:xfrm>
-            <a:off x="640080" y="1545336"/>
+          <p:cNvPr id="6" name="Text 4"/>
+          <p:cNvSpPr/>
+          <p:nvPr/>
+        </p:nvSpPr>
+        <p:spPr>
+          <a:xfrm>
+            <a:off x="640080" y="1591056"/>
             <a:ext cx="3749040" cy="292608"/>
           </a:xfrm>
           <a:prstGeom prst="rect">
@@ -9465,7 +9648,7 @@
                 <a:ea typeface="Malgun Gothic" pitchFamily="34" charset="-122"/>
                 <a:cs typeface="Malgun Gothic" pitchFamily="34" charset="-120"/>
               </a:rPr>
-              <a:t>긴급여부 판정</a:t>
+              <a:t>실시간 발생 개념</a:t>
             </a:r>
             <a:endParaRPr lang="en-US" sz="1250" dirty="0"/>
           </a:p>
@@ -9473,14 +9656,14 @@
       </p:sp>
       <p:sp>
         <p:nvSpPr>
-          <p:cNvPr id="6" name="Text 4"/>
-          <p:cNvSpPr/>
-          <p:nvPr/>
-        </p:nvSpPr>
-        <p:spPr>
-          <a:xfrm>
-            <a:off x="640080" y="1892808"/>
-            <a:ext cx="3749040" cy="969264"/>
+          <p:cNvPr id="7" name="Text 5"/>
+          <p:cNvSpPr/>
+          <p:nvPr/>
+        </p:nvSpPr>
+        <p:spPr>
+          <a:xfrm>
+            <a:off x="640080" y="1938528"/>
+            <a:ext cx="3749040" cy="1179576"/>
           </a:xfrm>
           <a:prstGeom prst="rect">
             <a:avLst/>
@@ -9507,7 +9690,7 @@
                 <a:ea typeface="Malgun Gothic" pitchFamily="34" charset="-122"/>
                 <a:cs typeface="Malgun Gothic" pitchFamily="34" charset="-120"/>
               </a:rPr>
-              <a:t>· 정의: now 기준 오늘(영업일) 내 처리해야 하면 긴급</a:t>
+              <a:t>· 앱 실행(runtime) 중 확률분포로 입고요청/출고요청이 실시간 생성</a:t>
             </a:r>
             <a:endParaRPr lang="en-US" sz="1020" dirty="0"/>
           </a:p>
@@ -9527,7 +9710,7 @@
                 <a:ea typeface="Malgun Gothic" pitchFamily="34" charset="-122"/>
                 <a:cs typeface="Malgun Gothic" pitchFamily="34" charset="-120"/>
               </a:rPr>
-              <a:t>· 판정: due_datetime ≤ 오늘 마감(EOD) → urgent = true</a:t>
+              <a:t>· 발생 시점: 보유 데이터 대비 미래 / 중간 / 근미래(실시간)</a:t>
             </a:r>
             <a:endParaRPr lang="en-US" sz="1020" dirty="0"/>
           </a:p>
@@ -9547,7 +9730,7 @@
                 <a:ea typeface="Malgun Gothic" pitchFamily="34" charset="-122"/>
                 <a:cs typeface="Malgun Gothic" pitchFamily="34" charset="-120"/>
               </a:rPr>
-              <a:t>· 연계: 피킹 우선순위(deadline_urgency)·DES 부하에 즉시 반영</a:t>
+              <a:t>· 생성기: 현재 DES Poisson 수요(λ) 로직 재사용</a:t>
             </a:r>
             <a:endParaRPr lang="en-US" sz="1020" dirty="0"/>
           </a:p>
@@ -9555,18 +9738,18 @@
       </p:sp>
       <p:sp>
         <p:nvSpPr>
-          <p:cNvPr id="7" name="Shape 5"/>
-          <p:cNvSpPr/>
-          <p:nvPr/>
-        </p:nvSpPr>
-        <p:spPr>
-          <a:xfrm>
-            <a:off x="457200" y="3127248"/>
-            <a:ext cx="4114800" cy="1627632"/>
+          <p:cNvPr id="8" name="Shape 6"/>
+          <p:cNvSpPr/>
+          <p:nvPr/>
+        </p:nvSpPr>
+        <p:spPr>
+          <a:xfrm>
+            <a:off x="457200" y="3383280"/>
+            <a:ext cx="4114800" cy="1280160"/>
           </a:xfrm>
           <a:prstGeom prst="roundRect">
             <a:avLst>
-              <a:gd name="adj" fmla="val 3933"/>
+              <a:gd name="adj" fmla="val 5000"/>
             </a:avLst>
           </a:prstGeom>
           <a:solidFill>
@@ -9584,13 +9767,13 @@
       </p:sp>
       <p:sp>
         <p:nvSpPr>
-          <p:cNvPr id="8" name="Text 6"/>
-          <p:cNvSpPr/>
-          <p:nvPr/>
-        </p:nvSpPr>
-        <p:spPr>
-          <a:xfrm>
-            <a:off x="640080" y="3255264"/>
+          <p:cNvPr id="9" name="Text 7"/>
+          <p:cNvSpPr/>
+          <p:nvPr/>
+        </p:nvSpPr>
+        <p:spPr>
+          <a:xfrm>
+            <a:off x="640080" y="3511296"/>
             <a:ext cx="3749040" cy="292608"/>
           </a:xfrm>
           <a:prstGeom prst="rect">
@@ -9615,7 +9798,7 @@
                 <a:ea typeface="Malgun Gothic" pitchFamily="34" charset="-122"/>
                 <a:cs typeface="Malgun Gothic" pitchFamily="34" charset="-120"/>
               </a:rPr>
-              <a:t>데이터 모델 변경</a:t>
+              <a:t>발생 흐름</a:t>
             </a:r>
             <a:endParaRPr lang="en-US" sz="1250" dirty="0"/>
           </a:p>
@@ -9623,14 +9806,14 @@
       </p:sp>
       <p:sp>
         <p:nvSpPr>
-          <p:cNvPr id="9" name="Text 7"/>
-          <p:cNvSpPr/>
-          <p:nvPr/>
-        </p:nvSpPr>
-        <p:spPr>
-          <a:xfrm>
-            <a:off x="640080" y="3602736"/>
-            <a:ext cx="3749040" cy="1024128"/>
+          <p:cNvPr id="10" name="Text 8"/>
+          <p:cNvSpPr/>
+          <p:nvPr/>
+        </p:nvSpPr>
+        <p:spPr>
+          <a:xfrm>
+            <a:off x="640080" y="3858768"/>
+            <a:ext cx="3749040" cy="676656"/>
           </a:xfrm>
           <a:prstGeom prst="rect">
             <a:avLst/>
@@ -9657,7 +9840,7 @@
                 <a:ea typeface="Malgun Gothic" pitchFamily="34" charset="-122"/>
                 <a:cs typeface="Malgun Gothic" pitchFamily="34" charset="-120"/>
               </a:rPr>
-              <a:t>· inbound_orders / outbound_orders에</a:t>
+              <a:t>확률 스트림 발생기 → 요청 row 생성</a:t>
             </a:r>
             <a:endParaRPr lang="en-US" sz="1020" dirty="0"/>
           </a:p>
@@ -9677,72 +9860,37 @@
                 <a:ea typeface="Malgun Gothic" pitchFamily="34" charset="-122"/>
                 <a:cs typeface="Malgun Gothic" pitchFamily="34" charset="-120"/>
               </a:rPr>
-              <a:t>   urgent 파생 컬럼(또는 뷰) 추가</a:t>
+              <a:t>→ Toast 알림 → [탭 이동] 또는 [닫기]</a:t>
             </a:r>
             <a:endParaRPr lang="en-US" sz="1020" dirty="0"/>
           </a:p>
-          <a:p>
-            <a:pPr indent="0" marL="0">
-              <a:lnSpc>
-                <a:spcPct val="105000"/>
-              </a:lnSpc>
-              <a:buNone/>
-            </a:pPr>
-            <a:r>
-              <a:rPr lang="en-US" sz="1020" dirty="0">
-                <a:solidFill>
-                  <a:srgbClr val="6B7A85"/>
-                </a:solidFill>
-                <a:latin typeface="Malgun Gothic" pitchFamily="34" charset="0"/>
-                <a:ea typeface="Malgun Gothic" pitchFamily="34" charset="-122"/>
-                <a:cs typeface="Malgun Gothic" pitchFamily="34" charset="-120"/>
-              </a:rPr>
-              <a:t>· 실시간 생성 요청은 row append (source=REALTIME)</a:t>
-            </a:r>
-            <a:endParaRPr lang="en-US" sz="1020" dirty="0"/>
-          </a:p>
-          <a:p>
-            <a:pPr indent="0" marL="0">
-              <a:lnSpc>
-                <a:spcPct val="105000"/>
-              </a:lnSpc>
-              <a:buNone/>
-            </a:pPr>
-            <a:r>
-              <a:rPr lang="en-US" sz="1020" dirty="0">
-                <a:solidFill>
-                  <a:srgbClr val="6B7A85"/>
-                </a:solidFill>
-                <a:latin typeface="Malgun Gothic" pitchFamily="34" charset="0"/>
-                <a:ea typeface="Malgun Gothic" pitchFamily="34" charset="-122"/>
-                <a:cs typeface="Malgun Gothic" pitchFamily="34" charset="-120"/>
-              </a:rPr>
-              <a:t>· 신규 탭: 입·출고 요청 데이터</a:t>
-            </a:r>
-            <a:endParaRPr lang="en-US" sz="1020" dirty="0"/>
-          </a:p>
-        </p:txBody>
-      </p:sp>
-      <p:sp>
-        <p:nvSpPr>
-          <p:cNvPr id="10" name="Shape 8"/>
-          <p:cNvSpPr/>
-          <p:nvPr/>
-        </p:nvSpPr>
-        <p:spPr>
-          <a:xfrm>
-            <a:off x="4709160" y="1417320"/>
-            <a:ext cx="3977640" cy="1143000"/>
+        </p:txBody>
+      </p:sp>
+      <p:sp>
+        <p:nvSpPr>
+          <p:cNvPr id="11" name="Shape 9"/>
+          <p:cNvSpPr/>
+          <p:nvPr/>
+        </p:nvSpPr>
+        <p:spPr>
+          <a:xfrm>
+            <a:off x="4754880" y="1463040"/>
+            <a:ext cx="3931920" cy="1417320"/>
           </a:xfrm>
           <a:prstGeom prst="roundRect">
             <a:avLst>
-              <a:gd name="adj" fmla="val 5600"/>
+              <a:gd name="adj" fmla="val 6452"/>
             </a:avLst>
           </a:prstGeom>
           <a:solidFill>
-            <a:srgbClr val="F4F6F7"/>
+            <a:srgbClr val="FFFFFF"/>
           </a:solidFill>
-          <a:ln/>
+          <a:ln w="15875">
+            <a:solidFill>
+              <a:srgbClr val="028090"/>
+            </a:solidFill>
+            <a:prstDash val="solid"/>
+          </a:ln>
           <a:effectLst>
             <a:outerShdw sx="100000" sy="100000" kx="0" ky="0" algn="bl" rotWithShape="0" blurRad="63500" dist="25400" dir="2700000">
               <a:srgbClr val="000000">
@@ -9754,14 +9902,14 @@
       </p:sp>
       <p:sp>
         <p:nvSpPr>
-          <p:cNvPr id="11" name="Text 9"/>
-          <p:cNvSpPr/>
-          <p:nvPr/>
-        </p:nvSpPr>
-        <p:spPr>
-          <a:xfrm>
-            <a:off x="4892040" y="1545336"/>
-            <a:ext cx="3611880" cy="292608"/>
+          <p:cNvPr id="12" name="Text 10"/>
+          <p:cNvSpPr/>
+          <p:nvPr/>
+        </p:nvSpPr>
+        <p:spPr>
+          <a:xfrm>
+            <a:off x="4956048" y="1591056"/>
+            <a:ext cx="3566160" cy="274320"/>
           </a:xfrm>
           <a:prstGeom prst="rect">
             <a:avLst/>
@@ -9777,6 +9925,701 @@
               <a:buNone/>
             </a:pPr>
             <a:r>
+              <a:rPr lang="en-US" sz="1200" b="1" dirty="0">
+                <a:solidFill>
+                  <a:srgbClr val="2B3A42"/>
+                </a:solidFill>
+                <a:latin typeface="Malgun Gothic" pitchFamily="34" charset="0"/>
+                <a:ea typeface="Malgun Gothic" pitchFamily="34" charset="-122"/>
+                <a:cs typeface="Malgun Gothic" pitchFamily="34" charset="-120"/>
+              </a:rPr>
+              <a:t>🔔  신규 출고요청 발생 — ORD-RT-014</a:t>
+            </a:r>
+            <a:endParaRPr lang="en-US" sz="1200" dirty="0"/>
+          </a:p>
+        </p:txBody>
+      </p:sp>
+      <p:sp>
+        <p:nvSpPr>
+          <p:cNvPr id="13" name="Text 11"/>
+          <p:cNvSpPr/>
+          <p:nvPr/>
+        </p:nvSpPr>
+        <p:spPr>
+          <a:xfrm>
+            <a:off x="4956048" y="1901952"/>
+            <a:ext cx="3566160" cy="274320"/>
+          </a:xfrm>
+          <a:prstGeom prst="rect">
+            <a:avLst/>
+          </a:prstGeom>
+          <a:noFill/>
+          <a:ln/>
+        </p:spPr>
+        <p:txBody>
+          <a:bodyPr wrap="square" lIns="0" tIns="0" rIns="0" bIns="0" rtlCol="0" anchor="ctr"/>
+          <a:lstStyle/>
+          <a:p>
+            <a:pPr indent="0" marL="0">
+              <a:buNone/>
+            </a:pPr>
+            <a:r>
+              <a:rPr lang="en-US" sz="1100" dirty="0">
+                <a:solidFill>
+                  <a:srgbClr val="6B7A85"/>
+                </a:solidFill>
+                <a:latin typeface="Malgun Gothic" pitchFamily="34" charset="0"/>
+                <a:ea typeface="Malgun Gothic" pitchFamily="34" charset="-122"/>
+                <a:cs typeface="Malgun Gothic" pitchFamily="34" charset="-120"/>
+              </a:rPr>
+              <a:t>오늘 16:00 마감 · </a:t>
+            </a:r>
+            <a:pPr indent="0" marL="0">
+              <a:buNone/>
+            </a:pPr>
+            <a:r>
+              <a:rPr lang="en-US" sz="1100" b="1" dirty="0">
+                <a:solidFill>
+                  <a:srgbClr val="C0392B"/>
+                </a:solidFill>
+                <a:latin typeface="Malgun Gothic" pitchFamily="34" charset="0"/>
+                <a:ea typeface="Malgun Gothic" pitchFamily="34" charset="-122"/>
+                <a:cs typeface="Malgun Gothic" pitchFamily="34" charset="-120"/>
+              </a:rPr>
+              <a:t>긴급</a:t>
+            </a:r>
+            <a:endParaRPr lang="en-US" sz="1100" dirty="0"/>
+          </a:p>
+        </p:txBody>
+      </p:sp>
+      <p:sp>
+        <p:nvSpPr>
+          <p:cNvPr id="14" name="Shape 12"/>
+          <p:cNvSpPr/>
+          <p:nvPr/>
+        </p:nvSpPr>
+        <p:spPr>
+          <a:xfrm>
+            <a:off x="4956048" y="2286000"/>
+            <a:ext cx="1737360" cy="384048"/>
+          </a:xfrm>
+          <a:prstGeom prst="roundRect">
+            <a:avLst>
+              <a:gd name="adj" fmla="val 23810"/>
+            </a:avLst>
+          </a:prstGeom>
+          <a:solidFill>
+            <a:srgbClr val="028090"/>
+          </a:solidFill>
+          <a:ln/>
+        </p:spPr>
+      </p:sp>
+      <p:sp>
+        <p:nvSpPr>
+          <p:cNvPr id="15" name="Text 13"/>
+          <p:cNvSpPr/>
+          <p:nvPr/>
+        </p:nvSpPr>
+        <p:spPr>
+          <a:xfrm>
+            <a:off x="4956048" y="2286000"/>
+            <a:ext cx="1737360" cy="384048"/>
+          </a:xfrm>
+          <a:prstGeom prst="rect">
+            <a:avLst/>
+          </a:prstGeom>
+          <a:noFill/>
+          <a:ln/>
+        </p:spPr>
+        <p:txBody>
+          <a:bodyPr wrap="square" lIns="0" tIns="0" rIns="0" bIns="0" rtlCol="0" anchor="ctr"/>
+          <a:lstStyle/>
+          <a:p>
+            <a:pPr algn="ctr" indent="0" marL="0">
+              <a:buNone/>
+            </a:pPr>
+            <a:r>
+              <a:rPr lang="en-US" sz="900" b="1" dirty="0">
+                <a:solidFill>
+                  <a:srgbClr val="FFFFFF"/>
+                </a:solidFill>
+                <a:latin typeface="Malgun Gothic" pitchFamily="34" charset="0"/>
+                <a:ea typeface="Malgun Gothic" pitchFamily="34" charset="-122"/>
+                <a:cs typeface="Malgun Gothic" pitchFamily="34" charset="-120"/>
+              </a:rPr>
+              <a:t>입·출고 요청 데이터로 이동</a:t>
+            </a:r>
+            <a:endParaRPr lang="en-US" sz="900" dirty="0"/>
+          </a:p>
+        </p:txBody>
+      </p:sp>
+      <p:sp>
+        <p:nvSpPr>
+          <p:cNvPr id="16" name="Shape 14"/>
+          <p:cNvSpPr/>
+          <p:nvPr/>
+        </p:nvSpPr>
+        <p:spPr>
+          <a:xfrm>
+            <a:off x="6812280" y="2286000"/>
+            <a:ext cx="868680" cy="384048"/>
+          </a:xfrm>
+          <a:prstGeom prst="roundRect">
+            <a:avLst>
+              <a:gd name="adj" fmla="val 23810"/>
+            </a:avLst>
+          </a:prstGeom>
+          <a:solidFill>
+            <a:srgbClr val="F4F6F7"/>
+          </a:solidFill>
+          <a:ln w="12700">
+            <a:solidFill>
+              <a:srgbClr val="C9D6D8"/>
+            </a:solidFill>
+            <a:prstDash val="solid"/>
+          </a:ln>
+        </p:spPr>
+      </p:sp>
+      <p:sp>
+        <p:nvSpPr>
+          <p:cNvPr id="17" name="Text 15"/>
+          <p:cNvSpPr/>
+          <p:nvPr/>
+        </p:nvSpPr>
+        <p:spPr>
+          <a:xfrm>
+            <a:off x="6812280" y="2286000"/>
+            <a:ext cx="868680" cy="384048"/>
+          </a:xfrm>
+          <a:prstGeom prst="rect">
+            <a:avLst/>
+          </a:prstGeom>
+          <a:noFill/>
+          <a:ln/>
+        </p:spPr>
+        <p:txBody>
+          <a:bodyPr wrap="square" lIns="0" tIns="0" rIns="0" bIns="0" rtlCol="0" anchor="ctr"/>
+          <a:lstStyle/>
+          <a:p>
+            <a:pPr algn="ctr" indent="0" marL="0">
+              <a:buNone/>
+            </a:pPr>
+            <a:r>
+              <a:rPr lang="en-US" sz="900" b="1" dirty="0">
+                <a:solidFill>
+                  <a:srgbClr val="6B7A85"/>
+                </a:solidFill>
+                <a:latin typeface="Malgun Gothic" pitchFamily="34" charset="0"/>
+                <a:ea typeface="Malgun Gothic" pitchFamily="34" charset="-122"/>
+                <a:cs typeface="Malgun Gothic" pitchFamily="34" charset="-120"/>
+              </a:rPr>
+              <a:t>닫기</a:t>
+            </a:r>
+            <a:endParaRPr lang="en-US" sz="900" dirty="0"/>
+          </a:p>
+        </p:txBody>
+      </p:sp>
+      <p:sp>
+        <p:nvSpPr>
+          <p:cNvPr id="18" name="Text 16"/>
+          <p:cNvSpPr/>
+          <p:nvPr/>
+        </p:nvSpPr>
+        <p:spPr>
+          <a:xfrm>
+            <a:off x="4754880" y="3246120"/>
+            <a:ext cx="3931920" cy="274320"/>
+          </a:xfrm>
+          <a:prstGeom prst="rect">
+            <a:avLst/>
+          </a:prstGeom>
+          <a:noFill/>
+          <a:ln/>
+        </p:spPr>
+        <p:txBody>
+          <a:bodyPr wrap="square" lIns="0" tIns="0" rIns="0" bIns="0" rtlCol="0" anchor="ctr"/>
+          <a:lstStyle/>
+          <a:p>
+            <a:pPr indent="0" marL="0">
+              <a:buNone/>
+            </a:pPr>
+            <a:r>
+              <a:rPr lang="en-US" sz="1100" b="1" dirty="0">
+                <a:solidFill>
+                  <a:srgbClr val="2B3A42"/>
+                </a:solidFill>
+                <a:latin typeface="Malgun Gothic" pitchFamily="34" charset="0"/>
+                <a:ea typeface="Malgun Gothic" pitchFamily="34" charset="-122"/>
+                <a:cs typeface="Malgun Gothic" pitchFamily="34" charset="-120"/>
+              </a:rPr>
+              <a:t>발생 시점 분포</a:t>
+            </a:r>
+            <a:endParaRPr lang="en-US" sz="1100" dirty="0"/>
+          </a:p>
+        </p:txBody>
+      </p:sp>
+      <p:sp>
+        <p:nvSpPr>
+          <p:cNvPr id="19" name="Shape 17"/>
+          <p:cNvSpPr/>
+          <p:nvPr/>
+        </p:nvSpPr>
+        <p:spPr>
+          <a:xfrm>
+            <a:off x="4937760" y="3977640"/>
+            <a:ext cx="3566160" cy="0"/>
+          </a:xfrm>
+          <a:prstGeom prst="line">
+            <a:avLst/>
+          </a:prstGeom>
+          <a:noFill/>
+          <a:ln w="19050">
+            <a:solidFill>
+              <a:srgbClr val="C9D6D8"/>
+            </a:solidFill>
+            <a:prstDash val="solid"/>
+          </a:ln>
+        </p:spPr>
+      </p:sp>
+      <p:sp>
+        <p:nvSpPr>
+          <p:cNvPr id="20" name="Shape 18"/>
+          <p:cNvSpPr/>
+          <p:nvPr/>
+        </p:nvSpPr>
+        <p:spPr>
+          <a:xfrm>
+            <a:off x="4937760" y="3904488"/>
+            <a:ext cx="146304" cy="146304"/>
+          </a:xfrm>
+          <a:prstGeom prst="ellipse">
+            <a:avLst/>
+          </a:prstGeom>
+          <a:solidFill>
+            <a:srgbClr val="028090"/>
+          </a:solidFill>
+          <a:ln/>
+        </p:spPr>
+      </p:sp>
+      <p:sp>
+        <p:nvSpPr>
+          <p:cNvPr id="21" name="Text 19"/>
+          <p:cNvSpPr/>
+          <p:nvPr/>
+        </p:nvSpPr>
+        <p:spPr>
+          <a:xfrm>
+            <a:off x="4526280" y="4114800"/>
+            <a:ext cx="960120" cy="274320"/>
+          </a:xfrm>
+          <a:prstGeom prst="rect">
+            <a:avLst/>
+          </a:prstGeom>
+          <a:noFill/>
+          <a:ln/>
+        </p:spPr>
+        <p:txBody>
+          <a:bodyPr wrap="square" lIns="0" tIns="0" rIns="0" bIns="0" rtlCol="0" anchor="ctr"/>
+          <a:lstStyle/>
+          <a:p>
+            <a:pPr algn="ctr" indent="0" marL="0">
+              <a:buNone/>
+            </a:pPr>
+            <a:r>
+              <a:rPr lang="en-US" sz="950" dirty="0">
+                <a:solidFill>
+                  <a:srgbClr val="2B3A42"/>
+                </a:solidFill>
+                <a:latin typeface="Malgun Gothic" pitchFamily="34" charset="0"/>
+                <a:ea typeface="Malgun Gothic" pitchFamily="34" charset="-122"/>
+                <a:cs typeface="Malgun Gothic" pitchFamily="34" charset="-120"/>
+              </a:rPr>
+              <a:t>now</a:t>
+            </a:r>
+            <a:endParaRPr lang="en-US" sz="950" dirty="0"/>
+          </a:p>
+        </p:txBody>
+      </p:sp>
+      <p:sp>
+        <p:nvSpPr>
+          <p:cNvPr id="22" name="Shape 20"/>
+          <p:cNvSpPr/>
+          <p:nvPr/>
+        </p:nvSpPr>
+        <p:spPr>
+          <a:xfrm>
+            <a:off x="5989320" y="3904488"/>
+            <a:ext cx="146304" cy="146304"/>
+          </a:xfrm>
+          <a:prstGeom prst="ellipse">
+            <a:avLst/>
+          </a:prstGeom>
+          <a:solidFill>
+            <a:srgbClr val="1C7293"/>
+          </a:solidFill>
+          <a:ln/>
+        </p:spPr>
+      </p:sp>
+      <p:sp>
+        <p:nvSpPr>
+          <p:cNvPr id="23" name="Text 21"/>
+          <p:cNvSpPr/>
+          <p:nvPr/>
+        </p:nvSpPr>
+        <p:spPr>
+          <a:xfrm>
+            <a:off x="5577840" y="4114800"/>
+            <a:ext cx="960120" cy="274320"/>
+          </a:xfrm>
+          <a:prstGeom prst="rect">
+            <a:avLst/>
+          </a:prstGeom>
+          <a:noFill/>
+          <a:ln/>
+        </p:spPr>
+        <p:txBody>
+          <a:bodyPr wrap="square" lIns="0" tIns="0" rIns="0" bIns="0" rtlCol="0" anchor="ctr"/>
+          <a:lstStyle/>
+          <a:p>
+            <a:pPr algn="ctr" indent="0" marL="0">
+              <a:buNone/>
+            </a:pPr>
+            <a:r>
+              <a:rPr lang="en-US" sz="950" dirty="0">
+                <a:solidFill>
+                  <a:srgbClr val="2B3A42"/>
+                </a:solidFill>
+                <a:latin typeface="Malgun Gothic" pitchFamily="34" charset="0"/>
+                <a:ea typeface="Malgun Gothic" pitchFamily="34" charset="-122"/>
+                <a:cs typeface="Malgun Gothic" pitchFamily="34" charset="-120"/>
+              </a:rPr>
+              <a:t>근미래</a:t>
+            </a:r>
+            <a:endParaRPr lang="en-US" sz="950" dirty="0"/>
+          </a:p>
+        </p:txBody>
+      </p:sp>
+      <p:sp>
+        <p:nvSpPr>
+          <p:cNvPr id="24" name="Shape 22"/>
+          <p:cNvSpPr/>
+          <p:nvPr/>
+        </p:nvSpPr>
+        <p:spPr>
+          <a:xfrm>
+            <a:off x="6949440" y="3904488"/>
+            <a:ext cx="146304" cy="146304"/>
+          </a:xfrm>
+          <a:prstGeom prst="ellipse">
+            <a:avLst/>
+          </a:prstGeom>
+          <a:solidFill>
+            <a:srgbClr val="8AA0A6"/>
+          </a:solidFill>
+          <a:ln/>
+        </p:spPr>
+      </p:sp>
+      <p:sp>
+        <p:nvSpPr>
+          <p:cNvPr id="25" name="Text 23"/>
+          <p:cNvSpPr/>
+          <p:nvPr/>
+        </p:nvSpPr>
+        <p:spPr>
+          <a:xfrm>
+            <a:off x="6537960" y="4114800"/>
+            <a:ext cx="960120" cy="274320"/>
+          </a:xfrm>
+          <a:prstGeom prst="rect">
+            <a:avLst/>
+          </a:prstGeom>
+          <a:noFill/>
+          <a:ln/>
+        </p:spPr>
+        <p:txBody>
+          <a:bodyPr wrap="square" lIns="0" tIns="0" rIns="0" bIns="0" rtlCol="0" anchor="ctr"/>
+          <a:lstStyle/>
+          <a:p>
+            <a:pPr algn="ctr" indent="0" marL="0">
+              <a:buNone/>
+            </a:pPr>
+            <a:r>
+              <a:rPr lang="en-US" sz="950" dirty="0">
+                <a:solidFill>
+                  <a:srgbClr val="2B3A42"/>
+                </a:solidFill>
+                <a:latin typeface="Malgun Gothic" pitchFamily="34" charset="0"/>
+                <a:ea typeface="Malgun Gothic" pitchFamily="34" charset="-122"/>
+                <a:cs typeface="Malgun Gothic" pitchFamily="34" charset="-120"/>
+              </a:rPr>
+              <a:t>중간</a:t>
+            </a:r>
+            <a:endParaRPr lang="en-US" sz="950" dirty="0"/>
+          </a:p>
+        </p:txBody>
+      </p:sp>
+      <p:sp>
+        <p:nvSpPr>
+          <p:cNvPr id="26" name="Shape 24"/>
+          <p:cNvSpPr/>
+          <p:nvPr/>
+        </p:nvSpPr>
+        <p:spPr>
+          <a:xfrm>
+            <a:off x="8183880" y="3904488"/>
+            <a:ext cx="146304" cy="146304"/>
+          </a:xfrm>
+          <a:prstGeom prst="ellipse">
+            <a:avLst/>
+          </a:prstGeom>
+          <a:solidFill>
+            <a:srgbClr val="8AA0A6"/>
+          </a:solidFill>
+          <a:ln/>
+        </p:spPr>
+      </p:sp>
+      <p:sp>
+        <p:nvSpPr>
+          <p:cNvPr id="27" name="Text 25"/>
+          <p:cNvSpPr/>
+          <p:nvPr/>
+        </p:nvSpPr>
+        <p:spPr>
+          <a:xfrm>
+            <a:off x="7772400" y="4114800"/>
+            <a:ext cx="960120" cy="274320"/>
+          </a:xfrm>
+          <a:prstGeom prst="rect">
+            <a:avLst/>
+          </a:prstGeom>
+          <a:noFill/>
+          <a:ln/>
+        </p:spPr>
+        <p:txBody>
+          <a:bodyPr wrap="square" lIns="0" tIns="0" rIns="0" bIns="0" rtlCol="0" anchor="ctr"/>
+          <a:lstStyle/>
+          <a:p>
+            <a:pPr algn="ctr" indent="0" marL="0">
+              <a:buNone/>
+            </a:pPr>
+            <a:r>
+              <a:rPr lang="en-US" sz="950" dirty="0">
+                <a:solidFill>
+                  <a:srgbClr val="2B3A42"/>
+                </a:solidFill>
+                <a:latin typeface="Malgun Gothic" pitchFamily="34" charset="0"/>
+                <a:ea typeface="Malgun Gothic" pitchFamily="34" charset="-122"/>
+                <a:cs typeface="Malgun Gothic" pitchFamily="34" charset="-120"/>
+              </a:rPr>
+              <a:t>미래</a:t>
+            </a:r>
+            <a:endParaRPr lang="en-US" sz="950" dirty="0"/>
+          </a:p>
+        </p:txBody>
+      </p:sp>
+      <p:sp>
+        <p:nvSpPr>
+          <p:cNvPr id="28" name="Text 26"/>
+          <p:cNvSpPr/>
+          <p:nvPr/>
+        </p:nvSpPr>
+        <p:spPr>
+          <a:xfrm>
+            <a:off x="4754880" y="4498848"/>
+            <a:ext cx="3931920" cy="457200"/>
+          </a:xfrm>
+          <a:prstGeom prst="rect">
+            <a:avLst/>
+          </a:prstGeom>
+          <a:noFill/>
+          <a:ln/>
+        </p:spPr>
+        <p:txBody>
+          <a:bodyPr wrap="square" lIns="0" tIns="0" rIns="0" bIns="0" rtlCol="0" anchor="t"/>
+          <a:lstStyle/>
+          <a:p>
+            <a:pPr indent="0" marL="0">
+              <a:buNone/>
+            </a:pPr>
+            <a:r>
+              <a:rPr lang="en-US" sz="950" i="1" dirty="0">
+                <a:solidFill>
+                  <a:srgbClr val="6B7A85"/>
+                </a:solidFill>
+                <a:latin typeface="Malgun Gothic" pitchFamily="34" charset="0"/>
+                <a:ea typeface="Malgun Gothic" pitchFamily="34" charset="-122"/>
+                <a:cs typeface="Malgun Gothic" pitchFamily="34" charset="-120"/>
+              </a:rPr>
+              <a:t>실시간 요청은 now 이후 어느 시점에도 발생 가능 — 근미래 건은 즉시 처리 압박</a:t>
+            </a:r>
+            <a:endParaRPr lang="en-US" sz="950" dirty="0"/>
+          </a:p>
+        </p:txBody>
+      </p:sp>
+    </p:spTree>
+  </p:cSld>
+  <p:clrMapOvr>
+    <a:masterClrMapping/>
+  </p:clrMapOvr>
+</p:sld>
+</file>
+
+<file path=ppt/slides/slide18.xml><?xml version="1.0" encoding="utf-8"?>
+<p:sld xmlns:a="http://schemas.openxmlformats.org/drawingml/2006/main" xmlns:r="http://schemas.openxmlformats.org/officeDocument/2006/relationships" xmlns:p="http://schemas.openxmlformats.org/presentationml/2006/main">
+  <p:cSld name="Slide 18">
+    <p:bg>
+      <p:bgPr>
+        <a:solidFill>
+          <a:srgbClr val="FFFFFF"/>
+        </a:solidFill>
+      </p:bgPr>
+    </p:bg>
+    <p:spTree>
+      <p:nvGrpSpPr>
+        <p:cNvPr id="1" name=""/>
+        <p:cNvGrpSpPr/>
+        <p:nvPr/>
+      </p:nvGrpSpPr>
+      <p:grpSpPr>
+        <a:xfrm>
+          <a:off x="0" y="0"/>
+          <a:ext cx="0" cy="0"/>
+          <a:chOff x="0" y="0"/>
+          <a:chExt cx="0" cy="0"/>
+        </a:xfrm>
+      </p:grpSpPr>
+      <p:sp>
+        <p:nvSpPr>
+          <p:cNvPr id="2" name="Text 0"/>
+          <p:cNvSpPr/>
+          <p:nvPr/>
+        </p:nvSpPr>
+        <p:spPr>
+          <a:xfrm>
+            <a:off x="457200" y="292608"/>
+            <a:ext cx="8229600" cy="274320"/>
+          </a:xfrm>
+          <a:prstGeom prst="rect">
+            <a:avLst/>
+          </a:prstGeom>
+          <a:noFill/>
+          <a:ln/>
+        </p:spPr>
+        <p:txBody>
+          <a:bodyPr wrap="square" lIns="0" tIns="0" rIns="0" bIns="0" rtlCol="0" anchor="ctr"/>
+          <a:lstStyle/>
+          <a:p>
+            <a:pPr indent="0" marL="0">
+              <a:buNone/>
+            </a:pPr>
+            <a:r>
+              <a:rPr lang="en-US" sz="1100" b="1" spc="200" kern="0" dirty="0">
+                <a:solidFill>
+                  <a:srgbClr val="028090"/>
+                </a:solidFill>
+                <a:latin typeface="Malgun Gothic" pitchFamily="34" charset="0"/>
+                <a:ea typeface="Malgun Gothic" pitchFamily="34" charset="-122"/>
+                <a:cs typeface="Malgun Gothic" pitchFamily="34" charset="-120"/>
+              </a:rPr>
+              <a:t>ROADMAP · NEXT</a:t>
+            </a:r>
+            <a:endParaRPr lang="en-US" sz="1100" dirty="0"/>
+          </a:p>
+        </p:txBody>
+      </p:sp>
+      <p:sp>
+        <p:nvSpPr>
+          <p:cNvPr id="3" name="Text 1"/>
+          <p:cNvSpPr/>
+          <p:nvPr/>
+        </p:nvSpPr>
+        <p:spPr>
+          <a:xfrm>
+            <a:off x="457200" y="530352"/>
+            <a:ext cx="8229600" cy="548640"/>
+          </a:xfrm>
+          <a:prstGeom prst="rect">
+            <a:avLst/>
+          </a:prstGeom>
+          <a:noFill/>
+          <a:ln/>
+        </p:spPr>
+        <p:txBody>
+          <a:bodyPr wrap="square" lIns="0" tIns="0" rIns="0" bIns="0" rtlCol="0" anchor="ctr"/>
+          <a:lstStyle/>
+          <a:p>
+            <a:pPr indent="0" marL="0">
+              <a:buNone/>
+            </a:pPr>
+            <a:r>
+              <a:rPr lang="en-US" sz="2700" b="1" dirty="0">
+                <a:solidFill>
+                  <a:srgbClr val="2B3A42"/>
+                </a:solidFill>
+                <a:latin typeface="Malgun Gothic" pitchFamily="34" charset="0"/>
+                <a:ea typeface="Malgun Gothic" pitchFamily="34" charset="-122"/>
+                <a:cs typeface="Malgun Gothic" pitchFamily="34" charset="-120"/>
+              </a:rPr>
+              <a:t>향후 ② 긴급 처리 판정 · 입·출고 요청 데이터 탭</a:t>
+            </a:r>
+            <a:endParaRPr lang="en-US" sz="2700" dirty="0"/>
+          </a:p>
+        </p:txBody>
+      </p:sp>
+      <p:sp>
+        <p:nvSpPr>
+          <p:cNvPr id="4" name="Shape 2"/>
+          <p:cNvSpPr/>
+          <p:nvPr/>
+        </p:nvSpPr>
+        <p:spPr>
+          <a:xfrm>
+            <a:off x="457200" y="1417320"/>
+            <a:ext cx="4114800" cy="1572768"/>
+          </a:xfrm>
+          <a:prstGeom prst="roundRect">
+            <a:avLst>
+              <a:gd name="adj" fmla="val 4070"/>
+            </a:avLst>
+          </a:prstGeom>
+          <a:solidFill>
+            <a:srgbClr val="F4F6F7"/>
+          </a:solidFill>
+          <a:ln/>
+          <a:effectLst>
+            <a:outerShdw sx="100000" sy="100000" kx="0" ky="0" algn="bl" rotWithShape="0" blurRad="63500" dist="25400" dir="2700000">
+              <a:srgbClr val="000000">
+                <a:alpha val="10000"/>
+              </a:srgbClr>
+            </a:outerShdw>
+          </a:effectLst>
+        </p:spPr>
+      </p:sp>
+      <p:sp>
+        <p:nvSpPr>
+          <p:cNvPr id="5" name="Text 3"/>
+          <p:cNvSpPr/>
+          <p:nvPr/>
+        </p:nvSpPr>
+        <p:spPr>
+          <a:xfrm>
+            <a:off x="640080" y="1545336"/>
+            <a:ext cx="3749040" cy="292608"/>
+          </a:xfrm>
+          <a:prstGeom prst="rect">
+            <a:avLst/>
+          </a:prstGeom>
+          <a:noFill/>
+          <a:ln/>
+        </p:spPr>
+        <p:txBody>
+          <a:bodyPr wrap="square" lIns="0" tIns="0" rIns="0" bIns="0" rtlCol="0" anchor="ctr"/>
+          <a:lstStyle/>
+          <a:p>
+            <a:pPr indent="0" marL="0">
+              <a:buNone/>
+            </a:pPr>
+            <a:r>
               <a:rPr lang="en-US" sz="1250" b="1" dirty="0">
                 <a:solidFill>
                   <a:srgbClr val="2B3A42"/>
@@ -9785,7 +10628,7 @@
                 <a:ea typeface="Malgun Gothic" pitchFamily="34" charset="-122"/>
                 <a:cs typeface="Malgun Gothic" pitchFamily="34" charset="-120"/>
               </a:rPr>
-              <a:t>UI 탭 구성 (신규 탭 추가)</a:t>
+              <a:t>긴급여부 판정</a:t>
             </a:r>
             <a:endParaRPr lang="en-US" sz="1250" dirty="0"/>
           </a:p>
@@ -9793,14 +10636,14 @@
       </p:sp>
       <p:sp>
         <p:nvSpPr>
-          <p:cNvPr id="12" name="Text 10"/>
-          <p:cNvSpPr/>
-          <p:nvPr/>
-        </p:nvSpPr>
-        <p:spPr>
-          <a:xfrm>
-            <a:off x="4892040" y="1892808"/>
-            <a:ext cx="3611880" cy="539496"/>
+          <p:cNvPr id="6" name="Text 4"/>
+          <p:cNvSpPr/>
+          <p:nvPr/>
+        </p:nvSpPr>
+        <p:spPr>
+          <a:xfrm>
+            <a:off x="640080" y="1892808"/>
+            <a:ext cx="3749040" cy="969264"/>
           </a:xfrm>
           <a:prstGeom prst="rect">
             <a:avLst/>
@@ -9827,7 +10670,7 @@
                 <a:ea typeface="Malgun Gothic" pitchFamily="34" charset="-122"/>
                 <a:cs typeface="Malgun Gothic" pitchFamily="34" charset="-120"/>
               </a:rPr>
-              <a:t>현재: Agent Chat · KPI · Simulation · Approval</a:t>
+              <a:t>· 정의: now 기준 오늘(영업일) 내 처리해야 하면 긴급</a:t>
             </a:r>
             <a:endParaRPr lang="en-US" sz="1020" dirty="0"/>
           </a:p>
@@ -9847,6 +10690,326 @@
                 <a:ea typeface="Malgun Gothic" pitchFamily="34" charset="-122"/>
                 <a:cs typeface="Malgun Gothic" pitchFamily="34" charset="-120"/>
               </a:rPr>
+              <a:t>· 판정: due_datetime ≤ 오늘 마감(EOD) → urgent = true</a:t>
+            </a:r>
+            <a:endParaRPr lang="en-US" sz="1020" dirty="0"/>
+          </a:p>
+          <a:p>
+            <a:pPr indent="0" marL="0">
+              <a:lnSpc>
+                <a:spcPct val="105000"/>
+              </a:lnSpc>
+              <a:buNone/>
+            </a:pPr>
+            <a:r>
+              <a:rPr lang="en-US" sz="1020" dirty="0">
+                <a:solidFill>
+                  <a:srgbClr val="6B7A85"/>
+                </a:solidFill>
+                <a:latin typeface="Malgun Gothic" pitchFamily="34" charset="0"/>
+                <a:ea typeface="Malgun Gothic" pitchFamily="34" charset="-122"/>
+                <a:cs typeface="Malgun Gothic" pitchFamily="34" charset="-120"/>
+              </a:rPr>
+              <a:t>· 연계: 피킹 우선순위(deadline_urgency)·DES 부하에 즉시 반영</a:t>
+            </a:r>
+            <a:endParaRPr lang="en-US" sz="1020" dirty="0"/>
+          </a:p>
+        </p:txBody>
+      </p:sp>
+      <p:sp>
+        <p:nvSpPr>
+          <p:cNvPr id="7" name="Shape 5"/>
+          <p:cNvSpPr/>
+          <p:nvPr/>
+        </p:nvSpPr>
+        <p:spPr>
+          <a:xfrm>
+            <a:off x="457200" y="3127248"/>
+            <a:ext cx="4114800" cy="1627632"/>
+          </a:xfrm>
+          <a:prstGeom prst="roundRect">
+            <a:avLst>
+              <a:gd name="adj" fmla="val 3933"/>
+            </a:avLst>
+          </a:prstGeom>
+          <a:solidFill>
+            <a:srgbClr val="EDF5F6"/>
+          </a:solidFill>
+          <a:ln/>
+          <a:effectLst>
+            <a:outerShdw sx="100000" sy="100000" kx="0" ky="0" algn="bl" rotWithShape="0" blurRad="63500" dist="25400" dir="2700000">
+              <a:srgbClr val="000000">
+                <a:alpha val="10000"/>
+              </a:srgbClr>
+            </a:outerShdw>
+          </a:effectLst>
+        </p:spPr>
+      </p:sp>
+      <p:sp>
+        <p:nvSpPr>
+          <p:cNvPr id="8" name="Text 6"/>
+          <p:cNvSpPr/>
+          <p:nvPr/>
+        </p:nvSpPr>
+        <p:spPr>
+          <a:xfrm>
+            <a:off x="640080" y="3255264"/>
+            <a:ext cx="3749040" cy="292608"/>
+          </a:xfrm>
+          <a:prstGeom prst="rect">
+            <a:avLst/>
+          </a:prstGeom>
+          <a:noFill/>
+          <a:ln/>
+        </p:spPr>
+        <p:txBody>
+          <a:bodyPr wrap="square" lIns="0" tIns="0" rIns="0" bIns="0" rtlCol="0" anchor="ctr"/>
+          <a:lstStyle/>
+          <a:p>
+            <a:pPr indent="0" marL="0">
+              <a:buNone/>
+            </a:pPr>
+            <a:r>
+              <a:rPr lang="en-US" sz="1250" b="1" dirty="0">
+                <a:solidFill>
+                  <a:srgbClr val="2B3A42"/>
+                </a:solidFill>
+                <a:latin typeface="Malgun Gothic" pitchFamily="34" charset="0"/>
+                <a:ea typeface="Malgun Gothic" pitchFamily="34" charset="-122"/>
+                <a:cs typeface="Malgun Gothic" pitchFamily="34" charset="-120"/>
+              </a:rPr>
+              <a:t>데이터 모델 변경</a:t>
+            </a:r>
+            <a:endParaRPr lang="en-US" sz="1250" dirty="0"/>
+          </a:p>
+        </p:txBody>
+      </p:sp>
+      <p:sp>
+        <p:nvSpPr>
+          <p:cNvPr id="9" name="Text 7"/>
+          <p:cNvSpPr/>
+          <p:nvPr/>
+        </p:nvSpPr>
+        <p:spPr>
+          <a:xfrm>
+            <a:off x="640080" y="3602736"/>
+            <a:ext cx="3749040" cy="1024128"/>
+          </a:xfrm>
+          <a:prstGeom prst="rect">
+            <a:avLst/>
+          </a:prstGeom>
+          <a:noFill/>
+          <a:ln/>
+        </p:spPr>
+        <p:txBody>
+          <a:bodyPr wrap="square" lIns="0" tIns="0" rIns="0" bIns="0" rtlCol="0" anchor="t"/>
+          <a:lstStyle/>
+          <a:p>
+            <a:pPr indent="0" marL="0">
+              <a:lnSpc>
+                <a:spcPct val="105000"/>
+              </a:lnSpc>
+              <a:buNone/>
+            </a:pPr>
+            <a:r>
+              <a:rPr lang="en-US" sz="1020" dirty="0">
+                <a:solidFill>
+                  <a:srgbClr val="6B7A85"/>
+                </a:solidFill>
+                <a:latin typeface="Malgun Gothic" pitchFamily="34" charset="0"/>
+                <a:ea typeface="Malgun Gothic" pitchFamily="34" charset="-122"/>
+                <a:cs typeface="Malgun Gothic" pitchFamily="34" charset="-120"/>
+              </a:rPr>
+              <a:t>· inbound_orders / outbound_orders에</a:t>
+            </a:r>
+            <a:endParaRPr lang="en-US" sz="1020" dirty="0"/>
+          </a:p>
+          <a:p>
+            <a:pPr indent="0" marL="0">
+              <a:lnSpc>
+                <a:spcPct val="105000"/>
+              </a:lnSpc>
+              <a:buNone/>
+            </a:pPr>
+            <a:r>
+              <a:rPr lang="en-US" sz="1020" dirty="0">
+                <a:solidFill>
+                  <a:srgbClr val="6B7A85"/>
+                </a:solidFill>
+                <a:latin typeface="Malgun Gothic" pitchFamily="34" charset="0"/>
+                <a:ea typeface="Malgun Gothic" pitchFamily="34" charset="-122"/>
+                <a:cs typeface="Malgun Gothic" pitchFamily="34" charset="-120"/>
+              </a:rPr>
+              <a:t>   urgent 파생 컬럼(또는 뷰) 추가</a:t>
+            </a:r>
+            <a:endParaRPr lang="en-US" sz="1020" dirty="0"/>
+          </a:p>
+          <a:p>
+            <a:pPr indent="0" marL="0">
+              <a:lnSpc>
+                <a:spcPct val="105000"/>
+              </a:lnSpc>
+              <a:buNone/>
+            </a:pPr>
+            <a:r>
+              <a:rPr lang="en-US" sz="1020" dirty="0">
+                <a:solidFill>
+                  <a:srgbClr val="6B7A85"/>
+                </a:solidFill>
+                <a:latin typeface="Malgun Gothic" pitchFamily="34" charset="0"/>
+                <a:ea typeface="Malgun Gothic" pitchFamily="34" charset="-122"/>
+                <a:cs typeface="Malgun Gothic" pitchFamily="34" charset="-120"/>
+              </a:rPr>
+              <a:t>· 실시간 생성 요청은 row append (source=REALTIME)</a:t>
+            </a:r>
+            <a:endParaRPr lang="en-US" sz="1020" dirty="0"/>
+          </a:p>
+          <a:p>
+            <a:pPr indent="0" marL="0">
+              <a:lnSpc>
+                <a:spcPct val="105000"/>
+              </a:lnSpc>
+              <a:buNone/>
+            </a:pPr>
+            <a:r>
+              <a:rPr lang="en-US" sz="1020" dirty="0">
+                <a:solidFill>
+                  <a:srgbClr val="6B7A85"/>
+                </a:solidFill>
+                <a:latin typeface="Malgun Gothic" pitchFamily="34" charset="0"/>
+                <a:ea typeface="Malgun Gothic" pitchFamily="34" charset="-122"/>
+                <a:cs typeface="Malgun Gothic" pitchFamily="34" charset="-120"/>
+              </a:rPr>
+              <a:t>· 신규 탭: 입·출고 요청 데이터</a:t>
+            </a:r>
+            <a:endParaRPr lang="en-US" sz="1020" dirty="0"/>
+          </a:p>
+        </p:txBody>
+      </p:sp>
+      <p:sp>
+        <p:nvSpPr>
+          <p:cNvPr id="10" name="Shape 8"/>
+          <p:cNvSpPr/>
+          <p:nvPr/>
+        </p:nvSpPr>
+        <p:spPr>
+          <a:xfrm>
+            <a:off x="4709160" y="1417320"/>
+            <a:ext cx="3977640" cy="1143000"/>
+          </a:xfrm>
+          <a:prstGeom prst="roundRect">
+            <a:avLst>
+              <a:gd name="adj" fmla="val 5600"/>
+            </a:avLst>
+          </a:prstGeom>
+          <a:solidFill>
+            <a:srgbClr val="F4F6F7"/>
+          </a:solidFill>
+          <a:ln/>
+          <a:effectLst>
+            <a:outerShdw sx="100000" sy="100000" kx="0" ky="0" algn="bl" rotWithShape="0" blurRad="63500" dist="25400" dir="2700000">
+              <a:srgbClr val="000000">
+                <a:alpha val="10000"/>
+              </a:srgbClr>
+            </a:outerShdw>
+          </a:effectLst>
+        </p:spPr>
+      </p:sp>
+      <p:sp>
+        <p:nvSpPr>
+          <p:cNvPr id="11" name="Text 9"/>
+          <p:cNvSpPr/>
+          <p:nvPr/>
+        </p:nvSpPr>
+        <p:spPr>
+          <a:xfrm>
+            <a:off x="4892040" y="1545336"/>
+            <a:ext cx="3611880" cy="292608"/>
+          </a:xfrm>
+          <a:prstGeom prst="rect">
+            <a:avLst/>
+          </a:prstGeom>
+          <a:noFill/>
+          <a:ln/>
+        </p:spPr>
+        <p:txBody>
+          <a:bodyPr wrap="square" lIns="0" tIns="0" rIns="0" bIns="0" rtlCol="0" anchor="ctr"/>
+          <a:lstStyle/>
+          <a:p>
+            <a:pPr indent="0" marL="0">
+              <a:buNone/>
+            </a:pPr>
+            <a:r>
+              <a:rPr lang="en-US" sz="1250" b="1" dirty="0">
+                <a:solidFill>
+                  <a:srgbClr val="2B3A42"/>
+                </a:solidFill>
+                <a:latin typeface="Malgun Gothic" pitchFamily="34" charset="0"/>
+                <a:ea typeface="Malgun Gothic" pitchFamily="34" charset="-122"/>
+                <a:cs typeface="Malgun Gothic" pitchFamily="34" charset="-120"/>
+              </a:rPr>
+              <a:t>UI 탭 구성 (신규 탭 추가)</a:t>
+            </a:r>
+            <a:endParaRPr lang="en-US" sz="1250" dirty="0"/>
+          </a:p>
+        </p:txBody>
+      </p:sp>
+      <p:sp>
+        <p:nvSpPr>
+          <p:cNvPr id="12" name="Text 10"/>
+          <p:cNvSpPr/>
+          <p:nvPr/>
+        </p:nvSpPr>
+        <p:spPr>
+          <a:xfrm>
+            <a:off x="4892040" y="1892808"/>
+            <a:ext cx="3611880" cy="539496"/>
+          </a:xfrm>
+          <a:prstGeom prst="rect">
+            <a:avLst/>
+          </a:prstGeom>
+          <a:noFill/>
+          <a:ln/>
+        </p:spPr>
+        <p:txBody>
+          <a:bodyPr wrap="square" lIns="0" tIns="0" rIns="0" bIns="0" rtlCol="0" anchor="t"/>
+          <a:lstStyle/>
+          <a:p>
+            <a:pPr indent="0" marL="0">
+              <a:lnSpc>
+                <a:spcPct val="105000"/>
+              </a:lnSpc>
+              <a:buNone/>
+            </a:pPr>
+            <a:r>
+              <a:rPr lang="en-US" sz="1020" dirty="0">
+                <a:solidFill>
+                  <a:srgbClr val="6B7A85"/>
+                </a:solidFill>
+                <a:latin typeface="Malgun Gothic" pitchFamily="34" charset="0"/>
+                <a:ea typeface="Malgun Gothic" pitchFamily="34" charset="-122"/>
+                <a:cs typeface="Malgun Gothic" pitchFamily="34" charset="-120"/>
+              </a:rPr>
+              <a:t>현재: Agent Chat · KPI · Simulation · Approval</a:t>
+            </a:r>
+            <a:endParaRPr lang="en-US" sz="1020" dirty="0"/>
+          </a:p>
+          <a:p>
+            <a:pPr indent="0" marL="0">
+              <a:lnSpc>
+                <a:spcPct val="105000"/>
+              </a:lnSpc>
+              <a:buNone/>
+            </a:pPr>
+            <a:r>
+              <a:rPr lang="en-US" sz="1020" dirty="0">
+                <a:solidFill>
+                  <a:srgbClr val="6B7A85"/>
+                </a:solidFill>
+                <a:latin typeface="Malgun Gothic" pitchFamily="34" charset="0"/>
+                <a:ea typeface="Malgun Gothic" pitchFamily="34" charset="-122"/>
+                <a:cs typeface="Malgun Gothic" pitchFamily="34" charset="-120"/>
+              </a:rPr>
               <a:t>추가: ★ 입·출고 요청 데이터 (실시간 요청·긴급 표시)</a:t>
             </a:r>
             <a:endParaRPr lang="en-US" sz="1020" dirty="0"/>
@@ -9894,7 +11057,7 @@
       </p:sp>
       <p:graphicFrame>
         <p:nvGraphicFramePr>
-          <p:cNvPr id="18" name="Table 0"/>
+          <p:cNvPr id="19" name="Table 0"/>
           <p:cNvGraphicFramePr>
             <a:graphicFrameLocks noGrp="1"/>
           </p:cNvGraphicFramePr>

--- a/Smart_WMS_Agent_기획요약.pptx
+++ b/Smart_WMS_Agent_기획요약.pptx
@@ -23,13 +23,15 @@
     <p:sldId id="271" r:id="rId17"/>
     <p:sldId id="272" r:id="rId18"/>
     <p:sldId id="273" r:id="rId19"/>
-    <p:sldId id="274" r:id="rId25"/>
-    <p:sldId id="275" r:id="rId26"/>
-    <p:sldId id="276" r:id="rId27"/>
-    <p:sldId id="277" r:id="rId28"/>
+    <p:sldId id="274" r:id="rId20"/>
+    <p:sldId id="275" r:id="rId21"/>
+    <p:sldId id="276" r:id="rId22"/>
+    <p:sldId id="277" r:id="rId23"/>
+    <p:sldId id="278" r:id="rId24"/>
+    <p:sldId id="279" r:id="rId25"/>
   </p:sldIdLst>
   <p:notesMasterIdLst>
-    <p:notesMasterId r:id="rId20"/>
+    <p:notesMasterId r:id="rId26"/>
   </p:notesMasterIdLst>
   <p:sldSz cx="9144000" cy="5143500"/>
   <p:notesSz cx="5143500" cy="9144000"/>
@@ -1357,6 +1359,94 @@
 </p:notes>
 </file>
 
+<file path=ppt/notesSlides/notesSlide19.xml><?xml version="1.0" encoding="utf-8"?>
+<p:notes xmlns:a="http://schemas.openxmlformats.org/drawingml/2006/main" xmlns:r="http://schemas.openxmlformats.org/officeDocument/2006/relationships" xmlns:p="http://schemas.openxmlformats.org/presentationml/2006/main">
+  <p:cSld>
+    <p:spTree>
+      <p:nvGrpSpPr>
+        <p:cNvPr id="1" name=""/>
+        <p:cNvGrpSpPr/>
+        <p:nvPr/>
+      </p:nvGrpSpPr>
+      <p:grpSpPr>
+        <a:xfrm>
+          <a:off x="0" y="0"/>
+          <a:ext cx="0" cy="0"/>
+          <a:chOff x="0" y="0"/>
+          <a:chExt cx="0" cy="0"/>
+        </a:xfrm>
+      </p:grpSpPr>
+      <p:sp>
+        <p:nvSpPr>
+          <p:cNvPr id="2" name="Slide Image Placeholder 1"/>
+          <p:cNvSpPr>
+            <a:spLocks noGrp="1" noRot="1" noChangeAspect="1"/>
+          </p:cNvSpPr>
+          <p:nvPr>
+            <p:ph type="sldImg"/>
+          </p:nvPr>
+        </p:nvSpPr>
+        <p:spPr/>
+      </p:sp>
+      <p:sp>
+        <p:nvSpPr>
+          <p:cNvPr id="3" name="Notes Placeholder 2"/>
+          <p:cNvSpPr>
+            <a:spLocks noGrp="1"/>
+          </p:cNvSpPr>
+          <p:nvPr>
+            <p:ph type="body" idx="1"/>
+          </p:nvPr>
+        </p:nvSpPr>
+        <p:spPr/>
+        <p:txBody>
+          <a:bodyPr/>
+          <a:lstStyle/>
+          <a:p>
+            <a:r>
+              <a:rPr lang="en-US" dirty="0"/>
+              <a:t/>
+            </a:r>
+            <a:endParaRPr lang="en-US" dirty="0"/>
+          </a:p>
+        </p:txBody>
+      </p:sp>
+      <p:sp>
+        <p:nvSpPr>
+          <p:cNvPr id="4" name="Slide Number Placeholder 3"/>
+          <p:cNvSpPr>
+            <a:spLocks noGrp="1"/>
+          </p:cNvSpPr>
+          <p:nvPr>
+            <p:ph type="sldNum" sz="quarter" idx="10"/>
+          </p:nvPr>
+        </p:nvSpPr>
+        <p:spPr/>
+        <p:txBody>
+          <a:bodyPr/>
+          <a:lstStyle/>
+          <a:p>
+            <a:fld id="{F7021451-1387-4CA6-816F-3879F97B5CBC}" type="slidenum">
+              <a:rPr lang="en-US"/>
+              <a:t>19</a:t>
+            </a:fld>
+            <a:endParaRPr lang="en-US"/>
+          </a:p>
+        </p:txBody>
+      </p:sp>
+    </p:spTree>
+    <p:extLst>
+      <p:ext uri="{BB962C8B-B14F-4D97-AF65-F5344CB8AC3E}">
+        <p14:creationId xmlns:p14="http://schemas.microsoft.com/office/powerpoint/2010/main" val="1024086991"/>
+      </p:ext>
+    </p:extLst>
+  </p:cSld>
+  <p:clrMapOvr>
+    <a:masterClrMapping/>
+  </p:clrMapOvr>
+</p:notes>
+</file>
+
 <file path=ppt/notesSlides/notesSlide2.xml><?xml version="1.0" encoding="utf-8"?>
 <p:notes xmlns:a="http://schemas.openxmlformats.org/drawingml/2006/main" xmlns:r="http://schemas.openxmlformats.org/officeDocument/2006/relationships" xmlns:p="http://schemas.openxmlformats.org/presentationml/2006/main">
   <p:cSld>
@@ -1427,6 +1517,446 @@
             <a:fld id="{F7021451-1387-4CA6-816F-3879F97B5CBC}" type="slidenum">
               <a:rPr lang="en-US"/>
               <a:t>2</a:t>
+            </a:fld>
+            <a:endParaRPr lang="en-US"/>
+          </a:p>
+        </p:txBody>
+      </p:sp>
+    </p:spTree>
+    <p:extLst>
+      <p:ext uri="{BB962C8B-B14F-4D97-AF65-F5344CB8AC3E}">
+        <p14:creationId xmlns:p14="http://schemas.microsoft.com/office/powerpoint/2010/main" val="1024086991"/>
+      </p:ext>
+    </p:extLst>
+  </p:cSld>
+  <p:clrMapOvr>
+    <a:masterClrMapping/>
+  </p:clrMapOvr>
+</p:notes>
+</file>
+
+<file path=ppt/notesSlides/notesSlide20.xml><?xml version="1.0" encoding="utf-8"?>
+<p:notes xmlns:a="http://schemas.openxmlformats.org/drawingml/2006/main" xmlns:r="http://schemas.openxmlformats.org/officeDocument/2006/relationships" xmlns:p="http://schemas.openxmlformats.org/presentationml/2006/main">
+  <p:cSld>
+    <p:spTree>
+      <p:nvGrpSpPr>
+        <p:cNvPr id="1" name=""/>
+        <p:cNvGrpSpPr/>
+        <p:nvPr/>
+      </p:nvGrpSpPr>
+      <p:grpSpPr>
+        <a:xfrm>
+          <a:off x="0" y="0"/>
+          <a:ext cx="0" cy="0"/>
+          <a:chOff x="0" y="0"/>
+          <a:chExt cx="0" cy="0"/>
+        </a:xfrm>
+      </p:grpSpPr>
+      <p:sp>
+        <p:nvSpPr>
+          <p:cNvPr id="2" name="Slide Image Placeholder 1"/>
+          <p:cNvSpPr>
+            <a:spLocks noGrp="1" noRot="1" noChangeAspect="1"/>
+          </p:cNvSpPr>
+          <p:nvPr>
+            <p:ph type="sldImg"/>
+          </p:nvPr>
+        </p:nvSpPr>
+        <p:spPr/>
+      </p:sp>
+      <p:sp>
+        <p:nvSpPr>
+          <p:cNvPr id="3" name="Notes Placeholder 2"/>
+          <p:cNvSpPr>
+            <a:spLocks noGrp="1"/>
+          </p:cNvSpPr>
+          <p:nvPr>
+            <p:ph type="body" idx="1"/>
+          </p:nvPr>
+        </p:nvSpPr>
+        <p:spPr/>
+        <p:txBody>
+          <a:bodyPr/>
+          <a:lstStyle/>
+          <a:p>
+            <a:r>
+              <a:rPr lang="en-US" dirty="0"/>
+              <a:t/>
+            </a:r>
+            <a:endParaRPr lang="en-US" dirty="0"/>
+          </a:p>
+        </p:txBody>
+      </p:sp>
+      <p:sp>
+        <p:nvSpPr>
+          <p:cNvPr id="4" name="Slide Number Placeholder 3"/>
+          <p:cNvSpPr>
+            <a:spLocks noGrp="1"/>
+          </p:cNvSpPr>
+          <p:nvPr>
+            <p:ph type="sldNum" sz="quarter" idx="10"/>
+          </p:nvPr>
+        </p:nvSpPr>
+        <p:spPr/>
+        <p:txBody>
+          <a:bodyPr/>
+          <a:lstStyle/>
+          <a:p>
+            <a:fld id="{F7021451-1387-4CA6-816F-3879F97B5CBC}" type="slidenum">
+              <a:rPr lang="en-US"/>
+              <a:t>20</a:t>
+            </a:fld>
+            <a:endParaRPr lang="en-US"/>
+          </a:p>
+        </p:txBody>
+      </p:sp>
+    </p:spTree>
+    <p:extLst>
+      <p:ext uri="{BB962C8B-B14F-4D97-AF65-F5344CB8AC3E}">
+        <p14:creationId xmlns:p14="http://schemas.microsoft.com/office/powerpoint/2010/main" val="1024086991"/>
+      </p:ext>
+    </p:extLst>
+  </p:cSld>
+  <p:clrMapOvr>
+    <a:masterClrMapping/>
+  </p:clrMapOvr>
+</p:notes>
+</file>
+
+<file path=ppt/notesSlides/notesSlide21.xml><?xml version="1.0" encoding="utf-8"?>
+<p:notes xmlns:a="http://schemas.openxmlformats.org/drawingml/2006/main" xmlns:r="http://schemas.openxmlformats.org/officeDocument/2006/relationships" xmlns:p="http://schemas.openxmlformats.org/presentationml/2006/main">
+  <p:cSld>
+    <p:spTree>
+      <p:nvGrpSpPr>
+        <p:cNvPr id="1" name=""/>
+        <p:cNvGrpSpPr/>
+        <p:nvPr/>
+      </p:nvGrpSpPr>
+      <p:grpSpPr>
+        <a:xfrm>
+          <a:off x="0" y="0"/>
+          <a:ext cx="0" cy="0"/>
+          <a:chOff x="0" y="0"/>
+          <a:chExt cx="0" cy="0"/>
+        </a:xfrm>
+      </p:grpSpPr>
+      <p:sp>
+        <p:nvSpPr>
+          <p:cNvPr id="2" name="Slide Image Placeholder 1"/>
+          <p:cNvSpPr>
+            <a:spLocks noGrp="1" noRot="1" noChangeAspect="1"/>
+          </p:cNvSpPr>
+          <p:nvPr>
+            <p:ph type="sldImg"/>
+          </p:nvPr>
+        </p:nvSpPr>
+        <p:spPr/>
+      </p:sp>
+      <p:sp>
+        <p:nvSpPr>
+          <p:cNvPr id="3" name="Notes Placeholder 2"/>
+          <p:cNvSpPr>
+            <a:spLocks noGrp="1"/>
+          </p:cNvSpPr>
+          <p:nvPr>
+            <p:ph type="body" idx="1"/>
+          </p:nvPr>
+        </p:nvSpPr>
+        <p:spPr/>
+        <p:txBody>
+          <a:bodyPr/>
+          <a:lstStyle/>
+          <a:p>
+            <a:r>
+              <a:rPr lang="en-US" dirty="0"/>
+              <a:t/>
+            </a:r>
+            <a:endParaRPr lang="en-US" dirty="0"/>
+          </a:p>
+        </p:txBody>
+      </p:sp>
+      <p:sp>
+        <p:nvSpPr>
+          <p:cNvPr id="4" name="Slide Number Placeholder 3"/>
+          <p:cNvSpPr>
+            <a:spLocks noGrp="1"/>
+          </p:cNvSpPr>
+          <p:nvPr>
+            <p:ph type="sldNum" sz="quarter" idx="10"/>
+          </p:nvPr>
+        </p:nvSpPr>
+        <p:spPr/>
+        <p:txBody>
+          <a:bodyPr/>
+          <a:lstStyle/>
+          <a:p>
+            <a:fld id="{F7021451-1387-4CA6-816F-3879F97B5CBC}" type="slidenum">
+              <a:rPr lang="en-US"/>
+              <a:t>21</a:t>
+            </a:fld>
+            <a:endParaRPr lang="en-US"/>
+          </a:p>
+        </p:txBody>
+      </p:sp>
+    </p:spTree>
+    <p:extLst>
+      <p:ext uri="{BB962C8B-B14F-4D97-AF65-F5344CB8AC3E}">
+        <p14:creationId xmlns:p14="http://schemas.microsoft.com/office/powerpoint/2010/main" val="1024086991"/>
+      </p:ext>
+    </p:extLst>
+  </p:cSld>
+  <p:clrMapOvr>
+    <a:masterClrMapping/>
+  </p:clrMapOvr>
+</p:notes>
+</file>
+
+<file path=ppt/notesSlides/notesSlide22.xml><?xml version="1.0" encoding="utf-8"?>
+<p:notes xmlns:a="http://schemas.openxmlformats.org/drawingml/2006/main" xmlns:r="http://schemas.openxmlformats.org/officeDocument/2006/relationships" xmlns:p="http://schemas.openxmlformats.org/presentationml/2006/main">
+  <p:cSld>
+    <p:spTree>
+      <p:nvGrpSpPr>
+        <p:cNvPr id="1" name=""/>
+        <p:cNvGrpSpPr/>
+        <p:nvPr/>
+      </p:nvGrpSpPr>
+      <p:grpSpPr>
+        <a:xfrm>
+          <a:off x="0" y="0"/>
+          <a:ext cx="0" cy="0"/>
+          <a:chOff x="0" y="0"/>
+          <a:chExt cx="0" cy="0"/>
+        </a:xfrm>
+      </p:grpSpPr>
+      <p:sp>
+        <p:nvSpPr>
+          <p:cNvPr id="2" name="Slide Image Placeholder 1"/>
+          <p:cNvSpPr>
+            <a:spLocks noGrp="1" noRot="1" noChangeAspect="1"/>
+          </p:cNvSpPr>
+          <p:nvPr>
+            <p:ph type="sldImg"/>
+          </p:nvPr>
+        </p:nvSpPr>
+        <p:spPr/>
+      </p:sp>
+      <p:sp>
+        <p:nvSpPr>
+          <p:cNvPr id="3" name="Notes Placeholder 2"/>
+          <p:cNvSpPr>
+            <a:spLocks noGrp="1"/>
+          </p:cNvSpPr>
+          <p:nvPr>
+            <p:ph type="body" idx="1"/>
+          </p:nvPr>
+        </p:nvSpPr>
+        <p:spPr/>
+        <p:txBody>
+          <a:bodyPr/>
+          <a:lstStyle/>
+          <a:p>
+            <a:r>
+              <a:rPr lang="en-US" dirty="0"/>
+              <a:t/>
+            </a:r>
+            <a:endParaRPr lang="en-US" dirty="0"/>
+          </a:p>
+        </p:txBody>
+      </p:sp>
+      <p:sp>
+        <p:nvSpPr>
+          <p:cNvPr id="4" name="Slide Number Placeholder 3"/>
+          <p:cNvSpPr>
+            <a:spLocks noGrp="1"/>
+          </p:cNvSpPr>
+          <p:nvPr>
+            <p:ph type="sldNum" sz="quarter" idx="10"/>
+          </p:nvPr>
+        </p:nvSpPr>
+        <p:spPr/>
+        <p:txBody>
+          <a:bodyPr/>
+          <a:lstStyle/>
+          <a:p>
+            <a:fld id="{F7021451-1387-4CA6-816F-3879F97B5CBC}" type="slidenum">
+              <a:rPr lang="en-US"/>
+              <a:t>22</a:t>
+            </a:fld>
+            <a:endParaRPr lang="en-US"/>
+          </a:p>
+        </p:txBody>
+      </p:sp>
+    </p:spTree>
+    <p:extLst>
+      <p:ext uri="{BB962C8B-B14F-4D97-AF65-F5344CB8AC3E}">
+        <p14:creationId xmlns:p14="http://schemas.microsoft.com/office/powerpoint/2010/main" val="1024086991"/>
+      </p:ext>
+    </p:extLst>
+  </p:cSld>
+  <p:clrMapOvr>
+    <a:masterClrMapping/>
+  </p:clrMapOvr>
+</p:notes>
+</file>
+
+<file path=ppt/notesSlides/notesSlide23.xml><?xml version="1.0" encoding="utf-8"?>
+<p:notes xmlns:a="http://schemas.openxmlformats.org/drawingml/2006/main" xmlns:r="http://schemas.openxmlformats.org/officeDocument/2006/relationships" xmlns:p="http://schemas.openxmlformats.org/presentationml/2006/main">
+  <p:cSld>
+    <p:spTree>
+      <p:nvGrpSpPr>
+        <p:cNvPr id="1" name=""/>
+        <p:cNvGrpSpPr/>
+        <p:nvPr/>
+      </p:nvGrpSpPr>
+      <p:grpSpPr>
+        <a:xfrm>
+          <a:off x="0" y="0"/>
+          <a:ext cx="0" cy="0"/>
+          <a:chOff x="0" y="0"/>
+          <a:chExt cx="0" cy="0"/>
+        </a:xfrm>
+      </p:grpSpPr>
+      <p:sp>
+        <p:nvSpPr>
+          <p:cNvPr id="2" name="Slide Image Placeholder 1"/>
+          <p:cNvSpPr>
+            <a:spLocks noGrp="1" noRot="1" noChangeAspect="1"/>
+          </p:cNvSpPr>
+          <p:nvPr>
+            <p:ph type="sldImg"/>
+          </p:nvPr>
+        </p:nvSpPr>
+        <p:spPr/>
+      </p:sp>
+      <p:sp>
+        <p:nvSpPr>
+          <p:cNvPr id="3" name="Notes Placeholder 2"/>
+          <p:cNvSpPr>
+            <a:spLocks noGrp="1"/>
+          </p:cNvSpPr>
+          <p:nvPr>
+            <p:ph type="body" idx="1"/>
+          </p:nvPr>
+        </p:nvSpPr>
+        <p:spPr/>
+        <p:txBody>
+          <a:bodyPr/>
+          <a:lstStyle/>
+          <a:p>
+            <a:r>
+              <a:rPr lang="en-US" dirty="0"/>
+              <a:t/>
+            </a:r>
+            <a:endParaRPr lang="en-US" dirty="0"/>
+          </a:p>
+        </p:txBody>
+      </p:sp>
+      <p:sp>
+        <p:nvSpPr>
+          <p:cNvPr id="4" name="Slide Number Placeholder 3"/>
+          <p:cNvSpPr>
+            <a:spLocks noGrp="1"/>
+          </p:cNvSpPr>
+          <p:nvPr>
+            <p:ph type="sldNum" sz="quarter" idx="10"/>
+          </p:nvPr>
+        </p:nvSpPr>
+        <p:spPr/>
+        <p:txBody>
+          <a:bodyPr/>
+          <a:lstStyle/>
+          <a:p>
+            <a:fld id="{F7021451-1387-4CA6-816F-3879F97B5CBC}" type="slidenum">
+              <a:rPr lang="en-US"/>
+              <a:t>23</a:t>
+            </a:fld>
+            <a:endParaRPr lang="en-US"/>
+          </a:p>
+        </p:txBody>
+      </p:sp>
+    </p:spTree>
+    <p:extLst>
+      <p:ext uri="{BB962C8B-B14F-4D97-AF65-F5344CB8AC3E}">
+        <p14:creationId xmlns:p14="http://schemas.microsoft.com/office/powerpoint/2010/main" val="1024086991"/>
+      </p:ext>
+    </p:extLst>
+  </p:cSld>
+  <p:clrMapOvr>
+    <a:masterClrMapping/>
+  </p:clrMapOvr>
+</p:notes>
+</file>
+
+<file path=ppt/notesSlides/notesSlide24.xml><?xml version="1.0" encoding="utf-8"?>
+<p:notes xmlns:a="http://schemas.openxmlformats.org/drawingml/2006/main" xmlns:r="http://schemas.openxmlformats.org/officeDocument/2006/relationships" xmlns:p="http://schemas.openxmlformats.org/presentationml/2006/main">
+  <p:cSld>
+    <p:spTree>
+      <p:nvGrpSpPr>
+        <p:cNvPr id="1" name=""/>
+        <p:cNvGrpSpPr/>
+        <p:nvPr/>
+      </p:nvGrpSpPr>
+      <p:grpSpPr>
+        <a:xfrm>
+          <a:off x="0" y="0"/>
+          <a:ext cx="0" cy="0"/>
+          <a:chOff x="0" y="0"/>
+          <a:chExt cx="0" cy="0"/>
+        </a:xfrm>
+      </p:grpSpPr>
+      <p:sp>
+        <p:nvSpPr>
+          <p:cNvPr id="2" name="Slide Image Placeholder 1"/>
+          <p:cNvSpPr>
+            <a:spLocks noGrp="1" noRot="1" noChangeAspect="1"/>
+          </p:cNvSpPr>
+          <p:nvPr>
+            <p:ph type="sldImg"/>
+          </p:nvPr>
+        </p:nvSpPr>
+        <p:spPr/>
+      </p:sp>
+      <p:sp>
+        <p:nvSpPr>
+          <p:cNvPr id="3" name="Notes Placeholder 2"/>
+          <p:cNvSpPr>
+            <a:spLocks noGrp="1"/>
+          </p:cNvSpPr>
+          <p:nvPr>
+            <p:ph type="body" idx="1"/>
+          </p:nvPr>
+        </p:nvSpPr>
+        <p:spPr/>
+        <p:txBody>
+          <a:bodyPr/>
+          <a:lstStyle/>
+          <a:p>
+            <a:r>
+              <a:rPr lang="en-US" dirty="0"/>
+              <a:t/>
+            </a:r>
+            <a:endParaRPr lang="en-US" dirty="0"/>
+          </a:p>
+        </p:txBody>
+      </p:sp>
+      <p:sp>
+        <p:nvSpPr>
+          <p:cNvPr id="4" name="Slide Number Placeholder 3"/>
+          <p:cNvSpPr>
+            <a:spLocks noGrp="1"/>
+          </p:cNvSpPr>
+          <p:nvPr>
+            <p:ph type="sldNum" sz="quarter" idx="10"/>
+          </p:nvPr>
+        </p:nvSpPr>
+        <p:spPr/>
+        <p:txBody>
+          <a:bodyPr/>
+          <a:lstStyle/>
+          <a:p>
+            <a:fld id="{F7021451-1387-4CA6-816F-3879F97B5CBC}" type="slidenum">
+              <a:rPr lang="en-US"/>
+              <a:t>24</a:t>
             </a:fld>
             <a:endParaRPr lang="en-US"/>
           </a:p>
@@ -4038,7 +4568,7 @@
                 <a:ea typeface="Malgun Gothic" pitchFamily="34" charset="-122"/>
                 <a:cs typeface="Malgun Gothic" pitchFamily="34" charset="-120"/>
               </a:rPr>
-              <a:t xml:space="preserve">평가 하네스  </a:t>
+              <a:t>평가 하네스  </a:t>
             </a:r>
             <a:pPr indent="0" marL="0">
               <a:buNone/>
@@ -6319,7 +6849,7 @@
                 <a:ea typeface="Courier New" pitchFamily="34" charset="-122"/>
                 <a:cs typeface="Courier New" pitchFamily="34" charset="-120"/>
               </a:rPr>
-              <a:t xml:space="preserve">  q, retries = query, 0</a:t>
+              <a:t>  q, retries = query, 0</a:t>
             </a:r>
             <a:endParaRPr lang="en-US" sz="830" dirty="0"/>
           </a:p>
@@ -6339,7 +6869,7 @@
                 <a:ea typeface="Courier New" pitchFamily="34" charset="-122"/>
                 <a:cs typeface="Courier New" pitchFamily="34" charset="-120"/>
               </a:rPr>
-              <a:t xml:space="preserve">  while True:</a:t>
+              <a:t>  while True:</a:t>
             </a:r>
             <a:endParaRPr lang="en-US" sz="830" dirty="0"/>
           </a:p>
@@ -6359,7 +6889,7 @@
                 <a:ea typeface="Courier New" pitchFamily="34" charset="-122"/>
                 <a:cs typeface="Courier New" pitchFamily="34" charset="-120"/>
               </a:rPr>
-              <a:t xml:space="preserve">    cands  = search(q, k, intent)    # FAISS</a:t>
+              <a:t>    cands  = search(q, k, intent)    # FAISS</a:t>
             </a:r>
             <a:endParaRPr lang="en-US" sz="830" dirty="0"/>
           </a:p>
@@ -6379,7 +6909,7 @@
                 <a:ea typeface="Courier New" pitchFamily="34" charset="-122"/>
                 <a:cs typeface="Courier New" pitchFamily="34" charset="-120"/>
               </a:rPr>
-              <a:t xml:space="preserve">    ranked = prism_rerank(query, cands)</a:t>
+              <a:t>    ranked = prism_rerank(query, cands)</a:t>
             </a:r>
             <a:endParaRPr lang="en-US" sz="830" dirty="0"/>
           </a:p>
@@ -6399,7 +6929,7 @@
                 <a:ea typeface="Courier New" pitchFamily="34" charset="-122"/>
                 <a:cs typeface="Courier New" pitchFamily="34" charset="-120"/>
               </a:rPr>
-              <a:t xml:space="preserve">    judge  = sufficient_context(query, ranked)</a:t>
+              <a:t>    judge  = sufficient_context(query, ranked)</a:t>
             </a:r>
             <a:endParaRPr lang="en-US" sz="830" dirty="0"/>
           </a:p>
@@ -6419,7 +6949,7 @@
                 <a:ea typeface="Courier New" pitchFamily="34" charset="-122"/>
                 <a:cs typeface="Courier New" pitchFamily="34" charset="-120"/>
               </a:rPr>
-              <a:t xml:space="preserve">    if judge["answerable"] or retries&gt;=2:</a:t>
+              <a:t>    if judge["answerable"] or retries&gt;=2:</a:t>
             </a:r>
             <a:endParaRPr lang="en-US" sz="830" dirty="0"/>
           </a:p>
@@ -6439,7 +6969,7 @@
                 <a:ea typeface="Courier New" pitchFamily="34" charset="-122"/>
                 <a:cs typeface="Courier New" pitchFamily="34" charset="-120"/>
               </a:rPr>
-              <a:t xml:space="preserve">      break</a:t>
+              <a:t>      break</a:t>
             </a:r>
             <a:endParaRPr lang="en-US" sz="830" dirty="0"/>
           </a:p>
@@ -6459,7 +6989,7 @@
                 <a:ea typeface="Courier New" pitchFamily="34" charset="-122"/>
                 <a:cs typeface="Courier New" pitchFamily="34" charset="-120"/>
               </a:rPr>
-              <a:t xml:space="preserve">    # 부족한 근거유형을 질의에 보강 후 재검색</a:t>
+              <a:t>    # 부족한 근거유형을 질의에 보강 후 재검색</a:t>
             </a:r>
             <a:endParaRPr lang="en-US" sz="830" dirty="0"/>
           </a:p>
@@ -6479,7 +7009,7 @@
                 <a:ea typeface="Courier New" pitchFamily="34" charset="-122"/>
                 <a:cs typeface="Courier New" pitchFamily="34" charset="-120"/>
               </a:rPr>
-              <a:t xml:space="preserve">    q = f"{query} {missing}"</a:t>
+              <a:t>    q = f"{query} {missing}"</a:t>
             </a:r>
             <a:endParaRPr lang="en-US" sz="830" dirty="0"/>
           </a:p>
@@ -6499,7 +7029,7 @@
                 <a:ea typeface="Courier New" pitchFamily="34" charset="-122"/>
                 <a:cs typeface="Courier New" pitchFamily="34" charset="-120"/>
               </a:rPr>
-              <a:t xml:space="preserve">    retries += 1</a:t>
+              <a:t>    retries += 1</a:t>
             </a:r>
             <a:endParaRPr lang="en-US" sz="830" dirty="0"/>
           </a:p>
@@ -6519,7 +7049,7 @@
                 <a:ea typeface="Courier New" pitchFamily="34" charset="-122"/>
                 <a:cs typeface="Courier New" pitchFamily="34" charset="-120"/>
               </a:rPr>
-              <a:t xml:space="preserve">  # 충분: 근거 반환 / 부족: abstain</a:t>
+              <a:t>  # 충분: 근거 반환 / 부족: abstain</a:t>
             </a:r>
             <a:endParaRPr lang="en-US" sz="830" dirty="0"/>
           </a:p>
@@ -6642,7 +7172,7 @@
                 <a:ea typeface="Courier New" pitchFamily="34" charset="-122"/>
                 <a:cs typeface="Courier New" pitchFamily="34" charset="-120"/>
               </a:rPr>
-              <a:t xml:space="preserve">  "inventory_risk": _h_inventory_risk,</a:t>
+              <a:t>  "inventory_risk": _h_inventory_risk,</a:t>
             </a:r>
             <a:endParaRPr lang="en-US" sz="830" dirty="0"/>
           </a:p>
@@ -6662,7 +7192,7 @@
                 <a:ea typeface="Courier New" pitchFamily="34" charset="-122"/>
                 <a:cs typeface="Courier New" pitchFamily="34" charset="-120"/>
               </a:rPr>
-              <a:t xml:space="preserve">  "stocking_recommendation": _h_stocking, ...}</a:t>
+              <a:t>  "stocking_recommendation": _h_stocking, ...}</a:t>
             </a:r>
             <a:endParaRPr lang="en-US" sz="830" dirty="0"/>
           </a:p>
@@ -6702,7 +7232,7 @@
                 <a:ea typeface="Courier New" pitchFamily="34" charset="-122"/>
                 <a:cs typeface="Courier New" pitchFamily="34" charset="-120"/>
               </a:rPr>
-              <a:t xml:space="preserve">  h = _HANDLERS[state["intent"]]</a:t>
+              <a:t>  h = _HANDLERS[state["intent"]]</a:t>
             </a:r>
             <a:endParaRPr lang="en-US" sz="830" dirty="0"/>
           </a:p>
@@ -6722,7 +7252,7 @@
                 <a:ea typeface="Courier New" pitchFamily="34" charset="-122"/>
                 <a:cs typeface="Courier New" pitchFamily="34" charset="-120"/>
               </a:rPr>
-              <a:t xml:space="preserve">  return {"tool_results": h(state["params"])}</a:t>
+              <a:t>  return {"tool_results": h(state["params"])}</a:t>
             </a:r>
             <a:endParaRPr lang="en-US" sz="830" dirty="0"/>
           </a:p>
@@ -6845,7 +7375,7 @@
                 <a:ea typeface="Courier New" pitchFamily="34" charset="-122"/>
                 <a:cs typeface="Courier New" pitchFamily="34" charset="-120"/>
               </a:rPr>
-              <a:t xml:space="preserve">  "stocking_recommendation", "inventory_risk"...}</a:t>
+              <a:t>  "stocking_recommendation", "inventory_risk"...}</a:t>
             </a:r>
             <a:endParaRPr lang="en-US" sz="830" dirty="0"/>
           </a:p>
@@ -6885,7 +7415,7 @@
                 <a:ea typeface="Courier New" pitchFamily="34" charset="-122"/>
                 <a:cs typeface="Courier New" pitchFamily="34" charset="-120"/>
               </a:rPr>
-              <a:t xml:space="preserve">  # 단순 조회는 검색 생략(비용·지연 ↓)</a:t>
+              <a:t>  # 단순 조회는 검색 생략(비용·지연 ↓)</a:t>
             </a:r>
             <a:endParaRPr lang="en-US" sz="830" dirty="0"/>
           </a:p>
@@ -6905,7 +7435,7 @@
                 <a:ea typeface="Courier New" pitchFamily="34" charset="-122"/>
                 <a:cs typeface="Courier New" pitchFamily="34" charset="-120"/>
               </a:rPr>
-              <a:t xml:space="preserve">  return {"rag_required":</a:t>
+              <a:t>  return {"rag_required":</a:t>
             </a:r>
             <a:endParaRPr lang="en-US" sz="830" dirty="0"/>
           </a:p>
@@ -6925,7 +7455,7 @@
                 <a:ea typeface="Courier New" pitchFamily="34" charset="-122"/>
                 <a:cs typeface="Courier New" pitchFamily="34" charset="-120"/>
               </a:rPr>
-              <a:t xml:space="preserve">          state["intent"] in RAG_INTENTS}</a:t>
+              <a:t>          state["intent"] in RAG_INTENTS}</a:t>
             </a:r>
             <a:endParaRPr lang="en-US" sz="830" dirty="0"/>
           </a:p>
@@ -7517,7 +8047,7 @@
                 <a:ea typeface="Malgun Gothic" pitchFamily="34" charset="-122"/>
                 <a:cs typeface="Malgun Gothic" pitchFamily="34" charset="-120"/>
               </a:rPr>
-              <a:t xml:space="preserve">ALR </a:t>
+              <a:t>ALR </a:t>
             </a:r>
             <a:pPr indent="0" marL="0">
               <a:lnSpc>
@@ -7534,7 +8064,7 @@
                 <a:ea typeface="Malgun Gothic" pitchFamily="34" charset="-122"/>
                 <a:cs typeface="Malgun Gothic" pitchFamily="34" charset="-120"/>
               </a:rPr>
-              <a:t xml:space="preserve">근거 구조·사전 라우팅      </a:t>
+              <a:t>근거 구조·사전 라우팅      </a:t>
             </a:r>
             <a:pPr indent="0" marL="0">
               <a:lnSpc>
@@ -7551,7 +8081,7 @@
                 <a:ea typeface="Malgun Gothic" pitchFamily="34" charset="-122"/>
                 <a:cs typeface="Malgun Gothic" pitchFamily="34" charset="-120"/>
               </a:rPr>
-              <a:t xml:space="preserve">PRISM </a:t>
+              <a:t>PRISM </a:t>
             </a:r>
             <a:pPr indent="0" marL="0">
               <a:lnSpc>
@@ -7568,7 +8098,7 @@
                 <a:ea typeface="Malgun Gothic" pitchFamily="34" charset="-122"/>
                 <a:cs typeface="Malgun Gothic" pitchFamily="34" charset="-120"/>
               </a:rPr>
-              <a:t xml:space="preserve">설명용 근거 추출      </a:t>
+              <a:t>설명용 근거 추출      </a:t>
             </a:r>
             <a:pPr indent="0" marL="0">
               <a:lnSpc>
@@ -7585,7 +8115,7 @@
                 <a:ea typeface="Malgun Gothic" pitchFamily="34" charset="-122"/>
                 <a:cs typeface="Malgun Gothic" pitchFamily="34" charset="-120"/>
               </a:rPr>
-              <a:t xml:space="preserve">Sufficient </a:t>
+              <a:t>Sufficient </a:t>
             </a:r>
             <a:pPr indent="0" marL="0">
               <a:lnSpc>
@@ -7832,7 +8362,7 @@
                 <a:ea typeface="Malgun Gothic" pitchFamily="34" charset="-122"/>
                 <a:cs typeface="Malgun Gothic" pitchFamily="34" charset="-120"/>
               </a:rPr>
-              <a:t xml:space="preserve">질문 입력 </a:t>
+              <a:t>질문 입력 </a:t>
             </a:r>
             <a:pPr algn="ctr" indent="0" marL="0">
               <a:buNone/>
@@ -7846,7 +8376,7 @@
                 <a:ea typeface="Malgun Gothic" pitchFamily="34" charset="-122"/>
                 <a:cs typeface="Malgun Gothic" pitchFamily="34" charset="-120"/>
               </a:rPr>
-              <a:t xml:space="preserve">→  </a:t>
+              <a:t>→  </a:t>
             </a:r>
             <a:pPr algn="ctr" indent="0" marL="0">
               <a:buNone/>
@@ -7860,7 +8390,7 @@
                 <a:ea typeface="Malgun Gothic" pitchFamily="34" charset="-122"/>
                 <a:cs typeface="Malgun Gothic" pitchFamily="34" charset="-120"/>
               </a:rPr>
-              <a:t xml:space="preserve">ALR </a:t>
+              <a:t>ALR </a:t>
             </a:r>
             <a:pPr algn="ctr" indent="0" marL="0">
               <a:buNone/>
@@ -7874,7 +8404,7 @@
                 <a:ea typeface="Malgun Gothic" pitchFamily="34" charset="-122"/>
                 <a:cs typeface="Malgun Gothic" pitchFamily="34" charset="-120"/>
               </a:rPr>
-              <a:t xml:space="preserve">→  Retrieval  →  </a:t>
+              <a:t>→  Retrieval  →  </a:t>
             </a:r>
             <a:pPr algn="ctr" indent="0" marL="0">
               <a:buNone/>
@@ -7888,7 +8418,7 @@
                 <a:ea typeface="Malgun Gothic" pitchFamily="34" charset="-122"/>
                 <a:cs typeface="Malgun Gothic" pitchFamily="34" charset="-120"/>
               </a:rPr>
-              <a:t xml:space="preserve">PRISM </a:t>
+              <a:t>PRISM </a:t>
             </a:r>
             <a:pPr algn="ctr" indent="0" marL="0">
               <a:buNone/>
@@ -7902,7 +8432,7 @@
                 <a:ea typeface="Malgun Gothic" pitchFamily="34" charset="-122"/>
                 <a:cs typeface="Malgun Gothic" pitchFamily="34" charset="-120"/>
               </a:rPr>
-              <a:t xml:space="preserve">→  </a:t>
+              <a:t>→  </a:t>
             </a:r>
             <a:pPr algn="ctr" indent="0" marL="0">
               <a:buNone/>
@@ -7916,7 +8446,7 @@
                 <a:ea typeface="Malgun Gothic" pitchFamily="34" charset="-122"/>
                 <a:cs typeface="Malgun Gothic" pitchFamily="34" charset="-120"/>
               </a:rPr>
-              <a:t xml:space="preserve">Sufficient Context </a:t>
+              <a:t>Sufficient Context </a:t>
             </a:r>
             <a:pPr algn="ctr" indent="0" marL="0">
               <a:buNone/>
@@ -7930,7 +8460,7 @@
                 <a:ea typeface="Malgun Gothic" pitchFamily="34" charset="-122"/>
                 <a:cs typeface="Malgun Gothic" pitchFamily="34" charset="-120"/>
               </a:rPr>
-              <a:t xml:space="preserve">→  </a:t>
+              <a:t>→  </a:t>
             </a:r>
             <a:pPr algn="ctr" indent="0" marL="0">
               <a:buNone/>
@@ -8054,7 +8584,7 @@
                 <a:ea typeface="Malgun Gothic" pitchFamily="34" charset="-122"/>
                 <a:cs typeface="Malgun Gothic" pitchFamily="34" charset="-120"/>
               </a:rPr>
-              <a:t xml:space="preserve">무엇  </a:t>
+              <a:t>무엇  </a:t>
             </a:r>
             <a:pPr indent="0" marL="0">
               <a:lnSpc>
@@ -8100,7 +8630,7 @@
                 <a:ea typeface="Malgun Gothic" pitchFamily="34" charset="-122"/>
                 <a:cs typeface="Malgun Gothic" pitchFamily="34" charset="-120"/>
               </a:rPr>
-              <a:t xml:space="preserve">강점  </a:t>
+              <a:t>강점  </a:t>
             </a:r>
             <a:pPr indent="0" marL="0">
               <a:lnSpc>
@@ -8146,7 +8676,7 @@
                 <a:ea typeface="Malgun Gothic" pitchFamily="34" charset="-122"/>
                 <a:cs typeface="Malgun Gothic" pitchFamily="34" charset="-120"/>
               </a:rPr>
-              <a:t xml:space="preserve">역할  </a:t>
+              <a:t>역할  </a:t>
             </a:r>
             <a:pPr indent="0" marL="0">
               <a:lnSpc>
@@ -8273,7 +8803,7 @@
                 <a:ea typeface="Malgun Gothic" pitchFamily="34" charset="-122"/>
                 <a:cs typeface="Malgun Gothic" pitchFamily="34" charset="-120"/>
               </a:rPr>
-              <a:t xml:space="preserve">무엇  </a:t>
+              <a:t>무엇  </a:t>
             </a:r>
             <a:pPr indent="0" marL="0">
               <a:lnSpc>
@@ -8319,7 +8849,7 @@
                 <a:ea typeface="Malgun Gothic" pitchFamily="34" charset="-122"/>
                 <a:cs typeface="Malgun Gothic" pitchFamily="34" charset="-120"/>
               </a:rPr>
-              <a:t xml:space="preserve">강점  </a:t>
+              <a:t>강점  </a:t>
             </a:r>
             <a:pPr indent="0" marL="0">
               <a:lnSpc>
@@ -8365,7 +8895,7 @@
                 <a:ea typeface="Malgun Gothic" pitchFamily="34" charset="-122"/>
                 <a:cs typeface="Malgun Gothic" pitchFamily="34" charset="-120"/>
               </a:rPr>
-              <a:t xml:space="preserve">역할  </a:t>
+              <a:t>역할  </a:t>
             </a:r>
             <a:pPr indent="0" marL="0">
               <a:lnSpc>
@@ -8492,7 +9022,7 @@
                 <a:ea typeface="Malgun Gothic" pitchFamily="34" charset="-122"/>
                 <a:cs typeface="Malgun Gothic" pitchFamily="34" charset="-120"/>
               </a:rPr>
-              <a:t xml:space="preserve">무엇  </a:t>
+              <a:t>무엇  </a:t>
             </a:r>
             <a:pPr indent="0" marL="0">
               <a:lnSpc>
@@ -8538,7 +9068,7 @@
                 <a:ea typeface="Malgun Gothic" pitchFamily="34" charset="-122"/>
                 <a:cs typeface="Malgun Gothic" pitchFamily="34" charset="-120"/>
               </a:rPr>
-              <a:t xml:space="preserve">강점  </a:t>
+              <a:t>강점  </a:t>
             </a:r>
             <a:pPr indent="0" marL="0">
               <a:lnSpc>
@@ -8584,7 +9114,7 @@
                 <a:ea typeface="Malgun Gothic" pitchFamily="34" charset="-122"/>
                 <a:cs typeface="Malgun Gothic" pitchFamily="34" charset="-120"/>
               </a:rPr>
-              <a:t xml:space="preserve">역할  </a:t>
+              <a:t>역할  </a:t>
             </a:r>
             <a:pPr indent="0" marL="0">
               <a:lnSpc>
@@ -8665,7 +9195,7 @@
                 <a:ea typeface="Malgun Gothic" pitchFamily="34" charset="-122"/>
                 <a:cs typeface="Malgun Gothic" pitchFamily="34" charset="-120"/>
               </a:rPr>
-              <a:t xml:space="preserve">결합  </a:t>
+              <a:t>결합  </a:t>
             </a:r>
             <a:pPr indent="0" marL="0">
               <a:lnSpc>
@@ -8922,7 +9452,7 @@
                 <a:ea typeface="Malgun Gothic" pitchFamily="34" charset="-122"/>
                 <a:cs typeface="Malgun Gothic" pitchFamily="34" charset="-120"/>
               </a:rPr>
-              <a:t xml:space="preserve">   (L2 정규화 → 코사인 유사도)</a:t>
+              <a:t>   (L2 정규화 → 코사인 유사도)</a:t>
             </a:r>
             <a:endParaRPr lang="en-US" sz="1020" dirty="0"/>
           </a:p>
@@ -8982,7 +9512,7 @@
                 <a:ea typeface="Malgun Gothic" pitchFamily="34" charset="-122"/>
                 <a:cs typeface="Malgun Gothic" pitchFamily="34" charset="-120"/>
               </a:rPr>
-              <a:t xml:space="preserve">   (LLM 없이 결정적 메타 부여)</a:t>
+              <a:t>   (LLM 없이 결정적 메타 부여)</a:t>
             </a:r>
             <a:endParaRPr lang="en-US" sz="1020" dirty="0"/>
           </a:p>
@@ -9022,7 +9552,7 @@
                 <a:ea typeface="Malgun Gothic" pitchFamily="34" charset="-122"/>
                 <a:cs typeface="Malgun Gothic" pitchFamily="34" charset="-120"/>
               </a:rPr>
-              <a:t xml:space="preserve">   section·answerable_intents·evidence_summary</a:t>
+              <a:t>   section·answerable_intents·evidence_summary</a:t>
             </a:r>
             <a:endParaRPr lang="en-US" sz="1020" dirty="0"/>
           </a:p>
@@ -9062,7 +9592,7 @@
                 <a:ea typeface="Malgun Gothic" pitchFamily="34" charset="-122"/>
                 <a:cs typeface="Malgun Gothic" pitchFamily="34" charset="-120"/>
               </a:rPr>
-              <a:t xml:space="preserve">   정책 변경 시 전체 재인덱싱</a:t>
+              <a:t>   정책 변경 시 전체 재인덱싱</a:t>
             </a:r>
             <a:endParaRPr lang="en-US" sz="1020" dirty="0"/>
           </a:p>
@@ -9272,7 +9802,7 @@
                 <a:ea typeface="Malgun Gothic" pitchFamily="34" charset="-122"/>
                 <a:cs typeface="Malgun Gothic" pitchFamily="34" charset="-120"/>
               </a:rPr>
-              <a:t xml:space="preserve">   충분 → 근거 답변 / 부족 → 재검색(≤2)·abstain</a:t>
+              <a:t>   충분 → 근거 답변 / 부족 → 재검색(≤2)·abstain</a:t>
             </a:r>
             <a:endParaRPr lang="en-US" sz="1020" dirty="0"/>
           </a:p>
@@ -9976,7 +10506,7 @@
                 <a:ea typeface="Malgun Gothic" pitchFamily="34" charset="-122"/>
                 <a:cs typeface="Malgun Gothic" pitchFamily="34" charset="-120"/>
               </a:rPr>
-              <a:t xml:space="preserve">오늘 16:00 마감 · </a:t>
+              <a:t>오늘 16:00 마감 · </a:t>
             </a:r>
             <a:pPr indent="0" marL="0">
               <a:buNone/>
@@ -10844,7 +11374,7 @@
                 <a:ea typeface="Malgun Gothic" pitchFamily="34" charset="-122"/>
                 <a:cs typeface="Malgun Gothic" pitchFamily="34" charset="-120"/>
               </a:rPr>
-              <a:t xml:space="preserve">   urgent 파생 컬럼(또는 뷰) 추가</a:t>
+              <a:t>   urgent 파생 컬럼(또는 뷰) 추가</a:t>
             </a:r>
             <a:endParaRPr lang="en-US" sz="1020" dirty="0"/>
           </a:p>
@@ -12197,7 +12727,7 @@
 
 <file path=ppt/slides/slide19.xml><?xml version="1.0" encoding="utf-8"?>
 <p:sld xmlns:a="http://schemas.openxmlformats.org/drawingml/2006/main" xmlns:r="http://schemas.openxmlformats.org/officeDocument/2006/relationships" xmlns:p="http://schemas.openxmlformats.org/presentationml/2006/main">
-  <p:cSld name="Slide 10">
+  <p:cSld name="Slide 19">
     <p:bg>
       <p:bgPr>
         <a:solidFill>
@@ -12252,7 +12782,7 @@
                 <a:ea typeface="Malgun Gothic" pitchFamily="34" charset="-122"/>
                 <a:cs typeface="Malgun Gothic" pitchFamily="34" charset="-120"/>
               </a:rPr>
-              <a:t>PROGRESS UPDATE · 2026.06.25</a:t>
+              <a:t>PROGRESS UPDATE · 2026.06.30</a:t>
             </a:r>
             <a:endParaRPr lang="en-US" sz="1300" dirty="0"/>
           </a:p>
@@ -12283,7 +12813,7 @@
               <a:buNone/>
             </a:pPr>
             <a:r>
-              <a:rPr lang="en-US" sz="4400" b="1" dirty="0">
+              <a:rPr lang="en-US" sz="3800" b="1" dirty="0">
                 <a:solidFill>
                   <a:srgbClr val="FFFFFF"/>
                 </a:solidFill>
@@ -12291,9 +12821,9 @@
                 <a:ea typeface="Malgun Gothic" pitchFamily="34" charset="-122"/>
                 <a:cs typeface="Malgun Gothic" pitchFamily="34" charset="-120"/>
               </a:rPr>
-              <a:t>구현 진행 업데이트</a:t>
-            </a:r>
-            <a:endParaRPr lang="en-US" sz="4400" dirty="0"/>
+              <a:t>창고 자동운영 — 블랙보드 멀티에이전트</a:t>
+            </a:r>
+            <a:endParaRPr lang="en-US" sz="3800" dirty="0"/>
           </a:p>
         </p:txBody>
       </p:sp>
@@ -12305,7 +12835,7 @@
         </p:nvSpPr>
         <p:spPr>
           <a:xfrm>
-            <a:off x="640080" y="2432304"/>
+            <a:off x="640080" y="2395728"/>
             <a:ext cx="7863840" cy="411480"/>
           </a:xfrm>
           <a:prstGeom prst="rect">
@@ -12330,7 +12860,7 @@
                 <a:ea typeface="Malgun Gothic" pitchFamily="34" charset="-122"/>
                 <a:cs typeface="Malgun Gothic" pitchFamily="34" charset="-120"/>
               </a:rPr>
-              <a:t>2026.06.17 이후 추가 구현 — 운영 흐름 현실화 · 대화/관측 · 실시간 시뮬레이션.</a:t>
+              <a:t>실시간 이벤트를 10개 에이전트가 블랙보드(DB)로 협업해 자동 처리하는 구조와 동작 원리</a:t>
             </a:r>
             <a:endParaRPr lang="en-US" sz="1400" dirty="0"/>
           </a:p>
@@ -12344,8 +12874,8 @@
         </p:nvSpPr>
         <p:spPr>
           <a:xfrm>
-            <a:off x="640080" y="3145536"/>
-            <a:ext cx="292608" cy="292608"/>
+            <a:off x="640080" y="3035808"/>
+            <a:ext cx="274320" cy="274320"/>
           </a:xfrm>
           <a:prstGeom prst="ellipse">
             <a:avLst/>
@@ -12364,8 +12894,8 @@
         </p:nvSpPr>
         <p:spPr>
           <a:xfrm>
-            <a:off x="640080" y="3145536"/>
-            <a:ext cx="292608" cy="292608"/>
+            <a:off x="640080" y="3035808"/>
+            <a:ext cx="274320" cy="274320"/>
           </a:xfrm>
           <a:prstGeom prst="rect">
             <a:avLst/>
@@ -12403,8 +12933,8 @@
         </p:nvSpPr>
         <p:spPr>
           <a:xfrm>
-            <a:off x="1078992" y="3099816"/>
-            <a:ext cx="7315200" cy="384048"/>
+            <a:off x="1060704" y="2980944"/>
+            <a:ext cx="7406640" cy="365760"/>
           </a:xfrm>
           <a:prstGeom prst="rect">
             <a:avLst/>
@@ -12420,7 +12950,7 @@
               <a:buNone/>
             </a:pPr>
             <a:r>
-              <a:rPr lang="en-US" sz="1300" dirty="0">
+              <a:rPr lang="en-US" sz="1250" dirty="0">
                 <a:solidFill>
                   <a:srgbClr val="ECEFF1"/>
                 </a:solidFill>
@@ -12428,9 +12958,9 @@
                 <a:ea typeface="Malgun Gothic" pitchFamily="34" charset="-122"/>
                 <a:cs typeface="Malgun Gothic" pitchFamily="34" charset="-120"/>
               </a:rPr>
-              <a:t>출고 할당 단계 · 예상 결품 (실 WMS 출고 흐름 반영)</a:t>
-            </a:r>
-            <a:endParaRPr lang="en-US" sz="1300" dirty="0"/>
+              <a:t>구조 — 10개 에이전트(도메인 6 · 인프라 4)와 블랙보드</a:t>
+            </a:r>
+            <a:endParaRPr lang="en-US" sz="1250" dirty="0"/>
           </a:p>
         </p:txBody>
       </p:sp>
@@ -12442,8 +12972,8 @@
         </p:nvSpPr>
         <p:spPr>
           <a:xfrm>
-            <a:off x="640080" y="3566160"/>
-            <a:ext cx="292608" cy="292608"/>
+            <a:off x="640080" y="3419856"/>
+            <a:ext cx="274320" cy="274320"/>
           </a:xfrm>
           <a:prstGeom prst="ellipse">
             <a:avLst/>
@@ -12462,8 +12992,8 @@
         </p:nvSpPr>
         <p:spPr>
           <a:xfrm>
-            <a:off x="640080" y="3566160"/>
-            <a:ext cx="292608" cy="292608"/>
+            <a:off x="640080" y="3419856"/>
+            <a:ext cx="274320" cy="274320"/>
           </a:xfrm>
           <a:prstGeom prst="rect">
             <a:avLst/>
@@ -12501,8 +13031,8 @@
         </p:nvSpPr>
         <p:spPr>
           <a:xfrm>
-            <a:off x="1078992" y="3520440"/>
-            <a:ext cx="7315200" cy="384048"/>
+            <a:off x="1060704" y="3364992"/>
+            <a:ext cx="7406640" cy="365760"/>
           </a:xfrm>
           <a:prstGeom prst="rect">
             <a:avLst/>
@@ -12518,7 +13048,7 @@
               <a:buNone/>
             </a:pPr>
             <a:r>
-              <a:rPr lang="en-US" sz="1300" dirty="0">
+              <a:rPr lang="en-US" sz="1250" dirty="0">
                 <a:solidFill>
                   <a:srgbClr val="ECEFF1"/>
                 </a:solidFill>
@@ -12526,9 +13056,9 @@
                 <a:ea typeface="Malgun Gothic" pitchFamily="34" charset="-122"/>
                 <a:cs typeface="Malgun Gothic" pitchFamily="34" charset="-120"/>
               </a:rPr>
-              <a:t>체화재고 · 재고 보충 (PICK/RESERVE 2단 재고)</a:t>
-            </a:r>
-            <a:endParaRPr lang="en-US" sz="1300" dirty="0"/>
+              <a:t>핵심 — 에이전트는 어떻게 협력하나 (주기 · 신호 · 데이터 읽기)</a:t>
+            </a:r>
+            <a:endParaRPr lang="en-US" sz="1250" dirty="0"/>
           </a:p>
         </p:txBody>
       </p:sp>
@@ -12540,8 +13070,8 @@
         </p:nvSpPr>
         <p:spPr>
           <a:xfrm>
-            <a:off x="640080" y="3986784"/>
-            <a:ext cx="292608" cy="292608"/>
+            <a:off x="640080" y="3803904"/>
+            <a:ext cx="274320" cy="274320"/>
           </a:xfrm>
           <a:prstGeom prst="ellipse">
             <a:avLst/>
@@ -12560,8 +13090,8 @@
         </p:nvSpPr>
         <p:spPr>
           <a:xfrm>
-            <a:off x="640080" y="3986784"/>
-            <a:ext cx="292608" cy="292608"/>
+            <a:off x="640080" y="3803904"/>
+            <a:ext cx="274320" cy="274320"/>
           </a:xfrm>
           <a:prstGeom prst="rect">
             <a:avLst/>
@@ -12599,8 +13129,8 @@
         </p:nvSpPr>
         <p:spPr>
           <a:xfrm>
-            <a:off x="1078992" y="3941064"/>
-            <a:ext cx="7315200" cy="384048"/>
+            <a:off x="1060704" y="3749040"/>
+            <a:ext cx="7406640" cy="365760"/>
           </a:xfrm>
           <a:prstGeom prst="rect">
             <a:avLst/>
@@ -12616,7 +13146,7 @@
               <a:buNone/>
             </a:pPr>
             <a:r>
-              <a:rPr lang="en-US" sz="1300" dirty="0">
+              <a:rPr lang="en-US" sz="1250" dirty="0">
                 <a:solidFill>
                   <a:srgbClr val="ECEFF1"/>
                 </a:solidFill>
@@ -12624,9 +13154,9 @@
                 <a:ea typeface="Malgun Gothic" pitchFamily="34" charset="-122"/>
                 <a:cs typeface="Malgun Gothic" pitchFamily="34" charset="-120"/>
               </a:rPr>
-              <a:t>실시간 수요 발생(Toast) · 대화 메모리(세션 · 멀티턴 맥락)</a:t>
-            </a:r>
-            <a:endParaRPr lang="en-US" sz="1300" dirty="0"/>
+              <a:t>연쇄 — 데이터로 흐르는 이벤트 체이닝 (입고→적치→자원)</a:t>
+            </a:r>
+            <a:endParaRPr lang="en-US" sz="1250" dirty="0"/>
           </a:p>
         </p:txBody>
       </p:sp>
@@ -12638,8 +13168,8 @@
         </p:nvSpPr>
         <p:spPr>
           <a:xfrm>
-            <a:off x="640080" y="4407408"/>
-            <a:ext cx="292608" cy="292608"/>
+            <a:off x="640080" y="4187952"/>
+            <a:ext cx="274320" cy="274320"/>
           </a:xfrm>
           <a:prstGeom prst="ellipse">
             <a:avLst/>
@@ -12658,8 +13188,8 @@
         </p:nvSpPr>
         <p:spPr>
           <a:xfrm>
-            <a:off x="640080" y="4407408"/>
-            <a:ext cx="292608" cy="292608"/>
+            <a:off x="640080" y="4187952"/>
+            <a:ext cx="274320" cy="274320"/>
           </a:xfrm>
           <a:prstGeom prst="rect">
             <a:avLst/>
@@ -12697,8 +13227,8 @@
         </p:nvSpPr>
         <p:spPr>
           <a:xfrm>
-            <a:off x="1078992" y="4361688"/>
-            <a:ext cx="7315200" cy="384048"/>
+            <a:off x="1060704" y="4133088"/>
+            <a:ext cx="7406640" cy="365760"/>
           </a:xfrm>
           <a:prstGeom prst="rect">
             <a:avLst/>
@@ -12714,7 +13244,7 @@
               <a:buNone/>
             </a:pPr>
             <a:r>
-              <a:rPr lang="en-US" sz="1300" dirty="0">
+              <a:rPr lang="en-US" sz="1250" dirty="0">
                 <a:solidFill>
                   <a:srgbClr val="ECEFF1"/>
                 </a:solidFill>
@@ -12722,21 +13252,119 @@
                 <a:ea typeface="Malgun Gothic" pitchFamily="34" charset="-122"/>
                 <a:cs typeface="Malgun Gothic" pitchFamily="34" charset="-120"/>
               </a:rPr>
-              <a:t>Approval·AI 동작 관측(트레이스) · 냉장/일반 · 고회전 슬로팅 · 지연비용 10배</a:t>
-            </a:r>
-            <a:endParaRPr lang="en-US" sz="1300" dirty="0"/>
-          </a:p>
-        </p:txBody>
-      </p:sp>
-      <p:sp>
-        <p:nvSpPr>
-          <p:cNvPr id="17" name="Text 15"/>
-          <p:cNvSpPr/>
-          <p:nvPr/>
-        </p:nvSpPr>
-        <p:spPr>
-          <a:xfrm>
-            <a:off x="640080" y="4828032"/>
+              <a:t>의사결정 1 사이클 — 8단계 실행과 가드레일</a:t>
+            </a:r>
+            <a:endParaRPr lang="en-US" sz="1250" dirty="0"/>
+          </a:p>
+        </p:txBody>
+      </p:sp>
+      <p:sp>
+        <p:nvSpPr>
+          <p:cNvPr id="17" name="Shape 15"/>
+          <p:cNvSpPr/>
+          <p:nvPr/>
+        </p:nvSpPr>
+        <p:spPr>
+          <a:xfrm>
+            <a:off x="640080" y="4572000"/>
+            <a:ext cx="274320" cy="274320"/>
+          </a:xfrm>
+          <a:prstGeom prst="ellipse">
+            <a:avLst/>
+          </a:prstGeom>
+          <a:solidFill>
+            <a:srgbClr val="028090"/>
+          </a:solidFill>
+          <a:ln/>
+        </p:spPr>
+      </p:sp>
+      <p:sp>
+        <p:nvSpPr>
+          <p:cNvPr id="18" name="Text 16"/>
+          <p:cNvSpPr/>
+          <p:nvPr/>
+        </p:nvSpPr>
+        <p:spPr>
+          <a:xfrm>
+            <a:off x="640080" y="4572000"/>
+            <a:ext cx="274320" cy="274320"/>
+          </a:xfrm>
+          <a:prstGeom prst="rect">
+            <a:avLst/>
+          </a:prstGeom>
+          <a:noFill/>
+          <a:ln/>
+        </p:spPr>
+        <p:txBody>
+          <a:bodyPr wrap="square" lIns="0" tIns="0" rIns="0" bIns="0" rtlCol="0" anchor="ctr"/>
+          <a:lstStyle/>
+          <a:p>
+            <a:pPr algn="ctr" indent="0" marL="0">
+              <a:buNone/>
+            </a:pPr>
+            <a:r>
+              <a:rPr lang="en-US" sz="1200" b="1" dirty="0">
+                <a:solidFill>
+                  <a:srgbClr val="FFFFFF"/>
+                </a:solidFill>
+                <a:latin typeface="Malgun Gothic" pitchFamily="34" charset="0"/>
+                <a:ea typeface="Malgun Gothic" pitchFamily="34" charset="-122"/>
+                <a:cs typeface="Malgun Gothic" pitchFamily="34" charset="-120"/>
+              </a:rPr>
+              <a:t>5</a:t>
+            </a:r>
+            <a:endParaRPr lang="en-US" sz="1200" dirty="0"/>
+          </a:p>
+        </p:txBody>
+      </p:sp>
+      <p:sp>
+        <p:nvSpPr>
+          <p:cNvPr id="19" name="Text 17"/>
+          <p:cNvSpPr/>
+          <p:nvPr/>
+        </p:nvSpPr>
+        <p:spPr>
+          <a:xfrm>
+            <a:off x="1060704" y="4517136"/>
+            <a:ext cx="7406640" cy="365760"/>
+          </a:xfrm>
+          <a:prstGeom prst="rect">
+            <a:avLst/>
+          </a:prstGeom>
+          <a:noFill/>
+          <a:ln/>
+        </p:spPr>
+        <p:txBody>
+          <a:bodyPr wrap="square" lIns="0" tIns="0" rIns="0" bIns="0" rtlCol="0" anchor="ctr"/>
+          <a:lstStyle/>
+          <a:p>
+            <a:pPr indent="0" marL="0">
+              <a:buNone/>
+            </a:pPr>
+            <a:r>
+              <a:rPr lang="en-US" sz="1250" dirty="0">
+                <a:solidFill>
+                  <a:srgbClr val="ECEFF1"/>
+                </a:solidFill>
+                <a:latin typeface="Malgun Gothic" pitchFamily="34" charset="0"/>
+                <a:ea typeface="Malgun Gothic" pitchFamily="34" charset="-122"/>
+                <a:cs typeface="Malgun Gothic" pitchFamily="34" charset="-120"/>
+              </a:rPr>
+              <a:t>대시보드 — ‘창고자동운영’ 탭 동작 가시화</a:t>
+            </a:r>
+            <a:endParaRPr lang="en-US" sz="1250" dirty="0"/>
+          </a:p>
+        </p:txBody>
+      </p:sp>
+      <p:sp>
+        <p:nvSpPr>
+          <p:cNvPr id="20" name="Text 18"/>
+          <p:cNvSpPr/>
+          <p:nvPr/>
+        </p:nvSpPr>
+        <p:spPr>
+          <a:xfrm>
+            <a:off x="640080" y="4846320"/>
             <a:ext cx="7863840" cy="274320"/>
           </a:xfrm>
           <a:prstGeom prst="rect">
@@ -12761,7 +13389,7 @@
                 <a:ea typeface="Malgun Gothic" pitchFamily="34" charset="-122"/>
                 <a:cs typeface="Malgun Gothic" pitchFamily="34" charset="-120"/>
               </a:rPr>
-              <a:t>Smart WMS Agent</a:t>
+              <a:t>Smart WMS Agent · Blackboard Auto-Execution Layer</a:t>
             </a:r>
             <a:endParaRPr lang="en-US" sz="1100" dirty="0"/>
           </a:p>
@@ -13753,7 +14381,7 @@
 
 <file path=ppt/slides/slide20.xml><?xml version="1.0" encoding="utf-8"?>
 <p:sld xmlns:a="http://schemas.openxmlformats.org/drawingml/2006/main" xmlns:r="http://schemas.openxmlformats.org/officeDocument/2006/relationships" xmlns:p="http://schemas.openxmlformats.org/presentationml/2006/main">
-  <p:cSld name="Slide 11">
+  <p:cSld name="Slide 20">
     <p:bg>
       <p:bgPr>
         <a:solidFill>
@@ -13808,7 +14436,7 @@
                 <a:ea typeface="Malgun Gothic" pitchFamily="34" charset="-122"/>
                 <a:cs typeface="Malgun Gothic" pitchFamily="34" charset="-120"/>
               </a:rPr>
-              <a:t>IMPLEMENTATION STATUS</a:t>
+              <a:t>AUTO-OPERATION · ARCHITECTURE</a:t>
             </a:r>
             <a:endParaRPr lang="en-US" sz="1100" dirty="0"/>
           </a:p>
@@ -13847,7 +14475,7 @@
                 <a:ea typeface="Malgun Gothic" pitchFamily="34" charset="-122"/>
                 <a:cs typeface="Malgun Gothic" pitchFamily="34" charset="-120"/>
               </a:rPr>
-              <a:t>이번 추가 구현 — 2026.06.25</a:t>
+              <a:t>10개 에이전트와 블랙보드</a:t>
             </a:r>
             <a:endParaRPr lang="en-US" sz="2700" dirty="0"/>
           </a:p>
@@ -13886,7 +14514,7 @@
                 <a:ea typeface="Malgun Gothic" pitchFamily="34" charset="-122"/>
                 <a:cs typeface="Malgun Gothic" pitchFamily="34" charset="-120"/>
               </a:rPr>
-              <a:t>실 WMS(BGF로지스) 출고 흐름 반영 + 대화/관측/실시간 — 전 항목 평가 하네스 40/40 통과</a:t>
+              <a:t>에이전트는 서로를 모른다. 공유 게시판(블랙보드=DB)의 상태 변화에만 반응하는 ‘지식원(knowledge source)’이다.</a:t>
             </a:r>
             <a:endParaRPr lang="en-US" sz="1150" dirty="0"/>
           </a:p>
@@ -13894,18 +14522,57 @@
       </p:sp>
       <p:sp>
         <p:nvSpPr>
-          <p:cNvPr id="5" name="Shape 3"/>
-          <p:cNvSpPr/>
-          <p:nvPr/>
-        </p:nvSpPr>
-        <p:spPr>
-          <a:xfrm>
-            <a:off x="457200" y="1463040"/>
-            <a:ext cx="2679192" cy="1371600"/>
+          <p:cNvPr id="5" name="Text 3"/>
+          <p:cNvSpPr/>
+          <p:nvPr/>
+        </p:nvSpPr>
+        <p:spPr>
+          <a:xfrm>
+            <a:off x="457200" y="1481328"/>
+            <a:ext cx="4114800" cy="274320"/>
+          </a:xfrm>
+          <a:prstGeom prst="rect">
+            <a:avLst/>
+          </a:prstGeom>
+          <a:noFill/>
+          <a:ln/>
+        </p:spPr>
+        <p:txBody>
+          <a:bodyPr wrap="square" lIns="0" tIns="0" rIns="0" bIns="0" rtlCol="0" anchor="ctr"/>
+          <a:lstStyle/>
+          <a:p>
+            <a:pPr indent="0" marL="0">
+              <a:buNone/>
+            </a:pPr>
+            <a:r>
+              <a:rPr lang="en-US" sz="1200" b="1" dirty="0">
+                <a:solidFill>
+                  <a:srgbClr val="2B3A42"/>
+                </a:solidFill>
+                <a:latin typeface="Malgun Gothic" pitchFamily="34" charset="0"/>
+                <a:ea typeface="Malgun Gothic" pitchFamily="34" charset="-122"/>
+                <a:cs typeface="Malgun Gothic" pitchFamily="34" charset="-120"/>
+              </a:rPr>
+              <a:t>도메인 에이전트 6 — Action을 ‘제안’만 (DB write 없음)</a:t>
+            </a:r>
+            <a:endParaRPr lang="en-US" sz="1200" dirty="0"/>
+          </a:p>
+        </p:txBody>
+      </p:sp>
+      <p:sp>
+        <p:nvSpPr>
+          <p:cNvPr id="6" name="Shape 4"/>
+          <p:cNvSpPr/>
+          <p:nvPr/>
+        </p:nvSpPr>
+        <p:spPr>
+          <a:xfrm>
+            <a:off x="457200" y="1810512"/>
+            <a:ext cx="2029968" cy="512064"/>
           </a:xfrm>
           <a:prstGeom prst="roundRect">
             <a:avLst>
-              <a:gd name="adj" fmla="val 4667"/>
+              <a:gd name="adj" fmla="val 10714"/>
             </a:avLst>
           </a:prstGeom>
           <a:solidFill>
@@ -13916,53 +14583,50 @@
       </p:sp>
       <p:sp>
         <p:nvSpPr>
-          <p:cNvPr id="6" name="Text 4"/>
-          <p:cNvSpPr/>
-          <p:nvPr/>
-        </p:nvSpPr>
-        <p:spPr>
-          <a:xfrm>
-            <a:off x="640080" y="1600200"/>
-            <a:ext cx="2313432" cy="1097280"/>
-          </a:xfrm>
-          <a:prstGeom prst="rect">
-            <a:avLst/>
-          </a:prstGeom>
-          <a:noFill/>
-          <a:ln/>
-        </p:spPr>
-        <p:txBody>
-          <a:bodyPr wrap="square" lIns="0" tIns="0" rIns="0" bIns="0" rtlCol="0" anchor="t"/>
-          <a:lstStyle/>
-          <a:p>
-            <a:pPr indent="0" marL="0">
-              <a:buNone/>
-            </a:pPr>
-            <a:r>
-              <a:rPr lang="en-US" sz="1350" b="1" dirty="0">
-                <a:solidFill>
-                  <a:srgbClr val="2B3A42"/>
-                </a:solidFill>
-                <a:latin typeface="Malgun Gothic" pitchFamily="34" charset="0"/>
-                <a:ea typeface="Malgun Gothic" pitchFamily="34" charset="-122"/>
-                <a:cs typeface="Malgun Gothic" pitchFamily="34" charset="-120"/>
-              </a:rPr>
-              <a:t>출고 할당 · 결품</a:t>
-            </a:r>
-            <a:endParaRPr lang="en-US" sz="1350" dirty="0"/>
-          </a:p>
-          <a:p>
-            <a:pPr indent="0" marL="0">
-              <a:buNone/>
-            </a:pPr>
-            <a:endParaRPr lang="en-US" sz="1350" dirty="0"/>
-          </a:p>
-          <a:p>
-            <a:pPr indent="0" marL="0">
-              <a:buNone/>
-            </a:pPr>
-            <a:r>
-              <a:rPr lang="en-US" sz="980" dirty="0">
+          <p:cNvPr id="7" name="Text 5"/>
+          <p:cNvSpPr/>
+          <p:nvPr/>
+        </p:nvSpPr>
+        <p:spPr>
+          <a:xfrm>
+            <a:off x="566928" y="1874520"/>
+            <a:ext cx="1828800" cy="402336"/>
+          </a:xfrm>
+          <a:prstGeom prst="rect">
+            <a:avLst/>
+          </a:prstGeom>
+          <a:noFill/>
+          <a:ln/>
+        </p:spPr>
+        <p:txBody>
+          <a:bodyPr wrap="square" lIns="0" tIns="0" rIns="0" bIns="0" rtlCol="0" anchor="ctr"/>
+          <a:lstStyle/>
+          <a:p>
+            <a:pPr indent="0" marL="0">
+              <a:lnSpc>
+                <a:spcPct val="96000"/>
+              </a:lnSpc>
+              <a:buNone/>
+            </a:pPr>
+            <a:r>
+              <a:rPr lang="en-US" sz="1050" b="1" dirty="0">
+                <a:solidFill>
+                  <a:srgbClr val="028090"/>
+                </a:solidFill>
+                <a:latin typeface="Malgun Gothic" pitchFamily="34" charset="0"/>
+                <a:ea typeface="Malgun Gothic" pitchFamily="34" charset="-122"/>
+                <a:cs typeface="Malgun Gothic" pitchFamily="34" charset="-120"/>
+              </a:rPr>
+              <a:t>Inbound  </a:t>
+            </a:r>
+            <a:pPr indent="0" marL="0">
+              <a:lnSpc>
+                <a:spcPct val="96000"/>
+              </a:lnSpc>
+              <a:buNone/>
+            </a:pPr>
+            <a:r>
+              <a:rPr lang="en-US" sz="860" dirty="0">
                 <a:solidFill>
                   <a:srgbClr val="6B7A85"/>
                 </a:solidFill>
@@ -13970,43 +14634,26 @@
                 <a:ea typeface="Malgun Gothic" pitchFamily="34" charset="-122"/>
                 <a:cs typeface="Malgun Gothic" pitchFamily="34" charset="-120"/>
               </a:rPr>
-              <a:t>예정→할당→피킹→확정 수량 세분화 · ATP 예상결품 KPI</a:t>
-            </a:r>
-            <a:endParaRPr lang="en-US" sz="1350" dirty="0"/>
-          </a:p>
-          <a:p>
-            <a:pPr indent="0" marL="0">
-              <a:buNone/>
-            </a:pPr>
-            <a:r>
-              <a:rPr lang="en-US" sz="980" dirty="0">
-                <a:solidFill>
-                  <a:srgbClr val="6B7A85"/>
-                </a:solidFill>
-                <a:latin typeface="Malgun Gothic" pitchFamily="34" charset="0"/>
-                <a:ea typeface="Malgun Gothic" pitchFamily="34" charset="-122"/>
-                <a:cs typeface="Malgun Gothic" pitchFamily="34" charset="-120"/>
-              </a:rPr>
-              <a:t>allocation.py · Draft(ALLOCATION)</a:t>
-            </a:r>
-            <a:endParaRPr lang="en-US" sz="1350" dirty="0"/>
-          </a:p>
-        </p:txBody>
-      </p:sp>
-      <p:sp>
-        <p:nvSpPr>
-          <p:cNvPr id="7" name="Shape 5"/>
-          <p:cNvSpPr/>
-          <p:nvPr/>
-        </p:nvSpPr>
-        <p:spPr>
-          <a:xfrm>
-            <a:off x="3328416" y="1463040"/>
-            <a:ext cx="2679192" cy="1371600"/>
+              <a:t>입고 도착 → 입고작업</a:t>
+            </a:r>
+            <a:endParaRPr lang="en-US" sz="1050" dirty="0"/>
+          </a:p>
+        </p:txBody>
+      </p:sp>
+      <p:sp>
+        <p:nvSpPr>
+          <p:cNvPr id="8" name="Shape 6"/>
+          <p:cNvSpPr/>
+          <p:nvPr/>
+        </p:nvSpPr>
+        <p:spPr>
+          <a:xfrm>
+            <a:off x="2578608" y="1810512"/>
+            <a:ext cx="2029968" cy="512064"/>
           </a:xfrm>
           <a:prstGeom prst="roundRect">
             <a:avLst>
-              <a:gd name="adj" fmla="val 4667"/>
+              <a:gd name="adj" fmla="val 10714"/>
             </a:avLst>
           </a:prstGeom>
           <a:solidFill>
@@ -14017,53 +14664,50 @@
       </p:sp>
       <p:sp>
         <p:nvSpPr>
-          <p:cNvPr id="8" name="Text 6"/>
-          <p:cNvSpPr/>
-          <p:nvPr/>
-        </p:nvSpPr>
-        <p:spPr>
-          <a:xfrm>
-            <a:off x="3511296" y="1600200"/>
-            <a:ext cx="2313432" cy="1097280"/>
-          </a:xfrm>
-          <a:prstGeom prst="rect">
-            <a:avLst/>
-          </a:prstGeom>
-          <a:noFill/>
-          <a:ln/>
-        </p:spPr>
-        <p:txBody>
-          <a:bodyPr wrap="square" lIns="0" tIns="0" rIns="0" bIns="0" rtlCol="0" anchor="t"/>
-          <a:lstStyle/>
-          <a:p>
-            <a:pPr indent="0" marL="0">
-              <a:buNone/>
-            </a:pPr>
-            <a:r>
-              <a:rPr lang="en-US" sz="1350" b="1" dirty="0">
-                <a:solidFill>
-                  <a:srgbClr val="2B3A42"/>
-                </a:solidFill>
-                <a:latin typeface="Malgun Gothic" pitchFamily="34" charset="0"/>
-                <a:ea typeface="Malgun Gothic" pitchFamily="34" charset="-122"/>
-                <a:cs typeface="Malgun Gothic" pitchFamily="34" charset="-120"/>
-              </a:rPr>
-              <a:t>체화 · 보충</a:t>
-            </a:r>
-            <a:endParaRPr lang="en-US" sz="1350" dirty="0"/>
-          </a:p>
-          <a:p>
-            <a:pPr indent="0" marL="0">
-              <a:buNone/>
-            </a:pPr>
-            <a:endParaRPr lang="en-US" sz="1350" dirty="0"/>
-          </a:p>
-          <a:p>
-            <a:pPr indent="0" marL="0">
-              <a:buNone/>
-            </a:pPr>
-            <a:r>
-              <a:rPr lang="en-US" sz="980" dirty="0">
+          <p:cNvPr id="9" name="Text 7"/>
+          <p:cNvSpPr/>
+          <p:nvPr/>
+        </p:nvSpPr>
+        <p:spPr>
+          <a:xfrm>
+            <a:off x="2688336" y="1874520"/>
+            <a:ext cx="1828800" cy="402336"/>
+          </a:xfrm>
+          <a:prstGeom prst="rect">
+            <a:avLst/>
+          </a:prstGeom>
+          <a:noFill/>
+          <a:ln/>
+        </p:spPr>
+        <p:txBody>
+          <a:bodyPr wrap="square" lIns="0" tIns="0" rIns="0" bIns="0" rtlCol="0" anchor="ctr"/>
+          <a:lstStyle/>
+          <a:p>
+            <a:pPr indent="0" marL="0">
+              <a:lnSpc>
+                <a:spcPct val="96000"/>
+              </a:lnSpc>
+              <a:buNone/>
+            </a:pPr>
+            <a:r>
+              <a:rPr lang="en-US" sz="1050" b="1" dirty="0">
+                <a:solidFill>
+                  <a:srgbClr val="028090"/>
+                </a:solidFill>
+                <a:latin typeface="Malgun Gothic" pitchFamily="34" charset="0"/>
+                <a:ea typeface="Malgun Gothic" pitchFamily="34" charset="-122"/>
+                <a:cs typeface="Malgun Gothic" pitchFamily="34" charset="-120"/>
+              </a:rPr>
+              <a:t>Putaway  </a:t>
+            </a:r>
+            <a:pPr indent="0" marL="0">
+              <a:lnSpc>
+                <a:spcPct val="96000"/>
+              </a:lnSpc>
+              <a:buNone/>
+            </a:pPr>
+            <a:r>
+              <a:rPr lang="en-US" sz="860" dirty="0">
                 <a:solidFill>
                   <a:srgbClr val="6B7A85"/>
                 </a:solidFill>
@@ -14071,43 +14715,389 @@
                 <a:ea typeface="Malgun Gothic" pitchFamily="34" charset="-122"/>
                 <a:cs typeface="Malgun Gothic" pitchFamily="34" charset="-120"/>
               </a:rPr>
-              <a:t>EXPIRING/DEAD/SLOW 등급·처분 · PICK/RESERVE 2단 보충</a:t>
-            </a:r>
-            <a:endParaRPr lang="en-US" sz="1350" dirty="0"/>
-          </a:p>
-          <a:p>
-            <a:pPr indent="0" marL="0">
-              <a:buNone/>
-            </a:pPr>
-            <a:r>
-              <a:rPr lang="en-US" sz="980" dirty="0">
-                <a:solidFill>
-                  <a:srgbClr val="6B7A85"/>
-                </a:solidFill>
-                <a:latin typeface="Malgun Gothic" pitchFamily="34" charset="0"/>
-                <a:ea typeface="Malgun Gothic" pitchFamily="34" charset="-122"/>
-                <a:cs typeface="Malgun Gothic" pitchFamily="34" charset="-120"/>
-              </a:rPr>
-              <a:t>dead_stock.py · replenishment.py</a:t>
-            </a:r>
-            <a:endParaRPr lang="en-US" sz="1350" dirty="0"/>
-          </a:p>
-        </p:txBody>
-      </p:sp>
-      <p:sp>
-        <p:nvSpPr>
-          <p:cNvPr id="9" name="Shape 7"/>
-          <p:cNvSpPr/>
-          <p:nvPr/>
-        </p:nvSpPr>
-        <p:spPr>
-          <a:xfrm>
-            <a:off x="6199632" y="1463040"/>
-            <a:ext cx="2679192" cy="1371600"/>
+              <a:t>입고완료 → 적치 위치 배정</a:t>
+            </a:r>
+            <a:endParaRPr lang="en-US" sz="1050" dirty="0"/>
+          </a:p>
+        </p:txBody>
+      </p:sp>
+      <p:sp>
+        <p:nvSpPr>
+          <p:cNvPr id="10" name="Shape 8"/>
+          <p:cNvSpPr/>
+          <p:nvPr/>
+        </p:nvSpPr>
+        <p:spPr>
+          <a:xfrm>
+            <a:off x="457200" y="2414016"/>
+            <a:ext cx="2029968" cy="512064"/>
           </a:xfrm>
           <a:prstGeom prst="roundRect">
             <a:avLst>
-              <a:gd name="adj" fmla="val 4667"/>
+              <a:gd name="adj" fmla="val 10714"/>
+            </a:avLst>
+          </a:prstGeom>
+          <a:solidFill>
+            <a:srgbClr val="F4F6F7"/>
+          </a:solidFill>
+          <a:ln/>
+        </p:spPr>
+      </p:sp>
+      <p:sp>
+        <p:nvSpPr>
+          <p:cNvPr id="11" name="Text 9"/>
+          <p:cNvSpPr/>
+          <p:nvPr/>
+        </p:nvSpPr>
+        <p:spPr>
+          <a:xfrm>
+            <a:off x="566928" y="2478024"/>
+            <a:ext cx="1828800" cy="402336"/>
+          </a:xfrm>
+          <a:prstGeom prst="rect">
+            <a:avLst/>
+          </a:prstGeom>
+          <a:noFill/>
+          <a:ln/>
+        </p:spPr>
+        <p:txBody>
+          <a:bodyPr wrap="square" lIns="0" tIns="0" rIns="0" bIns="0" rtlCol="0" anchor="ctr"/>
+          <a:lstStyle/>
+          <a:p>
+            <a:pPr indent="0" marL="0">
+              <a:lnSpc>
+                <a:spcPct val="96000"/>
+              </a:lnSpc>
+              <a:buNone/>
+            </a:pPr>
+            <a:r>
+              <a:rPr lang="en-US" sz="1050" b="1" dirty="0">
+                <a:solidFill>
+                  <a:srgbClr val="028090"/>
+                </a:solidFill>
+                <a:latin typeface="Malgun Gothic" pitchFamily="34" charset="0"/>
+                <a:ea typeface="Malgun Gothic" pitchFamily="34" charset="-122"/>
+                <a:cs typeface="Malgun Gothic" pitchFamily="34" charset="-120"/>
+              </a:rPr>
+              <a:t>Picking  </a:t>
+            </a:r>
+            <a:pPr indent="0" marL="0">
+              <a:lnSpc>
+                <a:spcPct val="96000"/>
+              </a:lnSpc>
+              <a:buNone/>
+            </a:pPr>
+            <a:r>
+              <a:rPr lang="en-US" sz="860" dirty="0">
+                <a:solidFill>
+                  <a:srgbClr val="6B7A85"/>
+                </a:solidFill>
+                <a:latin typeface="Malgun Gothic" pitchFamily="34" charset="0"/>
+                <a:ea typeface="Malgun Gothic" pitchFamily="34" charset="-122"/>
+                <a:cs typeface="Malgun Gothic" pitchFamily="34" charset="-120"/>
+              </a:rPr>
+              <a:t>출고주문 → 예약 + 피킹작업</a:t>
+            </a:r>
+            <a:endParaRPr lang="en-US" sz="1050" dirty="0"/>
+          </a:p>
+        </p:txBody>
+      </p:sp>
+      <p:sp>
+        <p:nvSpPr>
+          <p:cNvPr id="12" name="Shape 10"/>
+          <p:cNvSpPr/>
+          <p:nvPr/>
+        </p:nvSpPr>
+        <p:spPr>
+          <a:xfrm>
+            <a:off x="2578608" y="2414016"/>
+            <a:ext cx="2029968" cy="512064"/>
+          </a:xfrm>
+          <a:prstGeom prst="roundRect">
+            <a:avLst>
+              <a:gd name="adj" fmla="val 10714"/>
+            </a:avLst>
+          </a:prstGeom>
+          <a:solidFill>
+            <a:srgbClr val="F4F6F7"/>
+          </a:solidFill>
+          <a:ln/>
+        </p:spPr>
+      </p:sp>
+      <p:sp>
+        <p:nvSpPr>
+          <p:cNvPr id="13" name="Text 11"/>
+          <p:cNvSpPr/>
+          <p:nvPr/>
+        </p:nvSpPr>
+        <p:spPr>
+          <a:xfrm>
+            <a:off x="2688336" y="2478024"/>
+            <a:ext cx="1828800" cy="402336"/>
+          </a:xfrm>
+          <a:prstGeom prst="rect">
+            <a:avLst/>
+          </a:prstGeom>
+          <a:noFill/>
+          <a:ln/>
+        </p:spPr>
+        <p:txBody>
+          <a:bodyPr wrap="square" lIns="0" tIns="0" rIns="0" bIns="0" rtlCol="0" anchor="ctr"/>
+          <a:lstStyle/>
+          <a:p>
+            <a:pPr indent="0" marL="0">
+              <a:lnSpc>
+                <a:spcPct val="96000"/>
+              </a:lnSpc>
+              <a:buNone/>
+            </a:pPr>
+            <a:r>
+              <a:rPr lang="en-US" sz="1050" b="1" dirty="0">
+                <a:solidFill>
+                  <a:srgbClr val="028090"/>
+                </a:solidFill>
+                <a:latin typeface="Malgun Gothic" pitchFamily="34" charset="0"/>
+                <a:ea typeface="Malgun Gothic" pitchFamily="34" charset="-122"/>
+                <a:cs typeface="Malgun Gothic" pitchFamily="34" charset="-120"/>
+              </a:rPr>
+              <a:t>Outbound  </a:t>
+            </a:r>
+            <a:pPr indent="0" marL="0">
+              <a:lnSpc>
+                <a:spcPct val="96000"/>
+              </a:lnSpc>
+              <a:buNone/>
+            </a:pPr>
+            <a:r>
+              <a:rPr lang="en-US" sz="860" dirty="0">
+                <a:solidFill>
+                  <a:srgbClr val="6B7A85"/>
+                </a:solidFill>
+                <a:latin typeface="Malgun Gothic" pitchFamily="34" charset="0"/>
+                <a:ea typeface="Malgun Gothic" pitchFamily="34" charset="-122"/>
+                <a:cs typeface="Malgun Gothic" pitchFamily="34" charset="-120"/>
+              </a:rPr>
+              <a:t>임박 → 우선순위 / 출고준비</a:t>
+            </a:r>
+            <a:endParaRPr lang="en-US" sz="1050" dirty="0"/>
+          </a:p>
+        </p:txBody>
+      </p:sp>
+      <p:sp>
+        <p:nvSpPr>
+          <p:cNvPr id="14" name="Shape 12"/>
+          <p:cNvSpPr/>
+          <p:nvPr/>
+        </p:nvSpPr>
+        <p:spPr>
+          <a:xfrm>
+            <a:off x="457200" y="3017520"/>
+            <a:ext cx="2029968" cy="512064"/>
+          </a:xfrm>
+          <a:prstGeom prst="roundRect">
+            <a:avLst>
+              <a:gd name="adj" fmla="val 10714"/>
+            </a:avLst>
+          </a:prstGeom>
+          <a:solidFill>
+            <a:srgbClr val="F4F6F7"/>
+          </a:solidFill>
+          <a:ln/>
+        </p:spPr>
+      </p:sp>
+      <p:sp>
+        <p:nvSpPr>
+          <p:cNvPr id="15" name="Text 13"/>
+          <p:cNvSpPr/>
+          <p:nvPr/>
+        </p:nvSpPr>
+        <p:spPr>
+          <a:xfrm>
+            <a:off x="566928" y="3081528"/>
+            <a:ext cx="1828800" cy="402336"/>
+          </a:xfrm>
+          <a:prstGeom prst="rect">
+            <a:avLst/>
+          </a:prstGeom>
+          <a:noFill/>
+          <a:ln/>
+        </p:spPr>
+        <p:txBody>
+          <a:bodyPr wrap="square" lIns="0" tIns="0" rIns="0" bIns="0" rtlCol="0" anchor="ctr"/>
+          <a:lstStyle/>
+          <a:p>
+            <a:pPr indent="0" marL="0">
+              <a:lnSpc>
+                <a:spcPct val="96000"/>
+              </a:lnSpc>
+              <a:buNone/>
+            </a:pPr>
+            <a:r>
+              <a:rPr lang="en-US" sz="1050" b="1" dirty="0">
+                <a:solidFill>
+                  <a:srgbClr val="028090"/>
+                </a:solidFill>
+                <a:latin typeface="Malgun Gothic" pitchFamily="34" charset="0"/>
+                <a:ea typeface="Malgun Gothic" pitchFamily="34" charset="-122"/>
+                <a:cs typeface="Malgun Gothic" pitchFamily="34" charset="-120"/>
+              </a:rPr>
+              <a:t>Resource  </a:t>
+            </a:r>
+            <a:pPr indent="0" marL="0">
+              <a:lnSpc>
+                <a:spcPct val="96000"/>
+              </a:lnSpc>
+              <a:buNone/>
+            </a:pPr>
+            <a:r>
+              <a:rPr lang="en-US" sz="860" dirty="0">
+                <a:solidFill>
+                  <a:srgbClr val="6B7A85"/>
+                </a:solidFill>
+                <a:latin typeface="Malgun Gothic" pitchFamily="34" charset="0"/>
+                <a:ea typeface="Malgun Gothic" pitchFamily="34" charset="-122"/>
+                <a:cs typeface="Malgun Gothic" pitchFamily="34" charset="-120"/>
+              </a:rPr>
+              <a:t>작업 발생 → 작업자 배정</a:t>
+            </a:r>
+            <a:endParaRPr lang="en-US" sz="1050" dirty="0"/>
+          </a:p>
+        </p:txBody>
+      </p:sp>
+      <p:sp>
+        <p:nvSpPr>
+          <p:cNvPr id="16" name="Shape 14"/>
+          <p:cNvSpPr/>
+          <p:nvPr/>
+        </p:nvSpPr>
+        <p:spPr>
+          <a:xfrm>
+            <a:off x="2578608" y="3017520"/>
+            <a:ext cx="2029968" cy="512064"/>
+          </a:xfrm>
+          <a:prstGeom prst="roundRect">
+            <a:avLst>
+              <a:gd name="adj" fmla="val 10714"/>
+            </a:avLst>
+          </a:prstGeom>
+          <a:solidFill>
+            <a:srgbClr val="F4F6F7"/>
+          </a:solidFill>
+          <a:ln/>
+        </p:spPr>
+      </p:sp>
+      <p:sp>
+        <p:nvSpPr>
+          <p:cNvPr id="17" name="Text 15"/>
+          <p:cNvSpPr/>
+          <p:nvPr/>
+        </p:nvSpPr>
+        <p:spPr>
+          <a:xfrm>
+            <a:off x="2688336" y="3081528"/>
+            <a:ext cx="1828800" cy="402336"/>
+          </a:xfrm>
+          <a:prstGeom prst="rect">
+            <a:avLst/>
+          </a:prstGeom>
+          <a:noFill/>
+          <a:ln/>
+        </p:spPr>
+        <p:txBody>
+          <a:bodyPr wrap="square" lIns="0" tIns="0" rIns="0" bIns="0" rtlCol="0" anchor="ctr"/>
+          <a:lstStyle/>
+          <a:p>
+            <a:pPr indent="0" marL="0">
+              <a:lnSpc>
+                <a:spcPct val="96000"/>
+              </a:lnSpc>
+              <a:buNone/>
+            </a:pPr>
+            <a:r>
+              <a:rPr lang="en-US" sz="1050" b="1" dirty="0">
+                <a:solidFill>
+                  <a:srgbClr val="028090"/>
+                </a:solidFill>
+                <a:latin typeface="Malgun Gothic" pitchFamily="34" charset="0"/>
+                <a:ea typeface="Malgun Gothic" pitchFamily="34" charset="-122"/>
+                <a:cs typeface="Malgun Gothic" pitchFamily="34" charset="-120"/>
+              </a:rPr>
+              <a:t>InventoryRisk  </a:t>
+            </a:r>
+            <a:pPr indent="0" marL="0">
+              <a:lnSpc>
+                <a:spcPct val="96000"/>
+              </a:lnSpc>
+              <a:buNone/>
+            </a:pPr>
+            <a:r>
+              <a:rPr lang="en-US" sz="860" dirty="0">
+                <a:solidFill>
+                  <a:srgbClr val="6B7A85"/>
+                </a:solidFill>
+                <a:latin typeface="Malgun Gothic" pitchFamily="34" charset="0"/>
+                <a:ea typeface="Malgun Gothic" pitchFamily="34" charset="-122"/>
+                <a:cs typeface="Malgun Gothic" pitchFamily="34" charset="-120"/>
+              </a:rPr>
+              <a:t>결품 위험 → 경보(자동실행 금지)</a:t>
+            </a:r>
+            <a:endParaRPr lang="en-US" sz="1050" dirty="0"/>
+          </a:p>
+        </p:txBody>
+      </p:sp>
+      <p:sp>
+        <p:nvSpPr>
+          <p:cNvPr id="18" name="Text 16"/>
+          <p:cNvSpPr/>
+          <p:nvPr/>
+        </p:nvSpPr>
+        <p:spPr>
+          <a:xfrm>
+            <a:off x="4754880" y="1481328"/>
+            <a:ext cx="3931920" cy="274320"/>
+          </a:xfrm>
+          <a:prstGeom prst="rect">
+            <a:avLst/>
+          </a:prstGeom>
+          <a:noFill/>
+          <a:ln/>
+        </p:spPr>
+        <p:txBody>
+          <a:bodyPr wrap="square" lIns="0" tIns="0" rIns="0" bIns="0" rtlCol="0" anchor="ctr"/>
+          <a:lstStyle/>
+          <a:p>
+            <a:pPr indent="0" marL="0">
+              <a:buNone/>
+            </a:pPr>
+            <a:r>
+              <a:rPr lang="en-US" sz="1200" b="1" dirty="0">
+                <a:solidFill>
+                  <a:srgbClr val="2B3A42"/>
+                </a:solidFill>
+                <a:latin typeface="Malgun Gothic" pitchFamily="34" charset="0"/>
+                <a:ea typeface="Malgun Gothic" pitchFamily="34" charset="-122"/>
+                <a:cs typeface="Malgun Gothic" pitchFamily="34" charset="-120"/>
+              </a:rPr>
+              <a:t>인프라 에이전트 4 — 공통(cross-cutting)</a:t>
+            </a:r>
+            <a:endParaRPr lang="en-US" sz="1200" dirty="0"/>
+          </a:p>
+        </p:txBody>
+      </p:sp>
+      <p:sp>
+        <p:nvSpPr>
+          <p:cNvPr id="19" name="Shape 17"/>
+          <p:cNvSpPr/>
+          <p:nvPr/>
+        </p:nvSpPr>
+        <p:spPr>
+          <a:xfrm>
+            <a:off x="4754880" y="1810512"/>
+            <a:ext cx="3931920" cy="493776"/>
+          </a:xfrm>
+          <a:prstGeom prst="roundRect">
+            <a:avLst>
+              <a:gd name="adj" fmla="val 11111"/>
             </a:avLst>
           </a:prstGeom>
           <a:solidFill>
@@ -14118,30 +15108,33 @@
       </p:sp>
       <p:sp>
         <p:nvSpPr>
-          <p:cNvPr id="10" name="Text 8"/>
-          <p:cNvSpPr/>
-          <p:nvPr/>
-        </p:nvSpPr>
-        <p:spPr>
-          <a:xfrm>
-            <a:off x="6382512" y="1600200"/>
-            <a:ext cx="2313432" cy="1097280"/>
-          </a:xfrm>
-          <a:prstGeom prst="rect">
-            <a:avLst/>
-          </a:prstGeom>
-          <a:noFill/>
-          <a:ln/>
-        </p:spPr>
-        <p:txBody>
-          <a:bodyPr wrap="square" lIns="0" tIns="0" rIns="0" bIns="0" rtlCol="0" anchor="t"/>
-          <a:lstStyle/>
-          <a:p>
-            <a:pPr indent="0" marL="0">
-              <a:buNone/>
-            </a:pPr>
-            <a:r>
-              <a:rPr lang="en-US" sz="1350" b="1" dirty="0">
+          <p:cNvPr id="20" name="Text 18"/>
+          <p:cNvSpPr/>
+          <p:nvPr/>
+        </p:nvSpPr>
+        <p:spPr>
+          <a:xfrm>
+            <a:off x="4882896" y="1856232"/>
+            <a:ext cx="3703320" cy="402336"/>
+          </a:xfrm>
+          <a:prstGeom prst="rect">
+            <a:avLst/>
+          </a:prstGeom>
+          <a:noFill/>
+          <a:ln/>
+        </p:spPr>
+        <p:txBody>
+          <a:bodyPr wrap="square" lIns="0" tIns="0" rIns="0" bIns="0" rtlCol="0" anchor="ctr"/>
+          <a:lstStyle/>
+          <a:p>
+            <a:pPr indent="0" marL="0">
+              <a:lnSpc>
+                <a:spcPct val="96000"/>
+              </a:lnSpc>
+              <a:buNone/>
+            </a:pPr>
+            <a:r>
+              <a:rPr lang="en-US" sz="1050" b="1" dirty="0">
                 <a:solidFill>
                   <a:srgbClr val="028090"/>
                 </a:solidFill>
@@ -14149,22 +15142,16 @@
                 <a:ea typeface="Malgun Gothic" pitchFamily="34" charset="-122"/>
                 <a:cs typeface="Malgun Gothic" pitchFamily="34" charset="-120"/>
               </a:rPr>
-              <a:t>실시간 수요</a:t>
-            </a:r>
-            <a:endParaRPr lang="en-US" sz="1350" dirty="0"/>
-          </a:p>
-          <a:p>
-            <a:pPr indent="0" marL="0">
-              <a:buNone/>
-            </a:pPr>
-            <a:endParaRPr lang="en-US" sz="1350" dirty="0"/>
-          </a:p>
-          <a:p>
-            <a:pPr indent="0" marL="0">
-              <a:buNone/>
-            </a:pPr>
-            <a:r>
-              <a:rPr lang="en-US" sz="980" dirty="0">
+              <a:t>Control  </a:t>
+            </a:r>
+            <a:pPr indent="0" marL="0">
+              <a:lnSpc>
+                <a:spcPct val="96000"/>
+              </a:lnSpc>
+              <a:buNone/>
+            </a:pPr>
+            <a:r>
+              <a:rPr lang="en-US" sz="900" dirty="0">
                 <a:solidFill>
                   <a:srgbClr val="6B7A85"/>
                 </a:solidFill>
@@ -14172,346 +15159,26 @@
                 <a:ea typeface="Malgun Gothic" pitchFamily="34" charset="-122"/>
                 <a:cs typeface="Malgun Gothic" pitchFamily="34" charset="-120"/>
               </a:rPr>
-              <a:t>가상 입·출고 생성→DB→SSE Toast · 설정모달 · LLM 즉시 인지</a:t>
-            </a:r>
-            <a:endParaRPr lang="en-US" sz="1350" dirty="0"/>
-          </a:p>
-          <a:p>
-            <a:pPr indent="0" marL="0">
-              <a:buNone/>
-            </a:pPr>
-            <a:r>
-              <a:rPr lang="en-US" sz="980" dirty="0">
-                <a:solidFill>
-                  <a:srgbClr val="6B7A85"/>
-                </a:solidFill>
-                <a:latin typeface="Malgun Gothic" pitchFamily="34" charset="0"/>
-                <a:ea typeface="Malgun Gothic" pitchFamily="34" charset="-122"/>
-                <a:cs typeface="Malgun Gothic" pitchFamily="34" charset="-120"/>
-              </a:rPr>
-              <a:t>realtime.py</a:t>
-            </a:r>
-            <a:endParaRPr lang="en-US" sz="1350" dirty="0"/>
-          </a:p>
-        </p:txBody>
-      </p:sp>
-      <p:sp>
-        <p:nvSpPr>
-          <p:cNvPr id="11" name="Shape 9"/>
-          <p:cNvSpPr/>
-          <p:nvPr/>
-        </p:nvSpPr>
-        <p:spPr>
-          <a:xfrm>
-            <a:off x="457200" y="3017520"/>
-            <a:ext cx="2679192" cy="1371600"/>
+              <a:t>유일한 주기 스케줄러 — 이벤트를 읽어 에이전트에 분배</a:t>
+            </a:r>
+            <a:endParaRPr lang="en-US" sz="1050" dirty="0"/>
+          </a:p>
+        </p:txBody>
+      </p:sp>
+      <p:sp>
+        <p:nvSpPr>
+          <p:cNvPr id="21" name="Shape 19"/>
+          <p:cNvSpPr/>
+          <p:nvPr/>
+        </p:nvSpPr>
+        <p:spPr>
+          <a:xfrm>
+            <a:off x="4754880" y="2377440"/>
+            <a:ext cx="3931920" cy="493776"/>
           </a:xfrm>
           <a:prstGeom prst="roundRect">
             <a:avLst>
-              <a:gd name="adj" fmla="val 4667"/>
-            </a:avLst>
-          </a:prstGeom>
-          <a:solidFill>
-            <a:srgbClr val="F4F6F7"/>
-          </a:solidFill>
-          <a:ln/>
-        </p:spPr>
-      </p:sp>
-      <p:sp>
-        <p:nvSpPr>
-          <p:cNvPr id="12" name="Text 10"/>
-          <p:cNvSpPr/>
-          <p:nvPr/>
-        </p:nvSpPr>
-        <p:spPr>
-          <a:xfrm>
-            <a:off x="640080" y="3154680"/>
-            <a:ext cx="2313432" cy="1097280"/>
-          </a:xfrm>
-          <a:prstGeom prst="rect">
-            <a:avLst/>
-          </a:prstGeom>
-          <a:noFill/>
-          <a:ln/>
-        </p:spPr>
-        <p:txBody>
-          <a:bodyPr wrap="square" lIns="0" tIns="0" rIns="0" bIns="0" rtlCol="0" anchor="t"/>
-          <a:lstStyle/>
-          <a:p>
-            <a:pPr indent="0" marL="0">
-              <a:buNone/>
-            </a:pPr>
-            <a:r>
-              <a:rPr lang="en-US" sz="1350" b="1" dirty="0">
-                <a:solidFill>
-                  <a:srgbClr val="2B3A42"/>
-                </a:solidFill>
-                <a:latin typeface="Malgun Gothic" pitchFamily="34" charset="0"/>
-                <a:ea typeface="Malgun Gothic" pitchFamily="34" charset="-122"/>
-                <a:cs typeface="Malgun Gothic" pitchFamily="34" charset="-120"/>
-              </a:rPr>
-              <a:t>대화 메모리</a:t>
-            </a:r>
-            <a:endParaRPr lang="en-US" sz="1350" dirty="0"/>
-          </a:p>
-          <a:p>
-            <a:pPr indent="0" marL="0">
-              <a:buNone/>
-            </a:pPr>
-            <a:endParaRPr lang="en-US" sz="1350" dirty="0"/>
-          </a:p>
-          <a:p>
-            <a:pPr indent="0" marL="0">
-              <a:buNone/>
-            </a:pPr>
-            <a:r>
-              <a:rPr lang="en-US" sz="980" dirty="0">
-                <a:solidFill>
-                  <a:srgbClr val="6B7A85"/>
-                </a:solidFill>
-                <a:latin typeface="Malgun Gothic" pitchFamily="34" charset="0"/>
-                <a:ea typeface="Malgun Gothic" pitchFamily="34" charset="-122"/>
-                <a:cs typeface="Malgun Gothic" pitchFamily="34" charset="-120"/>
-              </a:rPr>
-              <a:t>세션 저장·복원(사이드바) + 멀티턴 맥락(대명사 해소)</a:t>
-            </a:r>
-            <a:endParaRPr lang="en-US" sz="1350" dirty="0"/>
-          </a:p>
-          <a:p>
-            <a:pPr indent="0" marL="0">
-              <a:buNone/>
-            </a:pPr>
-            <a:r>
-              <a:rPr lang="en-US" sz="980" dirty="0">
-                <a:solidFill>
-                  <a:srgbClr val="6B7A85"/>
-                </a:solidFill>
-                <a:latin typeface="Malgun Gothic" pitchFamily="34" charset="0"/>
-                <a:ea typeface="Malgun Gothic" pitchFamily="34" charset="-122"/>
-                <a:cs typeface="Malgun Gothic" pitchFamily="34" charset="-120"/>
-              </a:rPr>
-              <a:t>chat_store.py</a:t>
-            </a:r>
-            <a:endParaRPr lang="en-US" sz="1350" dirty="0"/>
-          </a:p>
-        </p:txBody>
-      </p:sp>
-      <p:sp>
-        <p:nvSpPr>
-          <p:cNvPr id="13" name="Shape 11"/>
-          <p:cNvSpPr/>
-          <p:nvPr/>
-        </p:nvSpPr>
-        <p:spPr>
-          <a:xfrm>
-            <a:off x="3328416" y="3017520"/>
-            <a:ext cx="2679192" cy="1371600"/>
-          </a:xfrm>
-          <a:prstGeom prst="roundRect">
-            <a:avLst>
-              <a:gd name="adj" fmla="val 4667"/>
-            </a:avLst>
-          </a:prstGeom>
-          <a:solidFill>
-            <a:srgbClr val="F4F6F7"/>
-          </a:solidFill>
-          <a:ln/>
-        </p:spPr>
-      </p:sp>
-      <p:sp>
-        <p:nvSpPr>
-          <p:cNvPr id="14" name="Text 12"/>
-          <p:cNvSpPr/>
-          <p:nvPr/>
-        </p:nvSpPr>
-        <p:spPr>
-          <a:xfrm>
-            <a:off x="3511296" y="3154680"/>
-            <a:ext cx="2313432" cy="1097280"/>
-          </a:xfrm>
-          <a:prstGeom prst="rect">
-            <a:avLst/>
-          </a:prstGeom>
-          <a:noFill/>
-          <a:ln/>
-        </p:spPr>
-        <p:txBody>
-          <a:bodyPr wrap="square" lIns="0" tIns="0" rIns="0" bIns="0" rtlCol="0" anchor="t"/>
-          <a:lstStyle/>
-          <a:p>
-            <a:pPr indent="0" marL="0">
-              <a:buNone/>
-            </a:pPr>
-            <a:r>
-              <a:rPr lang="en-US" sz="1350" b="1" dirty="0">
-                <a:solidFill>
-                  <a:srgbClr val="2B3A42"/>
-                </a:solidFill>
-                <a:latin typeface="Malgun Gothic" pitchFamily="34" charset="0"/>
-                <a:ea typeface="Malgun Gothic" pitchFamily="34" charset="-122"/>
-                <a:cs typeface="Malgun Gothic" pitchFamily="34" charset="-120"/>
-              </a:rPr>
-              <a:t>Approval · 관측</a:t>
-            </a:r>
-            <a:endParaRPr lang="en-US" sz="1350" dirty="0"/>
-          </a:p>
-          <a:p>
-            <a:pPr indent="0" marL="0">
-              <a:buNone/>
-            </a:pPr>
-            <a:endParaRPr lang="en-US" sz="1350" dirty="0"/>
-          </a:p>
-          <a:p>
-            <a:pPr indent="0" marL="0">
-              <a:buNone/>
-            </a:pPr>
-            <a:r>
-              <a:rPr lang="en-US" sz="980" dirty="0">
-                <a:solidFill>
-                  <a:srgbClr val="6B7A85"/>
-                </a:solidFill>
-                <a:latin typeface="Malgun Gothic" pitchFamily="34" charset="0"/>
-                <a:ea typeface="Malgun Gothic" pitchFamily="34" charset="-122"/>
-                <a:cs typeface="Malgun Gothic" pitchFamily="34" charset="-120"/>
-              </a:rPr>
-              <a:t>상태변경 승인 통합 화면 · LangGraph/RAG 트레이스</a:t>
-            </a:r>
-            <a:endParaRPr lang="en-US" sz="1350" dirty="0"/>
-          </a:p>
-          <a:p>
-            <a:pPr indent="0" marL="0">
-              <a:buNone/>
-            </a:pPr>
-            <a:r>
-              <a:rPr lang="en-US" sz="980" dirty="0">
-                <a:solidFill>
-                  <a:srgbClr val="6B7A85"/>
-                </a:solidFill>
-                <a:latin typeface="Malgun Gothic" pitchFamily="34" charset="0"/>
-                <a:ea typeface="Malgun Gothic" pitchFamily="34" charset="-122"/>
-                <a:cs typeface="Malgun Gothic" pitchFamily="34" charset="-120"/>
-              </a:rPr>
-              <a:t>trace_store.py · web SPA</a:t>
-            </a:r>
-            <a:endParaRPr lang="en-US" sz="1350" dirty="0"/>
-          </a:p>
-        </p:txBody>
-      </p:sp>
-      <p:sp>
-        <p:nvSpPr>
-          <p:cNvPr id="15" name="Shape 13"/>
-          <p:cNvSpPr/>
-          <p:nvPr/>
-        </p:nvSpPr>
-        <p:spPr>
-          <a:xfrm>
-            <a:off x="6199632" y="3017520"/>
-            <a:ext cx="2679192" cy="1371600"/>
-          </a:xfrm>
-          <a:prstGeom prst="roundRect">
-            <a:avLst>
-              <a:gd name="adj" fmla="val 4667"/>
-            </a:avLst>
-          </a:prstGeom>
-          <a:solidFill>
-            <a:srgbClr val="F4F6F7"/>
-          </a:solidFill>
-          <a:ln/>
-        </p:spPr>
-      </p:sp>
-      <p:sp>
-        <p:nvSpPr>
-          <p:cNvPr id="16" name="Text 14"/>
-          <p:cNvSpPr/>
-          <p:nvPr/>
-        </p:nvSpPr>
-        <p:spPr>
-          <a:xfrm>
-            <a:off x="6382512" y="3154680"/>
-            <a:ext cx="2313432" cy="1097280"/>
-          </a:xfrm>
-          <a:prstGeom prst="rect">
-            <a:avLst/>
-          </a:prstGeom>
-          <a:noFill/>
-          <a:ln/>
-        </p:spPr>
-        <p:txBody>
-          <a:bodyPr wrap="square" lIns="0" tIns="0" rIns="0" bIns="0" rtlCol="0" anchor="t"/>
-          <a:lstStyle/>
-          <a:p>
-            <a:pPr indent="0" marL="0">
-              <a:buNone/>
-            </a:pPr>
-            <a:r>
-              <a:rPr lang="en-US" sz="1350" b="1" dirty="0">
-                <a:solidFill>
-                  <a:srgbClr val="2B3A42"/>
-                </a:solidFill>
-                <a:latin typeface="Malgun Gothic" pitchFamily="34" charset="0"/>
-                <a:ea typeface="Malgun Gothic" pitchFamily="34" charset="-122"/>
-                <a:cs typeface="Malgun Gothic" pitchFamily="34" charset="-120"/>
-              </a:rPr>
-              <a:t>냉장·고회전·지연</a:t>
-            </a:r>
-            <a:endParaRPr lang="en-US" sz="1350" dirty="0"/>
-          </a:p>
-          <a:p>
-            <a:pPr indent="0" marL="0">
-              <a:buNone/>
-            </a:pPr>
-            <a:endParaRPr lang="en-US" sz="1350" dirty="0"/>
-          </a:p>
-          <a:p>
-            <a:pPr indent="0" marL="0">
-              <a:buNone/>
-            </a:pPr>
-            <a:r>
-              <a:rPr lang="en-US" sz="980" dirty="0">
-                <a:solidFill>
-                  <a:srgbClr val="6B7A85"/>
-                </a:solidFill>
-                <a:latin typeface="Malgun Gothic" pitchFamily="34" charset="0"/>
-                <a:ea typeface="Malgun Gothic" pitchFamily="34" charset="-122"/>
-                <a:cs typeface="Malgun Gothic" pitchFamily="34" charset="-120"/>
-              </a:rPr>
-              <a:t>냉장/일반 2종·격리·트윈 표현 · 고회전 입구 슬로팅 · 지연 10배</a:t>
-            </a:r>
-            <a:endParaRPr lang="en-US" sz="1350" dirty="0"/>
-          </a:p>
-          <a:p>
-            <a:pPr indent="0" marL="0">
-              <a:buNone/>
-            </a:pPr>
-            <a:r>
-              <a:rPr lang="en-US" sz="980" dirty="0">
-                <a:solidFill>
-                  <a:srgbClr val="6B7A85"/>
-                </a:solidFill>
-                <a:latin typeface="Malgun Gothic" pitchFamily="34" charset="0"/>
-                <a:ea typeface="Malgun Gothic" pitchFamily="34" charset="-122"/>
-                <a:cs typeface="Malgun Gothic" pitchFamily="34" charset="-120"/>
-              </a:rPr>
-              <a:t>des.py · stocking.py</a:t>
-            </a:r>
-            <a:endParaRPr lang="en-US" sz="1350" dirty="0"/>
-          </a:p>
-        </p:txBody>
-      </p:sp>
-      <p:sp>
-        <p:nvSpPr>
-          <p:cNvPr id="17" name="Shape 15"/>
-          <p:cNvSpPr/>
-          <p:nvPr/>
-        </p:nvSpPr>
-        <p:spPr>
-          <a:xfrm>
-            <a:off x="457200" y="4526280"/>
-            <a:ext cx="8229600" cy="502920"/>
-          </a:xfrm>
-          <a:prstGeom prst="roundRect">
-            <a:avLst>
-              <a:gd name="adj" fmla="val 12727"/>
+              <a:gd name="adj" fmla="val 11111"/>
             </a:avLst>
           </a:prstGeom>
           <a:solidFill>
@@ -14522,14 +15189,14 @@
       </p:sp>
       <p:sp>
         <p:nvSpPr>
-          <p:cNvPr id="18" name="Text 16"/>
-          <p:cNvSpPr/>
-          <p:nvPr/>
-        </p:nvSpPr>
-        <p:spPr>
-          <a:xfrm>
-            <a:off x="658368" y="4526280"/>
-            <a:ext cx="7863840" cy="502920"/>
+          <p:cNvPr id="22" name="Text 20"/>
+          <p:cNvSpPr/>
+          <p:nvPr/>
+        </p:nvSpPr>
+        <p:spPr>
+          <a:xfrm>
+            <a:off x="4882896" y="2423160"/>
+            <a:ext cx="3703320" cy="402336"/>
           </a:xfrm>
           <a:prstGeom prst="rect">
             <a:avLst/>
@@ -14542,6 +15209,9 @@
           <a:lstStyle/>
           <a:p>
             <a:pPr indent="0" marL="0">
+              <a:lnSpc>
+                <a:spcPct val="96000"/>
+              </a:lnSpc>
               <a:buNone/>
             </a:pPr>
             <a:r>
@@ -14553,21 +15223,284 @@
                 <a:ea typeface="Malgun Gothic" pitchFamily="34" charset="-122"/>
                 <a:cs typeface="Malgun Gothic" pitchFamily="34" charset="-120"/>
               </a:rPr>
-              <a:t xml:space="preserve">평가 하네스  </a:t>
-            </a:r>
-            <a:pPr indent="0" marL="0">
+              <a:t>Policy  </a:t>
+            </a:r>
+            <a:pPr indent="0" marL="0">
+              <a:lnSpc>
+                <a:spcPct val="96000"/>
+              </a:lnSpc>
+              <a:buNone/>
+            </a:pPr>
+            <a:r>
+              <a:rPr lang="en-US" sz="900" dirty="0">
+                <a:solidFill>
+                  <a:srgbClr val="6B7A85"/>
+                </a:solidFill>
+                <a:latin typeface="Malgun Gothic" pitchFamily="34" charset="0"/>
+                <a:ea typeface="Malgun Gothic" pitchFamily="34" charset="-122"/>
+                <a:cs typeface="Malgun Gothic" pitchFamily="34" charset="-120"/>
+              </a:rPr>
+              <a:t>자동실행 가부 게이트(위험 Action 차단)</a:t>
+            </a:r>
+            <a:endParaRPr lang="en-US" sz="1050" dirty="0"/>
+          </a:p>
+        </p:txBody>
+      </p:sp>
+      <p:sp>
+        <p:nvSpPr>
+          <p:cNvPr id="23" name="Shape 21"/>
+          <p:cNvSpPr/>
+          <p:nvPr/>
+        </p:nvSpPr>
+        <p:spPr>
+          <a:xfrm>
+            <a:off x="4754880" y="2944368"/>
+            <a:ext cx="3931920" cy="493776"/>
+          </a:xfrm>
+          <a:prstGeom prst="roundRect">
+            <a:avLst>
+              <a:gd name="adj" fmla="val 11111"/>
+            </a:avLst>
+          </a:prstGeom>
+          <a:solidFill>
+            <a:srgbClr val="EDF5F6"/>
+          </a:solidFill>
+          <a:ln/>
+        </p:spPr>
+      </p:sp>
+      <p:sp>
+        <p:nvSpPr>
+          <p:cNvPr id="24" name="Text 22"/>
+          <p:cNvSpPr/>
+          <p:nvPr/>
+        </p:nvSpPr>
+        <p:spPr>
+          <a:xfrm>
+            <a:off x="4882896" y="2990088"/>
+            <a:ext cx="3703320" cy="402336"/>
+          </a:xfrm>
+          <a:prstGeom prst="rect">
+            <a:avLst/>
+          </a:prstGeom>
+          <a:noFill/>
+          <a:ln/>
+        </p:spPr>
+        <p:txBody>
+          <a:bodyPr wrap="square" lIns="0" tIns="0" rIns="0" bIns="0" rtlCol="0" anchor="ctr"/>
+          <a:lstStyle/>
+          <a:p>
+            <a:pPr indent="0" marL="0">
+              <a:lnSpc>
+                <a:spcPct val="96000"/>
+              </a:lnSpc>
+              <a:buNone/>
+            </a:pPr>
+            <a:r>
+              <a:rPr lang="en-US" sz="1050" b="1" dirty="0">
+                <a:solidFill>
+                  <a:srgbClr val="028090"/>
+                </a:solidFill>
+                <a:latin typeface="Malgun Gothic" pitchFamily="34" charset="0"/>
+                <a:ea typeface="Malgun Gothic" pitchFamily="34" charset="-122"/>
+                <a:cs typeface="Malgun Gothic" pitchFamily="34" charset="-120"/>
+              </a:rPr>
+              <a:t>Simulation  </a:t>
+            </a:r>
+            <a:pPr indent="0" marL="0">
+              <a:lnSpc>
+                <a:spcPct val="96000"/>
+              </a:lnSpc>
+              <a:buNone/>
+            </a:pPr>
+            <a:r>
+              <a:rPr lang="en-US" sz="900" dirty="0">
+                <a:solidFill>
+                  <a:srgbClr val="6B7A85"/>
+                </a:solidFill>
+                <a:latin typeface="Malgun Gothic" pitchFamily="34" charset="0"/>
+                <a:ea typeface="Malgun Gothic" pitchFamily="34" charset="-122"/>
+                <a:cs typeface="Malgun Gothic" pitchFamily="34" charset="-120"/>
+              </a:rPr>
+              <a:t>배치 What-if(DES)로 KPI 과부하 판정 — 백그라운드 캐시</a:t>
+            </a:r>
+            <a:endParaRPr lang="en-US" sz="1050" dirty="0"/>
+          </a:p>
+        </p:txBody>
+      </p:sp>
+      <p:sp>
+        <p:nvSpPr>
+          <p:cNvPr id="25" name="Shape 23"/>
+          <p:cNvSpPr/>
+          <p:nvPr/>
+        </p:nvSpPr>
+        <p:spPr>
+          <a:xfrm>
+            <a:off x="4754880" y="3511296"/>
+            <a:ext cx="3931920" cy="493776"/>
+          </a:xfrm>
+          <a:prstGeom prst="roundRect">
+            <a:avLst>
+              <a:gd name="adj" fmla="val 11111"/>
+            </a:avLst>
+          </a:prstGeom>
+          <a:solidFill>
+            <a:srgbClr val="EDF5F6"/>
+          </a:solidFill>
+          <a:ln/>
+        </p:spPr>
+      </p:sp>
+      <p:sp>
+        <p:nvSpPr>
+          <p:cNvPr id="26" name="Text 24"/>
+          <p:cNvSpPr/>
+          <p:nvPr/>
+        </p:nvSpPr>
+        <p:spPr>
+          <a:xfrm>
+            <a:off x="4882896" y="3557016"/>
+            <a:ext cx="3703320" cy="402336"/>
+          </a:xfrm>
+          <a:prstGeom prst="rect">
+            <a:avLst/>
+          </a:prstGeom>
+          <a:noFill/>
+          <a:ln/>
+        </p:spPr>
+        <p:txBody>
+          <a:bodyPr wrap="square" lIns="0" tIns="0" rIns="0" bIns="0" rtlCol="0" anchor="ctr"/>
+          <a:lstStyle/>
+          <a:p>
+            <a:pPr indent="0" marL="0">
+              <a:lnSpc>
+                <a:spcPct val="96000"/>
+              </a:lnSpc>
+              <a:buNone/>
+            </a:pPr>
+            <a:r>
+              <a:rPr lang="en-US" sz="1050" b="1" dirty="0">
+                <a:solidFill>
+                  <a:srgbClr val="028090"/>
+                </a:solidFill>
+                <a:latin typeface="Malgun Gothic" pitchFamily="34" charset="0"/>
+                <a:ea typeface="Malgun Gothic" pitchFamily="34" charset="-122"/>
+                <a:cs typeface="Malgun Gothic" pitchFamily="34" charset="-120"/>
+              </a:rPr>
+              <a:t>Explanation  </a:t>
+            </a:r>
+            <a:pPr indent="0" marL="0">
+              <a:lnSpc>
+                <a:spcPct val="96000"/>
+              </a:lnSpc>
+              <a:buNone/>
+            </a:pPr>
+            <a:r>
+              <a:rPr lang="en-US" sz="900" dirty="0">
+                <a:solidFill>
+                  <a:srgbClr val="6B7A85"/>
+                </a:solidFill>
+                <a:latin typeface="Malgun Gothic" pitchFamily="34" charset="0"/>
+                <a:ea typeface="Malgun Gothic" pitchFamily="34" charset="-122"/>
+                <a:cs typeface="Malgun Gothic" pitchFamily="34" charset="-120"/>
+              </a:rPr>
+              <a:t>각 Action의 한국어 사유 생성(LLM + 템플릿 폴백)</a:t>
+            </a:r>
+            <a:endParaRPr lang="en-US" sz="1050" dirty="0"/>
+          </a:p>
+        </p:txBody>
+      </p:sp>
+      <p:sp>
+        <p:nvSpPr>
+          <p:cNvPr id="27" name="Shape 25"/>
+          <p:cNvSpPr/>
+          <p:nvPr/>
+        </p:nvSpPr>
+        <p:spPr>
+          <a:xfrm>
+            <a:off x="457200" y="4224528"/>
+            <a:ext cx="8229600" cy="841248"/>
+          </a:xfrm>
+          <a:prstGeom prst="roundRect">
+            <a:avLst>
+              <a:gd name="adj" fmla="val 7609"/>
+            </a:avLst>
+          </a:prstGeom>
+          <a:solidFill>
+            <a:srgbClr val="263238"/>
+          </a:solidFill>
+          <a:ln/>
+        </p:spPr>
+      </p:sp>
+      <p:sp>
+        <p:nvSpPr>
+          <p:cNvPr id="28" name="Text 26"/>
+          <p:cNvSpPr/>
+          <p:nvPr/>
+        </p:nvSpPr>
+        <p:spPr>
+          <a:xfrm>
+            <a:off x="658368" y="4224528"/>
+            <a:ext cx="7863840" cy="841248"/>
+          </a:xfrm>
+          <a:prstGeom prst="rect">
+            <a:avLst/>
+          </a:prstGeom>
+          <a:noFill/>
+          <a:ln/>
+        </p:spPr>
+        <p:txBody>
+          <a:bodyPr wrap="square" lIns="0" tIns="0" rIns="0" bIns="0" rtlCol="0" anchor="ctr"/>
+          <a:lstStyle/>
+          <a:p>
+            <a:pPr indent="0" marL="0">
+              <a:lnSpc>
+                <a:spcPct val="105000"/>
+              </a:lnSpc>
+              <a:buNone/>
+            </a:pPr>
+            <a:r>
+              <a:rPr lang="en-US" sz="1050" b="1" dirty="0">
+                <a:solidFill>
+                  <a:srgbClr val="7FD1CD"/>
+                </a:solidFill>
+                <a:latin typeface="Malgun Gothic" pitchFamily="34" charset="0"/>
+                <a:ea typeface="Malgun Gothic" pitchFamily="34" charset="-122"/>
+                <a:cs typeface="Malgun Gothic" pitchFamily="34" charset="-120"/>
+              </a:rPr>
+              <a:t>블랙보드 = DB 테이블  </a:t>
+            </a:r>
+            <a:pPr indent="0" marL="0">
+              <a:lnSpc>
+                <a:spcPct val="105000"/>
+              </a:lnSpc>
               <a:buNone/>
             </a:pPr>
             <a:r>
               <a:rPr lang="en-US" sz="1050" dirty="0">
                 <a:solidFill>
-                  <a:srgbClr val="2B3A42"/>
-                </a:solidFill>
-                <a:latin typeface="Malgun Gothic" pitchFamily="34" charset="0"/>
-                <a:ea typeface="Malgun Gothic" pitchFamily="34" charset="-122"/>
-                <a:cs typeface="Malgun Gothic" pitchFamily="34" charset="-120"/>
-              </a:rPr>
-              <a:t>9종 · 40체크 — 할당/결품·체화/보충 추가 + 기존(결정성·정규화·재현성·Forecast·Intent·RAG·Grounding) (eval/harness.py)</a:t>
+                  <a:srgbClr val="E6EDEF"/>
+                </a:solidFill>
+                <a:latin typeface="Malgun Gothic" pitchFamily="34" charset="0"/>
+                <a:ea typeface="Malgun Gothic" pitchFamily="34" charset="-122"/>
+                <a:cs typeface="Malgun Gothic" pitchFamily="34" charset="-120"/>
+              </a:rPr>
+              <a:t>blackboard_events · blackboard_actions · audit_logs · inventory_reservations. </a:t>
+            </a:r>
+            <a:pPr indent="0" marL="0">
+              <a:lnSpc>
+                <a:spcPct val="105000"/>
+              </a:lnSpc>
+              <a:buNone/>
+            </a:pPr>
+            <a:r>
+              <a:rPr lang="en-US" sz="1050" dirty="0">
+                <a:solidFill>
+                  <a:srgbClr val="B9C6CB"/>
+                </a:solidFill>
+                <a:latin typeface="Malgun Gothic" pitchFamily="34" charset="0"/>
+                <a:ea typeface="Malgun Gothic" pitchFamily="34" charset="-122"/>
+                <a:cs typeface="Malgun Gothic" pitchFamily="34" charset="-120"/>
+              </a:rPr>
+              <a:t>모든 협업은 이 게시판을 ‘읽고 쓰는’ 것으로만 이뤄진다 — 에이전트 간 직접 호출은 없다.</a:t>
             </a:r>
             <a:endParaRPr lang="en-US" sz="1050" dirty="0"/>
           </a:p>
@@ -14583,7 +15516,7 @@
 
 <file path=ppt/slides/slide21.xml><?xml version="1.0" encoding="utf-8"?>
 <p:sld xmlns:a="http://schemas.openxmlformats.org/drawingml/2006/main" xmlns:r="http://schemas.openxmlformats.org/officeDocument/2006/relationships" xmlns:p="http://schemas.openxmlformats.org/presentationml/2006/main">
-  <p:cSld name="Slide 14">
+  <p:cSld name="Slide 21">
     <p:bg>
       <p:bgPr>
         <a:solidFill>
@@ -14638,7 +15571,7 @@
                 <a:ea typeface="Malgun Gothic" pitchFamily="34" charset="-122"/>
                 <a:cs typeface="Malgun Gothic" pitchFamily="34" charset="-120"/>
               </a:rPr>
-              <a:t>REALTIME DEMAND</a:t>
+              <a:t>AUTO-OPERATION · MECHANISM</a:t>
             </a:r>
             <a:endParaRPr lang="en-US" sz="1100" dirty="0"/>
           </a:p>
@@ -14677,7 +15610,7 @@
                 <a:ea typeface="Malgun Gothic" pitchFamily="34" charset="-122"/>
                 <a:cs typeface="Malgun Gothic" pitchFamily="34" charset="-120"/>
               </a:rPr>
-              <a:t>실시간 수요 발생 — 기술 &amp; 구현 (realtime.py)</a:t>
+              <a:t>에이전트는 어떻게 협력하나</a:t>
             </a:r>
             <a:endParaRPr lang="en-US" sz="2700" dirty="0"/>
           </a:p>
@@ -14685,18 +15618,57 @@
       </p:sp>
       <p:sp>
         <p:nvSpPr>
-          <p:cNvPr id="4" name="Shape 2"/>
-          <p:cNvSpPr/>
-          <p:nvPr/>
-        </p:nvSpPr>
-        <p:spPr>
-          <a:xfrm>
-            <a:off x="457200" y="1371600"/>
-            <a:ext cx="4114800" cy="1783080"/>
+          <p:cNvPr id="4" name="Text 2"/>
+          <p:cNvSpPr/>
+          <p:nvPr/>
+        </p:nvSpPr>
+        <p:spPr>
+          <a:xfrm>
+            <a:off x="457200" y="1060704"/>
+            <a:ext cx="8229600" cy="320040"/>
+          </a:xfrm>
+          <a:prstGeom prst="rect">
+            <a:avLst/>
+          </a:prstGeom>
+          <a:noFill/>
+          <a:ln/>
+        </p:spPr>
+        <p:txBody>
+          <a:bodyPr wrap="square" lIns="0" tIns="0" rIns="0" bIns="0" rtlCol="0" anchor="ctr"/>
+          <a:lstStyle/>
+          <a:p>
+            <a:pPr indent="0" marL="0">
+              <a:buNone/>
+            </a:pPr>
+            <a:r>
+              <a:rPr lang="en-US" sz="1150" dirty="0">
+                <a:solidFill>
+                  <a:srgbClr val="6B7A85"/>
+                </a:solidFill>
+                <a:latin typeface="Malgun Gothic" pitchFamily="34" charset="0"/>
+                <a:ea typeface="Malgun Gothic" pitchFamily="34" charset="-122"/>
+                <a:cs typeface="Malgun Gothic" pitchFamily="34" charset="-120"/>
+              </a:rPr>
+              <a:t>주기적으로 파일을 읽지도, 서로를 직접 부르지도 않는다 — 가운데 블랙보드(이벤트 테이블)를 통해 간접 신호를 주고받는다.</a:t>
+            </a:r>
+            <a:endParaRPr lang="en-US" sz="1150" dirty="0"/>
+          </a:p>
+        </p:txBody>
+      </p:sp>
+      <p:sp>
+        <p:nvSpPr>
+          <p:cNvPr id="5" name="Shape 3"/>
+          <p:cNvSpPr/>
+          <p:nvPr/>
+        </p:nvSpPr>
+        <p:spPr>
+          <a:xfrm>
+            <a:off x="457200" y="1463040"/>
+            <a:ext cx="2697480" cy="2057400"/>
           </a:xfrm>
           <a:prstGeom prst="roundRect">
             <a:avLst>
-              <a:gd name="adj" fmla="val 3590"/>
+              <a:gd name="adj" fmla="val 3111"/>
             </a:avLst>
           </a:prstGeom>
           <a:solidFill>
@@ -14711,21 +15683,17 @@
             </a:outerShdw>
           </a:effectLst>
         </p:spPr>
-        <p:txBody>
-          <a:bodyPr/>
-          <a:p/>
-        </p:txBody>
-      </p:sp>
-      <p:sp>
-        <p:nvSpPr>
-          <p:cNvPr id="5" name="Text 3"/>
-          <p:cNvSpPr/>
-          <p:nvPr/>
-        </p:nvSpPr>
-        <p:spPr>
-          <a:xfrm>
-            <a:off x="640080" y="1499616"/>
-            <a:ext cx="3749040" cy="292608"/>
+      </p:sp>
+      <p:sp>
+        <p:nvSpPr>
+          <p:cNvPr id="6" name="Text 4"/>
+          <p:cNvSpPr/>
+          <p:nvPr/>
+        </p:nvSpPr>
+        <p:spPr>
+          <a:xfrm>
+            <a:off x="640080" y="1591056"/>
+            <a:ext cx="2331720" cy="292608"/>
           </a:xfrm>
           <a:prstGeom prst="rect">
             <a:avLst/>
@@ -14749,7 +15717,7 @@
                 <a:ea typeface="Malgun Gothic" pitchFamily="34" charset="-122"/>
                 <a:cs typeface="Malgun Gothic" pitchFamily="34" charset="-120"/>
               </a:rPr>
-              <a:t>기술 스택</a:t>
+              <a:t>① 유일한 ‘주기적’ 주체 = 컨트롤 루프 1개</a:t>
             </a:r>
             <a:endParaRPr lang="en-US" sz="1250" dirty="0"/>
           </a:p>
@@ -14757,14 +15725,14 @@
       </p:sp>
       <p:sp>
         <p:nvSpPr>
-          <p:cNvPr id="6" name="Text 4"/>
-          <p:cNvSpPr/>
-          <p:nvPr/>
-        </p:nvSpPr>
-        <p:spPr>
-          <a:xfrm>
-            <a:off x="640080" y="1847088"/>
-            <a:ext cx="3749040" cy="1179576"/>
+          <p:cNvPr id="7" name="Text 5"/>
+          <p:cNvSpPr/>
+          <p:nvPr/>
+        </p:nvSpPr>
+        <p:spPr>
+          <a:xfrm>
+            <a:off x="640080" y="1938528"/>
+            <a:ext cx="2331720" cy="1453896"/>
           </a:xfrm>
           <a:prstGeom prst="rect">
             <a:avLst/>
@@ -14791,7 +15759,7 @@
                 <a:ea typeface="Malgun Gothic" pitchFamily="34" charset="-122"/>
                 <a:cs typeface="Malgun Gothic" pitchFamily="34" charset="-120"/>
               </a:rPr>
-              <a:t>FastAPI SSE(Server-Sent Events) — 단방향 서버 푸시</a:t>
+              <a:t>· 1개 스레드가 cycle_seconds(기본 15초)</a:t>
             </a:r>
             <a:endParaRPr lang="en-US" sz="1020" dirty="0"/>
           </a:p>
@@ -14811,7 +15779,7 @@
                 <a:ea typeface="Malgun Gothic" pitchFamily="34" charset="-122"/>
                 <a:cs typeface="Malgun Gothic" pitchFamily="34" charset="-120"/>
               </a:rPr>
-              <a:t>· StreamingResponse(text/event-stream)로 Toast 전송</a:t>
+              <a:t>   마다 깨어난다.</a:t>
             </a:r>
             <a:endParaRPr lang="en-US" sz="1020" dirty="0"/>
           </a:p>
@@ -14831,7 +15799,7 @@
                 <a:ea typeface="Malgun Gothic" pitchFamily="34" charset="-122"/>
                 <a:cs typeface="Malgun Gothic" pitchFamily="34" charset="-120"/>
               </a:rPr>
-              <a:t>· asyncio 백그라운드 루프 + Queue 구독자 브로드캐스트</a:t>
+              <a:t>· 하는 일: blackboard_events 테이블에서</a:t>
             </a:r>
             <a:endParaRPr lang="en-US" sz="1020" dirty="0"/>
           </a:p>
@@ -14851,26 +15819,66 @@
                 <a:ea typeface="Malgun Gothic" pitchFamily="34" charset="-122"/>
                 <a:cs typeface="Malgun Gothic" pitchFamily="34" charset="-120"/>
               </a:rPr>
-              <a:t>· SQLite 즉시 기록 · 폴링 없이 서버 푸시(EventSource)</a:t>
+              <a:t>   status='NEW' 이벤트만 읽기.</a:t>
             </a:r>
             <a:endParaRPr lang="en-US" sz="1020" dirty="0"/>
           </a:p>
-        </p:txBody>
-      </p:sp>
-      <p:sp>
-        <p:nvSpPr>
-          <p:cNvPr id="7" name="Shape 5"/>
-          <p:cNvSpPr/>
-          <p:nvPr/>
-        </p:nvSpPr>
-        <p:spPr>
-          <a:xfrm>
-            <a:off x="4572000" y="1371600"/>
-            <a:ext cx="4114800" cy="1783080"/>
+          <a:p>
+            <a:pPr indent="0" marL="0">
+              <a:lnSpc>
+                <a:spcPct val="105000"/>
+              </a:lnSpc>
+              <a:buNone/>
+            </a:pPr>
+            <a:r>
+              <a:rPr lang="en-US" sz="1020" dirty="0">
+                <a:solidFill>
+                  <a:srgbClr val="6B7A85"/>
+                </a:solidFill>
+                <a:latin typeface="Malgun Gothic" pitchFamily="34" charset="0"/>
+                <a:ea typeface="Malgun Gothic" pitchFamily="34" charset="-122"/>
+                <a:cs typeface="Malgun Gothic" pitchFamily="34" charset="-120"/>
+              </a:rPr>
+              <a:t>· 파일을 폴링하는 게 아니라 DB 한</a:t>
+            </a:r>
+            <a:endParaRPr lang="en-US" sz="1020" dirty="0"/>
+          </a:p>
+          <a:p>
+            <a:pPr indent="0" marL="0">
+              <a:lnSpc>
+                <a:spcPct val="105000"/>
+              </a:lnSpc>
+              <a:buNone/>
+            </a:pPr>
+            <a:r>
+              <a:rPr lang="en-US" sz="1020" dirty="0">
+                <a:solidFill>
+                  <a:srgbClr val="6B7A85"/>
+                </a:solidFill>
+                <a:latin typeface="Malgun Gothic" pitchFamily="34" charset="0"/>
+                <a:ea typeface="Malgun Gothic" pitchFamily="34" charset="-122"/>
+                <a:cs typeface="Malgun Gothic" pitchFamily="34" charset="-120"/>
+              </a:rPr>
+              <a:t>   테이블을 읽는다.</a:t>
+            </a:r>
+            <a:endParaRPr lang="en-US" sz="1020" dirty="0"/>
+          </a:p>
+        </p:txBody>
+      </p:sp>
+      <p:sp>
+        <p:nvSpPr>
+          <p:cNvPr id="8" name="Shape 6"/>
+          <p:cNvSpPr/>
+          <p:nvPr/>
+        </p:nvSpPr>
+        <p:spPr>
+          <a:xfrm>
+            <a:off x="3273552" y="1463040"/>
+            <a:ext cx="2697480" cy="2057400"/>
           </a:xfrm>
           <a:prstGeom prst="roundRect">
             <a:avLst>
-              <a:gd name="adj" fmla="val 3590"/>
+              <a:gd name="adj" fmla="val 3111"/>
             </a:avLst>
           </a:prstGeom>
           <a:solidFill>
@@ -14885,21 +15893,17 @@
             </a:outerShdw>
           </a:effectLst>
         </p:spPr>
-        <p:txBody>
-          <a:bodyPr/>
-          <a:p/>
-        </p:txBody>
-      </p:sp>
-      <p:sp>
-        <p:nvSpPr>
-          <p:cNvPr id="8" name="Text 6"/>
-          <p:cNvSpPr/>
-          <p:nvPr/>
-        </p:nvSpPr>
-        <p:spPr>
-          <a:xfrm>
-            <a:off x="4754880" y="1499616"/>
-            <a:ext cx="3749040" cy="292608"/>
+      </p:sp>
+      <p:sp>
+        <p:nvSpPr>
+          <p:cNvPr id="9" name="Text 7"/>
+          <p:cNvSpPr/>
+          <p:nvPr/>
+        </p:nvSpPr>
+        <p:spPr>
+          <a:xfrm>
+            <a:off x="3456432" y="1591056"/>
+            <a:ext cx="2331720" cy="292608"/>
           </a:xfrm>
           <a:prstGeom prst="rect">
             <a:avLst/>
@@ -14923,7 +15927,7 @@
                 <a:ea typeface="Malgun Gothic" pitchFamily="34" charset="-122"/>
                 <a:cs typeface="Malgun Gothic" pitchFamily="34" charset="-120"/>
               </a:rPr>
-              <a:t>구현 흐름</a:t>
+              <a:t>② 에이전트 = ‘수동’ 함수</a:t>
             </a:r>
             <a:endParaRPr lang="en-US" sz="1250" dirty="0"/>
           </a:p>
@@ -14931,14 +15935,14 @@
       </p:sp>
       <p:sp>
         <p:nvSpPr>
-          <p:cNvPr id="9" name="Text 7"/>
-          <p:cNvSpPr/>
-          <p:nvPr/>
-        </p:nvSpPr>
-        <p:spPr>
-          <a:xfrm>
-            <a:off x="4754880" y="1847088"/>
-            <a:ext cx="3749040" cy="1179576"/>
+          <p:cNvPr id="10" name="Text 8"/>
+          <p:cNvSpPr/>
+          <p:nvPr/>
+        </p:nvSpPr>
+        <p:spPr>
+          <a:xfrm>
+            <a:off x="3456432" y="1938528"/>
+            <a:ext cx="2331720" cy="1453896"/>
           </a:xfrm>
           <a:prstGeom prst="rect">
             <a:avLst/>
@@ -14965,7 +15969,7 @@
                 <a:ea typeface="Malgun Gothic" pitchFamily="34" charset="-122"/>
                 <a:cs typeface="Malgun Gothic" pitchFamily="34" charset="-120"/>
               </a:rPr>
-              <a:t>① 가상 입·출고 생성(출고비율·수량 설정값 반영)</a:t>
+              <a:t>· handles(event_type) / propose(event)</a:t>
             </a:r>
             <a:endParaRPr lang="en-US" sz="1020" dirty="0"/>
           </a:p>
@@ -14985,7 +15989,7 @@
                 <a:ea typeface="Malgun Gothic" pitchFamily="34" charset="-122"/>
                 <a:cs typeface="Malgun Gothic" pitchFamily="34" charset="-120"/>
               </a:rPr>
-              <a:t>② DB INSERT 먼저 → ③ 이벤트 브로드캐스트(저장→알림)</a:t>
+              <a:t>   두 함수뿐 — 타이머·루프 없음.</a:t>
             </a:r>
             <a:endParaRPr lang="en-US" sz="1020" dirty="0"/>
           </a:p>
@@ -15005,7 +16009,7 @@
                 <a:ea typeface="Malgun Gothic" pitchFamily="34" charset="-122"/>
                 <a:cs typeface="Malgun Gothic" pitchFamily="34" charset="-120"/>
               </a:rPr>
-              <a:t>④ /events 구독자 큐로 전달 → 프론트 Toast 표시</a:t>
+              <a:t>· 컨트롤 루프가 이벤트 종류를 보고</a:t>
             </a:r>
             <a:endParaRPr lang="en-US" sz="1020" dirty="0"/>
           </a:p>
@@ -15025,48 +16029,49 @@
                 <a:ea typeface="Malgun Gothic" pitchFamily="34" charset="-122"/>
                 <a:cs typeface="Malgun Gothic" pitchFamily="34" charset="-120"/>
               </a:rPr>
-              <a:t>⑤ 제어 API: /realtime start·stop·emit·config</a:t>
+              <a:t>   해당 에이전트를 호출할 때만 동작.</a:t>
             </a:r>
             <a:endParaRPr lang="en-US" sz="1020" dirty="0"/>
           </a:p>
-        </p:txBody>
-      </p:sp>
-      <p:sp>
-        <p:nvSpPr>
-          <p:cNvPr id="10" name="Text 8"/>
-          <p:cNvSpPr/>
-          <p:nvPr/>
-        </p:nvSpPr>
-        <p:spPr>
-          <a:xfrm>
-            <a:off x="457200" y="3255264"/>
-            <a:ext cx="8229600" cy="292608"/>
-          </a:xfrm>
-          <a:prstGeom prst="rect">
-            <a:avLst/>
-          </a:prstGeom>
-          <a:noFill/>
-          <a:ln/>
-        </p:spPr>
-        <p:txBody>
-          <a:bodyPr wrap="square" lIns="0" tIns="0" rIns="0" bIns="0" rtlCol="0" anchor="ctr"/>
-          <a:lstStyle/>
-          <a:p>
-            <a:pPr algn="ctr" indent="0" marL="0">
-              <a:buNone/>
-            </a:pPr>
-            <a:r>
-              <a:rPr lang="en-US" sz="1150" i="1" dirty="0">
-                <a:solidFill>
-                  <a:srgbClr val="028090"/>
-                </a:solidFill>
-                <a:latin typeface="Malgun Gothic" pitchFamily="34" charset="0"/>
-                <a:ea typeface="Malgun Gothic" pitchFamily="34" charset="-122"/>
-                <a:cs typeface="Malgun Gothic" pitchFamily="34" charset="-120"/>
-              </a:rPr>
-              <a:t>핵심: 저장→알림 순서로 조회 일관성 — Toast 시점에 LLM 조회 Tool이 즉시 인지</a:t>
-            </a:r>
-            <a:endParaRPr lang="en-US" sz="1150" dirty="0"/>
+          <a:p>
+            <a:pPr indent="0" marL="0">
+              <a:lnSpc>
+                <a:spcPct val="105000"/>
+              </a:lnSpc>
+              <a:buNone/>
+            </a:pPr>
+            <a:r>
+              <a:rPr lang="en-US" sz="1020" dirty="0">
+                <a:solidFill>
+                  <a:srgbClr val="6B7A85"/>
+                </a:solidFill>
+                <a:latin typeface="Malgun Gothic" pitchFamily="34" charset="0"/>
+                <a:ea typeface="Malgun Gothic" pitchFamily="34" charset="-122"/>
+                <a:cs typeface="Malgun Gothic" pitchFamily="34" charset="-120"/>
+              </a:rPr>
+              <a:t>· 깨워진 그 순간 운영 테이블을 1회</a:t>
+            </a:r>
+            <a:endParaRPr lang="en-US" sz="1020" dirty="0"/>
+          </a:p>
+          <a:p>
+            <a:pPr indent="0" marL="0">
+              <a:lnSpc>
+                <a:spcPct val="105000"/>
+              </a:lnSpc>
+              <a:buNone/>
+            </a:pPr>
+            <a:r>
+              <a:rPr lang="en-US" sz="1020" dirty="0">
+                <a:solidFill>
+                  <a:srgbClr val="6B7A85"/>
+                </a:solidFill>
+                <a:latin typeface="Malgun Gothic" pitchFamily="34" charset="0"/>
+                <a:ea typeface="Malgun Gothic" pitchFamily="34" charset="-122"/>
+                <a:cs typeface="Malgun Gothic" pitchFamily="34" charset="-120"/>
+              </a:rPr>
+              <a:t>   조회해 판단(주기 폴링 아님).</a:t>
+            </a:r>
+            <a:endParaRPr lang="en-US" sz="1020" dirty="0"/>
           </a:p>
         </p:txBody>
       </p:sp>
@@ -15078,12 +16083,222 @@
         </p:nvSpPr>
         <p:spPr>
           <a:xfrm>
-            <a:off x="457200" y="3657600"/>
-            <a:ext cx="8229600" cy="1143000"/>
+            <a:off x="6089904" y="1463040"/>
+            <a:ext cx="2596896" cy="2057400"/>
           </a:xfrm>
           <a:prstGeom prst="roundRect">
             <a:avLst>
-              <a:gd name="adj" fmla="val 6400"/>
+              <a:gd name="adj" fmla="val 3111"/>
+            </a:avLst>
+          </a:prstGeom>
+          <a:solidFill>
+            <a:srgbClr val="F4F6F7"/>
+          </a:solidFill>
+          <a:ln/>
+          <a:effectLst>
+            <a:outerShdw sx="100000" sy="100000" kx="0" ky="0" algn="bl" rotWithShape="0" blurRad="63500" dist="25400" dir="2700000">
+              <a:srgbClr val="000000">
+                <a:alpha val="10000"/>
+              </a:srgbClr>
+            </a:outerShdw>
+          </a:effectLst>
+        </p:spPr>
+      </p:sp>
+      <p:sp>
+        <p:nvSpPr>
+          <p:cNvPr id="12" name="Text 10"/>
+          <p:cNvSpPr/>
+          <p:nvPr/>
+        </p:nvSpPr>
+        <p:spPr>
+          <a:xfrm>
+            <a:off x="6272784" y="1591056"/>
+            <a:ext cx="2231136" cy="292608"/>
+          </a:xfrm>
+          <a:prstGeom prst="rect">
+            <a:avLst/>
+          </a:prstGeom>
+          <a:noFill/>
+          <a:ln/>
+        </p:spPr>
+        <p:txBody>
+          <a:bodyPr wrap="square" lIns="0" tIns="0" rIns="0" bIns="0" rtlCol="0" anchor="ctr"/>
+          <a:lstStyle/>
+          <a:p>
+            <a:pPr indent="0" marL="0">
+              <a:buNone/>
+            </a:pPr>
+            <a:r>
+              <a:rPr lang="en-US" sz="1250" b="1" dirty="0">
+                <a:solidFill>
+                  <a:srgbClr val="2B3A42"/>
+                </a:solidFill>
+                <a:latin typeface="Malgun Gothic" pitchFamily="34" charset="0"/>
+                <a:ea typeface="Malgun Gothic" pitchFamily="34" charset="-122"/>
+                <a:cs typeface="Malgun Gothic" pitchFamily="34" charset="-120"/>
+              </a:rPr>
+              <a:t>③ ‘다음 에이전트’ 신호</a:t>
+            </a:r>
+            <a:endParaRPr lang="en-US" sz="1250" dirty="0"/>
+          </a:p>
+        </p:txBody>
+      </p:sp>
+      <p:sp>
+        <p:nvSpPr>
+          <p:cNvPr id="13" name="Text 11"/>
+          <p:cNvSpPr/>
+          <p:nvPr/>
+        </p:nvSpPr>
+        <p:spPr>
+          <a:xfrm>
+            <a:off x="6272784" y="1938528"/>
+            <a:ext cx="2231136" cy="1453896"/>
+          </a:xfrm>
+          <a:prstGeom prst="rect">
+            <a:avLst/>
+          </a:prstGeom>
+          <a:noFill/>
+          <a:ln/>
+        </p:spPr>
+        <p:txBody>
+          <a:bodyPr wrap="square" lIns="0" tIns="0" rIns="0" bIns="0" rtlCol="0" anchor="t"/>
+          <a:lstStyle/>
+          <a:p>
+            <a:pPr indent="0" marL="0">
+              <a:lnSpc>
+                <a:spcPct val="105000"/>
+              </a:lnSpc>
+              <a:buNone/>
+            </a:pPr>
+            <a:r>
+              <a:rPr lang="en-US" sz="1020" dirty="0">
+                <a:solidFill>
+                  <a:srgbClr val="6B7A85"/>
+                </a:solidFill>
+                <a:latin typeface="Malgun Gothic" pitchFamily="34" charset="0"/>
+                <a:ea typeface="Malgun Gothic" pitchFamily="34" charset="-122"/>
+                <a:cs typeface="Malgun Gothic" pitchFamily="34" charset="-120"/>
+              </a:rPr>
+              <a:t>· 직접 호출 ✕</a:t>
+            </a:r>
+            <a:endParaRPr lang="en-US" sz="1020" dirty="0"/>
+          </a:p>
+          <a:p>
+            <a:pPr indent="0" marL="0">
+              <a:lnSpc>
+                <a:spcPct val="105000"/>
+              </a:lnSpc>
+              <a:buNone/>
+            </a:pPr>
+            <a:r>
+              <a:rPr lang="en-US" sz="1020" dirty="0">
+                <a:solidFill>
+                  <a:srgbClr val="6B7A85"/>
+                </a:solidFill>
+                <a:latin typeface="Malgun Gothic" pitchFamily="34" charset="0"/>
+                <a:ea typeface="Malgun Gothic" pitchFamily="34" charset="-122"/>
+                <a:cs typeface="Malgun Gothic" pitchFamily="34" charset="-120"/>
+              </a:rPr>
+              <a:t>· Executor가 Action을 성공시킨 뒤</a:t>
+            </a:r>
+            <a:endParaRPr lang="en-US" sz="1020" dirty="0"/>
+          </a:p>
+          <a:p>
+            <a:pPr indent="0" marL="0">
+              <a:lnSpc>
+                <a:spcPct val="105000"/>
+              </a:lnSpc>
+              <a:buNone/>
+            </a:pPr>
+            <a:r>
+              <a:rPr lang="en-US" sz="1020" dirty="0">
+                <a:solidFill>
+                  <a:srgbClr val="6B7A85"/>
+                </a:solidFill>
+                <a:latin typeface="Malgun Gothic" pitchFamily="34" charset="0"/>
+                <a:ea typeface="Malgun Gothic" pitchFamily="34" charset="-122"/>
+                <a:cs typeface="Malgun Gothic" pitchFamily="34" charset="-120"/>
+              </a:rPr>
+              <a:t>   후속 이벤트 행을 블랙보드에 INSERT.</a:t>
+            </a:r>
+            <a:endParaRPr lang="en-US" sz="1020" dirty="0"/>
+          </a:p>
+          <a:p>
+            <a:pPr indent="0" marL="0">
+              <a:lnSpc>
+                <a:spcPct val="105000"/>
+              </a:lnSpc>
+              <a:buNone/>
+            </a:pPr>
+            <a:r>
+              <a:rPr lang="en-US" sz="1020" dirty="0">
+                <a:solidFill>
+                  <a:srgbClr val="6B7A85"/>
+                </a:solidFill>
+                <a:latin typeface="Malgun Gothic" pitchFamily="34" charset="0"/>
+                <a:ea typeface="Malgun Gothic" pitchFamily="34" charset="-122"/>
+                <a:cs typeface="Malgun Gothic" pitchFamily="34" charset="-120"/>
+              </a:rPr>
+              <a:t>· 컨트롤 루프가 그 새 이벤트를 읽어</a:t>
+            </a:r>
+            <a:endParaRPr lang="en-US" sz="1020" dirty="0"/>
+          </a:p>
+          <a:p>
+            <a:pPr indent="0" marL="0">
+              <a:lnSpc>
+                <a:spcPct val="105000"/>
+              </a:lnSpc>
+              <a:buNone/>
+            </a:pPr>
+            <a:r>
+              <a:rPr lang="en-US" sz="1020" dirty="0">
+                <a:solidFill>
+                  <a:srgbClr val="6B7A85"/>
+                </a:solidFill>
+                <a:latin typeface="Malgun Gothic" pitchFamily="34" charset="0"/>
+                <a:ea typeface="Malgun Gothic" pitchFamily="34" charset="-122"/>
+                <a:cs typeface="Malgun Gothic" pitchFamily="34" charset="-120"/>
+              </a:rPr>
+              <a:t>   다음 에이전트를 깨운다.</a:t>
+            </a:r>
+            <a:endParaRPr lang="en-US" sz="1020" dirty="0"/>
+          </a:p>
+          <a:p>
+            <a:pPr indent="0" marL="0">
+              <a:lnSpc>
+                <a:spcPct val="105000"/>
+              </a:lnSpc>
+              <a:buNone/>
+            </a:pPr>
+            <a:r>
+              <a:rPr lang="en-US" sz="1020" dirty="0">
+                <a:solidFill>
+                  <a:srgbClr val="6B7A85"/>
+                </a:solidFill>
+                <a:latin typeface="Malgun Gothic" pitchFamily="34" charset="0"/>
+                <a:ea typeface="Malgun Gothic" pitchFamily="34" charset="-122"/>
+                <a:cs typeface="Malgun Gothic" pitchFamily="34" charset="-120"/>
+              </a:rPr>
+              <a:t>   → data-driven 연쇄.</a:t>
+            </a:r>
+            <a:endParaRPr lang="en-US" sz="1020" dirty="0"/>
+          </a:p>
+        </p:txBody>
+      </p:sp>
+      <p:sp>
+        <p:nvSpPr>
+          <p:cNvPr id="14" name="Shape 12"/>
+          <p:cNvSpPr/>
+          <p:nvPr/>
+        </p:nvSpPr>
+        <p:spPr>
+          <a:xfrm>
+            <a:off x="457200" y="3703320"/>
+            <a:ext cx="8229600" cy="1325880"/>
+          </a:xfrm>
+          <a:prstGeom prst="roundRect">
+            <a:avLst>
+              <a:gd name="adj" fmla="val 4138"/>
             </a:avLst>
           </a:prstGeom>
           <a:solidFill>
@@ -15091,21 +16306,17 @@
           </a:solidFill>
           <a:ln/>
         </p:spPr>
-        <p:txBody>
-          <a:bodyPr/>
-          <a:p/>
-        </p:txBody>
-      </p:sp>
-      <p:sp>
-        <p:nvSpPr>
-          <p:cNvPr id="12" name="Text 10"/>
-          <p:cNvSpPr/>
-          <p:nvPr/>
-        </p:nvSpPr>
-        <p:spPr>
-          <a:xfrm>
-            <a:off x="685800" y="3767328"/>
-            <a:ext cx="7772400" cy="274320"/>
+      </p:sp>
+      <p:sp>
+        <p:nvSpPr>
+          <p:cNvPr id="15" name="Text 13"/>
+          <p:cNvSpPr/>
+          <p:nvPr/>
+        </p:nvSpPr>
+        <p:spPr>
+          <a:xfrm>
+            <a:off x="603504" y="3794760"/>
+            <a:ext cx="7936992" cy="237744"/>
           </a:xfrm>
           <a:prstGeom prst="rect">
             <a:avLst/>
@@ -15121,7 +16332,7 @@
               <a:buNone/>
             </a:pPr>
             <a:r>
-              <a:rPr lang="en-US" sz="1250" b="1" dirty="0">
+              <a:rPr lang="en-US" sz="950" b="1" dirty="0">
                 <a:solidFill>
                   <a:srgbClr val="7FD1CD"/>
                 </a:solidFill>
@@ -15129,22 +16340,22 @@
                 <a:ea typeface="Malgun Gothic" pitchFamily="34" charset="-122"/>
                 <a:cs typeface="Malgun Gothic" pitchFamily="34" charset="-120"/>
               </a:rPr>
-              <a:t>설정(⚙ 모달) · 실시간 인지 · 무폴링</a:t>
-            </a:r>
-            <a:endParaRPr lang="en-US" sz="1250" dirty="0"/>
-          </a:p>
-        </p:txBody>
-      </p:sp>
-      <p:sp>
-        <p:nvSpPr>
-          <p:cNvPr id="13" name="Text 11"/>
-          <p:cNvSpPr/>
-          <p:nvPr/>
-        </p:nvSpPr>
-        <p:spPr>
-          <a:xfrm>
-            <a:off x="685800" y="4133088"/>
-            <a:ext cx="7772400" cy="594360"/>
+              <a:t>control_loop.py — 유일한 주기 주체가 이벤트 테이블을 읽어 분배</a:t>
+            </a:r>
+            <a:endParaRPr lang="en-US" sz="950" dirty="0"/>
+          </a:p>
+        </p:txBody>
+      </p:sp>
+      <p:sp>
+        <p:nvSpPr>
+          <p:cNvPr id="16" name="Text 14"/>
+          <p:cNvSpPr/>
+          <p:nvPr/>
+        </p:nvSpPr>
+        <p:spPr>
+          <a:xfrm>
+            <a:off x="603504" y="4069080"/>
+            <a:ext cx="7936992" cy="868680"/>
           </a:xfrm>
           <a:prstGeom prst="rect">
             <a:avLst/>
@@ -15163,16 +16374,19 @@
               <a:buNone/>
             </a:pPr>
             <a:r>
-              <a:rPr lang="en-US" sz="1100" b="1" dirty="0">
-                <a:solidFill>
-                  <a:srgbClr val="FFFFFF"/>
-                </a:solidFill>
-                <a:latin typeface="Malgun Gothic" pitchFamily="34" charset="0"/>
-                <a:ea typeface="Malgun Gothic" pitchFamily="34" charset="-122"/>
-                <a:cs typeface="Malgun Gothic" pitchFamily="34" charset="-120"/>
-              </a:rPr>
-              <a:t xml:space="preserve">생성주기 </a:t>
-            </a:r>
+              <a:rPr lang="en-US" sz="830" dirty="0">
+                <a:solidFill>
+                  <a:srgbClr val="E6EDEF"/>
+                </a:solidFill>
+                <a:latin typeface="Courier New" pitchFamily="34" charset="0"/>
+                <a:ea typeface="Courier New" pitchFamily="34" charset="-122"/>
+                <a:cs typeface="Courier New" pitchFamily="34" charset="-120"/>
+              </a:rPr>
+              <a:t>while _running:</a:t>
+            </a:r>
+            <a:endParaRPr lang="en-US" sz="830" dirty="0"/>
+          </a:p>
+          <a:p>
             <a:pPr indent="0" marL="0">
               <a:lnSpc>
                 <a:spcPct val="105000"/>
@@ -15180,16 +16394,19 @@
               <a:buNone/>
             </a:pPr>
             <a:r>
-              <a:rPr lang="en-US" sz="1100" dirty="0">
-                <a:solidFill>
-                  <a:srgbClr val="CFD8DC"/>
-                </a:solidFill>
-                <a:latin typeface="Malgun Gothic" pitchFamily="34" charset="0"/>
-                <a:ea typeface="Malgun Gothic" pitchFamily="34" charset="-122"/>
-                <a:cs typeface="Malgun Gothic" pitchFamily="34" charset="-120"/>
-              </a:rPr>
-              <a:t xml:space="preserve">2초~ 가변      </a:t>
-            </a:r>
+              <a:rPr lang="en-US" sz="830" dirty="0">
+                <a:solidFill>
+                  <a:srgbClr val="E6EDEF"/>
+                </a:solidFill>
+                <a:latin typeface="Courier New" pitchFamily="34" charset="0"/>
+                <a:ea typeface="Courier New" pitchFamily="34" charset="-122"/>
+                <a:cs typeface="Courier New" pitchFamily="34" charset="-120"/>
+              </a:rPr>
+              <a:t>    if settings.enabled():</a:t>
+            </a:r>
+            <a:endParaRPr lang="en-US" sz="830" dirty="0"/>
+          </a:p>
+          <a:p>
             <a:pPr indent="0" marL="0">
               <a:lnSpc>
                 <a:spcPct val="105000"/>
@@ -15197,16 +16414,19 @@
               <a:buNone/>
             </a:pPr>
             <a:r>
-              <a:rPr lang="en-US" sz="1100" b="1" dirty="0">
-                <a:solidFill>
-                  <a:srgbClr val="FFFFFF"/>
-                </a:solidFill>
-                <a:latin typeface="Malgun Gothic" pitchFamily="34" charset="0"/>
-                <a:ea typeface="Malgun Gothic" pitchFamily="34" charset="-122"/>
-                <a:cs typeface="Malgun Gothic" pitchFamily="34" charset="-120"/>
-              </a:rPr>
-              <a:t xml:space="preserve">출고비율 </a:t>
-            </a:r>
+              <a:rPr lang="en-US" sz="830" dirty="0">
+                <a:solidFill>
+                  <a:srgbClr val="E6EDEF"/>
+                </a:solidFill>
+                <a:latin typeface="Courier New" pitchFamily="34" charset="0"/>
+                <a:ea typeface="Courier New" pitchFamily="34" charset="-122"/>
+                <a:cs typeface="Courier New" pitchFamily="34" charset="-120"/>
+              </a:rPr>
+              <a:t>        run_once()                 # blackboard_events 읽어 처리</a:t>
+            </a:r>
+            <a:endParaRPr lang="en-US" sz="830" dirty="0"/>
+          </a:p>
+          <a:p>
             <a:pPr indent="0" marL="0">
               <a:lnSpc>
                 <a:spcPct val="105000"/>
@@ -15214,33 +16434,28 @@
               <a:buNone/>
             </a:pPr>
             <a:r>
-              <a:rPr lang="en-US" sz="1100" dirty="0">
-                <a:solidFill>
-                  <a:srgbClr val="CFD8DC"/>
-                </a:solidFill>
-                <a:latin typeface="Malgun Gothic" pitchFamily="34" charset="0"/>
-                <a:ea typeface="Malgun Gothic" pitchFamily="34" charset="-122"/>
-                <a:cs typeface="Malgun Gothic" pitchFamily="34" charset="-120"/>
-              </a:rPr>
-              <a:t xml:space="preserve">출고:입고 비중      </a:t>
-            </a:r>
+              <a:rPr lang="en-US" sz="830" dirty="0">
+                <a:solidFill>
+                  <a:srgbClr val="E6EDEF"/>
+                </a:solidFill>
+                <a:latin typeface="Courier New" pitchFamily="34" charset="0"/>
+                <a:ea typeface="Courier New" pitchFamily="34" charset="-122"/>
+                <a:cs typeface="Courier New" pitchFamily="34" charset="-120"/>
+              </a:rPr>
+              <a:t>    time.sleep(cycle_seconds())    # ← 유일한 ‘주기적’ 부분 (기본 15초)</a:t>
+            </a:r>
+            <a:endParaRPr lang="en-US" sz="830" dirty="0"/>
+          </a:p>
+          <a:p>
             <a:pPr indent="0" marL="0">
               <a:lnSpc>
                 <a:spcPct val="105000"/>
               </a:lnSpc>
               <a:buNone/>
             </a:pPr>
-            <a:r>
-              <a:rPr lang="en-US" sz="1100" b="1" dirty="0">
-                <a:solidFill>
-                  <a:srgbClr val="FFFFFF"/>
-                </a:solidFill>
-                <a:latin typeface="Malgun Gothic" pitchFamily="34" charset="0"/>
-                <a:ea typeface="Malgun Gothic" pitchFamily="34" charset="-122"/>
-                <a:cs typeface="Malgun Gothic" pitchFamily="34" charset="-120"/>
-              </a:rPr>
-              <a:t xml:space="preserve">수량범위 </a:t>
-            </a:r>
+            <a:endParaRPr lang="en-US" sz="830" dirty="0"/>
+          </a:p>
+          <a:p>
             <a:pPr indent="0" marL="0">
               <a:lnSpc>
                 <a:spcPct val="105000"/>
@@ -15248,17 +16463,17 @@
               <a:buNone/>
             </a:pPr>
             <a:r>
-              <a:rPr lang="en-US" sz="1100" dirty="0">
-                <a:solidFill>
-                  <a:srgbClr val="CFD8DC"/>
-                </a:solidFill>
-                <a:latin typeface="Malgun Gothic" pitchFamily="34" charset="0"/>
-                <a:ea typeface="Malgun Gothic" pitchFamily="34" charset="-122"/>
-                <a:cs typeface="Malgun Gothic" pitchFamily="34" charset="-120"/>
-              </a:rPr>
-              <a:t>입·출고 min~max</a:t>
-            </a:r>
-            <a:endParaRPr lang="en-US" sz="1100" dirty="0"/>
+              <a:rPr lang="en-US" sz="830" dirty="0">
+                <a:solidFill>
+                  <a:srgbClr val="E6EDEF"/>
+                </a:solidFill>
+                <a:latin typeface="Courier New" pitchFamily="34" charset="0"/>
+                <a:ea typeface="Courier New" pitchFamily="34" charset="-122"/>
+                <a:cs typeface="Courier New" pitchFamily="34" charset="-120"/>
+              </a:rPr>
+              <a:t>def run_once():</a:t>
+            </a:r>
+            <a:endParaRPr lang="en-US" sz="830" dirty="0"/>
           </a:p>
           <a:p>
             <a:pPr indent="0" marL="0">
@@ -15268,17 +16483,97 @@
               <a:buNone/>
             </a:pPr>
             <a:r>
-              <a:rPr lang="en-US" sz="1100" i="1" dirty="0">
-                <a:solidFill>
-                  <a:srgbClr val="9FC7C4"/>
-                </a:solidFill>
-                <a:latin typeface="Malgun Gothic" pitchFamily="34" charset="0"/>
-                <a:ea typeface="Malgun Gothic" pitchFamily="34" charset="-122"/>
-                <a:cs typeface="Malgun Gothic" pitchFamily="34" charset="-120"/>
-              </a:rPr>
-              <a:t>→ 설정 모달에서 주기·출고비율·수량을 즉시 변경, 다음 주기부터 반영</a:t>
-            </a:r>
-            <a:endParaRPr lang="en-US" sz="1100" dirty="0"/>
+              <a:rPr lang="en-US" sz="830" dirty="0">
+                <a:solidFill>
+                  <a:srgbClr val="E6EDEF"/>
+                </a:solidFill>
+                <a:latin typeface="Courier New" pitchFamily="34" charset="0"/>
+                <a:ea typeface="Courier New" pitchFamily="34" charset="-122"/>
+                <a:cs typeface="Courier New" pitchFamily="34" charset="-120"/>
+              </a:rPr>
+              <a:t>    for ev in events.new_events():            # status='NEW' 이벤트만</a:t>
+            </a:r>
+            <a:endParaRPr lang="en-US" sz="830" dirty="0"/>
+          </a:p>
+          <a:p>
+            <a:pPr indent="0" marL="0">
+              <a:lnSpc>
+                <a:spcPct val="105000"/>
+              </a:lnSpc>
+              <a:buNone/>
+            </a:pPr>
+            <a:r>
+              <a:rPr lang="en-US" sz="830" dirty="0">
+                <a:solidFill>
+                  <a:srgbClr val="E6EDEF"/>
+                </a:solidFill>
+                <a:latin typeface="Courier New" pitchFamily="34" charset="0"/>
+                <a:ea typeface="Courier New" pitchFamily="34" charset="-122"/>
+                <a:cs typeface="Courier New" pitchFamily="34" charset="-120"/>
+              </a:rPr>
+              <a:t>        for agent in REGISTRY:</a:t>
+            </a:r>
+            <a:endParaRPr lang="en-US" sz="830" dirty="0"/>
+          </a:p>
+          <a:p>
+            <a:pPr indent="0" marL="0">
+              <a:lnSpc>
+                <a:spcPct val="105000"/>
+              </a:lnSpc>
+              <a:buNone/>
+            </a:pPr>
+            <a:r>
+              <a:rPr lang="en-US" sz="830" dirty="0">
+                <a:solidFill>
+                  <a:srgbClr val="E6EDEF"/>
+                </a:solidFill>
+                <a:latin typeface="Courier New" pitchFamily="34" charset="0"/>
+                <a:ea typeface="Courier New" pitchFamily="34" charset="-122"/>
+                <a:cs typeface="Courier New" pitchFamily="34" charset="-120"/>
+              </a:rPr>
+              <a:t>            if agent.handles(ev.type):        # 이 이벤트 담당?</a:t>
+            </a:r>
+            <a:endParaRPr lang="en-US" sz="830" dirty="0"/>
+          </a:p>
+          <a:p>
+            <a:pPr indent="0" marL="0">
+              <a:lnSpc>
+                <a:spcPct val="105000"/>
+              </a:lnSpc>
+              <a:buNone/>
+            </a:pPr>
+            <a:r>
+              <a:rPr lang="en-US" sz="830" dirty="0">
+                <a:solidFill>
+                  <a:srgbClr val="E6EDEF"/>
+                </a:solidFill>
+                <a:latin typeface="Courier New" pitchFamily="34" charset="0"/>
+                <a:ea typeface="Courier New" pitchFamily="34" charset="-122"/>
+                <a:cs typeface="Courier New" pitchFamily="34" charset="-120"/>
+              </a:rPr>
+              <a:t>                for spec in agent.propose(ev):    # Action 제안(읽기 1회)</a:t>
+            </a:r>
+            <a:endParaRPr lang="en-US" sz="830" dirty="0"/>
+          </a:p>
+          <a:p>
+            <a:pPr indent="0" marL="0">
+              <a:lnSpc>
+                <a:spcPct val="105000"/>
+              </a:lnSpc>
+              <a:buNone/>
+            </a:pPr>
+            <a:r>
+              <a:rPr lang="en-US" sz="830" dirty="0">
+                <a:solidFill>
+                  <a:srgbClr val="E6EDEF"/>
+                </a:solidFill>
+                <a:latin typeface="Courier New" pitchFamily="34" charset="0"/>
+                <a:ea typeface="Courier New" pitchFamily="34" charset="-122"/>
+                <a:cs typeface="Courier New" pitchFamily="34" charset="-120"/>
+              </a:rPr>
+              <a:t>                    executor.execute(create(spec))</a:t>
+            </a:r>
+            <a:endParaRPr lang="en-US" sz="830" dirty="0"/>
           </a:p>
         </p:txBody>
       </p:sp>
@@ -15292,7 +16587,7 @@
 
 <file path=ppt/slides/slide22.xml><?xml version="1.0" encoding="utf-8"?>
 <p:sld xmlns:a="http://schemas.openxmlformats.org/drawingml/2006/main" xmlns:r="http://schemas.openxmlformats.org/officeDocument/2006/relationships" xmlns:p="http://schemas.openxmlformats.org/presentationml/2006/main">
-  <p:cSld name="Slide 14">
+  <p:cSld name="Slide 22">
     <p:bg>
       <p:bgPr>
         <a:solidFill>
@@ -15347,7 +16642,7 @@
                 <a:ea typeface="Malgun Gothic" pitchFamily="34" charset="-122"/>
                 <a:cs typeface="Malgun Gothic" pitchFamily="34" charset="-120"/>
               </a:rPr>
-              <a:t>CONVERSATION MEMORY</a:t>
+              <a:t>AUTO-OPERATION · CHAINING</a:t>
             </a:r>
             <a:endParaRPr lang="en-US" sz="1100" dirty="0"/>
           </a:p>
@@ -15386,7 +16681,7 @@
                 <a:ea typeface="Malgun Gothic" pitchFamily="34" charset="-122"/>
                 <a:cs typeface="Malgun Gothic" pitchFamily="34" charset="-120"/>
               </a:rPr>
-              <a:t>대화 메모리 — 기술 &amp; 구현 (chat_store.py · LangGraph)</a:t>
+              <a:t>데이터로 흐르는 연쇄 — 입고 → 적치 → 자원</a:t>
             </a:r>
             <a:endParaRPr lang="en-US" sz="2700" dirty="0"/>
           </a:p>
@@ -15394,18 +16689,57 @@
       </p:sp>
       <p:sp>
         <p:nvSpPr>
-          <p:cNvPr id="4" name="Shape 2"/>
-          <p:cNvSpPr/>
-          <p:nvPr/>
-        </p:nvSpPr>
-        <p:spPr>
-          <a:xfrm>
-            <a:off x="457200" y="1371600"/>
-            <a:ext cx="4114800" cy="1783080"/>
+          <p:cNvPr id="4" name="Text 2"/>
+          <p:cNvSpPr/>
+          <p:nvPr/>
+        </p:nvSpPr>
+        <p:spPr>
+          <a:xfrm>
+            <a:off x="457200" y="1060704"/>
+            <a:ext cx="8229600" cy="320040"/>
+          </a:xfrm>
+          <a:prstGeom prst="rect">
+            <a:avLst/>
+          </a:prstGeom>
+          <a:noFill/>
+          <a:ln/>
+        </p:spPr>
+        <p:txBody>
+          <a:bodyPr wrap="square" lIns="0" tIns="0" rIns="0" bIns="0" rtlCol="0" anchor="ctr"/>
+          <a:lstStyle/>
+          <a:p>
+            <a:pPr indent="0" marL="0">
+              <a:buNone/>
+            </a:pPr>
+            <a:r>
+              <a:rPr lang="en-US" sz="1150" dirty="0">
+                <a:solidFill>
+                  <a:srgbClr val="6B7A85"/>
+                </a:solidFill>
+                <a:latin typeface="Malgun Gothic" pitchFamily="34" charset="0"/>
+                <a:ea typeface="Malgun Gothic" pitchFamily="34" charset="-122"/>
+                <a:cs typeface="Malgun Gothic" pitchFamily="34" charset="-120"/>
+              </a:rPr>
+              <a:t>한 에이전트의 실행 결과(=새 이벤트)가 다음 에이전트를 깨운다. 같은 사이클 안에서 이벤트가 빌 때까지 이어진다.</a:t>
+            </a:r>
+            <a:endParaRPr lang="en-US" sz="1150" dirty="0"/>
+          </a:p>
+        </p:txBody>
+      </p:sp>
+      <p:sp>
+        <p:nvSpPr>
+          <p:cNvPr id="5" name="Shape 3"/>
+          <p:cNvSpPr/>
+          <p:nvPr/>
+        </p:nvSpPr>
+        <p:spPr>
+          <a:xfrm>
+            <a:off x="457200" y="1517904"/>
+            <a:ext cx="2615184" cy="1828800"/>
           </a:xfrm>
           <a:prstGeom prst="roundRect">
             <a:avLst>
-              <a:gd name="adj" fmla="val 3590"/>
+              <a:gd name="adj" fmla="val 3500"/>
             </a:avLst>
           </a:prstGeom>
           <a:solidFill>
@@ -15420,21 +16754,17 @@
             </a:outerShdw>
           </a:effectLst>
         </p:spPr>
-        <p:txBody>
-          <a:bodyPr/>
-          <a:p/>
-        </p:txBody>
-      </p:sp>
-      <p:sp>
-        <p:nvSpPr>
-          <p:cNvPr id="5" name="Text 3"/>
-          <p:cNvSpPr/>
-          <p:nvPr/>
-        </p:nvSpPr>
-        <p:spPr>
-          <a:xfrm>
-            <a:off x="640080" y="1499616"/>
-            <a:ext cx="3749040" cy="292608"/>
+      </p:sp>
+      <p:sp>
+        <p:nvSpPr>
+          <p:cNvPr id="6" name="Text 4"/>
+          <p:cNvSpPr/>
+          <p:nvPr/>
+        </p:nvSpPr>
+        <p:spPr>
+          <a:xfrm>
+            <a:off x="603504" y="1636776"/>
+            <a:ext cx="2322576" cy="274320"/>
           </a:xfrm>
           <a:prstGeom prst="rect">
             <a:avLst/>
@@ -15450,7 +16780,49 @@
               <a:buNone/>
             </a:pPr>
             <a:r>
-              <a:rPr lang="en-US" sz="1250" b="1" dirty="0">
+              <a:rPr lang="en-US" sz="1200" b="1" dirty="0">
+                <a:solidFill>
+                  <a:srgbClr val="028090"/>
+                </a:solidFill>
+                <a:latin typeface="Malgun Gothic" pitchFamily="34" charset="0"/>
+                <a:ea typeface="Malgun Gothic" pitchFamily="34" charset="-122"/>
+                <a:cs typeface="Malgun Gothic" pitchFamily="34" charset="-120"/>
+              </a:rPr>
+              <a:t>InboundAgent</a:t>
+            </a:r>
+            <a:endParaRPr lang="en-US" sz="1200" dirty="0"/>
+          </a:p>
+        </p:txBody>
+      </p:sp>
+      <p:sp>
+        <p:nvSpPr>
+          <p:cNvPr id="7" name="Text 5"/>
+          <p:cNvSpPr/>
+          <p:nvPr/>
+        </p:nvSpPr>
+        <p:spPr>
+          <a:xfrm>
+            <a:off x="603504" y="1975104"/>
+            <a:ext cx="2322576" cy="1280160"/>
+          </a:xfrm>
+          <a:prstGeom prst="rect">
+            <a:avLst/>
+          </a:prstGeom>
+          <a:noFill/>
+          <a:ln/>
+        </p:spPr>
+        <p:txBody>
+          <a:bodyPr wrap="square" lIns="0" tIns="0" rIns="0" bIns="0" rtlCol="0" anchor="t"/>
+          <a:lstStyle/>
+          <a:p>
+            <a:pPr indent="0" marL="0">
+              <a:lnSpc>
+                <a:spcPct val="104000"/>
+              </a:lnSpc>
+              <a:buNone/>
+            </a:pPr>
+            <a:r>
+              <a:rPr lang="en-US" sz="900" b="1" dirty="0">
                 <a:solidFill>
                   <a:srgbClr val="2B3A42"/>
                 </a:solidFill>
@@ -15458,41 +16830,16 @@
                 <a:ea typeface="Malgun Gothic" pitchFamily="34" charset="-122"/>
                 <a:cs typeface="Malgun Gothic" pitchFamily="34" charset="-120"/>
               </a:rPr>
-              <a:t>계층 A — 영속화 (저장·복원)</a:t>
-            </a:r>
-            <a:endParaRPr lang="en-US" sz="1250" dirty="0"/>
-          </a:p>
-        </p:txBody>
-      </p:sp>
-      <p:sp>
-        <p:nvSpPr>
-          <p:cNvPr id="6" name="Text 4"/>
-          <p:cNvSpPr/>
-          <p:nvPr/>
-        </p:nvSpPr>
-        <p:spPr>
-          <a:xfrm>
-            <a:off x="640080" y="1847088"/>
-            <a:ext cx="3749040" cy="1179576"/>
-          </a:xfrm>
-          <a:prstGeom prst="rect">
-            <a:avLst/>
-          </a:prstGeom>
-          <a:noFill/>
-          <a:ln/>
-        </p:spPr>
-        <p:txBody>
-          <a:bodyPr wrap="square" lIns="0" tIns="0" rIns="0" bIns="0" rtlCol="0" anchor="t"/>
-          <a:lstStyle/>
-          <a:p>
+              <a:t>트리거  </a:t>
+            </a:r>
             <a:pPr indent="0" marL="0">
               <a:lnSpc>
-                <a:spcPct val="105000"/>
+                <a:spcPct val="104000"/>
               </a:lnSpc>
               <a:buNone/>
             </a:pPr>
             <a:r>
-              <a:rPr lang="en-US" sz="1020" dirty="0">
+              <a:rPr lang="en-US" sz="900" dirty="0">
                 <a:solidFill>
                   <a:srgbClr val="6B7A85"/>
                 </a:solidFill>
@@ -15500,19 +16847,45 @@
                 <a:ea typeface="Malgun Gothic" pitchFamily="34" charset="-122"/>
                 <a:cs typeface="Malgun Gothic" pitchFamily="34" charset="-120"/>
               </a:rPr>
-              <a:t>SQLite chat_sessions / chat_messages</a:t>
-            </a:r>
-            <a:endParaRPr lang="en-US" sz="1020" dirty="0"/>
+              <a:t>NEW_INBOUND_ARRIVAL</a:t>
+            </a:r>
+            <a:endParaRPr lang="en-US" sz="900" dirty="0"/>
           </a:p>
           <a:p>
             <a:pPr indent="0" marL="0">
               <a:lnSpc>
-                <a:spcPct val="105000"/>
+                <a:spcPct val="104000"/>
               </a:lnSpc>
               <a:buNone/>
             </a:pPr>
-            <a:r>
-              <a:rPr lang="en-US" sz="1020" dirty="0">
+            <a:endParaRPr lang="en-US" sz="900" dirty="0"/>
+          </a:p>
+          <a:p>
+            <a:pPr indent="0" marL="0">
+              <a:lnSpc>
+                <a:spcPct val="104000"/>
+              </a:lnSpc>
+              <a:buNone/>
+            </a:pPr>
+            <a:r>
+              <a:rPr lang="en-US" sz="900" b="1" dirty="0">
+                <a:solidFill>
+                  <a:srgbClr val="2B3A42"/>
+                </a:solidFill>
+                <a:latin typeface="Malgun Gothic" pitchFamily="34" charset="0"/>
+                <a:ea typeface="Malgun Gothic" pitchFamily="34" charset="-122"/>
+                <a:cs typeface="Malgun Gothic" pitchFamily="34" charset="-120"/>
+              </a:rPr>
+              <a:t>Action  </a:t>
+            </a:r>
+            <a:pPr indent="0" marL="0">
+              <a:lnSpc>
+                <a:spcPct val="104000"/>
+              </a:lnSpc>
+              <a:buNone/>
+            </a:pPr>
+            <a:r>
+              <a:rPr lang="en-US" sz="900" dirty="0">
                 <a:solidFill>
                   <a:srgbClr val="6B7A85"/>
                 </a:solidFill>
@@ -15520,19 +16893,45 @@
                 <a:ea typeface="Malgun Gothic" pitchFamily="34" charset="-122"/>
                 <a:cs typeface="Malgun Gothic" pitchFamily="34" charset="-120"/>
               </a:rPr>
-              <a:t>· 세션 생성 · 메시지 append · 제목 자동 생성</a:t>
-            </a:r>
-            <a:endParaRPr lang="en-US" sz="1020" dirty="0"/>
+              <a:t>CREATE_INBOUND_TASK (입고=RECEIVED)</a:t>
+            </a:r>
+            <a:endParaRPr lang="en-US" sz="900" dirty="0"/>
           </a:p>
           <a:p>
             <a:pPr indent="0" marL="0">
               <a:lnSpc>
-                <a:spcPct val="105000"/>
+                <a:spcPct val="104000"/>
               </a:lnSpc>
               <a:buNone/>
             </a:pPr>
-            <a:r>
-              <a:rPr lang="en-US" sz="1020" dirty="0">
+            <a:endParaRPr lang="en-US" sz="900" dirty="0"/>
+          </a:p>
+          <a:p>
+            <a:pPr indent="0" marL="0">
+              <a:lnSpc>
+                <a:spcPct val="104000"/>
+              </a:lnSpc>
+              <a:buNone/>
+            </a:pPr>
+            <a:r>
+              <a:rPr lang="en-US" sz="900" b="1" dirty="0">
+                <a:solidFill>
+                  <a:srgbClr val="028090"/>
+                </a:solidFill>
+                <a:latin typeface="Malgun Gothic" pitchFamily="34" charset="0"/>
+                <a:ea typeface="Malgun Gothic" pitchFamily="34" charset="-122"/>
+                <a:cs typeface="Malgun Gothic" pitchFamily="34" charset="-120"/>
+              </a:rPr>
+              <a:t>→ 발생  </a:t>
+            </a:r>
+            <a:pPr indent="0" marL="0">
+              <a:lnSpc>
+                <a:spcPct val="104000"/>
+              </a:lnSpc>
+              <a:buNone/>
+            </a:pPr>
+            <a:r>
+              <a:rPr lang="en-US" sz="900" dirty="0">
                 <a:solidFill>
                   <a:srgbClr val="6B7A85"/>
                 </a:solidFill>
@@ -15540,50 +16939,30 @@
                 <a:ea typeface="Malgun Gothic" pitchFamily="34" charset="-122"/>
                 <a:cs typeface="Malgun Gothic" pitchFamily="34" charset="-120"/>
               </a:rPr>
-              <a:t>· /sessions 목록·복원·삭제 · 서버 DB 저장</a:t>
-            </a:r>
-            <a:endParaRPr lang="en-US" sz="1020" dirty="0"/>
-          </a:p>
-          <a:p>
-            <a:pPr indent="0" marL="0">
-              <a:lnSpc>
-                <a:spcPct val="105000"/>
-              </a:lnSpc>
-              <a:buNone/>
-            </a:pPr>
-            <a:r>
-              <a:rPr lang="en-US" sz="1020" dirty="0">
-                <a:solidFill>
-                  <a:srgbClr val="6B7A85"/>
-                </a:solidFill>
-                <a:latin typeface="Malgun Gothic" pitchFamily="34" charset="0"/>
-                <a:ea typeface="Malgun Gothic" pitchFamily="34" charset="-122"/>
-                <a:cs typeface="Malgun Gothic" pitchFamily="34" charset="-120"/>
-              </a:rPr>
-              <a:t>· 사이드바 세션 목록·검색·복원 · 화자 라벨(user/ai)</a:t>
-            </a:r>
-            <a:endParaRPr lang="en-US" sz="1020" dirty="0"/>
-          </a:p>
-        </p:txBody>
-      </p:sp>
-      <p:sp>
-        <p:nvSpPr>
-          <p:cNvPr id="7" name="Shape 5"/>
-          <p:cNvSpPr/>
-          <p:nvPr/>
-        </p:nvSpPr>
-        <p:spPr>
-          <a:xfrm>
-            <a:off x="4572000" y="1371600"/>
-            <a:ext cx="4114800" cy="1783080"/>
+              <a:t>NEED_PUTAWAY</a:t>
+            </a:r>
+            <a:endParaRPr lang="en-US" sz="900" dirty="0"/>
+          </a:p>
+        </p:txBody>
+      </p:sp>
+      <p:sp>
+        <p:nvSpPr>
+          <p:cNvPr id="8" name="Shape 6"/>
+          <p:cNvSpPr/>
+          <p:nvPr/>
+        </p:nvSpPr>
+        <p:spPr>
+          <a:xfrm>
+            <a:off x="3273552" y="1517904"/>
+            <a:ext cx="2615184" cy="1828800"/>
           </a:xfrm>
           <a:prstGeom prst="roundRect">
             <a:avLst>
-              <a:gd name="adj" fmla="val 3590"/>
+              <a:gd name="adj" fmla="val 3500"/>
             </a:avLst>
           </a:prstGeom>
           <a:solidFill>
-            <a:srgbClr val="EDF5F6"/>
+            <a:srgbClr val="F4F6F7"/>
           </a:solidFill>
           <a:ln/>
           <a:effectLst>
@@ -15594,21 +16973,17 @@
             </a:outerShdw>
           </a:effectLst>
         </p:spPr>
-        <p:txBody>
-          <a:bodyPr/>
-          <a:p/>
-        </p:txBody>
-      </p:sp>
-      <p:sp>
-        <p:nvSpPr>
-          <p:cNvPr id="8" name="Text 6"/>
-          <p:cNvSpPr/>
-          <p:nvPr/>
-        </p:nvSpPr>
-        <p:spPr>
-          <a:xfrm>
-            <a:off x="4754880" y="1499616"/>
-            <a:ext cx="3749040" cy="292608"/>
+      </p:sp>
+      <p:sp>
+        <p:nvSpPr>
+          <p:cNvPr id="9" name="Text 7"/>
+          <p:cNvSpPr/>
+          <p:nvPr/>
+        </p:nvSpPr>
+        <p:spPr>
+          <a:xfrm>
+            <a:off x="3419856" y="1636776"/>
+            <a:ext cx="2322576" cy="274320"/>
           </a:xfrm>
           <a:prstGeom prst="rect">
             <a:avLst/>
@@ -15624,7 +16999,49 @@
               <a:buNone/>
             </a:pPr>
             <a:r>
-              <a:rPr lang="en-US" sz="1250" b="1" dirty="0">
+              <a:rPr lang="en-US" sz="1200" b="1" dirty="0">
+                <a:solidFill>
+                  <a:srgbClr val="028090"/>
+                </a:solidFill>
+                <a:latin typeface="Malgun Gothic" pitchFamily="34" charset="0"/>
+                <a:ea typeface="Malgun Gothic" pitchFamily="34" charset="-122"/>
+                <a:cs typeface="Malgun Gothic" pitchFamily="34" charset="-120"/>
+              </a:rPr>
+              <a:t>PutawayAgent</a:t>
+            </a:r>
+            <a:endParaRPr lang="en-US" sz="1200" dirty="0"/>
+          </a:p>
+        </p:txBody>
+      </p:sp>
+      <p:sp>
+        <p:nvSpPr>
+          <p:cNvPr id="10" name="Text 8"/>
+          <p:cNvSpPr/>
+          <p:nvPr/>
+        </p:nvSpPr>
+        <p:spPr>
+          <a:xfrm>
+            <a:off x="3419856" y="1975104"/>
+            <a:ext cx="2322576" cy="1280160"/>
+          </a:xfrm>
+          <a:prstGeom prst="rect">
+            <a:avLst/>
+          </a:prstGeom>
+          <a:noFill/>
+          <a:ln/>
+        </p:spPr>
+        <p:txBody>
+          <a:bodyPr wrap="square" lIns="0" tIns="0" rIns="0" bIns="0" rtlCol="0" anchor="t"/>
+          <a:lstStyle/>
+          <a:p>
+            <a:pPr indent="0" marL="0">
+              <a:lnSpc>
+                <a:spcPct val="104000"/>
+              </a:lnSpc>
+              <a:buNone/>
+            </a:pPr>
+            <a:r>
+              <a:rPr lang="en-US" sz="900" b="1" dirty="0">
                 <a:solidFill>
                   <a:srgbClr val="2B3A42"/>
                 </a:solidFill>
@@ -15632,22 +17049,489 @@
                 <a:ea typeface="Malgun Gothic" pitchFamily="34" charset="-122"/>
                 <a:cs typeface="Malgun Gothic" pitchFamily="34" charset="-120"/>
               </a:rPr>
-              <a:t>계층 B — 멀티턴 맥락</a:t>
-            </a:r>
-            <a:endParaRPr lang="en-US" sz="1250" dirty="0"/>
-          </a:p>
-        </p:txBody>
-      </p:sp>
-      <p:sp>
-        <p:nvSpPr>
-          <p:cNvPr id="9" name="Text 7"/>
-          <p:cNvSpPr/>
-          <p:nvPr/>
-        </p:nvSpPr>
-        <p:spPr>
-          <a:xfrm>
-            <a:off x="4754880" y="1847088"/>
-            <a:ext cx="3749040" cy="1179576"/>
+              <a:t>트리거  </a:t>
+            </a:r>
+            <a:pPr indent="0" marL="0">
+              <a:lnSpc>
+                <a:spcPct val="104000"/>
+              </a:lnSpc>
+              <a:buNone/>
+            </a:pPr>
+            <a:r>
+              <a:rPr lang="en-US" sz="900" dirty="0">
+                <a:solidFill>
+                  <a:srgbClr val="6B7A85"/>
+                </a:solidFill>
+                <a:latin typeface="Malgun Gothic" pitchFamily="34" charset="0"/>
+                <a:ea typeface="Malgun Gothic" pitchFamily="34" charset="-122"/>
+                <a:cs typeface="Malgun Gothic" pitchFamily="34" charset="-120"/>
+              </a:rPr>
+              <a:t>NEED_PUTAWAY</a:t>
+            </a:r>
+            <a:endParaRPr lang="en-US" sz="900" dirty="0"/>
+          </a:p>
+          <a:p>
+            <a:pPr indent="0" marL="0">
+              <a:lnSpc>
+                <a:spcPct val="104000"/>
+              </a:lnSpc>
+              <a:buNone/>
+            </a:pPr>
+            <a:endParaRPr lang="en-US" sz="900" dirty="0"/>
+          </a:p>
+          <a:p>
+            <a:pPr indent="0" marL="0">
+              <a:lnSpc>
+                <a:spcPct val="104000"/>
+              </a:lnSpc>
+              <a:buNone/>
+            </a:pPr>
+            <a:r>
+              <a:rPr lang="en-US" sz="900" b="1" dirty="0">
+                <a:solidFill>
+                  <a:srgbClr val="2B3A42"/>
+                </a:solidFill>
+                <a:latin typeface="Malgun Gothic" pitchFamily="34" charset="0"/>
+                <a:ea typeface="Malgun Gothic" pitchFamily="34" charset="-122"/>
+                <a:cs typeface="Malgun Gothic" pitchFamily="34" charset="-120"/>
+              </a:rPr>
+              <a:t>Action  </a:t>
+            </a:r>
+            <a:pPr indent="0" marL="0">
+              <a:lnSpc>
+                <a:spcPct val="104000"/>
+              </a:lnSpc>
+              <a:buNone/>
+            </a:pPr>
+            <a:r>
+              <a:rPr lang="en-US" sz="900" dirty="0">
+                <a:solidFill>
+                  <a:srgbClr val="6B7A85"/>
+                </a:solidFill>
+                <a:latin typeface="Malgun Gothic" pitchFamily="34" charset="0"/>
+                <a:ea typeface="Malgun Gothic" pitchFamily="34" charset="-122"/>
+                <a:cs typeface="Malgun Gothic" pitchFamily="34" charset="-120"/>
+              </a:rPr>
+              <a:t>CREATE_PUTAWAY_TASK (적치작업 생성)</a:t>
+            </a:r>
+            <a:endParaRPr lang="en-US" sz="900" dirty="0"/>
+          </a:p>
+          <a:p>
+            <a:pPr indent="0" marL="0">
+              <a:lnSpc>
+                <a:spcPct val="104000"/>
+              </a:lnSpc>
+              <a:buNone/>
+            </a:pPr>
+            <a:endParaRPr lang="en-US" sz="900" dirty="0"/>
+          </a:p>
+          <a:p>
+            <a:pPr indent="0" marL="0">
+              <a:lnSpc>
+                <a:spcPct val="104000"/>
+              </a:lnSpc>
+              <a:buNone/>
+            </a:pPr>
+            <a:r>
+              <a:rPr lang="en-US" sz="900" b="1" dirty="0">
+                <a:solidFill>
+                  <a:srgbClr val="028090"/>
+                </a:solidFill>
+                <a:latin typeface="Malgun Gothic" pitchFamily="34" charset="0"/>
+                <a:ea typeface="Malgun Gothic" pitchFamily="34" charset="-122"/>
+                <a:cs typeface="Malgun Gothic" pitchFamily="34" charset="-120"/>
+              </a:rPr>
+              <a:t>→ 발생  </a:t>
+            </a:r>
+            <a:pPr indent="0" marL="0">
+              <a:lnSpc>
+                <a:spcPct val="104000"/>
+              </a:lnSpc>
+              <a:buNone/>
+            </a:pPr>
+            <a:r>
+              <a:rPr lang="en-US" sz="900" dirty="0">
+                <a:solidFill>
+                  <a:srgbClr val="6B7A85"/>
+                </a:solidFill>
+                <a:latin typeface="Malgun Gothic" pitchFamily="34" charset="0"/>
+                <a:ea typeface="Malgun Gothic" pitchFamily="34" charset="-122"/>
+                <a:cs typeface="Malgun Gothic" pitchFamily="34" charset="-120"/>
+              </a:rPr>
+              <a:t>TASK_CREATED</a:t>
+            </a:r>
+            <a:endParaRPr lang="en-US" sz="900" dirty="0"/>
+          </a:p>
+        </p:txBody>
+      </p:sp>
+      <p:sp>
+        <p:nvSpPr>
+          <p:cNvPr id="11" name="Shape 9"/>
+          <p:cNvSpPr/>
+          <p:nvPr/>
+        </p:nvSpPr>
+        <p:spPr>
+          <a:xfrm>
+            <a:off x="6089904" y="1517904"/>
+            <a:ext cx="2615184" cy="1828800"/>
+          </a:xfrm>
+          <a:prstGeom prst="roundRect">
+            <a:avLst>
+              <a:gd name="adj" fmla="val 3500"/>
+            </a:avLst>
+          </a:prstGeom>
+          <a:solidFill>
+            <a:srgbClr val="F4F6F7"/>
+          </a:solidFill>
+          <a:ln/>
+          <a:effectLst>
+            <a:outerShdw sx="100000" sy="100000" kx="0" ky="0" algn="bl" rotWithShape="0" blurRad="63500" dist="25400" dir="2700000">
+              <a:srgbClr val="000000">
+                <a:alpha val="10000"/>
+              </a:srgbClr>
+            </a:outerShdw>
+          </a:effectLst>
+        </p:spPr>
+      </p:sp>
+      <p:sp>
+        <p:nvSpPr>
+          <p:cNvPr id="12" name="Text 10"/>
+          <p:cNvSpPr/>
+          <p:nvPr/>
+        </p:nvSpPr>
+        <p:spPr>
+          <a:xfrm>
+            <a:off x="6236208" y="1636776"/>
+            <a:ext cx="2322576" cy="274320"/>
+          </a:xfrm>
+          <a:prstGeom prst="rect">
+            <a:avLst/>
+          </a:prstGeom>
+          <a:noFill/>
+          <a:ln/>
+        </p:spPr>
+        <p:txBody>
+          <a:bodyPr wrap="square" lIns="0" tIns="0" rIns="0" bIns="0" rtlCol="0" anchor="ctr"/>
+          <a:lstStyle/>
+          <a:p>
+            <a:pPr indent="0" marL="0">
+              <a:buNone/>
+            </a:pPr>
+            <a:r>
+              <a:rPr lang="en-US" sz="1200" b="1" dirty="0">
+                <a:solidFill>
+                  <a:srgbClr val="028090"/>
+                </a:solidFill>
+                <a:latin typeface="Malgun Gothic" pitchFamily="34" charset="0"/>
+                <a:ea typeface="Malgun Gothic" pitchFamily="34" charset="-122"/>
+                <a:cs typeface="Malgun Gothic" pitchFamily="34" charset="-120"/>
+              </a:rPr>
+              <a:t>ResourceAgent</a:t>
+            </a:r>
+            <a:endParaRPr lang="en-US" sz="1200" dirty="0"/>
+          </a:p>
+        </p:txBody>
+      </p:sp>
+      <p:sp>
+        <p:nvSpPr>
+          <p:cNvPr id="13" name="Text 11"/>
+          <p:cNvSpPr/>
+          <p:nvPr/>
+        </p:nvSpPr>
+        <p:spPr>
+          <a:xfrm>
+            <a:off x="6236208" y="1975104"/>
+            <a:ext cx="2322576" cy="1280160"/>
+          </a:xfrm>
+          <a:prstGeom prst="rect">
+            <a:avLst/>
+          </a:prstGeom>
+          <a:noFill/>
+          <a:ln/>
+        </p:spPr>
+        <p:txBody>
+          <a:bodyPr wrap="square" lIns="0" tIns="0" rIns="0" bIns="0" rtlCol="0" anchor="t"/>
+          <a:lstStyle/>
+          <a:p>
+            <a:pPr indent="0" marL="0">
+              <a:lnSpc>
+                <a:spcPct val="104000"/>
+              </a:lnSpc>
+              <a:buNone/>
+            </a:pPr>
+            <a:r>
+              <a:rPr lang="en-US" sz="900" b="1" dirty="0">
+                <a:solidFill>
+                  <a:srgbClr val="2B3A42"/>
+                </a:solidFill>
+                <a:latin typeface="Malgun Gothic" pitchFamily="34" charset="0"/>
+                <a:ea typeface="Malgun Gothic" pitchFamily="34" charset="-122"/>
+                <a:cs typeface="Malgun Gothic" pitchFamily="34" charset="-120"/>
+              </a:rPr>
+              <a:t>트리거  </a:t>
+            </a:r>
+            <a:pPr indent="0" marL="0">
+              <a:lnSpc>
+                <a:spcPct val="104000"/>
+              </a:lnSpc>
+              <a:buNone/>
+            </a:pPr>
+            <a:r>
+              <a:rPr lang="en-US" sz="900" dirty="0">
+                <a:solidFill>
+                  <a:srgbClr val="6B7A85"/>
+                </a:solidFill>
+                <a:latin typeface="Malgun Gothic" pitchFamily="34" charset="0"/>
+                <a:ea typeface="Malgun Gothic" pitchFamily="34" charset="-122"/>
+                <a:cs typeface="Malgun Gothic" pitchFamily="34" charset="-120"/>
+              </a:rPr>
+              <a:t>TASK_CREATED</a:t>
+            </a:r>
+            <a:endParaRPr lang="en-US" sz="900" dirty="0"/>
+          </a:p>
+          <a:p>
+            <a:pPr indent="0" marL="0">
+              <a:lnSpc>
+                <a:spcPct val="104000"/>
+              </a:lnSpc>
+              <a:buNone/>
+            </a:pPr>
+            <a:endParaRPr lang="en-US" sz="900" dirty="0"/>
+          </a:p>
+          <a:p>
+            <a:pPr indent="0" marL="0">
+              <a:lnSpc>
+                <a:spcPct val="104000"/>
+              </a:lnSpc>
+              <a:buNone/>
+            </a:pPr>
+            <a:r>
+              <a:rPr lang="en-US" sz="900" b="1" dirty="0">
+                <a:solidFill>
+                  <a:srgbClr val="2B3A42"/>
+                </a:solidFill>
+                <a:latin typeface="Malgun Gothic" pitchFamily="34" charset="0"/>
+                <a:ea typeface="Malgun Gothic" pitchFamily="34" charset="-122"/>
+                <a:cs typeface="Malgun Gothic" pitchFamily="34" charset="-120"/>
+              </a:rPr>
+              <a:t>Action  </a:t>
+            </a:r>
+            <a:pPr indent="0" marL="0">
+              <a:lnSpc>
+                <a:spcPct val="104000"/>
+              </a:lnSpc>
+              <a:buNone/>
+            </a:pPr>
+            <a:r>
+              <a:rPr lang="en-US" sz="900" dirty="0">
+                <a:solidFill>
+                  <a:srgbClr val="6B7A85"/>
+                </a:solidFill>
+                <a:latin typeface="Malgun Gothic" pitchFamily="34" charset="0"/>
+                <a:ea typeface="Malgun Gothic" pitchFamily="34" charset="-122"/>
+                <a:cs typeface="Malgun Gothic" pitchFamily="34" charset="-120"/>
+              </a:rPr>
+              <a:t>ALLOCATE_WORKER (작업자 배정)</a:t>
+            </a:r>
+            <a:endParaRPr lang="en-US" sz="900" dirty="0"/>
+          </a:p>
+          <a:p>
+            <a:pPr indent="0" marL="0">
+              <a:lnSpc>
+                <a:spcPct val="104000"/>
+              </a:lnSpc>
+              <a:buNone/>
+            </a:pPr>
+            <a:endParaRPr lang="en-US" sz="900" dirty="0"/>
+          </a:p>
+          <a:p>
+            <a:pPr indent="0" marL="0">
+              <a:lnSpc>
+                <a:spcPct val="104000"/>
+              </a:lnSpc>
+              <a:buNone/>
+            </a:pPr>
+            <a:r>
+              <a:rPr lang="en-US" sz="900" b="1" dirty="0">
+                <a:solidFill>
+                  <a:srgbClr val="028090"/>
+                </a:solidFill>
+                <a:latin typeface="Malgun Gothic" pitchFamily="34" charset="0"/>
+                <a:ea typeface="Malgun Gothic" pitchFamily="34" charset="-122"/>
+                <a:cs typeface="Malgun Gothic" pitchFamily="34" charset="-120"/>
+              </a:rPr>
+              <a:t>→ 발생  </a:t>
+            </a:r>
+            <a:pPr indent="0" marL="0">
+              <a:lnSpc>
+                <a:spcPct val="104000"/>
+              </a:lnSpc>
+              <a:buNone/>
+            </a:pPr>
+            <a:r>
+              <a:rPr lang="en-US" sz="900" dirty="0">
+                <a:solidFill>
+                  <a:srgbClr val="6B7A85"/>
+                </a:solidFill>
+                <a:latin typeface="Malgun Gothic" pitchFamily="34" charset="0"/>
+                <a:ea typeface="Malgun Gothic" pitchFamily="34" charset="-122"/>
+                <a:cs typeface="Malgun Gothic" pitchFamily="34" charset="-120"/>
+              </a:rPr>
+              <a:t>(완료)</a:t>
+            </a:r>
+            <a:endParaRPr lang="en-US" sz="900" dirty="0"/>
+          </a:p>
+        </p:txBody>
+      </p:sp>
+      <p:sp>
+        <p:nvSpPr>
+          <p:cNvPr id="14" name="Text 12"/>
+          <p:cNvSpPr/>
+          <p:nvPr/>
+        </p:nvSpPr>
+        <p:spPr>
+          <a:xfrm>
+            <a:off x="3163824" y="1517904"/>
+            <a:ext cx="146304" cy="1828800"/>
+          </a:xfrm>
+          <a:prstGeom prst="rect">
+            <a:avLst/>
+          </a:prstGeom>
+          <a:noFill/>
+          <a:ln/>
+        </p:spPr>
+        <p:txBody>
+          <a:bodyPr wrap="square" lIns="0" tIns="0" rIns="0" bIns="0" rtlCol="0" anchor="ctr"/>
+          <a:lstStyle/>
+          <a:p>
+            <a:pPr algn="ctr" indent="0" marL="0">
+              <a:buNone/>
+            </a:pPr>
+            <a:r>
+              <a:rPr lang="en-US" sz="1800" b="1" dirty="0">
+                <a:solidFill>
+                  <a:srgbClr val="028090"/>
+                </a:solidFill>
+                <a:latin typeface="Malgun Gothic" pitchFamily="34" charset="0"/>
+                <a:ea typeface="Malgun Gothic" pitchFamily="34" charset="-122"/>
+                <a:cs typeface="Malgun Gothic" pitchFamily="34" charset="-120"/>
+              </a:rPr>
+              <a:t>→</a:t>
+            </a:r>
+            <a:endParaRPr lang="en-US" sz="1800" dirty="0"/>
+          </a:p>
+        </p:txBody>
+      </p:sp>
+      <p:sp>
+        <p:nvSpPr>
+          <p:cNvPr id="15" name="Text 13"/>
+          <p:cNvSpPr/>
+          <p:nvPr/>
+        </p:nvSpPr>
+        <p:spPr>
+          <a:xfrm>
+            <a:off x="5980176" y="1517904"/>
+            <a:ext cx="146304" cy="1828800"/>
+          </a:xfrm>
+          <a:prstGeom prst="rect">
+            <a:avLst/>
+          </a:prstGeom>
+          <a:noFill/>
+          <a:ln/>
+        </p:spPr>
+        <p:txBody>
+          <a:bodyPr wrap="square" lIns="0" tIns="0" rIns="0" bIns="0" rtlCol="0" anchor="ctr"/>
+          <a:lstStyle/>
+          <a:p>
+            <a:pPr algn="ctr" indent="0" marL="0">
+              <a:buNone/>
+            </a:pPr>
+            <a:r>
+              <a:rPr lang="en-US" sz="1800" b="1" dirty="0">
+                <a:solidFill>
+                  <a:srgbClr val="028090"/>
+                </a:solidFill>
+                <a:latin typeface="Malgun Gothic" pitchFamily="34" charset="0"/>
+                <a:ea typeface="Malgun Gothic" pitchFamily="34" charset="-122"/>
+                <a:cs typeface="Malgun Gothic" pitchFamily="34" charset="-120"/>
+              </a:rPr>
+              <a:t>→</a:t>
+            </a:r>
+            <a:endParaRPr lang="en-US" sz="1800" dirty="0"/>
+          </a:p>
+        </p:txBody>
+      </p:sp>
+      <p:sp>
+        <p:nvSpPr>
+          <p:cNvPr id="16" name="Shape 14"/>
+          <p:cNvSpPr/>
+          <p:nvPr/>
+        </p:nvSpPr>
+        <p:spPr>
+          <a:xfrm>
+            <a:off x="457200" y="3529584"/>
+            <a:ext cx="5074920" cy="1463040"/>
+          </a:xfrm>
+          <a:prstGeom prst="roundRect">
+            <a:avLst>
+              <a:gd name="adj" fmla="val 3750"/>
+            </a:avLst>
+          </a:prstGeom>
+          <a:solidFill>
+            <a:srgbClr val="263238"/>
+          </a:solidFill>
+          <a:ln/>
+        </p:spPr>
+      </p:sp>
+      <p:sp>
+        <p:nvSpPr>
+          <p:cNvPr id="17" name="Text 15"/>
+          <p:cNvSpPr/>
+          <p:nvPr/>
+        </p:nvSpPr>
+        <p:spPr>
+          <a:xfrm>
+            <a:off x="603504" y="3621024"/>
+            <a:ext cx="4782312" cy="237744"/>
+          </a:xfrm>
+          <a:prstGeom prst="rect">
+            <a:avLst/>
+          </a:prstGeom>
+          <a:noFill/>
+          <a:ln/>
+        </p:spPr>
+        <p:txBody>
+          <a:bodyPr wrap="square" lIns="0" tIns="0" rIns="0" bIns="0" rtlCol="0" anchor="ctr"/>
+          <a:lstStyle/>
+          <a:p>
+            <a:pPr indent="0" marL="0">
+              <a:buNone/>
+            </a:pPr>
+            <a:r>
+              <a:rPr lang="en-US" sz="950" b="1" dirty="0">
+                <a:solidFill>
+                  <a:srgbClr val="7FD1CD"/>
+                </a:solidFill>
+                <a:latin typeface="Malgun Gothic" pitchFamily="34" charset="0"/>
+                <a:ea typeface="Malgun Gothic" pitchFamily="34" charset="-122"/>
+                <a:cs typeface="Malgun Gothic" pitchFamily="34" charset="-120"/>
+              </a:rPr>
+              <a:t>executor.py — 성공 후 ‘다음 에이전트’ 신호 = 이벤트 INSERT</a:t>
+            </a:r>
+            <a:endParaRPr lang="en-US" sz="950" dirty="0"/>
+          </a:p>
+        </p:txBody>
+      </p:sp>
+      <p:sp>
+        <p:nvSpPr>
+          <p:cNvPr id="18" name="Text 16"/>
+          <p:cNvSpPr/>
+          <p:nvPr/>
+        </p:nvSpPr>
+        <p:spPr>
+          <a:xfrm>
+            <a:off x="603504" y="3895344"/>
+            <a:ext cx="4782312" cy="1005840"/>
           </a:xfrm>
           <a:prstGeom prst="rect">
             <a:avLst/>
@@ -15666,17 +17550,17 @@
               <a:buNone/>
             </a:pPr>
             <a:r>
-              <a:rPr lang="en-US" sz="1020" dirty="0">
-                <a:solidFill>
-                  <a:srgbClr val="6B7A85"/>
-                </a:solidFill>
-                <a:latin typeface="Malgun Gothic" pitchFamily="34" charset="0"/>
-                <a:ea typeface="Malgun Gothic" pitchFamily="34" charset="-122"/>
-                <a:cs typeface="Malgun Gothic" pitchFamily="34" charset="-120"/>
-              </a:rPr>
-              <a:t>“직전 맥락 기억” — 최근 6턴 주입</a:t>
-            </a:r>
-            <a:endParaRPr lang="en-US" sz="1020" dirty="0"/>
+              <a:rPr lang="en-US" sz="830" dirty="0">
+                <a:solidFill>
+                  <a:srgbClr val="E6EDEF"/>
+                </a:solidFill>
+                <a:latin typeface="Courier New" pitchFamily="34" charset="0"/>
+                <a:ea typeface="Courier New" pitchFamily="34" charset="-122"/>
+                <a:cs typeface="Courier New" pitchFamily="34" charset="-120"/>
+              </a:rPr>
+              <a:t>def _emit_followups(action, result):</a:t>
+            </a:r>
+            <a:endParaRPr lang="en-US" sz="830" dirty="0"/>
           </a:p>
           <a:p>
             <a:pPr indent="0" marL="0">
@@ -15686,17 +17570,17 @@
               <a:buNone/>
             </a:pPr>
             <a:r>
-              <a:rPr lang="en-US" sz="1020" dirty="0">
-                <a:solidFill>
-                  <a:srgbClr val="6B7A85"/>
-                </a:solidFill>
-                <a:latin typeface="Malgun Gothic" pitchFamily="34" charset="0"/>
-                <a:ea typeface="Malgun Gothic" pitchFamily="34" charset="-122"/>
-                <a:cs typeface="Malgun Gothic" pitchFamily="34" charset="-120"/>
-              </a:rPr>
-              <a:t>· /chat이 session_id로 recent_history → state.history</a:t>
-            </a:r>
-            <a:endParaRPr lang="en-US" sz="1020" dirty="0"/>
+              <a:rPr lang="en-US" sz="830" dirty="0">
+                <a:solidFill>
+                  <a:srgbClr val="E6EDEF"/>
+                </a:solidFill>
+                <a:latin typeface="Courier New" pitchFamily="34" charset="0"/>
+                <a:ea typeface="Courier New" pitchFamily="34" charset="-122"/>
+                <a:cs typeface="Courier New" pitchFamily="34" charset="-120"/>
+              </a:rPr>
+              <a:t>  if at == 'CREATE_INBOUND_TASK':</a:t>
+            </a:r>
+            <a:endParaRPr lang="en-US" sz="830" dirty="0"/>
           </a:p>
           <a:p>
             <a:pPr indent="0" marL="0">
@@ -15706,17 +17590,17 @@
               <a:buNone/>
             </a:pPr>
             <a:r>
-              <a:rPr lang="en-US" sz="1020" dirty="0">
-                <a:solidFill>
-                  <a:srgbClr val="6B7A85"/>
-                </a:solidFill>
-                <a:latin typeface="Malgun Gothic" pitchFamily="34" charset="0"/>
-                <a:ea typeface="Malgun Gothic" pitchFamily="34" charset="-122"/>
-                <a:cs typeface="Malgun Gothic" pitchFamily="34" charset="-120"/>
-              </a:rPr>
-              <a:t>· Router 대명사·생략 해소(‘그거 할당’→직전 order_no)</a:t>
-            </a:r>
-            <a:endParaRPr lang="en-US" sz="1020" dirty="0"/>
+              <a:rPr lang="en-US" sz="830" dirty="0">
+                <a:solidFill>
+                  <a:srgbClr val="E6EDEF"/>
+                </a:solidFill>
+                <a:latin typeface="Courier New" pitchFamily="34" charset="0"/>
+                <a:ea typeface="Courier New" pitchFamily="34" charset="-122"/>
+                <a:cs typeface="Courier New" pitchFamily="34" charset="-120"/>
+              </a:rPr>
+              <a:t>    events.add_event('NEED_PUTAWAY','inbound', inbound_no)</a:t>
+            </a:r>
+            <a:endParaRPr lang="en-US" sz="830" dirty="0"/>
           </a:p>
           <a:p>
             <a:pPr indent="0" marL="0">
@@ -15726,73 +17610,874 @@
               <a:buNone/>
             </a:pPr>
             <a:r>
-              <a:rPr lang="en-US" sz="1020" dirty="0">
-                <a:solidFill>
-                  <a:srgbClr val="6B7A85"/>
-                </a:solidFill>
-                <a:latin typeface="Malgun Gothic" pitchFamily="34" charset="0"/>
-                <a:ea typeface="Malgun Gothic" pitchFamily="34" charset="-122"/>
-                <a:cs typeface="Malgun Gothic" pitchFamily="34" charset="-120"/>
-              </a:rPr>
-              <a:t>· Response Generator가 맥락 이어받아 일관 응답</a:t>
-            </a:r>
-            <a:endParaRPr lang="en-US" sz="1020" dirty="0"/>
-          </a:p>
-        </p:txBody>
-      </p:sp>
-      <p:sp>
-        <p:nvSpPr>
-          <p:cNvPr id="10" name="Text 8"/>
-          <p:cNvSpPr/>
-          <p:nvPr/>
-        </p:nvSpPr>
-        <p:spPr>
-          <a:xfrm>
-            <a:off x="457200" y="3255264"/>
-            <a:ext cx="8229600" cy="292608"/>
-          </a:xfrm>
-          <a:prstGeom prst="rect">
-            <a:avLst/>
-          </a:prstGeom>
-          <a:noFill/>
-          <a:ln/>
-        </p:spPr>
-        <p:txBody>
-          <a:bodyPr wrap="square" lIns="0" tIns="0" rIns="0" bIns="0" rtlCol="0" anchor="ctr"/>
-          <a:lstStyle/>
-          <a:p>
-            <a:pPr algn="ctr" indent="0" marL="0">
-              <a:buNone/>
-            </a:pPr>
-            <a:r>
-              <a:rPr lang="en-US" sz="1150" i="1" dirty="0">
-                <a:solidFill>
-                  <a:srgbClr val="028090"/>
-                </a:solidFill>
-                <a:latin typeface="Malgun Gothic" pitchFamily="34" charset="0"/>
-                <a:ea typeface="Malgun Gothic" pitchFamily="34" charset="-122"/>
-                <a:cs typeface="Malgun Gothic" pitchFamily="34" charset="-120"/>
-              </a:rPr>
-              <a:t>핵심: smalltalk 인텐트 — 인사·이름·‘기억해둬’를 history로 응답(고정 문구 제거)</a:t>
-            </a:r>
-            <a:endParaRPr lang="en-US" sz="1150" dirty="0"/>
-          </a:p>
-        </p:txBody>
-      </p:sp>
-      <p:sp>
-        <p:nvSpPr>
-          <p:cNvPr id="11" name="Shape 9"/>
-          <p:cNvSpPr/>
-          <p:nvPr/>
-        </p:nvSpPr>
-        <p:spPr>
-          <a:xfrm>
-            <a:off x="457200" y="3657600"/>
-            <a:ext cx="8229600" cy="1143000"/>
+              <a:rPr lang="en-US" sz="830" dirty="0">
+                <a:solidFill>
+                  <a:srgbClr val="E6EDEF"/>
+                </a:solidFill>
+                <a:latin typeface="Courier New" pitchFamily="34" charset="0"/>
+                <a:ea typeface="Courier New" pitchFamily="34" charset="-122"/>
+                <a:cs typeface="Courier New" pitchFamily="34" charset="-120"/>
+              </a:rPr>
+              <a:t>  elif at == 'CREATE_PUTAWAY_TASK':</a:t>
+            </a:r>
+            <a:endParaRPr lang="en-US" sz="830" dirty="0"/>
+          </a:p>
+          <a:p>
+            <a:pPr indent="0" marL="0">
+              <a:lnSpc>
+                <a:spcPct val="105000"/>
+              </a:lnSpc>
+              <a:buNone/>
+            </a:pPr>
+            <a:r>
+              <a:rPr lang="en-US" sz="830" dirty="0">
+                <a:solidFill>
+                  <a:srgbClr val="E6EDEF"/>
+                </a:solidFill>
+                <a:latin typeface="Courier New" pitchFamily="34" charset="0"/>
+                <a:ea typeface="Courier New" pitchFamily="34" charset="-122"/>
+                <a:cs typeface="Courier New" pitchFamily="34" charset="-120"/>
+              </a:rPr>
+              <a:t>    events.add_event('TASK_CREATED','task', stocking_task_id)</a:t>
+            </a:r>
+            <a:endParaRPr lang="en-US" sz="830" dirty="0"/>
+          </a:p>
+          <a:p>
+            <a:pPr indent="0" marL="0">
+              <a:lnSpc>
+                <a:spcPct val="105000"/>
+              </a:lnSpc>
+              <a:buNone/>
+            </a:pPr>
+            <a:r>
+              <a:rPr lang="en-US" sz="830" dirty="0">
+                <a:solidFill>
+                  <a:srgbClr val="E6EDEF"/>
+                </a:solidFill>
+                <a:latin typeface="Courier New" pitchFamily="34" charset="0"/>
+                <a:ea typeface="Courier New" pitchFamily="34" charset="-122"/>
+                <a:cs typeface="Courier New" pitchFamily="34" charset="-120"/>
+              </a:rPr>
+              <a:t>  elif at == 'CREATE_PICKING_TASK':</a:t>
+            </a:r>
+            <a:endParaRPr lang="en-US" sz="830" dirty="0"/>
+          </a:p>
+          <a:p>
+            <a:pPr indent="0" marL="0">
+              <a:lnSpc>
+                <a:spcPct val="105000"/>
+              </a:lnSpc>
+              <a:buNone/>
+            </a:pPr>
+            <a:r>
+              <a:rPr lang="en-US" sz="830" dirty="0">
+                <a:solidFill>
+                  <a:srgbClr val="E6EDEF"/>
+                </a:solidFill>
+                <a:latin typeface="Courier New" pitchFamily="34" charset="0"/>
+                <a:ea typeface="Courier New" pitchFamily="34" charset="-122"/>
+                <a:cs typeface="Courier New" pitchFamily="34" charset="-120"/>
+              </a:rPr>
+              <a:t>    events.add_event('TASK_CREATED','task', picking_task_id)</a:t>
+            </a:r>
+            <a:endParaRPr lang="en-US" sz="830" dirty="0"/>
+          </a:p>
+        </p:txBody>
+      </p:sp>
+      <p:sp>
+        <p:nvSpPr>
+          <p:cNvPr id="19" name="Shape 17"/>
+          <p:cNvSpPr/>
+          <p:nvPr/>
+        </p:nvSpPr>
+        <p:spPr>
+          <a:xfrm>
+            <a:off x="5669280" y="3529584"/>
+            <a:ext cx="3017520" cy="1463040"/>
           </a:xfrm>
           <a:prstGeom prst="roundRect">
             <a:avLst>
-              <a:gd name="adj" fmla="val 6400"/>
+              <a:gd name="adj" fmla="val 4375"/>
+            </a:avLst>
+          </a:prstGeom>
+          <a:solidFill>
+            <a:srgbClr val="EDF5F6"/>
+          </a:solidFill>
+          <a:ln/>
+        </p:spPr>
+      </p:sp>
+      <p:sp>
+        <p:nvSpPr>
+          <p:cNvPr id="20" name="Text 18"/>
+          <p:cNvSpPr/>
+          <p:nvPr/>
+        </p:nvSpPr>
+        <p:spPr>
+          <a:xfrm>
+            <a:off x="5852160" y="3657600"/>
+            <a:ext cx="2697480" cy="1225296"/>
+          </a:xfrm>
+          <a:prstGeom prst="rect">
+            <a:avLst/>
+          </a:prstGeom>
+          <a:noFill/>
+          <a:ln/>
+        </p:spPr>
+        <p:txBody>
+          <a:bodyPr wrap="square" lIns="0" tIns="0" rIns="0" bIns="0" rtlCol="0" anchor="t"/>
+          <a:lstStyle/>
+          <a:p>
+            <a:pPr indent="0" marL="0">
+              <a:lnSpc>
+                <a:spcPct val="104000"/>
+              </a:lnSpc>
+              <a:buNone/>
+            </a:pPr>
+            <a:r>
+              <a:rPr lang="en-US" sz="920" b="1" dirty="0">
+                <a:solidFill>
+                  <a:srgbClr val="2B3A42"/>
+                </a:solidFill>
+                <a:latin typeface="Malgun Gothic" pitchFamily="34" charset="0"/>
+                <a:ea typeface="Malgun Gothic" pitchFamily="34" charset="-122"/>
+                <a:cs typeface="Malgun Gothic" pitchFamily="34" charset="-120"/>
+              </a:rPr>
+              <a:t>출고 흐름도 동일
+</a:t>
+            </a:r>
+            <a:pPr indent="0" marL="0">
+              <a:lnSpc>
+                <a:spcPct val="104000"/>
+              </a:lnSpc>
+              <a:buNone/>
+            </a:pPr>
+            <a:r>
+              <a:rPr lang="en-US" sz="920" dirty="0">
+                <a:solidFill>
+                  <a:srgbClr val="6B7A85"/>
+                </a:solidFill>
+                <a:latin typeface="Malgun Gothic" pitchFamily="34" charset="0"/>
+                <a:ea typeface="Malgun Gothic" pitchFamily="34" charset="-122"/>
+                <a:cs typeface="Malgun Gothic" pitchFamily="34" charset="-120"/>
+              </a:rPr>
+              <a:t>NEW_OUTBOUND_ORDER → PickingAgent
+(예약 + 피킹작업) →〔TASK_CREATED〕→
+ResourceAgent(작업자 배정).
+</a:t>
+            </a:r>
+            <a:pPr indent="0" marL="0">
+              <a:lnSpc>
+                <a:spcPct val="104000"/>
+              </a:lnSpc>
+              <a:buNone/>
+            </a:pPr>
+            <a:r>
+              <a:rPr lang="en-US" sz="920" i="1" dirty="0">
+                <a:solidFill>
+                  <a:srgbClr val="028090"/>
+                </a:solidFill>
+                <a:latin typeface="Malgun Gothic" pitchFamily="34" charset="0"/>
+                <a:ea typeface="Malgun Gothic" pitchFamily="34" charset="-122"/>
+                <a:cs typeface="Malgun Gothic" pitchFamily="34" charset="-120"/>
+              </a:rPr>
+              <a:t>에이전트는 서로 모른 채, 블랙보드에 쌓인 이벤트만 보고 자기 일을 한다.</a:t>
+            </a:r>
+            <a:endParaRPr lang="en-US" sz="920" dirty="0"/>
+          </a:p>
+        </p:txBody>
+      </p:sp>
+    </p:spTree>
+  </p:cSld>
+  <p:clrMapOvr>
+    <a:masterClrMapping/>
+  </p:clrMapOvr>
+</p:sld>
+</file>
+
+<file path=ppt/slides/slide23.xml><?xml version="1.0" encoding="utf-8"?>
+<p:sld xmlns:a="http://schemas.openxmlformats.org/drawingml/2006/main" xmlns:r="http://schemas.openxmlformats.org/officeDocument/2006/relationships" xmlns:p="http://schemas.openxmlformats.org/presentationml/2006/main">
+  <p:cSld name="Slide 23">
+    <p:bg>
+      <p:bgPr>
+        <a:solidFill>
+          <a:srgbClr val="FFFFFF"/>
+        </a:solidFill>
+      </p:bgPr>
+    </p:bg>
+    <p:spTree>
+      <p:nvGrpSpPr>
+        <p:cNvPr id="1" name=""/>
+        <p:cNvGrpSpPr/>
+        <p:nvPr/>
+      </p:nvGrpSpPr>
+      <p:grpSpPr>
+        <a:xfrm>
+          <a:off x="0" y="0"/>
+          <a:ext cx="0" cy="0"/>
+          <a:chOff x="0" y="0"/>
+          <a:chExt cx="0" cy="0"/>
+        </a:xfrm>
+      </p:grpSpPr>
+      <p:sp>
+        <p:nvSpPr>
+          <p:cNvPr id="2" name="Text 0"/>
+          <p:cNvSpPr/>
+          <p:nvPr/>
+        </p:nvSpPr>
+        <p:spPr>
+          <a:xfrm>
+            <a:off x="457200" y="292608"/>
+            <a:ext cx="8229600" cy="274320"/>
+          </a:xfrm>
+          <a:prstGeom prst="rect">
+            <a:avLst/>
+          </a:prstGeom>
+          <a:noFill/>
+          <a:ln/>
+        </p:spPr>
+        <p:txBody>
+          <a:bodyPr wrap="square" lIns="0" tIns="0" rIns="0" bIns="0" rtlCol="0" anchor="ctr"/>
+          <a:lstStyle/>
+          <a:p>
+            <a:pPr indent="0" marL="0">
+              <a:buNone/>
+            </a:pPr>
+            <a:r>
+              <a:rPr lang="en-US" sz="1100" b="1" spc="200" kern="0" dirty="0">
+                <a:solidFill>
+                  <a:srgbClr val="028090"/>
+                </a:solidFill>
+                <a:latin typeface="Malgun Gothic" pitchFamily="34" charset="0"/>
+                <a:ea typeface="Malgun Gothic" pitchFamily="34" charset="-122"/>
+                <a:cs typeface="Malgun Gothic" pitchFamily="34" charset="-120"/>
+              </a:rPr>
+              <a:t>AUTO-OPERATION · DECISION CYCLE</a:t>
+            </a:r>
+            <a:endParaRPr lang="en-US" sz="1100" dirty="0"/>
+          </a:p>
+        </p:txBody>
+      </p:sp>
+      <p:sp>
+        <p:nvSpPr>
+          <p:cNvPr id="3" name="Text 1"/>
+          <p:cNvSpPr/>
+          <p:nvPr/>
+        </p:nvSpPr>
+        <p:spPr>
+          <a:xfrm>
+            <a:off x="457200" y="530352"/>
+            <a:ext cx="8229600" cy="548640"/>
+          </a:xfrm>
+          <a:prstGeom prst="rect">
+            <a:avLst/>
+          </a:prstGeom>
+          <a:noFill/>
+          <a:ln/>
+        </p:spPr>
+        <p:txBody>
+          <a:bodyPr wrap="square" lIns="0" tIns="0" rIns="0" bIns="0" rtlCol="0" anchor="ctr"/>
+          <a:lstStyle/>
+          <a:p>
+            <a:pPr indent="0" marL="0">
+              <a:buNone/>
+            </a:pPr>
+            <a:r>
+              <a:rPr lang="en-US" sz="2700" b="1" dirty="0">
+                <a:solidFill>
+                  <a:srgbClr val="2B3A42"/>
+                </a:solidFill>
+                <a:latin typeface="Malgun Gothic" pitchFamily="34" charset="0"/>
+                <a:ea typeface="Malgun Gothic" pitchFamily="34" charset="-122"/>
+                <a:cs typeface="Malgun Gothic" pitchFamily="34" charset="-120"/>
+              </a:rPr>
+              <a:t>의사결정 1 사이클 — 실행 8단계와 가드레일</a:t>
+            </a:r>
+            <a:endParaRPr lang="en-US" sz="2700" dirty="0"/>
+          </a:p>
+        </p:txBody>
+      </p:sp>
+      <p:sp>
+        <p:nvSpPr>
+          <p:cNvPr id="4" name="Text 2"/>
+          <p:cNvSpPr/>
+          <p:nvPr/>
+        </p:nvSpPr>
+        <p:spPr>
+          <a:xfrm>
+            <a:off x="457200" y="1060704"/>
+            <a:ext cx="8229600" cy="320040"/>
+          </a:xfrm>
+          <a:prstGeom prst="rect">
+            <a:avLst/>
+          </a:prstGeom>
+          <a:noFill/>
+          <a:ln/>
+        </p:spPr>
+        <p:txBody>
+          <a:bodyPr wrap="square" lIns="0" tIns="0" rIns="0" bIns="0" rtlCol="0" anchor="ctr"/>
+          <a:lstStyle/>
+          <a:p>
+            <a:pPr indent="0" marL="0">
+              <a:buNone/>
+            </a:pPr>
+            <a:r>
+              <a:rPr lang="en-US" sz="1150" dirty="0">
+                <a:solidFill>
+                  <a:srgbClr val="6B7A85"/>
+                </a:solidFill>
+                <a:latin typeface="Malgun Gothic" pitchFamily="34" charset="0"/>
+                <a:ea typeface="Malgun Gothic" pitchFamily="34" charset="-122"/>
+                <a:cs typeface="Malgun Gothic" pitchFamily="34" charset="-120"/>
+              </a:rPr>
+              <a:t>이벤트가 Action으로 실행되기까지 — 자동 상태변경의 유일한 경로(Executor)는 매 단계를 검증·감사한다.</a:t>
+            </a:r>
+            <a:endParaRPr lang="en-US" sz="1150" dirty="0"/>
+          </a:p>
+        </p:txBody>
+      </p:sp>
+      <p:sp>
+        <p:nvSpPr>
+          <p:cNvPr id="5" name="Shape 3"/>
+          <p:cNvSpPr/>
+          <p:nvPr/>
+        </p:nvSpPr>
+        <p:spPr>
+          <a:xfrm>
+            <a:off x="457200" y="1463040"/>
+            <a:ext cx="8229600" cy="566928"/>
+          </a:xfrm>
+          <a:prstGeom prst="roundRect">
+            <a:avLst>
+              <a:gd name="adj" fmla="val 12903"/>
+            </a:avLst>
+          </a:prstGeom>
+          <a:solidFill>
+            <a:srgbClr val="EDF5F6"/>
+          </a:solidFill>
+          <a:ln/>
+        </p:spPr>
+      </p:sp>
+      <p:sp>
+        <p:nvSpPr>
+          <p:cNvPr id="6" name="Text 4"/>
+          <p:cNvSpPr/>
+          <p:nvPr/>
+        </p:nvSpPr>
+        <p:spPr>
+          <a:xfrm>
+            <a:off x="548640" y="1463040"/>
+            <a:ext cx="8046720" cy="566928"/>
+          </a:xfrm>
+          <a:prstGeom prst="rect">
+            <a:avLst/>
+          </a:prstGeom>
+          <a:noFill/>
+          <a:ln/>
+        </p:spPr>
+        <p:txBody>
+          <a:bodyPr wrap="square" lIns="0" tIns="0" rIns="0" bIns="0" rtlCol="0" anchor="ctr"/>
+          <a:lstStyle/>
+          <a:p>
+            <a:pPr algn="ctr" indent="0" marL="0">
+              <a:buNone/>
+            </a:pPr>
+            <a:r>
+              <a:rPr lang="en-US" sz="1100" b="1" dirty="0">
+                <a:solidFill>
+                  <a:srgbClr val="2B3A42"/>
+                </a:solidFill>
+                <a:latin typeface="Malgun Gothic" pitchFamily="34" charset="0"/>
+                <a:ea typeface="Malgun Gothic" pitchFamily="34" charset="-122"/>
+                <a:cs typeface="Malgun Gothic" pitchFamily="34" charset="-120"/>
+              </a:rPr>
+              <a:t>이벤트 수집 </a:t>
+            </a:r>
+            <a:pPr algn="ctr" indent="0" marL="0">
+              <a:buNone/>
+            </a:pPr>
+            <a:r>
+              <a:rPr lang="en-US" sz="1100" dirty="0">
+                <a:solidFill>
+                  <a:srgbClr val="6B7A85"/>
+                </a:solidFill>
+                <a:latin typeface="Malgun Gothic" pitchFamily="34" charset="0"/>
+                <a:ea typeface="Malgun Gothic" pitchFamily="34" charset="-122"/>
+                <a:cs typeface="Malgun Gothic" pitchFamily="34" charset="-120"/>
+              </a:rPr>
+              <a:t>→ </a:t>
+            </a:r>
+            <a:pPr algn="ctr" indent="0" marL="0">
+              <a:buNone/>
+            </a:pPr>
+            <a:r>
+              <a:rPr lang="en-US" sz="1100" b="1" dirty="0">
+                <a:solidFill>
+                  <a:srgbClr val="028090"/>
+                </a:solidFill>
+                <a:latin typeface="Malgun Gothic" pitchFamily="34" charset="0"/>
+                <a:ea typeface="Malgun Gothic" pitchFamily="34" charset="-122"/>
+                <a:cs typeface="Malgun Gothic" pitchFamily="34" charset="-120"/>
+              </a:rPr>
+              <a:t>배치 시뮬 게이트 </a:t>
+            </a:r>
+            <a:pPr algn="ctr" indent="0" marL="0">
+              <a:buNone/>
+            </a:pPr>
+            <a:r>
+              <a:rPr lang="en-US" sz="1100" dirty="0">
+                <a:solidFill>
+                  <a:srgbClr val="6B7A85"/>
+                </a:solidFill>
+                <a:latin typeface="Malgun Gothic" pitchFamily="34" charset="0"/>
+                <a:ea typeface="Malgun Gothic" pitchFamily="34" charset="-122"/>
+                <a:cs typeface="Malgun Gothic" pitchFamily="34" charset="-120"/>
+              </a:rPr>
+              <a:t>→ </a:t>
+            </a:r>
+            <a:pPr algn="ctr" indent="0" marL="0">
+              <a:buNone/>
+            </a:pPr>
+            <a:r>
+              <a:rPr lang="en-US" sz="1100" b="1" dirty="0">
+                <a:solidFill>
+                  <a:srgbClr val="028090"/>
+                </a:solidFill>
+                <a:latin typeface="Malgun Gothic" pitchFamily="34" charset="0"/>
+                <a:ea typeface="Malgun Gothic" pitchFamily="34" charset="-122"/>
+                <a:cs typeface="Malgun Gothic" pitchFamily="34" charset="-120"/>
+              </a:rPr>
+              <a:t>정책 </a:t>
+            </a:r>
+            <a:pPr algn="ctr" indent="0" marL="0">
+              <a:buNone/>
+            </a:pPr>
+            <a:r>
+              <a:rPr lang="en-US" sz="1100" dirty="0">
+                <a:solidFill>
+                  <a:srgbClr val="6B7A85"/>
+                </a:solidFill>
+                <a:latin typeface="Malgun Gothic" pitchFamily="34" charset="0"/>
+                <a:ea typeface="Malgun Gothic" pitchFamily="34" charset="-122"/>
+                <a:cs typeface="Malgun Gothic" pitchFamily="34" charset="-120"/>
+              </a:rPr>
+              <a:t>→ 사전검증 → 락 → </a:t>
+            </a:r>
+            <a:pPr algn="ctr" indent="0" marL="0">
+              <a:buNone/>
+            </a:pPr>
+            <a:r>
+              <a:rPr lang="en-US" sz="1100" b="1" dirty="0">
+                <a:solidFill>
+                  <a:srgbClr val="2B3A42"/>
+                </a:solidFill>
+                <a:latin typeface="Malgun Gothic" pitchFamily="34" charset="0"/>
+                <a:ea typeface="Malgun Gothic" pitchFamily="34" charset="-122"/>
+                <a:cs typeface="Malgun Gothic" pitchFamily="34" charset="-120"/>
+              </a:rPr>
+              <a:t>트랜잭션 실행 </a:t>
+            </a:r>
+            <a:pPr algn="ctr" indent="0" marL="0">
+              <a:buNone/>
+            </a:pPr>
+            <a:r>
+              <a:rPr lang="en-US" sz="1100" dirty="0">
+                <a:solidFill>
+                  <a:srgbClr val="6B7A85"/>
+                </a:solidFill>
+                <a:latin typeface="Malgun Gothic" pitchFamily="34" charset="0"/>
+                <a:ea typeface="Malgun Gothic" pitchFamily="34" charset="-122"/>
+                <a:cs typeface="Malgun Gothic" pitchFamily="34" charset="-120"/>
+              </a:rPr>
+              <a:t>→ 사후검증 → </a:t>
+            </a:r>
+            <a:pPr algn="ctr" indent="0" marL="0">
+              <a:buNone/>
+            </a:pPr>
+            <a:r>
+              <a:rPr lang="en-US" sz="1100" b="1" dirty="0">
+                <a:solidFill>
+                  <a:srgbClr val="2B3A42"/>
+                </a:solidFill>
+                <a:latin typeface="Malgun Gothic" pitchFamily="34" charset="0"/>
+                <a:ea typeface="Malgun Gothic" pitchFamily="34" charset="-122"/>
+                <a:cs typeface="Malgun Gothic" pitchFamily="34" charset="-120"/>
+              </a:rPr>
+              <a:t>감사 · 후속이벤트</a:t>
+            </a:r>
+            <a:endParaRPr lang="en-US" sz="1100" dirty="0"/>
+          </a:p>
+        </p:txBody>
+      </p:sp>
+      <p:sp>
+        <p:nvSpPr>
+          <p:cNvPr id="7" name="Shape 5"/>
+          <p:cNvSpPr/>
+          <p:nvPr/>
+        </p:nvSpPr>
+        <p:spPr>
+          <a:xfrm>
+            <a:off x="457200" y="2240280"/>
+            <a:ext cx="4023360" cy="841248"/>
+          </a:xfrm>
+          <a:prstGeom prst="roundRect">
+            <a:avLst>
+              <a:gd name="adj" fmla="val 7609"/>
+            </a:avLst>
+          </a:prstGeom>
+          <a:solidFill>
+            <a:srgbClr val="F4F6F7"/>
+          </a:solidFill>
+          <a:ln/>
+          <a:effectLst>
+            <a:outerShdw sx="100000" sy="100000" kx="0" ky="0" algn="bl" rotWithShape="0" blurRad="63500" dist="25400" dir="2700000">
+              <a:srgbClr val="000000">
+                <a:alpha val="10000"/>
+              </a:srgbClr>
+            </a:outerShdw>
+          </a:effectLst>
+        </p:spPr>
+      </p:sp>
+      <p:sp>
+        <p:nvSpPr>
+          <p:cNvPr id="8" name="Text 6"/>
+          <p:cNvSpPr/>
+          <p:nvPr/>
+        </p:nvSpPr>
+        <p:spPr>
+          <a:xfrm>
+            <a:off x="621792" y="2350008"/>
+            <a:ext cx="3694176" cy="621792"/>
+          </a:xfrm>
+          <a:prstGeom prst="rect">
+            <a:avLst/>
+          </a:prstGeom>
+          <a:noFill/>
+          <a:ln/>
+        </p:spPr>
+        <p:txBody>
+          <a:bodyPr wrap="square" lIns="0" tIns="0" rIns="0" bIns="0" rtlCol="0" anchor="t"/>
+          <a:lstStyle/>
+          <a:p>
+            <a:pPr indent="0" marL="0">
+              <a:lnSpc>
+                <a:spcPct val="104000"/>
+              </a:lnSpc>
+              <a:buNone/>
+            </a:pPr>
+            <a:r>
+              <a:rPr lang="en-US" sz="1100" b="1" dirty="0">
+                <a:solidFill>
+                  <a:srgbClr val="028090"/>
+                </a:solidFill>
+                <a:latin typeface="Malgun Gothic" pitchFamily="34" charset="0"/>
+                <a:ea typeface="Malgun Gothic" pitchFamily="34" charset="-122"/>
+                <a:cs typeface="Malgun Gothic" pitchFamily="34" charset="-120"/>
+              </a:rPr>
+              <a:t>멱등성(Idempotency)
+</a:t>
+            </a:r>
+            <a:pPr indent="0" marL="0">
+              <a:lnSpc>
+                <a:spcPct val="104000"/>
+              </a:lnSpc>
+              <a:buNone/>
+            </a:pPr>
+            <a:r>
+              <a:rPr lang="en-US" sz="950" dirty="0">
+                <a:solidFill>
+                  <a:srgbClr val="6B7A85"/>
+                </a:solidFill>
+                <a:latin typeface="Malgun Gothic" pitchFamily="34" charset="0"/>
+                <a:ea typeface="Malgun Gothic" pitchFamily="34" charset="-122"/>
+                <a:cs typeface="Malgun Gothic" pitchFamily="34" charset="-120"/>
+              </a:rPr>
+              <a:t>idempotency_key UNIQUE → 같은 작업 중복 시 SKIPPED_DUPLICATE</a:t>
+            </a:r>
+            <a:endParaRPr lang="en-US" sz="1100" dirty="0"/>
+          </a:p>
+        </p:txBody>
+      </p:sp>
+      <p:sp>
+        <p:nvSpPr>
+          <p:cNvPr id="9" name="Shape 7"/>
+          <p:cNvSpPr/>
+          <p:nvPr/>
+        </p:nvSpPr>
+        <p:spPr>
+          <a:xfrm>
+            <a:off x="4663440" y="2240280"/>
+            <a:ext cx="4023360" cy="841248"/>
+          </a:xfrm>
+          <a:prstGeom prst="roundRect">
+            <a:avLst>
+              <a:gd name="adj" fmla="val 7609"/>
+            </a:avLst>
+          </a:prstGeom>
+          <a:solidFill>
+            <a:srgbClr val="F4F6F7"/>
+          </a:solidFill>
+          <a:ln/>
+          <a:effectLst>
+            <a:outerShdw sx="100000" sy="100000" kx="0" ky="0" algn="bl" rotWithShape="0" blurRad="63500" dist="25400" dir="2700000">
+              <a:srgbClr val="000000">
+                <a:alpha val="10000"/>
+              </a:srgbClr>
+            </a:outerShdw>
+          </a:effectLst>
+        </p:spPr>
+      </p:sp>
+      <p:sp>
+        <p:nvSpPr>
+          <p:cNvPr id="10" name="Text 8"/>
+          <p:cNvSpPr/>
+          <p:nvPr/>
+        </p:nvSpPr>
+        <p:spPr>
+          <a:xfrm>
+            <a:off x="4828032" y="2350008"/>
+            <a:ext cx="3694176" cy="621792"/>
+          </a:xfrm>
+          <a:prstGeom prst="rect">
+            <a:avLst/>
+          </a:prstGeom>
+          <a:noFill/>
+          <a:ln/>
+        </p:spPr>
+        <p:txBody>
+          <a:bodyPr wrap="square" lIns="0" tIns="0" rIns="0" bIns="0" rtlCol="0" anchor="t"/>
+          <a:lstStyle/>
+          <a:p>
+            <a:pPr indent="0" marL="0">
+              <a:lnSpc>
+                <a:spcPct val="104000"/>
+              </a:lnSpc>
+              <a:buNone/>
+            </a:pPr>
+            <a:r>
+              <a:rPr lang="en-US" sz="1100" b="1" dirty="0">
+                <a:solidFill>
+                  <a:srgbClr val="028090"/>
+                </a:solidFill>
+                <a:latin typeface="Malgun Gothic" pitchFamily="34" charset="0"/>
+                <a:ea typeface="Malgun Gothic" pitchFamily="34" charset="-122"/>
+                <a:cs typeface="Malgun Gothic" pitchFamily="34" charset="-120"/>
+              </a:rPr>
+              <a:t>예약 단일출처
+</a:t>
+            </a:r>
+            <a:pPr indent="0" marL="0">
+              <a:lnSpc>
+                <a:spcPct val="104000"/>
+              </a:lnSpc>
+              <a:buNone/>
+            </a:pPr>
+            <a:r>
+              <a:rPr lang="en-US" sz="950" dirty="0">
+                <a:solidFill>
+                  <a:srgbClr val="6B7A85"/>
+                </a:solidFill>
+                <a:latin typeface="Malgun Gothic" pitchFamily="34" charset="0"/>
+                <a:ea typeface="Malgun Gothic" pitchFamily="34" charset="-122"/>
+                <a:cs typeface="Malgun Gothic" pitchFamily="34" charset="-120"/>
+              </a:rPr>
+              <a:t>가용 = 보유(AVAILABLE) − 예약. 예측·할당·자동운영이 같은 수치 사용</a:t>
+            </a:r>
+            <a:endParaRPr lang="en-US" sz="1100" dirty="0"/>
+          </a:p>
+        </p:txBody>
+      </p:sp>
+      <p:sp>
+        <p:nvSpPr>
+          <p:cNvPr id="11" name="Shape 9"/>
+          <p:cNvSpPr/>
+          <p:nvPr/>
+        </p:nvSpPr>
+        <p:spPr>
+          <a:xfrm>
+            <a:off x="457200" y="3200400"/>
+            <a:ext cx="4023360" cy="841248"/>
+          </a:xfrm>
+          <a:prstGeom prst="roundRect">
+            <a:avLst>
+              <a:gd name="adj" fmla="val 7609"/>
+            </a:avLst>
+          </a:prstGeom>
+          <a:solidFill>
+            <a:srgbClr val="F4F6F7"/>
+          </a:solidFill>
+          <a:ln/>
+          <a:effectLst>
+            <a:outerShdw sx="100000" sy="100000" kx="0" ky="0" algn="bl" rotWithShape="0" blurRad="63500" dist="25400" dir="2700000">
+              <a:srgbClr val="000000">
+                <a:alpha val="10000"/>
+              </a:srgbClr>
+            </a:outerShdw>
+          </a:effectLst>
+        </p:spPr>
+      </p:sp>
+      <p:sp>
+        <p:nvSpPr>
+          <p:cNvPr id="12" name="Text 10"/>
+          <p:cNvSpPr/>
+          <p:nvPr/>
+        </p:nvSpPr>
+        <p:spPr>
+          <a:xfrm>
+            <a:off x="621792" y="3310128"/>
+            <a:ext cx="3694176" cy="621792"/>
+          </a:xfrm>
+          <a:prstGeom prst="rect">
+            <a:avLst/>
+          </a:prstGeom>
+          <a:noFill/>
+          <a:ln/>
+        </p:spPr>
+        <p:txBody>
+          <a:bodyPr wrap="square" lIns="0" tIns="0" rIns="0" bIns="0" rtlCol="0" anchor="t"/>
+          <a:lstStyle/>
+          <a:p>
+            <a:pPr indent="0" marL="0">
+              <a:lnSpc>
+                <a:spcPct val="104000"/>
+              </a:lnSpc>
+              <a:buNone/>
+            </a:pPr>
+            <a:r>
+              <a:rPr lang="en-US" sz="1100" b="1" dirty="0">
+                <a:solidFill>
+                  <a:srgbClr val="028090"/>
+                </a:solidFill>
+                <a:latin typeface="Malgun Gothic" pitchFamily="34" charset="0"/>
+                <a:ea typeface="Malgun Gothic" pitchFamily="34" charset="-122"/>
+                <a:cs typeface="Malgun Gothic" pitchFamily="34" charset="-120"/>
+              </a:rPr>
+              <a:t>정책 게이트
+</a:t>
+            </a:r>
+            <a:pPr indent="0" marL="0">
+              <a:lnSpc>
+                <a:spcPct val="104000"/>
+              </a:lnSpc>
+              <a:buNone/>
+            </a:pPr>
+            <a:r>
+              <a:rPr lang="en-US" sz="950" dirty="0">
+                <a:solidFill>
+                  <a:srgbClr val="6B7A85"/>
+                </a:solidFill>
+                <a:latin typeface="Malgun Gothic" pitchFamily="34" charset="0"/>
+                <a:ea typeface="Malgun Gothic" pitchFamily="34" charset="-122"/>
+                <a:cs typeface="Malgun Gothic" pitchFamily="34" charset="-120"/>
+              </a:rPr>
+              <a:t>위험 Action(재고보정·취소·출고확정 등)은 자동실행 금지 → POLICY_BLOCKED</a:t>
+            </a:r>
+            <a:endParaRPr lang="en-US" sz="1100" dirty="0"/>
+          </a:p>
+        </p:txBody>
+      </p:sp>
+      <p:sp>
+        <p:nvSpPr>
+          <p:cNvPr id="13" name="Shape 11"/>
+          <p:cNvSpPr/>
+          <p:nvPr/>
+        </p:nvSpPr>
+        <p:spPr>
+          <a:xfrm>
+            <a:off x="4663440" y="3200400"/>
+            <a:ext cx="4023360" cy="841248"/>
+          </a:xfrm>
+          <a:prstGeom prst="roundRect">
+            <a:avLst>
+              <a:gd name="adj" fmla="val 7609"/>
+            </a:avLst>
+          </a:prstGeom>
+          <a:solidFill>
+            <a:srgbClr val="F4F6F7"/>
+          </a:solidFill>
+          <a:ln/>
+          <a:effectLst>
+            <a:outerShdw sx="100000" sy="100000" kx="0" ky="0" algn="bl" rotWithShape="0" blurRad="63500" dist="25400" dir="2700000">
+              <a:srgbClr val="000000">
+                <a:alpha val="10000"/>
+              </a:srgbClr>
+            </a:outerShdw>
+          </a:effectLst>
+        </p:spPr>
+      </p:sp>
+      <p:sp>
+        <p:nvSpPr>
+          <p:cNvPr id="14" name="Text 12"/>
+          <p:cNvSpPr/>
+          <p:nvPr/>
+        </p:nvSpPr>
+        <p:spPr>
+          <a:xfrm>
+            <a:off x="4828032" y="3310128"/>
+            <a:ext cx="3694176" cy="621792"/>
+          </a:xfrm>
+          <a:prstGeom prst="rect">
+            <a:avLst/>
+          </a:prstGeom>
+          <a:noFill/>
+          <a:ln/>
+        </p:spPr>
+        <p:txBody>
+          <a:bodyPr wrap="square" lIns="0" tIns="0" rIns="0" bIns="0" rtlCol="0" anchor="t"/>
+          <a:lstStyle/>
+          <a:p>
+            <a:pPr indent="0" marL="0">
+              <a:lnSpc>
+                <a:spcPct val="104000"/>
+              </a:lnSpc>
+              <a:buNone/>
+            </a:pPr>
+            <a:r>
+              <a:rPr lang="en-US" sz="1100" b="1" dirty="0">
+                <a:solidFill>
+                  <a:srgbClr val="028090"/>
+                </a:solidFill>
+                <a:latin typeface="Malgun Gothic" pitchFamily="34" charset="0"/>
+                <a:ea typeface="Malgun Gothic" pitchFamily="34" charset="-122"/>
+                <a:cs typeface="Malgun Gothic" pitchFamily="34" charset="-120"/>
+              </a:rPr>
+              <a:t>시뮬 게이트
+</a:t>
+            </a:r>
+            <a:pPr indent="0" marL="0">
+              <a:lnSpc>
+                <a:spcPct val="104000"/>
+              </a:lnSpc>
+              <a:buNone/>
+            </a:pPr>
+            <a:r>
+              <a:rPr lang="en-US" sz="950" dirty="0">
+                <a:solidFill>
+                  <a:srgbClr val="6B7A85"/>
+                </a:solidFill>
+                <a:latin typeface="Malgun Gothic" pitchFamily="34" charset="0"/>
+                <a:ea typeface="Malgun Gothic" pitchFamily="34" charset="-122"/>
+                <a:cs typeface="Malgun Gothic" pitchFamily="34" charset="-120"/>
+              </a:rPr>
+              <a:t>배치 What-if 팀 가동률이 임계 이상이면 sim-required Action 보류</a:t>
+            </a:r>
+            <a:endParaRPr lang="en-US" sz="1100" dirty="0"/>
+          </a:p>
+        </p:txBody>
+      </p:sp>
+      <p:sp>
+        <p:nvSpPr>
+          <p:cNvPr id="15" name="Shape 13"/>
+          <p:cNvSpPr/>
+          <p:nvPr/>
+        </p:nvSpPr>
+        <p:spPr>
+          <a:xfrm>
+            <a:off x="457200" y="4279392"/>
+            <a:ext cx="8229600" cy="749808"/>
+          </a:xfrm>
+          <a:prstGeom prst="roundRect">
+            <a:avLst>
+              <a:gd name="adj" fmla="val 8537"/>
             </a:avLst>
           </a:prstGeom>
           <a:solidFill>
@@ -15800,21 +18485,17 @@
           </a:solidFill>
           <a:ln/>
         </p:spPr>
-        <p:txBody>
-          <a:bodyPr/>
-          <a:p/>
-        </p:txBody>
-      </p:sp>
-      <p:sp>
-        <p:nvSpPr>
-          <p:cNvPr id="12" name="Text 10"/>
-          <p:cNvSpPr/>
-          <p:nvPr/>
-        </p:nvSpPr>
-        <p:spPr>
-          <a:xfrm>
-            <a:off x="685800" y="3767328"/>
-            <a:ext cx="7772400" cy="274320"/>
+      </p:sp>
+      <p:sp>
+        <p:nvSpPr>
+          <p:cNvPr id="16" name="Text 14"/>
+          <p:cNvSpPr/>
+          <p:nvPr/>
+        </p:nvSpPr>
+        <p:spPr>
+          <a:xfrm>
+            <a:off x="658368" y="4279392"/>
+            <a:ext cx="7863840" cy="749808"/>
           </a:xfrm>
           <a:prstGeom prst="rect">
             <a:avLst/>
@@ -15824,45 +18505,6 @@
         </p:spPr>
         <p:txBody>
           <a:bodyPr wrap="square" lIns="0" tIns="0" rIns="0" bIns="0" rtlCol="0" anchor="ctr"/>
-          <a:lstStyle/>
-          <a:p>
-            <a:pPr indent="0" marL="0">
-              <a:buNone/>
-            </a:pPr>
-            <a:r>
-              <a:rPr lang="en-US" sz="1250" b="1" dirty="0">
-                <a:solidFill>
-                  <a:srgbClr val="7FD1CD"/>
-                </a:solidFill>
-                <a:latin typeface="Malgun Gothic" pitchFamily="34" charset="0"/>
-                <a:ea typeface="Malgun Gothic" pitchFamily="34" charset="-122"/>
-                <a:cs typeface="Malgun Gothic" pitchFamily="34" charset="-120"/>
-              </a:rPr>
-              <a:t>저장 · 맥락 · 모델</a:t>
-            </a:r>
-            <a:endParaRPr lang="en-US" sz="1250" dirty="0"/>
-          </a:p>
-        </p:txBody>
-      </p:sp>
-      <p:sp>
-        <p:nvSpPr>
-          <p:cNvPr id="13" name="Text 11"/>
-          <p:cNvSpPr/>
-          <p:nvPr/>
-        </p:nvSpPr>
-        <p:spPr>
-          <a:xfrm>
-            <a:off x="685800" y="4133088"/>
-            <a:ext cx="7772400" cy="594360"/>
-          </a:xfrm>
-          <a:prstGeom prst="rect">
-            <a:avLst/>
-          </a:prstGeom>
-          <a:noFill/>
-          <a:ln/>
-        </p:spPr>
-        <p:txBody>
-          <a:bodyPr wrap="square" lIns="0" tIns="0" rIns="0" bIns="0" rtlCol="0" anchor="t"/>
           <a:lstStyle/>
           <a:p>
             <a:pPr indent="0" marL="0">
@@ -15872,15 +18514,15 @@
               <a:buNone/>
             </a:pPr>
             <a:r>
-              <a:rPr lang="en-US" sz="1100" b="1" dirty="0">
-                <a:solidFill>
-                  <a:srgbClr val="FFFFFF"/>
-                </a:solidFill>
-                <a:latin typeface="Malgun Gothic" pitchFamily="34" charset="0"/>
-                <a:ea typeface="Malgun Gothic" pitchFamily="34" charset="-122"/>
-                <a:cs typeface="Malgun Gothic" pitchFamily="34" charset="-120"/>
-              </a:rPr>
-              <a:t xml:space="preserve">저장 </a:t>
+              <a:rPr lang="en-US" sz="1000" b="1" dirty="0">
+                <a:solidFill>
+                  <a:srgbClr val="7FD1CD"/>
+                </a:solidFill>
+                <a:latin typeface="Malgun Gothic" pitchFamily="34" charset="0"/>
+                <a:ea typeface="Malgun Gothic" pitchFamily="34" charset="-122"/>
+                <a:cs typeface="Malgun Gothic" pitchFamily="34" charset="-120"/>
+              </a:rPr>
+              <a:t>원칙  </a:t>
             </a:r>
             <a:pPr indent="0" marL="0">
               <a:lnSpc>
@@ -15889,16 +18531,937 @@
               <a:buNone/>
             </a:pPr>
             <a:r>
-              <a:rPr lang="en-US" sz="1100" dirty="0">
-                <a:solidFill>
-                  <a:srgbClr val="CFD8DC"/>
-                </a:solidFill>
-                <a:latin typeface="Malgun Gothic" pitchFamily="34" charset="0"/>
-                <a:ea typeface="Malgun Gothic" pitchFamily="34" charset="-122"/>
-                <a:cs typeface="Malgun Gothic" pitchFamily="34" charset="-120"/>
-              </a:rPr>
-              <a:t xml:space="preserve">SQLite 서버 DB      </a:t>
-            </a:r>
+              <a:rPr lang="en-US" sz="1000" dirty="0">
+                <a:solidFill>
+                  <a:srgbClr val="E6EDEF"/>
+                </a:solidFill>
+                <a:latin typeface="Malgun Gothic" pitchFamily="34" charset="0"/>
+                <a:ea typeface="Malgun Gothic" pitchFamily="34" charset="-122"/>
+                <a:cs typeface="Malgun Gothic" pitchFamily="34" charset="-120"/>
+              </a:rPr>
+              <a:t>‘무승인 상태변경 0건(HITL)’을 Auto Mode가 위 가드레일과 함께 대체한다. 모든 실행은 8단계 감사로그(EVENT_RECEIVED→…→FINISHED)로 추적된다.</a:t>
+            </a:r>
+            <a:endParaRPr lang="en-US" sz="1000" dirty="0"/>
+          </a:p>
+        </p:txBody>
+      </p:sp>
+    </p:spTree>
+  </p:cSld>
+  <p:clrMapOvr>
+    <a:masterClrMapping/>
+  </p:clrMapOvr>
+</p:sld>
+</file>
+
+<file path=ppt/slides/slide24.xml><?xml version="1.0" encoding="utf-8"?>
+<p:sld xmlns:a="http://schemas.openxmlformats.org/drawingml/2006/main" xmlns:r="http://schemas.openxmlformats.org/officeDocument/2006/relationships" xmlns:p="http://schemas.openxmlformats.org/presentationml/2006/main">
+  <p:cSld name="Slide 24">
+    <p:bg>
+      <p:bgPr>
+        <a:solidFill>
+          <a:srgbClr val="FFFFFF"/>
+        </a:solidFill>
+      </p:bgPr>
+    </p:bg>
+    <p:spTree>
+      <p:nvGrpSpPr>
+        <p:cNvPr id="1" name=""/>
+        <p:cNvGrpSpPr/>
+        <p:nvPr/>
+      </p:nvGrpSpPr>
+      <p:grpSpPr>
+        <a:xfrm>
+          <a:off x="0" y="0"/>
+          <a:ext cx="0" cy="0"/>
+          <a:chOff x="0" y="0"/>
+          <a:chExt cx="0" cy="0"/>
+        </a:xfrm>
+      </p:grpSpPr>
+      <p:sp>
+        <p:nvSpPr>
+          <p:cNvPr id="2" name="Text 0"/>
+          <p:cNvSpPr/>
+          <p:nvPr/>
+        </p:nvSpPr>
+        <p:spPr>
+          <a:xfrm>
+            <a:off x="457200" y="292608"/>
+            <a:ext cx="8229600" cy="274320"/>
+          </a:xfrm>
+          <a:prstGeom prst="rect">
+            <a:avLst/>
+          </a:prstGeom>
+          <a:noFill/>
+          <a:ln/>
+        </p:spPr>
+        <p:txBody>
+          <a:bodyPr wrap="square" lIns="0" tIns="0" rIns="0" bIns="0" rtlCol="0" anchor="ctr"/>
+          <a:lstStyle/>
+          <a:p>
+            <a:pPr indent="0" marL="0">
+              <a:buNone/>
+            </a:pPr>
+            <a:r>
+              <a:rPr lang="en-US" sz="1100" b="1" spc="200" kern="0" dirty="0">
+                <a:solidFill>
+                  <a:srgbClr val="028090"/>
+                </a:solidFill>
+                <a:latin typeface="Malgun Gothic" pitchFamily="34" charset="0"/>
+                <a:ea typeface="Malgun Gothic" pitchFamily="34" charset="-122"/>
+                <a:cs typeface="Malgun Gothic" pitchFamily="34" charset="-120"/>
+              </a:rPr>
+              <a:t>AUTO-OPERATION · DASHBOARD</a:t>
+            </a:r>
+            <a:endParaRPr lang="en-US" sz="1100" dirty="0"/>
+          </a:p>
+        </p:txBody>
+      </p:sp>
+      <p:sp>
+        <p:nvSpPr>
+          <p:cNvPr id="3" name="Text 1"/>
+          <p:cNvSpPr/>
+          <p:nvPr/>
+        </p:nvSpPr>
+        <p:spPr>
+          <a:xfrm>
+            <a:off x="457200" y="530352"/>
+            <a:ext cx="8229600" cy="548640"/>
+          </a:xfrm>
+          <a:prstGeom prst="rect">
+            <a:avLst/>
+          </a:prstGeom>
+          <a:noFill/>
+          <a:ln/>
+        </p:spPr>
+        <p:txBody>
+          <a:bodyPr wrap="square" lIns="0" tIns="0" rIns="0" bIns="0" rtlCol="0" anchor="ctr"/>
+          <a:lstStyle/>
+          <a:p>
+            <a:pPr indent="0" marL="0">
+              <a:buNone/>
+            </a:pPr>
+            <a:r>
+              <a:rPr lang="en-US" sz="2700" b="1" dirty="0">
+                <a:solidFill>
+                  <a:srgbClr val="2B3A42"/>
+                </a:solidFill>
+                <a:latin typeface="Malgun Gothic" pitchFamily="34" charset="0"/>
+                <a:ea typeface="Malgun Gothic" pitchFamily="34" charset="-122"/>
+                <a:cs typeface="Malgun Gothic" pitchFamily="34" charset="-120"/>
+              </a:rPr>
+              <a:t>‘창고자동운영’ 탭 — 동작 가시화</a:t>
+            </a:r>
+            <a:endParaRPr lang="en-US" sz="2700" dirty="0"/>
+          </a:p>
+        </p:txBody>
+      </p:sp>
+      <p:sp>
+        <p:nvSpPr>
+          <p:cNvPr id="4" name="Text 2"/>
+          <p:cNvSpPr/>
+          <p:nvPr/>
+        </p:nvSpPr>
+        <p:spPr>
+          <a:xfrm>
+            <a:off x="457200" y="1060704"/>
+            <a:ext cx="8229600" cy="320040"/>
+          </a:xfrm>
+          <a:prstGeom prst="rect">
+            <a:avLst/>
+          </a:prstGeom>
+          <a:noFill/>
+          <a:ln/>
+        </p:spPr>
+        <p:txBody>
+          <a:bodyPr wrap="square" lIns="0" tIns="0" rIns="0" bIns="0" rtlCol="0" anchor="ctr"/>
+          <a:lstStyle/>
+          <a:p>
+            <a:pPr indent="0" marL="0">
+              <a:buNone/>
+            </a:pPr>
+            <a:r>
+              <a:rPr lang="en-US" sz="1150" dirty="0">
+                <a:solidFill>
+                  <a:srgbClr val="6B7A85"/>
+                </a:solidFill>
+                <a:latin typeface="Malgun Gothic" pitchFamily="34" charset="0"/>
+                <a:ea typeface="Malgun Gothic" pitchFamily="34" charset="-122"/>
+                <a:cs typeface="Malgun Gothic" pitchFamily="34" charset="-120"/>
+              </a:rPr>
+              <a:t>10개 에이전트가 동작할 때 원이 점등되고, 단계별 로그·Action·LLM 사유가 실시간으로 쌓인다.</a:t>
+            </a:r>
+            <a:endParaRPr lang="en-US" sz="1150" dirty="0"/>
+          </a:p>
+        </p:txBody>
+      </p:sp>
+      <p:sp>
+        <p:nvSpPr>
+          <p:cNvPr id="5" name="Text 3"/>
+          <p:cNvSpPr/>
+          <p:nvPr/>
+        </p:nvSpPr>
+        <p:spPr>
+          <a:xfrm>
+            <a:off x="457200" y="1444752"/>
+            <a:ext cx="4572000" cy="274320"/>
+          </a:xfrm>
+          <a:prstGeom prst="rect">
+            <a:avLst/>
+          </a:prstGeom>
+          <a:noFill/>
+          <a:ln/>
+        </p:spPr>
+        <p:txBody>
+          <a:bodyPr wrap="square" lIns="0" tIns="0" rIns="0" bIns="0" rtlCol="0" anchor="ctr"/>
+          <a:lstStyle/>
+          <a:p>
+            <a:pPr indent="0" marL="0">
+              <a:buNone/>
+            </a:pPr>
+            <a:r>
+              <a:rPr lang="en-US" sz="1100" b="1" dirty="0">
+                <a:solidFill>
+                  <a:srgbClr val="2B3A42"/>
+                </a:solidFill>
+                <a:latin typeface="Malgun Gothic" pitchFamily="34" charset="0"/>
+                <a:ea typeface="Malgun Gothic" pitchFamily="34" charset="-122"/>
+                <a:cs typeface="Malgun Gothic" pitchFamily="34" charset="-120"/>
+              </a:rPr>
+              <a:t>에이전트 보드 (도메인 6 · 인프라 4)</a:t>
+            </a:r>
+            <a:endParaRPr lang="en-US" sz="1100" dirty="0"/>
+          </a:p>
+        </p:txBody>
+      </p:sp>
+      <p:sp>
+        <p:nvSpPr>
+          <p:cNvPr id="6" name="Shape 4"/>
+          <p:cNvSpPr/>
+          <p:nvPr/>
+        </p:nvSpPr>
+        <p:spPr>
+          <a:xfrm>
+            <a:off x="457200" y="1783080"/>
+            <a:ext cx="566928" cy="566928"/>
+          </a:xfrm>
+          <a:prstGeom prst="ellipse">
+            <a:avLst/>
+          </a:prstGeom>
+          <a:solidFill>
+            <a:srgbClr val="F4F6F7"/>
+          </a:solidFill>
+          <a:ln w="12700">
+            <a:solidFill>
+              <a:srgbClr val="C9D6D8"/>
+            </a:solidFill>
+            <a:prstDash val="solid"/>
+          </a:ln>
+        </p:spPr>
+      </p:sp>
+      <p:sp>
+        <p:nvSpPr>
+          <p:cNvPr id="7" name="Text 5"/>
+          <p:cNvSpPr/>
+          <p:nvPr/>
+        </p:nvSpPr>
+        <p:spPr>
+          <a:xfrm>
+            <a:off x="347472" y="2350008"/>
+            <a:ext cx="786384" cy="237744"/>
+          </a:xfrm>
+          <a:prstGeom prst="rect">
+            <a:avLst/>
+          </a:prstGeom>
+          <a:noFill/>
+          <a:ln/>
+        </p:spPr>
+        <p:txBody>
+          <a:bodyPr wrap="square" lIns="0" tIns="0" rIns="0" bIns="0" rtlCol="0" anchor="ctr"/>
+          <a:lstStyle/>
+          <a:p>
+            <a:pPr algn="ctr" indent="0" marL="0">
+              <a:buNone/>
+            </a:pPr>
+            <a:r>
+              <a:rPr lang="en-US" sz="850" dirty="0">
+                <a:solidFill>
+                  <a:srgbClr val="6B7A85"/>
+                </a:solidFill>
+                <a:latin typeface="Malgun Gothic" pitchFamily="34" charset="0"/>
+                <a:ea typeface="Malgun Gothic" pitchFamily="34" charset="-122"/>
+                <a:cs typeface="Malgun Gothic" pitchFamily="34" charset="-120"/>
+              </a:rPr>
+              <a:t>입고</a:t>
+            </a:r>
+            <a:endParaRPr lang="en-US" sz="850" dirty="0"/>
+          </a:p>
+        </p:txBody>
+      </p:sp>
+      <p:sp>
+        <p:nvSpPr>
+          <p:cNvPr id="8" name="Shape 6"/>
+          <p:cNvSpPr/>
+          <p:nvPr/>
+        </p:nvSpPr>
+        <p:spPr>
+          <a:xfrm>
+            <a:off x="1298448" y="1783080"/>
+            <a:ext cx="566928" cy="566928"/>
+          </a:xfrm>
+          <a:prstGeom prst="ellipse">
+            <a:avLst/>
+          </a:prstGeom>
+          <a:solidFill>
+            <a:srgbClr val="F4F6F7"/>
+          </a:solidFill>
+          <a:ln w="12700">
+            <a:solidFill>
+              <a:srgbClr val="C9D6D8"/>
+            </a:solidFill>
+            <a:prstDash val="solid"/>
+          </a:ln>
+        </p:spPr>
+      </p:sp>
+      <p:sp>
+        <p:nvSpPr>
+          <p:cNvPr id="9" name="Text 7"/>
+          <p:cNvSpPr/>
+          <p:nvPr/>
+        </p:nvSpPr>
+        <p:spPr>
+          <a:xfrm>
+            <a:off x="1188720" y="2350008"/>
+            <a:ext cx="786384" cy="237744"/>
+          </a:xfrm>
+          <a:prstGeom prst="rect">
+            <a:avLst/>
+          </a:prstGeom>
+          <a:noFill/>
+          <a:ln/>
+        </p:spPr>
+        <p:txBody>
+          <a:bodyPr wrap="square" lIns="0" tIns="0" rIns="0" bIns="0" rtlCol="0" anchor="ctr"/>
+          <a:lstStyle/>
+          <a:p>
+            <a:pPr algn="ctr" indent="0" marL="0">
+              <a:buNone/>
+            </a:pPr>
+            <a:r>
+              <a:rPr lang="en-US" sz="850" dirty="0">
+                <a:solidFill>
+                  <a:srgbClr val="6B7A85"/>
+                </a:solidFill>
+                <a:latin typeface="Malgun Gothic" pitchFamily="34" charset="0"/>
+                <a:ea typeface="Malgun Gothic" pitchFamily="34" charset="-122"/>
+                <a:cs typeface="Malgun Gothic" pitchFamily="34" charset="-120"/>
+              </a:rPr>
+              <a:t>적치</a:t>
+            </a:r>
+            <a:endParaRPr lang="en-US" sz="850" dirty="0"/>
+          </a:p>
+        </p:txBody>
+      </p:sp>
+      <p:sp>
+        <p:nvSpPr>
+          <p:cNvPr id="10" name="Shape 8"/>
+          <p:cNvSpPr/>
+          <p:nvPr/>
+        </p:nvSpPr>
+        <p:spPr>
+          <a:xfrm>
+            <a:off x="2139696" y="1783080"/>
+            <a:ext cx="566928" cy="566928"/>
+          </a:xfrm>
+          <a:prstGeom prst="ellipse">
+            <a:avLst/>
+          </a:prstGeom>
+          <a:solidFill>
+            <a:srgbClr val="028090"/>
+          </a:solidFill>
+          <a:ln w="25400">
+            <a:solidFill>
+              <a:srgbClr val="028090"/>
+            </a:solidFill>
+            <a:prstDash val="solid"/>
+          </a:ln>
+        </p:spPr>
+      </p:sp>
+      <p:sp>
+        <p:nvSpPr>
+          <p:cNvPr id="11" name="Text 9"/>
+          <p:cNvSpPr/>
+          <p:nvPr/>
+        </p:nvSpPr>
+        <p:spPr>
+          <a:xfrm>
+            <a:off x="2029968" y="2350008"/>
+            <a:ext cx="786384" cy="237744"/>
+          </a:xfrm>
+          <a:prstGeom prst="rect">
+            <a:avLst/>
+          </a:prstGeom>
+          <a:noFill/>
+          <a:ln/>
+        </p:spPr>
+        <p:txBody>
+          <a:bodyPr wrap="square" lIns="0" tIns="0" rIns="0" bIns="0" rtlCol="0" anchor="ctr"/>
+          <a:lstStyle/>
+          <a:p>
+            <a:pPr algn="ctr" indent="0" marL="0">
+              <a:buNone/>
+            </a:pPr>
+            <a:r>
+              <a:rPr lang="en-US" sz="850" b="1" dirty="0">
+                <a:solidFill>
+                  <a:srgbClr val="028090"/>
+                </a:solidFill>
+                <a:latin typeface="Malgun Gothic" pitchFamily="34" charset="0"/>
+                <a:ea typeface="Malgun Gothic" pitchFamily="34" charset="-122"/>
+                <a:cs typeface="Malgun Gothic" pitchFamily="34" charset="-120"/>
+              </a:rPr>
+              <a:t>피킹</a:t>
+            </a:r>
+            <a:endParaRPr lang="en-US" sz="850" dirty="0"/>
+          </a:p>
+        </p:txBody>
+      </p:sp>
+      <p:sp>
+        <p:nvSpPr>
+          <p:cNvPr id="12" name="Shape 10"/>
+          <p:cNvSpPr/>
+          <p:nvPr/>
+        </p:nvSpPr>
+        <p:spPr>
+          <a:xfrm>
+            <a:off x="2980944" y="1783080"/>
+            <a:ext cx="566928" cy="566928"/>
+          </a:xfrm>
+          <a:prstGeom prst="ellipse">
+            <a:avLst/>
+          </a:prstGeom>
+          <a:solidFill>
+            <a:srgbClr val="F4F6F7"/>
+          </a:solidFill>
+          <a:ln w="12700">
+            <a:solidFill>
+              <a:srgbClr val="C9D6D8"/>
+            </a:solidFill>
+            <a:prstDash val="solid"/>
+          </a:ln>
+        </p:spPr>
+      </p:sp>
+      <p:sp>
+        <p:nvSpPr>
+          <p:cNvPr id="13" name="Text 11"/>
+          <p:cNvSpPr/>
+          <p:nvPr/>
+        </p:nvSpPr>
+        <p:spPr>
+          <a:xfrm>
+            <a:off x="2871216" y="2350008"/>
+            <a:ext cx="786384" cy="237744"/>
+          </a:xfrm>
+          <a:prstGeom prst="rect">
+            <a:avLst/>
+          </a:prstGeom>
+          <a:noFill/>
+          <a:ln/>
+        </p:spPr>
+        <p:txBody>
+          <a:bodyPr wrap="square" lIns="0" tIns="0" rIns="0" bIns="0" rtlCol="0" anchor="ctr"/>
+          <a:lstStyle/>
+          <a:p>
+            <a:pPr algn="ctr" indent="0" marL="0">
+              <a:buNone/>
+            </a:pPr>
+            <a:r>
+              <a:rPr lang="en-US" sz="850" dirty="0">
+                <a:solidFill>
+                  <a:srgbClr val="6B7A85"/>
+                </a:solidFill>
+                <a:latin typeface="Malgun Gothic" pitchFamily="34" charset="0"/>
+                <a:ea typeface="Malgun Gothic" pitchFamily="34" charset="-122"/>
+                <a:cs typeface="Malgun Gothic" pitchFamily="34" charset="-120"/>
+              </a:rPr>
+              <a:t>출고</a:t>
+            </a:r>
+            <a:endParaRPr lang="en-US" sz="850" dirty="0"/>
+          </a:p>
+        </p:txBody>
+      </p:sp>
+      <p:sp>
+        <p:nvSpPr>
+          <p:cNvPr id="14" name="Shape 12"/>
+          <p:cNvSpPr/>
+          <p:nvPr/>
+        </p:nvSpPr>
+        <p:spPr>
+          <a:xfrm>
+            <a:off x="3822192" y="1783080"/>
+            <a:ext cx="566928" cy="566928"/>
+          </a:xfrm>
+          <a:prstGeom prst="ellipse">
+            <a:avLst/>
+          </a:prstGeom>
+          <a:solidFill>
+            <a:srgbClr val="F4F6F7"/>
+          </a:solidFill>
+          <a:ln w="12700">
+            <a:solidFill>
+              <a:srgbClr val="C9D6D8"/>
+            </a:solidFill>
+            <a:prstDash val="solid"/>
+          </a:ln>
+        </p:spPr>
+      </p:sp>
+      <p:sp>
+        <p:nvSpPr>
+          <p:cNvPr id="15" name="Text 13"/>
+          <p:cNvSpPr/>
+          <p:nvPr/>
+        </p:nvSpPr>
+        <p:spPr>
+          <a:xfrm>
+            <a:off x="3712464" y="2350008"/>
+            <a:ext cx="786384" cy="237744"/>
+          </a:xfrm>
+          <a:prstGeom prst="rect">
+            <a:avLst/>
+          </a:prstGeom>
+          <a:noFill/>
+          <a:ln/>
+        </p:spPr>
+        <p:txBody>
+          <a:bodyPr wrap="square" lIns="0" tIns="0" rIns="0" bIns="0" rtlCol="0" anchor="ctr"/>
+          <a:lstStyle/>
+          <a:p>
+            <a:pPr algn="ctr" indent="0" marL="0">
+              <a:buNone/>
+            </a:pPr>
+            <a:r>
+              <a:rPr lang="en-US" sz="850" dirty="0">
+                <a:solidFill>
+                  <a:srgbClr val="6B7A85"/>
+                </a:solidFill>
+                <a:latin typeface="Malgun Gothic" pitchFamily="34" charset="0"/>
+                <a:ea typeface="Malgun Gothic" pitchFamily="34" charset="-122"/>
+                <a:cs typeface="Malgun Gothic" pitchFamily="34" charset="-120"/>
+              </a:rPr>
+              <a:t>자원</a:t>
+            </a:r>
+            <a:endParaRPr lang="en-US" sz="850" dirty="0"/>
+          </a:p>
+        </p:txBody>
+      </p:sp>
+      <p:sp>
+        <p:nvSpPr>
+          <p:cNvPr id="16" name="Shape 14"/>
+          <p:cNvSpPr/>
+          <p:nvPr/>
+        </p:nvSpPr>
+        <p:spPr>
+          <a:xfrm>
+            <a:off x="457200" y="2651760"/>
+            <a:ext cx="566928" cy="566928"/>
+          </a:xfrm>
+          <a:prstGeom prst="ellipse">
+            <a:avLst/>
+          </a:prstGeom>
+          <a:solidFill>
+            <a:srgbClr val="F4F6F7"/>
+          </a:solidFill>
+          <a:ln w="12700">
+            <a:solidFill>
+              <a:srgbClr val="C9D6D8"/>
+            </a:solidFill>
+            <a:prstDash val="solid"/>
+          </a:ln>
+        </p:spPr>
+      </p:sp>
+      <p:sp>
+        <p:nvSpPr>
+          <p:cNvPr id="17" name="Text 15"/>
+          <p:cNvSpPr/>
+          <p:nvPr/>
+        </p:nvSpPr>
+        <p:spPr>
+          <a:xfrm>
+            <a:off x="347472" y="3218688"/>
+            <a:ext cx="786384" cy="237744"/>
+          </a:xfrm>
+          <a:prstGeom prst="rect">
+            <a:avLst/>
+          </a:prstGeom>
+          <a:noFill/>
+          <a:ln/>
+        </p:spPr>
+        <p:txBody>
+          <a:bodyPr wrap="square" lIns="0" tIns="0" rIns="0" bIns="0" rtlCol="0" anchor="ctr"/>
+          <a:lstStyle/>
+          <a:p>
+            <a:pPr algn="ctr" indent="0" marL="0">
+              <a:buNone/>
+            </a:pPr>
+            <a:r>
+              <a:rPr lang="en-US" sz="850" dirty="0">
+                <a:solidFill>
+                  <a:srgbClr val="6B7A85"/>
+                </a:solidFill>
+                <a:latin typeface="Malgun Gothic" pitchFamily="34" charset="0"/>
+                <a:ea typeface="Malgun Gothic" pitchFamily="34" charset="-122"/>
+                <a:cs typeface="Malgun Gothic" pitchFamily="34" charset="-120"/>
+              </a:rPr>
+              <a:t>위험</a:t>
+            </a:r>
+            <a:endParaRPr lang="en-US" sz="850" dirty="0"/>
+          </a:p>
+        </p:txBody>
+      </p:sp>
+      <p:sp>
+        <p:nvSpPr>
+          <p:cNvPr id="18" name="Shape 16"/>
+          <p:cNvSpPr/>
+          <p:nvPr/>
+        </p:nvSpPr>
+        <p:spPr>
+          <a:xfrm>
+            <a:off x="1298448" y="2651760"/>
+            <a:ext cx="566928" cy="566928"/>
+          </a:xfrm>
+          <a:prstGeom prst="ellipse">
+            <a:avLst/>
+          </a:prstGeom>
+          <a:solidFill>
+            <a:srgbClr val="F4F6F7"/>
+          </a:solidFill>
+          <a:ln w="12700">
+            <a:solidFill>
+              <a:srgbClr val="C9D6D8"/>
+            </a:solidFill>
+            <a:prstDash val="solid"/>
+          </a:ln>
+        </p:spPr>
+      </p:sp>
+      <p:sp>
+        <p:nvSpPr>
+          <p:cNvPr id="19" name="Text 17"/>
+          <p:cNvSpPr/>
+          <p:nvPr/>
+        </p:nvSpPr>
+        <p:spPr>
+          <a:xfrm>
+            <a:off x="1188720" y="3218688"/>
+            <a:ext cx="786384" cy="237744"/>
+          </a:xfrm>
+          <a:prstGeom prst="rect">
+            <a:avLst/>
+          </a:prstGeom>
+          <a:noFill/>
+          <a:ln/>
+        </p:spPr>
+        <p:txBody>
+          <a:bodyPr wrap="square" lIns="0" tIns="0" rIns="0" bIns="0" rtlCol="0" anchor="ctr"/>
+          <a:lstStyle/>
+          <a:p>
+            <a:pPr algn="ctr" indent="0" marL="0">
+              <a:buNone/>
+            </a:pPr>
+            <a:r>
+              <a:rPr lang="en-US" sz="850" dirty="0">
+                <a:solidFill>
+                  <a:srgbClr val="6B7A85"/>
+                </a:solidFill>
+                <a:latin typeface="Malgun Gothic" pitchFamily="34" charset="0"/>
+                <a:ea typeface="Malgun Gothic" pitchFamily="34" charset="-122"/>
+                <a:cs typeface="Malgun Gothic" pitchFamily="34" charset="-120"/>
+              </a:rPr>
+              <a:t>컨트롤</a:t>
+            </a:r>
+            <a:endParaRPr lang="en-US" sz="850" dirty="0"/>
+          </a:p>
+        </p:txBody>
+      </p:sp>
+      <p:sp>
+        <p:nvSpPr>
+          <p:cNvPr id="20" name="Shape 18"/>
+          <p:cNvSpPr/>
+          <p:nvPr/>
+        </p:nvSpPr>
+        <p:spPr>
+          <a:xfrm>
+            <a:off x="2139696" y="2651760"/>
+            <a:ext cx="566928" cy="566928"/>
+          </a:xfrm>
+          <a:prstGeom prst="ellipse">
+            <a:avLst/>
+          </a:prstGeom>
+          <a:solidFill>
+            <a:srgbClr val="F4F6F7"/>
+          </a:solidFill>
+          <a:ln w="12700">
+            <a:solidFill>
+              <a:srgbClr val="C9D6D8"/>
+            </a:solidFill>
+            <a:prstDash val="solid"/>
+          </a:ln>
+        </p:spPr>
+      </p:sp>
+      <p:sp>
+        <p:nvSpPr>
+          <p:cNvPr id="21" name="Text 19"/>
+          <p:cNvSpPr/>
+          <p:nvPr/>
+        </p:nvSpPr>
+        <p:spPr>
+          <a:xfrm>
+            <a:off x="2029968" y="3218688"/>
+            <a:ext cx="786384" cy="237744"/>
+          </a:xfrm>
+          <a:prstGeom prst="rect">
+            <a:avLst/>
+          </a:prstGeom>
+          <a:noFill/>
+          <a:ln/>
+        </p:spPr>
+        <p:txBody>
+          <a:bodyPr wrap="square" lIns="0" tIns="0" rIns="0" bIns="0" rtlCol="0" anchor="ctr"/>
+          <a:lstStyle/>
+          <a:p>
+            <a:pPr algn="ctr" indent="0" marL="0">
+              <a:buNone/>
+            </a:pPr>
+            <a:r>
+              <a:rPr lang="en-US" sz="850" dirty="0">
+                <a:solidFill>
+                  <a:srgbClr val="6B7A85"/>
+                </a:solidFill>
+                <a:latin typeface="Malgun Gothic" pitchFamily="34" charset="0"/>
+                <a:ea typeface="Malgun Gothic" pitchFamily="34" charset="-122"/>
+                <a:cs typeface="Malgun Gothic" pitchFamily="34" charset="-120"/>
+              </a:rPr>
+              <a:t>정책</a:t>
+            </a:r>
+            <a:endParaRPr lang="en-US" sz="850" dirty="0"/>
+          </a:p>
+        </p:txBody>
+      </p:sp>
+      <p:sp>
+        <p:nvSpPr>
+          <p:cNvPr id="22" name="Shape 20"/>
+          <p:cNvSpPr/>
+          <p:nvPr/>
+        </p:nvSpPr>
+        <p:spPr>
+          <a:xfrm>
+            <a:off x="2980944" y="2651760"/>
+            <a:ext cx="566928" cy="566928"/>
+          </a:xfrm>
+          <a:prstGeom prst="ellipse">
+            <a:avLst/>
+          </a:prstGeom>
+          <a:solidFill>
+            <a:srgbClr val="F4F6F7"/>
+          </a:solidFill>
+          <a:ln w="12700">
+            <a:solidFill>
+              <a:srgbClr val="C9D6D8"/>
+            </a:solidFill>
+            <a:prstDash val="solid"/>
+          </a:ln>
+        </p:spPr>
+      </p:sp>
+      <p:sp>
+        <p:nvSpPr>
+          <p:cNvPr id="23" name="Text 21"/>
+          <p:cNvSpPr/>
+          <p:nvPr/>
+        </p:nvSpPr>
+        <p:spPr>
+          <a:xfrm>
+            <a:off x="2871216" y="3218688"/>
+            <a:ext cx="786384" cy="237744"/>
+          </a:xfrm>
+          <a:prstGeom prst="rect">
+            <a:avLst/>
+          </a:prstGeom>
+          <a:noFill/>
+          <a:ln/>
+        </p:spPr>
+        <p:txBody>
+          <a:bodyPr wrap="square" lIns="0" tIns="0" rIns="0" bIns="0" rtlCol="0" anchor="ctr"/>
+          <a:lstStyle/>
+          <a:p>
+            <a:pPr algn="ctr" indent="0" marL="0">
+              <a:buNone/>
+            </a:pPr>
+            <a:r>
+              <a:rPr lang="en-US" sz="850" dirty="0">
+                <a:solidFill>
+                  <a:srgbClr val="6B7A85"/>
+                </a:solidFill>
+                <a:latin typeface="Malgun Gothic" pitchFamily="34" charset="0"/>
+                <a:ea typeface="Malgun Gothic" pitchFamily="34" charset="-122"/>
+                <a:cs typeface="Malgun Gothic" pitchFamily="34" charset="-120"/>
+              </a:rPr>
+              <a:t>시뮬</a:t>
+            </a:r>
+            <a:endParaRPr lang="en-US" sz="850" dirty="0"/>
+          </a:p>
+        </p:txBody>
+      </p:sp>
+      <p:sp>
+        <p:nvSpPr>
+          <p:cNvPr id="24" name="Shape 22"/>
+          <p:cNvSpPr/>
+          <p:nvPr/>
+        </p:nvSpPr>
+        <p:spPr>
+          <a:xfrm>
+            <a:off x="3822192" y="2651760"/>
+            <a:ext cx="566928" cy="566928"/>
+          </a:xfrm>
+          <a:prstGeom prst="ellipse">
+            <a:avLst/>
+          </a:prstGeom>
+          <a:solidFill>
+            <a:srgbClr val="F4F6F7"/>
+          </a:solidFill>
+          <a:ln w="12700">
+            <a:solidFill>
+              <a:srgbClr val="C9D6D8"/>
+            </a:solidFill>
+            <a:prstDash val="solid"/>
+          </a:ln>
+        </p:spPr>
+      </p:sp>
+      <p:sp>
+        <p:nvSpPr>
+          <p:cNvPr id="25" name="Text 23"/>
+          <p:cNvSpPr/>
+          <p:nvPr/>
+        </p:nvSpPr>
+        <p:spPr>
+          <a:xfrm>
+            <a:off x="3712464" y="3218688"/>
+            <a:ext cx="786384" cy="237744"/>
+          </a:xfrm>
+          <a:prstGeom prst="rect">
+            <a:avLst/>
+          </a:prstGeom>
+          <a:noFill/>
+          <a:ln/>
+        </p:spPr>
+        <p:txBody>
+          <a:bodyPr wrap="square" lIns="0" tIns="0" rIns="0" bIns="0" rtlCol="0" anchor="ctr"/>
+          <a:lstStyle/>
+          <a:p>
+            <a:pPr algn="ctr" indent="0" marL="0">
+              <a:buNone/>
+            </a:pPr>
+            <a:r>
+              <a:rPr lang="en-US" sz="850" dirty="0">
+                <a:solidFill>
+                  <a:srgbClr val="6B7A85"/>
+                </a:solidFill>
+                <a:latin typeface="Malgun Gothic" pitchFamily="34" charset="0"/>
+                <a:ea typeface="Malgun Gothic" pitchFamily="34" charset="-122"/>
+                <a:cs typeface="Malgun Gothic" pitchFamily="34" charset="-120"/>
+              </a:rPr>
+              <a:t>설명</a:t>
+            </a:r>
+            <a:endParaRPr lang="en-US" sz="850" dirty="0"/>
+          </a:p>
+        </p:txBody>
+      </p:sp>
+      <p:sp>
+        <p:nvSpPr>
+          <p:cNvPr id="26" name="Shape 24"/>
+          <p:cNvSpPr/>
+          <p:nvPr/>
+        </p:nvSpPr>
+        <p:spPr>
+          <a:xfrm>
+            <a:off x="4754880" y="1444752"/>
+            <a:ext cx="3931920" cy="1371600"/>
+          </a:xfrm>
+          <a:prstGeom prst="roundRect">
+            <a:avLst>
+              <a:gd name="adj" fmla="val 4667"/>
+            </a:avLst>
+          </a:prstGeom>
+          <a:solidFill>
+            <a:srgbClr val="EDF5F6"/>
+          </a:solidFill>
+          <a:ln/>
+          <a:effectLst>
+            <a:outerShdw sx="100000" sy="100000" kx="0" ky="0" algn="bl" rotWithShape="0" blurRad="63500" dist="25400" dir="2700000">
+              <a:srgbClr val="000000">
+                <a:alpha val="10000"/>
+              </a:srgbClr>
+            </a:outerShdw>
+          </a:effectLst>
+        </p:spPr>
+      </p:sp>
+      <p:sp>
+        <p:nvSpPr>
+          <p:cNvPr id="27" name="Text 25"/>
+          <p:cNvSpPr/>
+          <p:nvPr/>
+        </p:nvSpPr>
+        <p:spPr>
+          <a:xfrm>
+            <a:off x="4937760" y="1572768"/>
+            <a:ext cx="3566160" cy="292608"/>
+          </a:xfrm>
+          <a:prstGeom prst="rect">
+            <a:avLst/>
+          </a:prstGeom>
+          <a:noFill/>
+          <a:ln/>
+        </p:spPr>
+        <p:txBody>
+          <a:bodyPr wrap="square" lIns="0" tIns="0" rIns="0" bIns="0" rtlCol="0" anchor="ctr"/>
+          <a:lstStyle/>
+          <a:p>
+            <a:pPr indent="0" marL="0">
+              <a:buNone/>
+            </a:pPr>
+            <a:r>
+              <a:rPr lang="en-US" sz="1250" b="1" dirty="0">
+                <a:solidFill>
+                  <a:srgbClr val="2B3A42"/>
+                </a:solidFill>
+                <a:latin typeface="Malgun Gothic" pitchFamily="34" charset="0"/>
+                <a:ea typeface="Malgun Gothic" pitchFamily="34" charset="-122"/>
+                <a:cs typeface="Malgun Gothic" pitchFamily="34" charset="-120"/>
+              </a:rPr>
+              <a:t>실시간 동작 로그</a:t>
+            </a:r>
+            <a:endParaRPr lang="en-US" sz="1250" dirty="0"/>
+          </a:p>
+        </p:txBody>
+      </p:sp>
+      <p:sp>
+        <p:nvSpPr>
+          <p:cNvPr id="28" name="Text 26"/>
+          <p:cNvSpPr/>
+          <p:nvPr/>
+        </p:nvSpPr>
+        <p:spPr>
+          <a:xfrm>
+            <a:off x="4937760" y="1920240"/>
+            <a:ext cx="3566160" cy="768096"/>
+          </a:xfrm>
+          <a:prstGeom prst="rect">
+            <a:avLst/>
+          </a:prstGeom>
+          <a:noFill/>
+          <a:ln/>
+        </p:spPr>
+        <p:txBody>
+          <a:bodyPr wrap="square" lIns="0" tIns="0" rIns="0" bIns="0" rtlCol="0" anchor="t"/>
+          <a:lstStyle/>
+          <a:p>
             <a:pPr indent="0" marL="0">
               <a:lnSpc>
                 <a:spcPct val="105000"/>
@@ -15906,16 +19469,19 @@
               <a:buNone/>
             </a:pPr>
             <a:r>
-              <a:rPr lang="en-US" sz="1100" b="1" dirty="0">
-                <a:solidFill>
-                  <a:srgbClr val="FFFFFF"/>
-                </a:solidFill>
-                <a:latin typeface="Malgun Gothic" pitchFamily="34" charset="0"/>
-                <a:ea typeface="Malgun Gothic" pitchFamily="34" charset="-122"/>
-                <a:cs typeface="Malgun Gothic" pitchFamily="34" charset="-120"/>
-              </a:rPr>
-              <a:t xml:space="preserve">맥락 </a:t>
-            </a:r>
+              <a:rPr lang="en-US" sz="1020" dirty="0">
+                <a:solidFill>
+                  <a:srgbClr val="6B7A85"/>
+                </a:solidFill>
+                <a:latin typeface="Malgun Gothic" pitchFamily="34" charset="0"/>
+                <a:ea typeface="Malgun Gothic" pitchFamily="34" charset="-122"/>
+                <a:cs typeface="Malgun Gothic" pitchFamily="34" charset="-120"/>
+              </a:rPr>
+              <a:t>· 감사 8단계를 에이전트·결과 색상으로 표시</a:t>
+            </a:r>
+            <a:endParaRPr lang="en-US" sz="1020" dirty="0"/>
+          </a:p>
+          <a:p>
             <a:pPr indent="0" marL="0">
               <a:lnSpc>
                 <a:spcPct val="105000"/>
@@ -15923,16 +19489,19 @@
               <a:buNone/>
             </a:pPr>
             <a:r>
-              <a:rPr lang="en-US" sz="1100" dirty="0">
-                <a:solidFill>
-                  <a:srgbClr val="CFD8DC"/>
-                </a:solidFill>
-                <a:latin typeface="Malgun Gothic" pitchFamily="34" charset="0"/>
-                <a:ea typeface="Malgun Gothic" pitchFamily="34" charset="-122"/>
-                <a:cs typeface="Malgun Gothic" pitchFamily="34" charset="-120"/>
-              </a:rPr>
-              <a:t xml:space="preserve">LangGraph state.history      </a:t>
-            </a:r>
+              <a:rPr lang="en-US" sz="1020" dirty="0">
+                <a:solidFill>
+                  <a:srgbClr val="6B7A85"/>
+                </a:solidFill>
+                <a:latin typeface="Malgun Gothic" pitchFamily="34" charset="0"/>
+                <a:ea typeface="Malgun Gothic" pitchFamily="34" charset="-122"/>
+                <a:cs typeface="Malgun Gothic" pitchFamily="34" charset="-120"/>
+              </a:rPr>
+              <a:t>· 신규 줄만 증분 추가(깜빡임 없음)</a:t>
+            </a:r>
+            <a:endParaRPr lang="en-US" sz="1020" dirty="0"/>
+          </a:p>
+          <a:p>
             <a:pPr indent="0" marL="0">
               <a:lnSpc>
                 <a:spcPct val="105000"/>
@@ -15940,16 +19509,109 @@
               <a:buNone/>
             </a:pPr>
             <a:r>
-              <a:rPr lang="en-US" sz="1100" b="1" dirty="0">
-                <a:solidFill>
-                  <a:srgbClr val="FFFFFF"/>
-                </a:solidFill>
-                <a:latin typeface="Malgun Gothic" pitchFamily="34" charset="0"/>
-                <a:ea typeface="Malgun Gothic" pitchFamily="34" charset="-122"/>
-                <a:cs typeface="Malgun Gothic" pitchFamily="34" charset="-120"/>
-              </a:rPr>
-              <a:t xml:space="preserve">모델 </a:t>
-            </a:r>
+              <a:rPr lang="en-US" sz="1020" dirty="0">
+                <a:solidFill>
+                  <a:srgbClr val="6B7A85"/>
+                </a:solidFill>
+                <a:latin typeface="Malgun Gothic" pitchFamily="34" charset="0"/>
+                <a:ea typeface="Malgun Gothic" pitchFamily="34" charset="-122"/>
+                <a:cs typeface="Malgun Gothic" pitchFamily="34" charset="-120"/>
+              </a:rPr>
+              <a:t>· 동작한 에이전트 원이 1.2초 점등</a:t>
+            </a:r>
+            <a:endParaRPr lang="en-US" sz="1020" dirty="0"/>
+          </a:p>
+        </p:txBody>
+      </p:sp>
+      <p:sp>
+        <p:nvSpPr>
+          <p:cNvPr id="29" name="Shape 27"/>
+          <p:cNvSpPr/>
+          <p:nvPr/>
+        </p:nvSpPr>
+        <p:spPr>
+          <a:xfrm>
+            <a:off x="4754880" y="2907792"/>
+            <a:ext cx="3931920" cy="960120"/>
+          </a:xfrm>
+          <a:prstGeom prst="roundRect">
+            <a:avLst>
+              <a:gd name="adj" fmla="val 6667"/>
+            </a:avLst>
+          </a:prstGeom>
+          <a:solidFill>
+            <a:srgbClr val="F4F6F7"/>
+          </a:solidFill>
+          <a:ln/>
+          <a:effectLst>
+            <a:outerShdw sx="100000" sy="100000" kx="0" ky="0" algn="bl" rotWithShape="0" blurRad="63500" dist="25400" dir="2700000">
+              <a:srgbClr val="000000">
+                <a:alpha val="10000"/>
+              </a:srgbClr>
+            </a:outerShdw>
+          </a:effectLst>
+        </p:spPr>
+      </p:sp>
+      <p:sp>
+        <p:nvSpPr>
+          <p:cNvPr id="30" name="Text 28"/>
+          <p:cNvSpPr/>
+          <p:nvPr/>
+        </p:nvSpPr>
+        <p:spPr>
+          <a:xfrm>
+            <a:off x="4937760" y="3035808"/>
+            <a:ext cx="3566160" cy="292608"/>
+          </a:xfrm>
+          <a:prstGeom prst="rect">
+            <a:avLst/>
+          </a:prstGeom>
+          <a:noFill/>
+          <a:ln/>
+        </p:spPr>
+        <p:txBody>
+          <a:bodyPr wrap="square" lIns="0" tIns="0" rIns="0" bIns="0" rtlCol="0" anchor="ctr"/>
+          <a:lstStyle/>
+          <a:p>
+            <a:pPr indent="0" marL="0">
+              <a:buNone/>
+            </a:pPr>
+            <a:r>
+              <a:rPr lang="en-US" sz="1250" b="1" dirty="0">
+                <a:solidFill>
+                  <a:srgbClr val="2B3A42"/>
+                </a:solidFill>
+                <a:latin typeface="Malgun Gothic" pitchFamily="34" charset="0"/>
+                <a:ea typeface="Malgun Gothic" pitchFamily="34" charset="-122"/>
+                <a:cs typeface="Malgun Gothic" pitchFamily="34" charset="-120"/>
+              </a:rPr>
+              <a:t>Action 타임라인</a:t>
+            </a:r>
+            <a:endParaRPr lang="en-US" sz="1250" dirty="0"/>
+          </a:p>
+        </p:txBody>
+      </p:sp>
+      <p:sp>
+        <p:nvSpPr>
+          <p:cNvPr id="31" name="Text 29"/>
+          <p:cNvSpPr/>
+          <p:nvPr/>
+        </p:nvSpPr>
+        <p:spPr>
+          <a:xfrm>
+            <a:off x="4937760" y="3383280"/>
+            <a:ext cx="3566160" cy="356616"/>
+          </a:xfrm>
+          <a:prstGeom prst="rect">
+            <a:avLst/>
+          </a:prstGeom>
+          <a:noFill/>
+          <a:ln/>
+        </p:spPr>
+        <p:txBody>
+          <a:bodyPr wrap="square" lIns="0" tIns="0" rIns="0" bIns="0" rtlCol="0" anchor="t"/>
+          <a:lstStyle/>
+          <a:p>
             <a:pPr indent="0" marL="0">
               <a:lnSpc>
                 <a:spcPct val="105000"/>
@@ -15957,17 +19619,17 @@
               <a:buNone/>
             </a:pPr>
             <a:r>
-              <a:rPr lang="en-US" sz="1100" dirty="0">
-                <a:solidFill>
-                  <a:srgbClr val="CFD8DC"/>
-                </a:solidFill>
-                <a:latin typeface="Malgun Gothic" pitchFamily="34" charset="0"/>
-                <a:ea typeface="Malgun Gothic" pitchFamily="34" charset="-122"/>
-                <a:cs typeface="Malgun Gothic" pitchFamily="34" charset="-120"/>
-              </a:rPr>
-              <a:t>gpt-4.1-mini·gpt-5.4</a:t>
-            </a:r>
-            <a:endParaRPr lang="en-US" sz="1100" dirty="0"/>
+              <a:rPr lang="en-US" sz="1020" dirty="0">
+                <a:solidFill>
+                  <a:srgbClr val="6B7A85"/>
+                </a:solidFill>
+                <a:latin typeface="Malgun Gothic" pitchFamily="34" charset="0"/>
+                <a:ea typeface="Malgun Gothic" pitchFamily="34" charset="-122"/>
+                <a:cs typeface="Malgun Gothic" pitchFamily="34" charset="-120"/>
+              </a:rPr>
+              <a:t>· 처리 시각 · 에이전트 · 상태 배지(성공/차단/실패)</a:t>
+            </a:r>
+            <a:endParaRPr lang="en-US" sz="1020" dirty="0"/>
           </a:p>
           <a:p>
             <a:pPr indent="0" marL="0">
@@ -15977,17 +19639,181 @@
               <a:buNone/>
             </a:pPr>
             <a:r>
-              <a:rPr lang="en-US" sz="1100" i="1" dirty="0">
-                <a:solidFill>
-                  <a:srgbClr val="9FC7C4"/>
-                </a:solidFill>
-                <a:latin typeface="Malgun Gothic" pitchFamily="34" charset="0"/>
-                <a:ea typeface="Malgun Gothic" pitchFamily="34" charset="-122"/>
-                <a:cs typeface="Malgun Gothic" pitchFamily="34" charset="-120"/>
-              </a:rPr>
-              <a:t>→ 세션 내 기억만 동작 · 세션 간 영구기억(장기 메모리)은 설계만</a:t>
-            </a:r>
-            <a:endParaRPr lang="en-US" sz="1100" dirty="0"/>
+              <a:rPr lang="en-US" sz="1020" dirty="0">
+                <a:solidFill>
+                  <a:srgbClr val="6B7A85"/>
+                </a:solidFill>
+                <a:latin typeface="Malgun Gothic" pitchFamily="34" charset="0"/>
+                <a:ea typeface="Malgun Gothic" pitchFamily="34" charset="-122"/>
+                <a:cs typeface="Malgun Gothic" pitchFamily="34" charset="-120"/>
+              </a:rPr>
+              <a:t>· 클릭 → 하단에 LLM 한국어 사유</a:t>
+            </a:r>
+            <a:endParaRPr lang="en-US" sz="1020" dirty="0"/>
+          </a:p>
+        </p:txBody>
+      </p:sp>
+      <p:sp>
+        <p:nvSpPr>
+          <p:cNvPr id="32" name="Shape 30"/>
+          <p:cNvSpPr/>
+          <p:nvPr/>
+        </p:nvSpPr>
+        <p:spPr>
+          <a:xfrm>
+            <a:off x="457200" y="4023360"/>
+            <a:ext cx="4069080" cy="1005840"/>
+          </a:xfrm>
+          <a:prstGeom prst="roundRect">
+            <a:avLst>
+              <a:gd name="adj" fmla="val 6364"/>
+            </a:avLst>
+          </a:prstGeom>
+          <a:solidFill>
+            <a:srgbClr val="263238"/>
+          </a:solidFill>
+          <a:ln/>
+        </p:spPr>
+      </p:sp>
+      <p:sp>
+        <p:nvSpPr>
+          <p:cNvPr id="33" name="Text 31"/>
+          <p:cNvSpPr/>
+          <p:nvPr/>
+        </p:nvSpPr>
+        <p:spPr>
+          <a:xfrm>
+            <a:off x="658368" y="4133088"/>
+            <a:ext cx="3703320" cy="841248"/>
+          </a:xfrm>
+          <a:prstGeom prst="rect">
+            <a:avLst/>
+          </a:prstGeom>
+          <a:noFill/>
+          <a:ln/>
+        </p:spPr>
+        <p:txBody>
+          <a:bodyPr wrap="square" lIns="0" tIns="0" rIns="0" bIns="0" rtlCol="0" anchor="t"/>
+          <a:lstStyle/>
+          <a:p>
+            <a:pPr indent="0" marL="0">
+              <a:lnSpc>
+                <a:spcPct val="105000"/>
+              </a:lnSpc>
+              <a:buNone/>
+            </a:pPr>
+            <a:r>
+              <a:rPr lang="en-US" sz="950" b="1" dirty="0">
+                <a:solidFill>
+                  <a:srgbClr val="7FD1CD"/>
+                </a:solidFill>
+                <a:latin typeface="Malgun Gothic" pitchFamily="34" charset="0"/>
+                <a:ea typeface="Malgun Gothic" pitchFamily="34" charset="-122"/>
+                <a:cs typeface="Malgun Gothic" pitchFamily="34" charset="-120"/>
+              </a:rPr>
+              <a:t>한 건씩 가시화
+</a:t>
+            </a:r>
+            <a:pPr indent="0" marL="0">
+              <a:lnSpc>
+                <a:spcPct val="105000"/>
+              </a:lnSpc>
+              <a:buNone/>
+            </a:pPr>
+            <a:r>
+              <a:rPr lang="en-US" sz="950" dirty="0">
+                <a:solidFill>
+                  <a:srgbClr val="E6EDEF"/>
+                </a:solidFill>
+                <a:latin typeface="Malgun Gothic" pitchFamily="34" charset="0"/>
+                <a:ea typeface="Malgun Gothic" pitchFamily="34" charset="-122"/>
+                <a:cs typeface="Malgun Gothic" pitchFamily="34" charset="-120"/>
+              </a:rPr>
+              <a:t>Action 간 step_delay(기본 1.2초)로 흐름을 눈으로 확인. 시뮬 DES(수 초)는 백그라운드 캐시라 사이클을 막지 않음.</a:t>
+            </a:r>
+            <a:endParaRPr lang="en-US" sz="950" dirty="0"/>
+          </a:p>
+        </p:txBody>
+      </p:sp>
+      <p:sp>
+        <p:nvSpPr>
+          <p:cNvPr id="34" name="Shape 32"/>
+          <p:cNvSpPr/>
+          <p:nvPr/>
+        </p:nvSpPr>
+        <p:spPr>
+          <a:xfrm>
+            <a:off x="4617720" y="4023360"/>
+            <a:ext cx="4069080" cy="1005840"/>
+          </a:xfrm>
+          <a:prstGeom prst="roundRect">
+            <a:avLst>
+              <a:gd name="adj" fmla="val 6364"/>
+            </a:avLst>
+          </a:prstGeom>
+          <a:solidFill>
+            <a:srgbClr val="EDF5F6"/>
+          </a:solidFill>
+          <a:ln/>
+        </p:spPr>
+      </p:sp>
+      <p:sp>
+        <p:nvSpPr>
+          <p:cNvPr id="35" name="Text 33"/>
+          <p:cNvSpPr/>
+          <p:nvPr/>
+        </p:nvSpPr>
+        <p:spPr>
+          <a:xfrm>
+            <a:off x="4818888" y="4133088"/>
+            <a:ext cx="3703320" cy="841248"/>
+          </a:xfrm>
+          <a:prstGeom prst="rect">
+            <a:avLst/>
+          </a:prstGeom>
+          <a:noFill/>
+          <a:ln/>
+        </p:spPr>
+        <p:txBody>
+          <a:bodyPr wrap="square" lIns="0" tIns="0" rIns="0" bIns="0" rtlCol="0" anchor="t"/>
+          <a:lstStyle/>
+          <a:p>
+            <a:pPr indent="0" marL="0">
+              <a:lnSpc>
+                <a:spcPct val="105000"/>
+              </a:lnSpc>
+              <a:buNone/>
+            </a:pPr>
+            <a:r>
+              <a:rPr lang="en-US" sz="950" b="1" dirty="0">
+                <a:solidFill>
+                  <a:srgbClr val="028090"/>
+                </a:solidFill>
+                <a:latin typeface="Malgun Gothic" pitchFamily="34" charset="0"/>
+                <a:ea typeface="Malgun Gothic" pitchFamily="34" charset="-122"/>
+                <a:cs typeface="Malgun Gothic" pitchFamily="34" charset="-120"/>
+              </a:rPr>
+              <a:t>안전 가동 조건
+</a:t>
+            </a:r>
+            <a:pPr indent="0" marL="0">
+              <a:lnSpc>
+                <a:spcPct val="105000"/>
+              </a:lnSpc>
+              <a:buNone/>
+            </a:pPr>
+            <a:r>
+              <a:rPr lang="en-US" sz="950" dirty="0">
+                <a:solidFill>
+                  <a:srgbClr val="6B7A85"/>
+                </a:solidFill>
+                <a:latin typeface="Malgun Gothic" pitchFamily="34" charset="0"/>
+                <a:ea typeface="Malgun Gothic" pitchFamily="34" charset="-122"/>
+                <a:cs typeface="Malgun Gothic" pitchFamily="34" charset="-120"/>
+              </a:rPr>
+              <a:t>‘실시간 수요’ ON 일 때만 자동운영 시작 가능. Auto Mode는 기본 OFF — 켜야 컨트롤 루프가 돈다.</a:t>
+            </a:r>
+            <a:endParaRPr lang="en-US" sz="950" dirty="0"/>
           </a:p>
         </p:txBody>
       </p:sp>
@@ -18259,7 +22085,7 @@
                 <a:ea typeface="Malgun Gothic" pitchFamily="34" charset="-122"/>
                 <a:cs typeface="Malgun Gothic" pitchFamily="34" charset="-120"/>
               </a:rPr>
-              <a:t xml:space="preserve">대상 작업  </a:t>
+              <a:t>대상 작업  </a:t>
             </a:r>
             <a:pPr indent="0" marL="0">
               <a:buNone/>
@@ -18273,7 +22099,7 @@
                 <a:ea typeface="Malgun Gothic" pitchFamily="34" charset="-122"/>
                 <a:cs typeface="Malgun Gothic" pitchFamily="34" charset="-120"/>
               </a:rPr>
-              <a:t xml:space="preserve">적치지시 생성 · 피킹지시 발행 · 출고확정     </a:t>
+              <a:t>적치지시 생성 · 피킹지시 발행 · 출고확정     </a:t>
             </a:r>
             <a:pPr indent="0" marL="0">
               <a:buNone/>
@@ -18287,7 +22113,7 @@
                 <a:ea typeface="Malgun Gothic" pitchFamily="34" charset="-122"/>
                 <a:cs typeface="Malgun Gothic" pitchFamily="34" charset="-120"/>
               </a:rPr>
-              <a:t xml:space="preserve">원칙  </a:t>
+              <a:t>원칙  </a:t>
             </a:r>
             <a:pPr indent="0" marL="0">
               <a:buNone/>
@@ -19073,7 +22899,7 @@
                 <a:ea typeface="Malgun Gothic" pitchFamily="34" charset="-122"/>
                 <a:cs typeface="Malgun Gothic" pitchFamily="34" charset="-120"/>
               </a:rPr>
-              <a:t xml:space="preserve">LLM · 임베딩  </a:t>
+              <a:t>LLM · 임베딩  </a:t>
             </a:r>
             <a:pPr indent="0" marL="0">
               <a:buNone/>
@@ -19146,7 +22972,7 @@
                 <a:ea typeface="Malgun Gothic" pitchFamily="34" charset="-122"/>
                 <a:cs typeface="Malgun Gothic" pitchFamily="34" charset="-120"/>
               </a:rPr>
-              <a:t xml:space="preserve">LangGraph  </a:t>
+              <a:t>LangGraph  </a:t>
             </a:r>
             <a:pPr indent="0" marL="0">
               <a:buNone/>
@@ -19219,7 +23045,7 @@
                 <a:ea typeface="Malgun Gothic" pitchFamily="34" charset="-122"/>
                 <a:cs typeface="Malgun Gothic" pitchFamily="34" charset="-120"/>
               </a:rPr>
-              <a:t xml:space="preserve">Tool Engine  </a:t>
+              <a:t>Tool Engine  </a:t>
             </a:r>
             <a:pPr indent="0" marL="0">
               <a:buNone/>
@@ -19292,7 +23118,7 @@
                 <a:ea typeface="Malgun Gothic" pitchFamily="34" charset="-122"/>
                 <a:cs typeface="Malgun Gothic" pitchFamily="34" charset="-120"/>
               </a:rPr>
-              <a:t xml:space="preserve">RAG (FAISS)  </a:t>
+              <a:t>RAG (FAISS)  </a:t>
             </a:r>
             <a:pPr indent="0" marL="0">
               <a:buNone/>
@@ -19365,7 +23191,7 @@
                 <a:ea typeface="Malgun Gothic" pitchFamily="34" charset="-122"/>
                 <a:cs typeface="Malgun Gothic" pitchFamily="34" charset="-120"/>
               </a:rPr>
-              <a:t xml:space="preserve">SQLite  </a:t>
+              <a:t>SQLite  </a:t>
             </a:r>
             <a:pPr indent="0" marL="0">
               <a:buNone/>
@@ -19438,7 +23264,7 @@
                 <a:ea typeface="Malgun Gothic" pitchFamily="34" charset="-122"/>
                 <a:cs typeface="Malgun Gothic" pitchFamily="34" charset="-120"/>
               </a:rPr>
-              <a:t xml:space="preserve">Linear Regression  </a:t>
+              <a:t>Linear Regression  </a:t>
             </a:r>
             <a:pPr indent="0" marL="0">
               <a:buNone/>
@@ -19511,7 +23337,7 @@
                 <a:ea typeface="Malgun Gothic" pitchFamily="34" charset="-122"/>
                 <a:cs typeface="Malgun Gothic" pitchFamily="34" charset="-120"/>
               </a:rPr>
-              <a:t xml:space="preserve">FastAPI · Streamlit  </a:t>
+              <a:t>FastAPI · Streamlit  </a:t>
             </a:r>
             <a:pPr indent="0" marL="0">
               <a:buNone/>
@@ -19625,7 +23451,7 @@
                 <a:ea typeface="Malgun Gothic" pitchFamily="34" charset="-122"/>
                 <a:cs typeface="Malgun Gothic" pitchFamily="34" charset="-120"/>
               </a:rPr>
-              <a:t xml:space="preserve">적치 정책   </a:t>
+              <a:t>적치 정책   </a:t>
             </a:r>
             <a:pPr indent="0" marL="0">
               <a:buNone/>
@@ -19678,7 +23504,7 @@
                 <a:ea typeface="Malgun Gothic" pitchFamily="34" charset="-122"/>
                 <a:cs typeface="Malgun Gothic" pitchFamily="34" charset="-120"/>
               </a:rPr>
-              <a:t xml:space="preserve">피킹 정책   </a:t>
+              <a:t>피킹 정책   </a:t>
             </a:r>
             <a:pPr indent="0" marL="0">
               <a:buNone/>
@@ -19731,7 +23557,7 @@
                 <a:ea typeface="Malgun Gothic" pitchFamily="34" charset="-122"/>
                 <a:cs typeface="Malgun Gothic" pitchFamily="34" charset="-120"/>
               </a:rPr>
-              <a:t xml:space="preserve">재고 리스크 정책   </a:t>
+              <a:t>재고 리스크 정책   </a:t>
             </a:r>
             <a:pPr indent="0" marL="0">
               <a:buNone/>
@@ -19784,7 +23610,7 @@
                 <a:ea typeface="Malgun Gothic" pitchFamily="34" charset="-122"/>
                 <a:cs typeface="Malgun Gothic" pitchFamily="34" charset="-120"/>
               </a:rPr>
-              <a:t xml:space="preserve">운영 SOP   </a:t>
+              <a:t>운영 SOP   </a:t>
             </a:r>
             <a:pPr indent="0" marL="0">
               <a:buNone/>
@@ -19837,7 +23663,7 @@
                 <a:ea typeface="Malgun Gothic" pitchFamily="34" charset="-122"/>
                 <a:cs typeface="Malgun Gothic" pitchFamily="34" charset="-120"/>
               </a:rPr>
-              <a:t xml:space="preserve">산식 문서   </a:t>
+              <a:t>산식 문서   </a:t>
             </a:r>
             <a:pPr indent="0" marL="0">
               <a:buNone/>
@@ -19890,7 +23716,7 @@
                 <a:ea typeface="Malgun Gothic" pitchFamily="34" charset="-122"/>
                 <a:cs typeface="Malgun Gothic" pitchFamily="34" charset="-120"/>
               </a:rPr>
-              <a:t xml:space="preserve">용어 사전   </a:t>
+              <a:t>용어 사전   </a:t>
             </a:r>
             <a:pPr indent="0" marL="0">
               <a:buNone/>
